--- a/a7/packages/A7 Unit 3 - Exponents and Scientific Notation/Lessons/3.02/A7 3.02 Quotient Laws of Exponents - Slides.pptx
+++ b/a7/packages/A7 Unit 3 - Exponents and Scientific Notation/Lessons/3.02/A7 3.02 Quotient Laws of Exponents - Slides.pptx
@@ -3129,7 +3129,7 @@
         </p:nvSpPr>
         <p:spPr>
           <a:xfrm>
-            <a:off x="777240" y="1691640"/>
+            <a:off x="777240" y="2148840"/>
             <a:ext cx="10607040" cy="347472"/>
           </a:xfrm>
           <a:prstGeom prst="rect">
@@ -3164,7 +3164,7 @@
         </p:nvSpPr>
         <p:spPr>
           <a:xfrm>
-            <a:off x="777240" y="2048256"/>
+            <a:off x="777240" y="2505456"/>
             <a:ext cx="10607040" cy="1005840"/>
           </a:xfrm>
           <a:prstGeom prst="rect">
@@ -3199,7 +3199,7 @@
         </p:nvCxnSpPr>
         <p:spPr>
           <a:xfrm>
-            <a:off x="3291840" y="3255264"/>
+            <a:off x="3291840" y="3712464"/>
             <a:ext cx="5577840" cy="0"/>
           </a:xfrm>
           <a:prstGeom prst="line">
@@ -3234,7 +3234,7 @@
         </p:nvCxnSpPr>
         <p:spPr>
           <a:xfrm>
-            <a:off x="3291840" y="3337560"/>
+            <a:off x="3291840" y="3794760"/>
             <a:ext cx="5577840" cy="0"/>
           </a:xfrm>
           <a:prstGeom prst="line">
@@ -3269,7 +3269,7 @@
         </p:nvSpPr>
         <p:spPr>
           <a:xfrm>
-            <a:off x="777240" y="3502152"/>
+            <a:off x="777240" y="3959352"/>
             <a:ext cx="10607040" cy="310896"/>
           </a:xfrm>
           <a:prstGeom prst="rect">
@@ -3304,7 +3304,7 @@
         </p:nvSpPr>
         <p:spPr>
           <a:xfrm>
-            <a:off x="777240" y="3840480"/>
+            <a:off x="777240" y="4297680"/>
             <a:ext cx="10607040" cy="731520"/>
           </a:xfrm>
           <a:prstGeom prst="rect">
@@ -3327,129 +3327,13 @@
                 <a:latin typeface="Century Schoolbook"/>
               </a:rPr>
               <a:t>I can use the quotient of powers, power of a quotient and zero exponent laws to rewrite and evaluate a numerical expression.</a:t>
-            </a:r>
-          </a:p>
-        </p:txBody>
-      </p:sp>
-      <p:sp>
-        <p:nvSpPr>
-          <p:cNvPr id="8" name="Rectangle 7"/>
-          <p:cNvSpPr/>
-          <p:nvPr/>
-        </p:nvSpPr>
-        <p:spPr>
-          <a:xfrm>
-            <a:off x="2377440" y="4736592"/>
-            <a:ext cx="7406640" cy="1051560"/>
-          </a:xfrm>
-          <a:prstGeom prst="rect">
-            <a:avLst/>
-          </a:prstGeom>
-          <a:solidFill>
-            <a:srgbClr val="F2F2F0"/>
-          </a:solidFill>
-          <a:ln w="9525">
-            <a:solidFill>
-              <a:srgbClr val="BFBFBF"/>
-            </a:solidFill>
-          </a:ln>
-          <a:effectLst/>
-        </p:spPr>
-        <p:style>
-          <a:lnRef idx="1">
-            <a:schemeClr val="accent1"/>
-          </a:lnRef>
-          <a:fillRef idx="3">
-            <a:schemeClr val="accent1"/>
-          </a:fillRef>
-          <a:effectRef idx="2">
-            <a:schemeClr val="accent1"/>
-          </a:effectRef>
-          <a:fontRef idx="minor">
-            <a:schemeClr val="lt1"/>
-          </a:fontRef>
-        </p:style>
-        <p:txBody>
-          <a:bodyPr rtlCol="0" anchor="ctr"/>
-          <a:lstStyle/>
-          <a:p>
-            <a:pPr algn="ctr"/>
-          </a:p>
-        </p:txBody>
-      </p:sp>
-      <p:sp>
-        <p:nvSpPr>
-          <p:cNvPr id="9" name="TextBox 8"/>
-          <p:cNvSpPr txBox="1"/>
-          <p:nvPr/>
-        </p:nvSpPr>
-        <p:spPr>
-          <a:xfrm>
-            <a:off x="2606040" y="4892040"/>
-            <a:ext cx="6949440" cy="365760"/>
-          </a:xfrm>
-          <a:prstGeom prst="rect">
-            <a:avLst/>
-          </a:prstGeom>
-          <a:noFill/>
-        </p:spPr>
-        <p:txBody>
-          <a:bodyPr wrap="square" lIns="45720" rIns="45720" tIns="18288" bIns="18288" anchor="t">
-            <a:spAutoFit/>
-          </a:bodyPr>
-          <a:lstStyle/>
-          <a:p>
-            <a:pPr algn="ctr"/>
-            <a:r>
-              <a:rPr sz="1700" b="0" i="1">
-                <a:solidFill>
-                  <a:srgbClr val="6B6B6B"/>
-                </a:solidFill>
-                <a:latin typeface="Century Schoolbook"/>
-              </a:rPr>
-              <a:t>Yesterday: same base, add the exponents.</a:t>
-            </a:r>
-          </a:p>
-        </p:txBody>
-      </p:sp>
-      <p:sp>
-        <p:nvSpPr>
-          <p:cNvPr id="10" name="TextBox 9"/>
-          <p:cNvSpPr txBox="1"/>
-          <p:nvPr/>
-        </p:nvSpPr>
-        <p:spPr>
-          <a:xfrm>
-            <a:off x="2606040" y="5276088"/>
-            <a:ext cx="6949440" cy="365760"/>
-          </a:xfrm>
-          <a:prstGeom prst="rect">
-            <a:avLst/>
-          </a:prstGeom>
-          <a:noFill/>
-        </p:spPr>
-        <p:txBody>
-          <a:bodyPr wrap="square" lIns="45720" rIns="45720" tIns="18288" bIns="18288" anchor="t">
-            <a:spAutoFit/>
-          </a:bodyPr>
-          <a:lstStyle/>
-          <a:p>
-            <a:pPr algn="ctr"/>
-            <a:r>
-              <a:rPr sz="1700" b="1" i="0">
-                <a:solidFill>
-                  <a:srgbClr val="1A1A1A"/>
-                </a:solidFill>
-                <a:latin typeface="Century Schoolbook"/>
-              </a:rPr>
-              <a:t>Today: same base, subtract — and exponent 0 is not 0.</a:t>
             </a:r>
           </a:p>
         </p:txBody>
       </p:sp>
       <p:cxnSp>
         <p:nvCxnSpPr>
-          <p:cNvPr id="11" name="Connector 10"/>
+          <p:cNvPr id="8" name="Connector 7"/>
           <p:cNvCxnSpPr/>
           <p:nvPr/>
         </p:nvCxnSpPr>
@@ -3484,7 +3368,7 @@
       </p:cxnSp>
       <p:sp>
         <p:nvSpPr>
-          <p:cNvPr id="12" name="TextBox 11"/>
+          <p:cNvPr id="9" name="TextBox 8"/>
           <p:cNvSpPr txBox="1"/>
           <p:nvPr/>
         </p:nvSpPr>
@@ -3519,7 +3403,7 @@
       </p:sp>
       <p:sp>
         <p:nvSpPr>
-          <p:cNvPr id="13" name="TextBox 12"/>
+          <p:cNvPr id="10" name="TextBox 9"/>
           <p:cNvSpPr txBox="1"/>
           <p:nvPr/>
         </p:nvSpPr>
@@ -3675,44 +3559,9 @@
           </a:fontRef>
         </p:style>
       </p:cxnSp>
-      <p:sp>
-        <p:nvSpPr>
-          <p:cNvPr id="5" name="TextBox 4"/>
-          <p:cNvSpPr txBox="1"/>
-          <p:nvPr/>
-        </p:nvSpPr>
-        <p:spPr>
-          <a:xfrm>
-            <a:off x="777240" y="1261872"/>
-            <a:ext cx="10607040" cy="310896"/>
-          </a:xfrm>
-          <a:prstGeom prst="rect">
-            <a:avLst/>
-          </a:prstGeom>
-          <a:noFill/>
-        </p:spPr>
-        <p:txBody>
-          <a:bodyPr wrap="square" lIns="45720" rIns="45720" tIns="18288" bIns="18288" anchor="t">
-            <a:spAutoFit/>
-          </a:bodyPr>
-          <a:lstStyle/>
-          <a:p>
-            <a:pPr algn="l"/>
-            <a:r>
-              <a:rPr sz="1700" b="0" i="1">
-                <a:solidFill>
-                  <a:srgbClr val="6B6B6B"/>
-                </a:solidFill>
-                <a:latin typeface="Century Schoolbook"/>
-              </a:rPr>
-              <a:t>Answer.</a:t>
-            </a:r>
-          </a:p>
-        </p:txBody>
-      </p:sp>
       <p:cxnSp>
         <p:nvCxnSpPr>
-          <p:cNvPr id="6" name="Connector 5"/>
+          <p:cNvPr id="5" name="Connector 4"/>
           <p:cNvCxnSpPr/>
           <p:nvPr/>
         </p:nvCxnSpPr>
@@ -3747,7 +3596,7 @@
       </p:cxnSp>
       <p:sp>
         <p:nvSpPr>
-          <p:cNvPr id="7" name="TextBox 6"/>
+          <p:cNvPr id="6" name="TextBox 5"/>
           <p:cNvSpPr txBox="1"/>
           <p:nvPr/>
         </p:nvSpPr>
@@ -3782,7 +3631,7 @@
       </p:sp>
       <p:sp>
         <p:nvSpPr>
-          <p:cNvPr id="8" name="TextBox 7"/>
+          <p:cNvPr id="7" name="TextBox 6"/>
           <p:cNvSpPr txBox="1"/>
           <p:nvPr/>
         </p:nvSpPr>
@@ -3817,7 +3666,7 @@
       </p:sp>
       <p:pic>
         <p:nvPicPr>
-          <p:cNvPr id="9" name="Picture 8" descr="b0a43ae0750e3ab4.png"/>
+          <p:cNvPr id="8" name="Picture 7" descr="b0a43ae0750e3ab4.png"/>
           <p:cNvPicPr>
             <a:picLocks noChangeAspect="1"/>
           </p:cNvPicPr>
@@ -3841,51 +3690,42 @@
       </p:pic>
       <p:sp>
         <p:nvSpPr>
+          <p:cNvPr id="9" name="TextBox 8"/>
+          <p:cNvSpPr txBox="1"/>
+          <p:nvPr/>
+        </p:nvSpPr>
+        <p:spPr>
+          <a:xfrm>
+            <a:off x="777240" y="3715512"/>
+            <a:ext cx="10607040" cy="429370"/>
+          </a:xfrm>
+          <a:prstGeom prst="rect">
+            <a:avLst/>
+          </a:prstGeom>
+          <a:noFill/>
+        </p:spPr>
+        <p:txBody>
+          <a:bodyPr wrap="square" lIns="45720" rIns="45720" tIns="18288" bIns="18288" anchor="t">
+            <a:spAutoFit/>
+          </a:bodyPr>
+          <a:lstStyle/>
+          <a:p>
+            <a:pPr algn="ctr"/>
+            <a:r>
+              <a:rPr sz="2400" b="1" i="0">
+                <a:solidFill>
+                  <a:srgbClr val="1A1A1A"/>
+                </a:solidFill>
+                <a:latin typeface="Century Schoolbook"/>
+              </a:rPr>
+              <a:t>Which law? Then find the value.</a:t>
+            </a:r>
+          </a:p>
+        </p:txBody>
+      </p:sp>
+      <p:sp>
+        <p:nvSpPr>
           <p:cNvPr id="10" name="TextBox 9"/>
-          <p:cNvSpPr txBox="1"/>
-          <p:nvPr/>
-        </p:nvSpPr>
-        <p:spPr>
-          <a:xfrm>
-            <a:off x="777240" y="3532632"/>
-            <a:ext cx="10607040" cy="429370"/>
-          </a:xfrm>
-          <a:prstGeom prst="rect">
-            <a:avLst/>
-          </a:prstGeom>
-          <a:noFill/>
-        </p:spPr>
-        <p:txBody>
-          <a:bodyPr wrap="square" lIns="45720" rIns="45720" tIns="18288" bIns="18288" anchor="t">
-            <a:spAutoFit/>
-          </a:bodyPr>
-          <a:lstStyle/>
-          <a:p>
-            <a:pPr algn="ctr"/>
-            <a:r>
-              <a:rPr sz="2400" b="0" i="0">
-                <a:solidFill>
-                  <a:srgbClr val="6B6B6B"/>
-                </a:solidFill>
-                <a:latin typeface="Century Schoolbook"/>
-              </a:rPr>
-              <a:t>same base, subtract: 3</a:t>
-            </a:r>
-            <a:r>
-              <a:rPr sz="2400" b="0" i="0" baseline="30000">
-                <a:solidFill>
-                  <a:srgbClr val="6B6B6B"/>
-                </a:solidFill>
-                <a:latin typeface="Century Schoolbook"/>
-              </a:rPr>
-              <a:t>4</a:t>
-            </a:r>
-          </a:p>
-        </p:txBody>
-      </p:sp>
-      <p:sp>
-        <p:nvSpPr>
-          <p:cNvPr id="11" name="TextBox 10"/>
           <p:cNvSpPr txBox="1"/>
           <p:nvPr/>
         </p:nvSpPr>
@@ -4059,44 +3899,9 @@
           </a:fontRef>
         </p:style>
       </p:cxnSp>
-      <p:sp>
-        <p:nvSpPr>
-          <p:cNvPr id="5" name="TextBox 4"/>
-          <p:cNvSpPr txBox="1"/>
-          <p:nvPr/>
-        </p:nvSpPr>
-        <p:spPr>
-          <a:xfrm>
-            <a:off x="777240" y="1261872"/>
-            <a:ext cx="10607040" cy="310896"/>
-          </a:xfrm>
-          <a:prstGeom prst="rect">
-            <a:avLst/>
-          </a:prstGeom>
-          <a:noFill/>
-        </p:spPr>
-        <p:txBody>
-          <a:bodyPr wrap="square" lIns="45720" rIns="45720" tIns="18288" bIns="18288" anchor="t">
-            <a:spAutoFit/>
-          </a:bodyPr>
-          <a:lstStyle/>
-          <a:p>
-            <a:pPr algn="l"/>
-            <a:r>
-              <a:rPr sz="1700" b="0" i="1">
-                <a:solidFill>
-                  <a:srgbClr val="6B6B6B"/>
-                </a:solidFill>
-                <a:latin typeface="Century Schoolbook"/>
-              </a:rPr>
-              <a:t>A decimal base inside a quotient.</a:t>
-            </a:r>
-          </a:p>
-        </p:txBody>
-      </p:sp>
       <p:cxnSp>
         <p:nvCxnSpPr>
-          <p:cNvPr id="6" name="Connector 5"/>
+          <p:cNvPr id="5" name="Connector 4"/>
           <p:cNvCxnSpPr/>
           <p:nvPr/>
         </p:nvCxnSpPr>
@@ -4131,7 +3936,7 @@
       </p:cxnSp>
       <p:sp>
         <p:nvSpPr>
-          <p:cNvPr id="7" name="TextBox 6"/>
+          <p:cNvPr id="6" name="TextBox 5"/>
           <p:cNvSpPr txBox="1"/>
           <p:nvPr/>
         </p:nvSpPr>
@@ -4166,7 +3971,7 @@
       </p:sp>
       <p:sp>
         <p:nvSpPr>
-          <p:cNvPr id="8" name="TextBox 7"/>
+          <p:cNvPr id="7" name="TextBox 6"/>
           <p:cNvSpPr txBox="1"/>
           <p:nvPr/>
         </p:nvSpPr>
@@ -4201,7 +4006,7 @@
       </p:sp>
       <p:pic>
         <p:nvPicPr>
-          <p:cNvPr id="9" name="Picture 8" descr="b43cc8ad2e0eadb2.png"/>
+          <p:cNvPr id="8" name="Picture 7" descr="b43cc8ad2e0eadb2.png"/>
           <p:cNvPicPr>
             <a:picLocks noChangeAspect="1"/>
           </p:cNvPicPr>
@@ -4225,7 +4030,7 @@
       </p:pic>
       <p:sp>
         <p:nvSpPr>
-          <p:cNvPr id="10" name="TextBox 9"/>
+          <p:cNvPr id="9" name="TextBox 8"/>
           <p:cNvSpPr txBox="1"/>
           <p:nvPr/>
         </p:nvSpPr>
@@ -4381,44 +4186,9 @@
           </a:fontRef>
         </p:style>
       </p:cxnSp>
-      <p:sp>
-        <p:nvSpPr>
-          <p:cNvPr id="5" name="TextBox 4"/>
-          <p:cNvSpPr txBox="1"/>
-          <p:nvPr/>
-        </p:nvSpPr>
-        <p:spPr>
-          <a:xfrm>
-            <a:off x="777240" y="1261872"/>
-            <a:ext cx="10607040" cy="310896"/>
-          </a:xfrm>
-          <a:prstGeom prst="rect">
-            <a:avLst/>
-          </a:prstGeom>
-          <a:noFill/>
-        </p:spPr>
-        <p:txBody>
-          <a:bodyPr wrap="square" lIns="45720" rIns="45720" tIns="18288" bIns="18288" anchor="t">
-            <a:spAutoFit/>
-          </a:bodyPr>
-          <a:lstStyle/>
-          <a:p>
-            <a:pPr algn="l"/>
-            <a:r>
-              <a:rPr sz="1700" b="0" i="1">
-                <a:solidFill>
-                  <a:srgbClr val="6B6B6B"/>
-                </a:solidFill>
-                <a:latin typeface="Century Schoolbook"/>
-              </a:rPr>
-              <a:t>Worked both ways.</a:t>
-            </a:r>
-          </a:p>
-        </p:txBody>
-      </p:sp>
       <p:cxnSp>
         <p:nvCxnSpPr>
-          <p:cNvPr id="6" name="Connector 5"/>
+          <p:cNvPr id="5" name="Connector 4"/>
           <p:cNvCxnSpPr/>
           <p:nvPr/>
         </p:nvCxnSpPr>
@@ -4453,7 +4223,7 @@
       </p:cxnSp>
       <p:sp>
         <p:nvSpPr>
-          <p:cNvPr id="7" name="TextBox 6"/>
+          <p:cNvPr id="6" name="TextBox 5"/>
           <p:cNvSpPr txBox="1"/>
           <p:nvPr/>
         </p:nvSpPr>
@@ -4488,7 +4258,7 @@
       </p:sp>
       <p:sp>
         <p:nvSpPr>
-          <p:cNvPr id="8" name="TextBox 7"/>
+          <p:cNvPr id="7" name="TextBox 6"/>
           <p:cNvSpPr txBox="1"/>
           <p:nvPr/>
         </p:nvSpPr>
@@ -4523,7 +4293,7 @@
       </p:sp>
       <p:pic>
         <p:nvPicPr>
-          <p:cNvPr id="9" name="Picture 8" descr="7ab80e4044f30348.png"/>
+          <p:cNvPr id="8" name="Picture 7" descr="7ab80e4044f30348.png"/>
           <p:cNvPicPr>
             <a:picLocks noChangeAspect="1"/>
           </p:cNvPicPr>
@@ -4545,44 +4315,9 @@
           </a:prstGeom>
         </p:spPr>
       </p:pic>
-      <p:sp>
-        <p:nvSpPr>
-          <p:cNvPr id="10" name="TextBox 9"/>
-          <p:cNvSpPr txBox="1"/>
-          <p:nvPr/>
-        </p:nvSpPr>
-        <p:spPr>
-          <a:xfrm>
-            <a:off x="6041136" y="2098548"/>
-            <a:ext cx="5343144" cy="502920"/>
-          </a:xfrm>
-          <a:prstGeom prst="rect">
-            <a:avLst/>
-          </a:prstGeom>
-          <a:noFill/>
-        </p:spPr>
-        <p:txBody>
-          <a:bodyPr wrap="square" lIns="45720" rIns="45720" tIns="18288" bIns="18288" anchor="ctr">
-            <a:spAutoFit/>
-          </a:bodyPr>
-          <a:lstStyle/>
-          <a:p>
-            <a:pPr algn="l"/>
-            <a:r>
-              <a:rPr sz="2100" b="0" i="1">
-                <a:solidFill>
-                  <a:srgbClr val="6B6B6B"/>
-                </a:solidFill>
-                <a:latin typeface="Century Schoolbook"/>
-              </a:rPr>
-              <a:t>power of a quotient</a:t>
-            </a:r>
-          </a:p>
-        </p:txBody>
-      </p:sp>
       <p:pic>
         <p:nvPicPr>
-          <p:cNvPr id="11" name="Picture 10" descr="e1269a6bd0483359.png"/>
+          <p:cNvPr id="9" name="Picture 8" descr="e1269a6bd0483359.png"/>
           <p:cNvPicPr>
             <a:picLocks noChangeAspect="1"/>
           </p:cNvPicPr>
@@ -4604,62 +4339,9 @@
           </a:prstGeom>
         </p:spPr>
       </p:pic>
-      <p:sp>
-        <p:nvSpPr>
-          <p:cNvPr id="12" name="TextBox 11"/>
-          <p:cNvSpPr txBox="1"/>
-          <p:nvPr/>
-        </p:nvSpPr>
-        <p:spPr>
-          <a:xfrm>
-            <a:off x="5772912" y="3125724"/>
-            <a:ext cx="5611367" cy="502920"/>
-          </a:xfrm>
-          <a:prstGeom prst="rect">
-            <a:avLst/>
-          </a:prstGeom>
-          <a:noFill/>
-        </p:spPr>
-        <p:txBody>
-          <a:bodyPr wrap="square" lIns="45720" rIns="45720" tIns="18288" bIns="18288" anchor="ctr">
-            <a:spAutoFit/>
-          </a:bodyPr>
-          <a:lstStyle/>
-          <a:p>
-            <a:pPr algn="l"/>
-            <a:r>
-              <a:rPr sz="2100" b="0" i="1">
-                <a:solidFill>
-                  <a:srgbClr val="6B6B6B"/>
-                </a:solidFill>
-                <a:latin typeface="Century Schoolbook"/>
-              </a:rPr>
-              <a:t>divide by 10</a:t>
-            </a:r>
-            <a:r>
-              <a:rPr sz="2100" b="0" i="1" baseline="30000">
-                <a:solidFill>
-                  <a:srgbClr val="6B6B6B"/>
-                </a:solidFill>
-                <a:latin typeface="Century Schoolbook"/>
-              </a:rPr>
-              <a:t>4</a:t>
-            </a:r>
-            <a:r>
-              <a:rPr sz="2100" b="0" i="1">
-                <a:solidFill>
-                  <a:srgbClr val="6B6B6B"/>
-                </a:solidFill>
-                <a:latin typeface="Century Schoolbook"/>
-              </a:rPr>
-              <a:t>: four places left</a:t>
-            </a:r>
-          </a:p>
-        </p:txBody>
-      </p:sp>
       <p:pic>
         <p:nvPicPr>
-          <p:cNvPr id="13" name="Picture 12" descr="ac2b58a90d22f614.png"/>
+          <p:cNvPr id="10" name="Picture 9" descr="ac2b58a90d22f614.png"/>
           <p:cNvPicPr>
             <a:picLocks noChangeAspect="1"/>
           </p:cNvPicPr>
@@ -4683,42 +4365,7 @@
       </p:pic>
       <p:sp>
         <p:nvSpPr>
-          <p:cNvPr id="14" name="TextBox 13"/>
-          <p:cNvSpPr txBox="1"/>
-          <p:nvPr/>
-        </p:nvSpPr>
-        <p:spPr>
-          <a:xfrm>
-            <a:off x="5733288" y="3951731"/>
-            <a:ext cx="5650992" cy="502920"/>
-          </a:xfrm>
-          <a:prstGeom prst="rect">
-            <a:avLst/>
-          </a:prstGeom>
-          <a:noFill/>
-        </p:spPr>
-        <p:txBody>
-          <a:bodyPr wrap="square" lIns="45720" rIns="45720" tIns="18288" bIns="18288" anchor="ctr">
-            <a:spAutoFit/>
-          </a:bodyPr>
-          <a:lstStyle/>
-          <a:p>
-            <a:pPr algn="l"/>
-            <a:r>
-              <a:rPr sz="2100" b="0" i="1">
-                <a:solidFill>
-                  <a:srgbClr val="6B6B6B"/>
-                </a:solidFill>
-                <a:latin typeface="Century Schoolbook"/>
-              </a:rPr>
-              <a:t>check: divide first, then raise</a:t>
-            </a:r>
-          </a:p>
-        </p:txBody>
-      </p:sp>
-      <p:sp>
-        <p:nvSpPr>
-          <p:cNvPr id="15" name="TextBox 14"/>
+          <p:cNvPr id="11" name="TextBox 10"/>
           <p:cNvSpPr txBox="1"/>
           <p:nvPr/>
         </p:nvSpPr>
@@ -4874,44 +4521,9 @@
           </a:fontRef>
         </p:style>
       </p:cxnSp>
-      <p:sp>
-        <p:nvSpPr>
-          <p:cNvPr id="5" name="TextBox 4"/>
-          <p:cNvSpPr txBox="1"/>
-          <p:nvPr/>
-        </p:nvSpPr>
-        <p:spPr>
-          <a:xfrm>
-            <a:off x="777240" y="1261872"/>
-            <a:ext cx="10607040" cy="310896"/>
-          </a:xfrm>
-          <a:prstGeom prst="rect">
-            <a:avLst/>
-          </a:prstGeom>
-          <a:noFill/>
-        </p:spPr>
-        <p:txBody>
-          <a:bodyPr wrap="square" lIns="45720" rIns="45720" tIns="18288" bIns="18288" anchor="t">
-            <a:spAutoFit/>
-          </a:bodyPr>
-          <a:lstStyle/>
-          <a:p>
-            <a:pPr algn="l"/>
-            <a:r>
-              <a:rPr sz="1700" b="0" i="1">
-                <a:solidFill>
-                  <a:srgbClr val="6B6B6B"/>
-                </a:solidFill>
-                <a:latin typeface="Century Schoolbook"/>
-              </a:rPr>
-              <a:t>Same steps, your numbers. Boards up when done.</a:t>
-            </a:r>
-          </a:p>
-        </p:txBody>
-      </p:sp>
       <p:cxnSp>
         <p:nvCxnSpPr>
-          <p:cNvPr id="6" name="Connector 5"/>
+          <p:cNvPr id="5" name="Connector 4"/>
           <p:cNvCxnSpPr/>
           <p:nvPr/>
         </p:nvCxnSpPr>
@@ -4946,7 +4558,7 @@
       </p:cxnSp>
       <p:sp>
         <p:nvSpPr>
-          <p:cNvPr id="7" name="TextBox 6"/>
+          <p:cNvPr id="6" name="TextBox 5"/>
           <p:cNvSpPr txBox="1"/>
           <p:nvPr/>
         </p:nvSpPr>
@@ -4981,7 +4593,7 @@
       </p:sp>
       <p:sp>
         <p:nvSpPr>
-          <p:cNvPr id="8" name="TextBox 7"/>
+          <p:cNvPr id="7" name="TextBox 6"/>
           <p:cNvSpPr txBox="1"/>
           <p:nvPr/>
         </p:nvSpPr>
@@ -5016,7 +4628,7 @@
       </p:sp>
       <p:pic>
         <p:nvPicPr>
-          <p:cNvPr id="9" name="Picture 8" descr="e60d4cb6647beeea.png"/>
+          <p:cNvPr id="8" name="Picture 7" descr="e60d4cb6647beeea.png"/>
           <p:cNvPicPr>
             <a:picLocks noChangeAspect="1"/>
           </p:cNvPicPr>
@@ -5038,6 +4650,41 @@
           </a:prstGeom>
         </p:spPr>
       </p:pic>
+      <p:sp>
+        <p:nvSpPr>
+          <p:cNvPr id="9" name="TextBox 8"/>
+          <p:cNvSpPr txBox="1"/>
+          <p:nvPr/>
+        </p:nvSpPr>
+        <p:spPr>
+          <a:xfrm>
+            <a:off x="777240" y="3550920"/>
+            <a:ext cx="10607040" cy="429370"/>
+          </a:xfrm>
+          <a:prstGeom prst="rect">
+            <a:avLst/>
+          </a:prstGeom>
+          <a:noFill/>
+        </p:spPr>
+        <p:txBody>
+          <a:bodyPr wrap="square" lIns="45720" rIns="45720" tIns="18288" bIns="18288" anchor="t">
+            <a:spAutoFit/>
+          </a:bodyPr>
+          <a:lstStyle/>
+          <a:p>
+            <a:pPr algn="ctr"/>
+            <a:r>
+              <a:rPr sz="2400" b="1" i="0">
+                <a:solidFill>
+                  <a:srgbClr val="1A1A1A"/>
+                </a:solidFill>
+                <a:latin typeface="Century Schoolbook"/>
+              </a:rPr>
+              <a:t>Find the value.</a:t>
+            </a:r>
+          </a:p>
+        </p:txBody>
+      </p:sp>
     </p:spTree>
   </p:cSld>
   <p:clrMapOvr>
@@ -5161,44 +4808,9 @@
           </a:fontRef>
         </p:style>
       </p:cxnSp>
-      <p:sp>
-        <p:nvSpPr>
-          <p:cNvPr id="5" name="TextBox 4"/>
-          <p:cNvSpPr txBox="1"/>
-          <p:nvPr/>
-        </p:nvSpPr>
-        <p:spPr>
-          <a:xfrm>
-            <a:off x="777240" y="1261872"/>
-            <a:ext cx="10607040" cy="310896"/>
-          </a:xfrm>
-          <a:prstGeom prst="rect">
-            <a:avLst/>
-          </a:prstGeom>
-          <a:noFill/>
-        </p:spPr>
-        <p:txBody>
-          <a:bodyPr wrap="square" lIns="45720" rIns="45720" tIns="18288" bIns="18288" anchor="t">
-            <a:spAutoFit/>
-          </a:bodyPr>
-          <a:lstStyle/>
-          <a:p>
-            <a:pPr algn="l"/>
-            <a:r>
-              <a:rPr sz="1700" b="0" i="1">
-                <a:solidFill>
-                  <a:srgbClr val="6B6B6B"/>
-                </a:solidFill>
-                <a:latin typeface="Century Schoolbook"/>
-              </a:rPr>
-              <a:t>Answer.</a:t>
-            </a:r>
-          </a:p>
-        </p:txBody>
-      </p:sp>
       <p:cxnSp>
         <p:nvCxnSpPr>
-          <p:cNvPr id="6" name="Connector 5"/>
+          <p:cNvPr id="5" name="Connector 4"/>
           <p:cNvCxnSpPr/>
           <p:nvPr/>
         </p:nvCxnSpPr>
@@ -5233,7 +4845,7 @@
       </p:cxnSp>
       <p:sp>
         <p:nvSpPr>
-          <p:cNvPr id="7" name="TextBox 6"/>
+          <p:cNvPr id="6" name="TextBox 5"/>
           <p:cNvSpPr txBox="1"/>
           <p:nvPr/>
         </p:nvSpPr>
@@ -5268,7 +4880,7 @@
       </p:sp>
       <p:sp>
         <p:nvSpPr>
-          <p:cNvPr id="8" name="TextBox 7"/>
+          <p:cNvPr id="7" name="TextBox 6"/>
           <p:cNvSpPr txBox="1"/>
           <p:nvPr/>
         </p:nvSpPr>
@@ -5303,7 +4915,7 @@
       </p:sp>
       <p:pic>
         <p:nvPicPr>
-          <p:cNvPr id="9" name="Picture 8" descr="74bc3eff5c14b1ec.png"/>
+          <p:cNvPr id="8" name="Picture 7" descr="74bc3eff5c14b1ec.png"/>
           <p:cNvPicPr>
             <a:picLocks noChangeAspect="1"/>
           </p:cNvPicPr>
@@ -5327,42 +4939,42 @@
       </p:pic>
       <p:sp>
         <p:nvSpPr>
+          <p:cNvPr id="9" name="TextBox 8"/>
+          <p:cNvSpPr txBox="1"/>
+          <p:nvPr/>
+        </p:nvSpPr>
+        <p:spPr>
+          <a:xfrm>
+            <a:off x="777240" y="3553968"/>
+            <a:ext cx="10607040" cy="429370"/>
+          </a:xfrm>
+          <a:prstGeom prst="rect">
+            <a:avLst/>
+          </a:prstGeom>
+          <a:noFill/>
+        </p:spPr>
+        <p:txBody>
+          <a:bodyPr wrap="square" lIns="45720" rIns="45720" tIns="18288" bIns="18288" anchor="t">
+            <a:spAutoFit/>
+          </a:bodyPr>
+          <a:lstStyle/>
+          <a:p>
+            <a:pPr algn="ctr"/>
+            <a:r>
+              <a:rPr sz="2400" b="1" i="0">
+                <a:solidFill>
+                  <a:srgbClr val="1A1A1A"/>
+                </a:solidFill>
+                <a:latin typeface="Century Schoolbook"/>
+              </a:rPr>
+              <a:t>Find the value.</a:t>
+            </a:r>
+          </a:p>
+        </p:txBody>
+      </p:sp>
+      <p:sp>
+        <p:nvSpPr>
           <p:cNvPr id="10" name="TextBox 9"/>
-          <p:cNvSpPr txBox="1"/>
-          <p:nvPr/>
-        </p:nvSpPr>
-        <p:spPr>
-          <a:xfrm>
-            <a:off x="777240" y="3371088"/>
-            <a:ext cx="10607040" cy="429370"/>
-          </a:xfrm>
-          <a:prstGeom prst="rect">
-            <a:avLst/>
-          </a:prstGeom>
-          <a:noFill/>
-        </p:spPr>
-        <p:txBody>
-          <a:bodyPr wrap="square" lIns="45720" rIns="45720" tIns="18288" bIns="18288" anchor="t">
-            <a:spAutoFit/>
-          </a:bodyPr>
-          <a:lstStyle/>
-          <a:p>
-            <a:pPr algn="ctr"/>
-            <a:r>
-              <a:rPr sz="2400" b="0" i="0">
-                <a:solidFill>
-                  <a:srgbClr val="6B6B6B"/>
-                </a:solidFill>
-                <a:latin typeface="Century Schoolbook"/>
-              </a:rPr>
-              <a:t>numerator and denominator both cubed</a:t>
-            </a:r>
-          </a:p>
-        </p:txBody>
-      </p:sp>
-      <p:sp>
-        <p:nvSpPr>
-          <p:cNvPr id="11" name="TextBox 10"/>
           <p:cNvSpPr txBox="1"/>
           <p:nvPr/>
         </p:nvSpPr>
@@ -5397,7 +5009,7 @@
       </p:sp>
       <p:pic>
         <p:nvPicPr>
-          <p:cNvPr id="12" name="Picture 11" descr="78fdb0141a7d8d23.png"/>
+          <p:cNvPr id="11" name="Picture 10" descr="78fdb0141a7d8d23.png"/>
           <p:cNvPicPr>
             <a:picLocks noChangeAspect="1"/>
           </p:cNvPicPr>
@@ -5542,44 +5154,9 @@
           </a:fontRef>
         </p:style>
       </p:cxnSp>
-      <p:sp>
-        <p:nvSpPr>
-          <p:cNvPr id="5" name="TextBox 4"/>
-          <p:cNvSpPr txBox="1"/>
-          <p:nvPr/>
-        </p:nvSpPr>
-        <p:spPr>
-          <a:xfrm>
-            <a:off x="777240" y="1261872"/>
-            <a:ext cx="10607040" cy="310896"/>
-          </a:xfrm>
-          <a:prstGeom prst="rect">
-            <a:avLst/>
-          </a:prstGeom>
-          <a:noFill/>
-        </p:spPr>
-        <p:txBody>
-          <a:bodyPr wrap="square" lIns="45720" rIns="45720" tIns="18288" bIns="18288" anchor="t">
-            <a:spAutoFit/>
-          </a:bodyPr>
-          <a:lstStyle/>
-          <a:p>
-            <a:pPr algn="l"/>
-            <a:r>
-              <a:rPr sz="1700" b="0" i="1">
-                <a:solidFill>
-                  <a:srgbClr val="6B6B6B"/>
-                </a:solidFill>
-                <a:latin typeface="Century Schoolbook"/>
-              </a:rPr>
-              <a:t>Boards up on three.</a:t>
-            </a:r>
-          </a:p>
-        </p:txBody>
-      </p:sp>
       <p:cxnSp>
         <p:nvCxnSpPr>
-          <p:cNvPr id="6" name="Connector 5"/>
+          <p:cNvPr id="5" name="Connector 4"/>
           <p:cNvCxnSpPr/>
           <p:nvPr/>
         </p:nvCxnSpPr>
@@ -5614,7 +5191,7 @@
       </p:cxnSp>
       <p:sp>
         <p:nvSpPr>
-          <p:cNvPr id="7" name="TextBox 6"/>
+          <p:cNvPr id="6" name="TextBox 5"/>
           <p:cNvSpPr txBox="1"/>
           <p:nvPr/>
         </p:nvSpPr>
@@ -5649,7 +5226,7 @@
       </p:sp>
       <p:sp>
         <p:nvSpPr>
-          <p:cNvPr id="8" name="TextBox 7"/>
+          <p:cNvPr id="7" name="TextBox 6"/>
           <p:cNvSpPr txBox="1"/>
           <p:nvPr/>
         </p:nvSpPr>
@@ -5684,7 +5261,7 @@
       </p:sp>
       <p:pic>
         <p:nvPicPr>
-          <p:cNvPr id="9" name="Picture 8" descr="858f7499cc3aa9e8.png"/>
+          <p:cNvPr id="8" name="Picture 7" descr="858f7499cc3aa9e8.png"/>
           <p:cNvPicPr>
             <a:picLocks noChangeAspect="1"/>
           </p:cNvPicPr>
@@ -5708,7 +5285,7 @@
       </p:pic>
       <p:sp>
         <p:nvSpPr>
-          <p:cNvPr id="10" name="TextBox 9"/>
+          <p:cNvPr id="9" name="TextBox 8"/>
           <p:cNvSpPr txBox="1"/>
           <p:nvPr/>
         </p:nvSpPr>
@@ -5737,41 +5314,6 @@
                 <a:latin typeface="Century Schoolbook"/>
               </a:rPr>
               <a:t>Answer it.</a:t>
-            </a:r>
-          </a:p>
-        </p:txBody>
-      </p:sp>
-      <p:sp>
-        <p:nvSpPr>
-          <p:cNvPr id="11" name="TextBox 10"/>
-          <p:cNvSpPr txBox="1"/>
-          <p:nvPr/>
-        </p:nvSpPr>
-        <p:spPr>
-          <a:xfrm>
-            <a:off x="777240" y="4828032"/>
-            <a:ext cx="10607040" cy="365760"/>
-          </a:xfrm>
-          <a:prstGeom prst="rect">
-            <a:avLst/>
-          </a:prstGeom>
-          <a:noFill/>
-        </p:spPr>
-        <p:txBody>
-          <a:bodyPr wrap="square" lIns="45720" rIns="45720" tIns="18288" bIns="18288" anchor="t">
-            <a:spAutoFit/>
-          </a:bodyPr>
-          <a:lstStyle/>
-          <a:p>
-            <a:pPr algn="ctr"/>
-            <a:r>
-              <a:rPr sz="1900" b="0" i="1">
-                <a:solidFill>
-                  <a:srgbClr val="6B6B6B"/>
-                </a:solidFill>
-                <a:latin typeface="Century Schoolbook"/>
-              </a:rPr>
-              <a:t>Write it as one power.</a:t>
             </a:r>
           </a:p>
         </p:txBody>
@@ -5899,44 +5441,9 @@
           </a:fontRef>
         </p:style>
       </p:cxnSp>
-      <p:sp>
-        <p:nvSpPr>
-          <p:cNvPr id="5" name="TextBox 4"/>
-          <p:cNvSpPr txBox="1"/>
-          <p:nvPr/>
-        </p:nvSpPr>
-        <p:spPr>
-          <a:xfrm>
-            <a:off x="777240" y="1261872"/>
-            <a:ext cx="10607040" cy="310896"/>
-          </a:xfrm>
-          <a:prstGeom prst="rect">
-            <a:avLst/>
-          </a:prstGeom>
-          <a:noFill/>
-        </p:spPr>
-        <p:txBody>
-          <a:bodyPr wrap="square" lIns="45720" rIns="45720" tIns="18288" bIns="18288" anchor="t">
-            <a:spAutoFit/>
-          </a:bodyPr>
-          <a:lstStyle/>
-          <a:p>
-            <a:pPr algn="l"/>
-            <a:r>
-              <a:rPr sz="1700" b="0" i="1">
-                <a:solidFill>
-                  <a:srgbClr val="6B6B6B"/>
-                </a:solidFill>
-                <a:latin typeface="Century Schoolbook"/>
-              </a:rPr>
-              <a:t>Answer.</a:t>
-            </a:r>
-          </a:p>
-        </p:txBody>
-      </p:sp>
       <p:cxnSp>
         <p:nvCxnSpPr>
-          <p:cNvPr id="6" name="Connector 5"/>
+          <p:cNvPr id="5" name="Connector 4"/>
           <p:cNvCxnSpPr/>
           <p:nvPr/>
         </p:nvCxnSpPr>
@@ -5971,7 +5478,7 @@
       </p:cxnSp>
       <p:sp>
         <p:nvSpPr>
-          <p:cNvPr id="7" name="TextBox 6"/>
+          <p:cNvPr id="6" name="TextBox 5"/>
           <p:cNvSpPr txBox="1"/>
           <p:nvPr/>
         </p:nvSpPr>
@@ -6006,7 +5513,7 @@
       </p:sp>
       <p:sp>
         <p:nvSpPr>
-          <p:cNvPr id="8" name="TextBox 7"/>
+          <p:cNvPr id="7" name="TextBox 6"/>
           <p:cNvSpPr txBox="1"/>
           <p:nvPr/>
         </p:nvSpPr>
@@ -6041,7 +5548,7 @@
       </p:sp>
       <p:pic>
         <p:nvPicPr>
-          <p:cNvPr id="9" name="Picture 8" descr="b0b61f7be1f45fff.png"/>
+          <p:cNvPr id="8" name="Picture 7" descr="b0b61f7be1f45fff.png"/>
           <p:cNvPicPr>
             <a:picLocks noChangeAspect="1"/>
           </p:cNvPicPr>
@@ -6065,42 +5572,7 @@
       </p:pic>
       <p:sp>
         <p:nvSpPr>
-          <p:cNvPr id="10" name="TextBox 9"/>
-          <p:cNvSpPr txBox="1"/>
-          <p:nvPr/>
-        </p:nvSpPr>
-        <p:spPr>
-          <a:xfrm>
-            <a:off x="1828800" y="3395471"/>
-            <a:ext cx="8503920" cy="548640"/>
-          </a:xfrm>
-          <a:prstGeom prst="rect">
-            <a:avLst/>
-          </a:prstGeom>
-          <a:noFill/>
-        </p:spPr>
-        <p:txBody>
-          <a:bodyPr wrap="square" lIns="45720" rIns="45720" tIns="18288" bIns="18288" anchor="t">
-            <a:spAutoFit/>
-          </a:bodyPr>
-          <a:lstStyle/>
-          <a:p>
-            <a:pPr algn="ctr"/>
-            <a:r>
-              <a:rPr sz="2400" b="0" i="0">
-                <a:solidFill>
-                  <a:srgbClr val="6B6B6B"/>
-                </a:solidFill>
-                <a:latin typeface="Century Schoolbook"/>
-              </a:rPr>
-              <a:t>same base, subtract the exponents</a:t>
-            </a:r>
-          </a:p>
-        </p:txBody>
-      </p:sp>
-      <p:sp>
-        <p:nvSpPr>
-          <p:cNvPr id="11" name="TextBox 10"/>
+          <p:cNvPr id="9" name="TextBox 8"/>
           <p:cNvSpPr txBox="1"/>
           <p:nvPr/>
         </p:nvSpPr>
@@ -6135,7 +5607,7 @@
       </p:sp>
       <p:pic>
         <p:nvPicPr>
-          <p:cNvPr id="12" name="Picture 11" descr="6677a7c756544677.png"/>
+          <p:cNvPr id="10" name="Picture 9" descr="6677a7c756544677.png"/>
           <p:cNvPicPr>
             <a:picLocks noChangeAspect="1"/>
           </p:cNvPicPr>
@@ -6280,44 +5752,9 @@
           </a:fontRef>
         </p:style>
       </p:cxnSp>
-      <p:sp>
-        <p:nvSpPr>
-          <p:cNvPr id="5" name="TextBox 4"/>
-          <p:cNvSpPr txBox="1"/>
-          <p:nvPr/>
-        </p:nvSpPr>
-        <p:spPr>
-          <a:xfrm>
-            <a:off x="777240" y="1261872"/>
-            <a:ext cx="10607040" cy="310896"/>
-          </a:xfrm>
-          <a:prstGeom prst="rect">
-            <a:avLst/>
-          </a:prstGeom>
-          <a:noFill/>
-        </p:spPr>
-        <p:txBody>
-          <a:bodyPr wrap="square" lIns="45720" rIns="45720" tIns="18288" bIns="18288" anchor="t">
-            <a:spAutoFit/>
-          </a:bodyPr>
-          <a:lstStyle/>
-          <a:p>
-            <a:pPr algn="l"/>
-            <a:r>
-              <a:rPr sz="1700" b="0" i="1">
-                <a:solidFill>
-                  <a:srgbClr val="6B6B6B"/>
-                </a:solidFill>
-                <a:latin typeface="Century Schoolbook"/>
-              </a:rPr>
-              <a:t>Boards up on three.</a:t>
-            </a:r>
-          </a:p>
-        </p:txBody>
-      </p:sp>
       <p:cxnSp>
         <p:nvCxnSpPr>
-          <p:cNvPr id="6" name="Connector 5"/>
+          <p:cNvPr id="5" name="Connector 4"/>
           <p:cNvCxnSpPr/>
           <p:nvPr/>
         </p:nvCxnSpPr>
@@ -6352,7 +5789,7 @@
       </p:cxnSp>
       <p:sp>
         <p:nvSpPr>
-          <p:cNvPr id="7" name="TextBox 6"/>
+          <p:cNvPr id="6" name="TextBox 5"/>
           <p:cNvSpPr txBox="1"/>
           <p:nvPr/>
         </p:nvSpPr>
@@ -6387,7 +5824,7 @@
       </p:sp>
       <p:sp>
         <p:nvSpPr>
-          <p:cNvPr id="8" name="TextBox 7"/>
+          <p:cNvPr id="7" name="TextBox 6"/>
           <p:cNvSpPr txBox="1"/>
           <p:nvPr/>
         </p:nvSpPr>
@@ -6422,7 +5859,7 @@
       </p:sp>
       <p:sp>
         <p:nvSpPr>
-          <p:cNvPr id="9" name="TextBox 8"/>
+          <p:cNvPr id="8" name="TextBox 7"/>
           <p:cNvSpPr txBox="1"/>
           <p:nvPr/>
         </p:nvSpPr>
@@ -6457,7 +5894,7 @@
       </p:sp>
       <p:pic>
         <p:nvPicPr>
-          <p:cNvPr id="10" name="Picture 9" descr="138fda7418465782.png"/>
+          <p:cNvPr id="9" name="Picture 8" descr="138fda7418465782.png"/>
           <p:cNvPicPr>
             <a:picLocks noChangeAspect="1"/>
           </p:cNvPicPr>
@@ -6481,7 +5918,7 @@
       </p:pic>
       <p:sp>
         <p:nvSpPr>
-          <p:cNvPr id="11" name="TextBox 10"/>
+          <p:cNvPr id="10" name="TextBox 9"/>
           <p:cNvSpPr txBox="1"/>
           <p:nvPr/>
         </p:nvSpPr>
@@ -6516,7 +5953,7 @@
       </p:sp>
       <p:sp>
         <p:nvSpPr>
-          <p:cNvPr id="12" name="TextBox 11"/>
+          <p:cNvPr id="11" name="TextBox 10"/>
           <p:cNvSpPr txBox="1"/>
           <p:nvPr/>
         </p:nvSpPr>
@@ -6551,7 +5988,7 @@
       </p:sp>
       <p:sp>
         <p:nvSpPr>
-          <p:cNvPr id="13" name="TextBox 12"/>
+          <p:cNvPr id="12" name="TextBox 11"/>
           <p:cNvSpPr txBox="1"/>
           <p:nvPr/>
         </p:nvSpPr>
@@ -6586,7 +6023,7 @@
       </p:sp>
       <p:sp>
         <p:nvSpPr>
-          <p:cNvPr id="14" name="TextBox 13"/>
+          <p:cNvPr id="13" name="TextBox 12"/>
           <p:cNvSpPr txBox="1"/>
           <p:nvPr/>
         </p:nvSpPr>
@@ -6742,44 +6179,9 @@
           </a:fontRef>
         </p:style>
       </p:cxnSp>
-      <p:sp>
-        <p:nvSpPr>
-          <p:cNvPr id="5" name="TextBox 4"/>
-          <p:cNvSpPr txBox="1"/>
-          <p:nvPr/>
-        </p:nvSpPr>
-        <p:spPr>
-          <a:xfrm>
-            <a:off x="777240" y="1261872"/>
-            <a:ext cx="10607040" cy="310896"/>
-          </a:xfrm>
-          <a:prstGeom prst="rect">
-            <a:avLst/>
-          </a:prstGeom>
-          <a:noFill/>
-        </p:spPr>
-        <p:txBody>
-          <a:bodyPr wrap="square" lIns="45720" rIns="45720" tIns="18288" bIns="18288" anchor="t">
-            <a:spAutoFit/>
-          </a:bodyPr>
-          <a:lstStyle/>
-          <a:p>
-            <a:pPr algn="l"/>
-            <a:r>
-              <a:rPr sz="1700" b="0" i="1">
-                <a:solidFill>
-                  <a:srgbClr val="6B6B6B"/>
-                </a:solidFill>
-                <a:latin typeface="Century Schoolbook"/>
-              </a:rPr>
-              <a:t>Answer.</a:t>
-            </a:r>
-          </a:p>
-        </p:txBody>
-      </p:sp>
       <p:cxnSp>
         <p:nvCxnSpPr>
-          <p:cNvPr id="6" name="Connector 5"/>
+          <p:cNvPr id="5" name="Connector 4"/>
           <p:cNvCxnSpPr/>
           <p:nvPr/>
         </p:nvCxnSpPr>
@@ -6814,7 +6216,7 @@
       </p:cxnSp>
       <p:sp>
         <p:nvSpPr>
-          <p:cNvPr id="7" name="TextBox 6"/>
+          <p:cNvPr id="6" name="TextBox 5"/>
           <p:cNvSpPr txBox="1"/>
           <p:nvPr/>
         </p:nvSpPr>
@@ -6849,7 +6251,7 @@
       </p:sp>
       <p:sp>
         <p:nvSpPr>
-          <p:cNvPr id="8" name="TextBox 7"/>
+          <p:cNvPr id="7" name="TextBox 6"/>
           <p:cNvSpPr txBox="1"/>
           <p:nvPr/>
         </p:nvSpPr>
@@ -6884,7 +6286,7 @@
       </p:sp>
       <p:sp>
         <p:nvSpPr>
-          <p:cNvPr id="9" name="TextBox 8"/>
+          <p:cNvPr id="8" name="TextBox 7"/>
           <p:cNvSpPr txBox="1"/>
           <p:nvPr/>
         </p:nvSpPr>
@@ -6919,7 +6321,7 @@
       </p:sp>
       <p:pic>
         <p:nvPicPr>
-          <p:cNvPr id="10" name="Picture 9" descr="7c23c9fd82d9d425.png"/>
+          <p:cNvPr id="9" name="Picture 8" descr="7c23c9fd82d9d425.png"/>
           <p:cNvPicPr>
             <a:picLocks noChangeAspect="1"/>
           </p:cNvPicPr>
@@ -6943,7 +6345,7 @@
       </p:pic>
       <p:sp>
         <p:nvSpPr>
-          <p:cNvPr id="11" name="TextBox 10"/>
+          <p:cNvPr id="10" name="TextBox 9"/>
           <p:cNvSpPr txBox="1"/>
           <p:nvPr/>
         </p:nvSpPr>
@@ -6978,7 +6380,7 @@
       </p:sp>
       <p:sp>
         <p:nvSpPr>
-          <p:cNvPr id="12" name="TextBox 11"/>
+          <p:cNvPr id="11" name="TextBox 10"/>
           <p:cNvSpPr txBox="1"/>
           <p:nvPr/>
         </p:nvSpPr>
@@ -7013,7 +6415,7 @@
       </p:sp>
       <p:sp>
         <p:nvSpPr>
-          <p:cNvPr id="13" name="TextBox 12"/>
+          <p:cNvPr id="12" name="TextBox 11"/>
           <p:cNvSpPr txBox="1"/>
           <p:nvPr/>
         </p:nvSpPr>
@@ -7048,87 +6450,7 @@
       </p:sp>
       <p:sp>
         <p:nvSpPr>
-          <p:cNvPr id="14" name="TextBox 13"/>
-          <p:cNvSpPr txBox="1"/>
-          <p:nvPr/>
-        </p:nvSpPr>
-        <p:spPr>
-          <a:xfrm>
-            <a:off x="1828800" y="3656804"/>
-            <a:ext cx="8503920" cy="548640"/>
-          </a:xfrm>
-          <a:prstGeom prst="rect">
-            <a:avLst/>
-          </a:prstGeom>
-          <a:noFill/>
-        </p:spPr>
-        <p:txBody>
-          <a:bodyPr wrap="square" lIns="45720" rIns="45720" tIns="18288" bIns="18288" anchor="t">
-            <a:spAutoFit/>
-          </a:bodyPr>
-          <a:lstStyle/>
-          <a:p>
-            <a:pPr algn="ctr"/>
-            <a:r>
-              <a:rPr sz="2400" b="0" i="0">
-                <a:solidFill>
-                  <a:srgbClr val="6B6B6B"/>
-                </a:solidFill>
-                <a:latin typeface="Century Schoolbook"/>
-              </a:rPr>
-              <a:t>8</a:t>
-            </a:r>
-            <a:r>
-              <a:rPr sz="2400" b="0" i="0" baseline="30000">
-                <a:solidFill>
-                  <a:srgbClr val="6B6B6B"/>
-                </a:solidFill>
-                <a:latin typeface="Century Schoolbook"/>
-              </a:rPr>
-              <a:t>4</a:t>
-            </a:r>
-            <a:r>
-              <a:rPr sz="2400" b="0" i="0">
-                <a:solidFill>
-                  <a:srgbClr val="6B6B6B"/>
-                </a:solidFill>
-                <a:latin typeface="Century Schoolbook"/>
-              </a:rPr>
-              <a:t> ÷ 8</a:t>
-            </a:r>
-            <a:r>
-              <a:rPr sz="2400" b="0" i="0" baseline="30000">
-                <a:solidFill>
-                  <a:srgbClr val="6B6B6B"/>
-                </a:solidFill>
-                <a:latin typeface="Century Schoolbook"/>
-              </a:rPr>
-              <a:t>1</a:t>
-            </a:r>
-            <a:r>
-              <a:rPr sz="2400" b="0" i="0">
-                <a:solidFill>
-                  <a:srgbClr val="6B6B6B"/>
-                </a:solidFill>
-                <a:latin typeface="Century Schoolbook"/>
-              </a:rPr>
-              <a:t> = 8</a:t>
-            </a:r>
-            <a:r>
-              <a:rPr sz="2400" b="0" i="0" baseline="30000">
-                <a:solidFill>
-                  <a:srgbClr val="6B6B6B"/>
-                </a:solidFill>
-                <a:latin typeface="Century Schoolbook"/>
-              </a:rPr>
-              <a:t>3</a:t>
-            </a:r>
-          </a:p>
-        </p:txBody>
-      </p:sp>
-      <p:sp>
-        <p:nvSpPr>
-          <p:cNvPr id="15" name="TextBox 14"/>
+          <p:cNvPr id="13" name="TextBox 12"/>
           <p:cNvSpPr txBox="1"/>
           <p:nvPr/>
         </p:nvSpPr>
@@ -7284,44 +6606,9 @@
           </a:fontRef>
         </p:style>
       </p:cxnSp>
-      <p:sp>
-        <p:nvSpPr>
-          <p:cNvPr id="5" name="TextBox 4"/>
-          <p:cNvSpPr txBox="1"/>
-          <p:nvPr/>
-        </p:nvSpPr>
-        <p:spPr>
-          <a:xfrm>
-            <a:off x="777240" y="1261872"/>
-            <a:ext cx="10607040" cy="310896"/>
-          </a:xfrm>
-          <a:prstGeom prst="rect">
-            <a:avLst/>
-          </a:prstGeom>
-          <a:noFill/>
-        </p:spPr>
-        <p:txBody>
-          <a:bodyPr wrap="square" lIns="45720" rIns="45720" tIns="18288" bIns="18288" anchor="t">
-            <a:spAutoFit/>
-          </a:bodyPr>
-          <a:lstStyle/>
-          <a:p>
-            <a:pPr algn="l"/>
-            <a:r>
-              <a:rPr sz="1700" b="0" i="1">
-                <a:solidFill>
-                  <a:srgbClr val="6B6B6B"/>
-                </a:solidFill>
-                <a:latin typeface="Century Schoolbook"/>
-              </a:rPr>
-              <a:t>Boards up on three.</a:t>
-            </a:r>
-          </a:p>
-        </p:txBody>
-      </p:sp>
       <p:cxnSp>
         <p:nvCxnSpPr>
-          <p:cNvPr id="6" name="Connector 5"/>
+          <p:cNvPr id="5" name="Connector 4"/>
           <p:cNvCxnSpPr/>
           <p:nvPr/>
         </p:nvCxnSpPr>
@@ -7356,7 +6643,7 @@
       </p:cxnSp>
       <p:sp>
         <p:nvSpPr>
-          <p:cNvPr id="7" name="TextBox 6"/>
+          <p:cNvPr id="6" name="TextBox 5"/>
           <p:cNvSpPr txBox="1"/>
           <p:nvPr/>
         </p:nvSpPr>
@@ -7391,7 +6678,7 @@
       </p:sp>
       <p:sp>
         <p:nvSpPr>
-          <p:cNvPr id="8" name="TextBox 7"/>
+          <p:cNvPr id="7" name="TextBox 6"/>
           <p:cNvSpPr txBox="1"/>
           <p:nvPr/>
         </p:nvSpPr>
@@ -7426,7 +6713,7 @@
       </p:sp>
       <p:pic>
         <p:nvPicPr>
-          <p:cNvPr id="9" name="Picture 8" descr="1252d608a87976a6.png"/>
+          <p:cNvPr id="8" name="Picture 7" descr="1252d608a87976a6.png"/>
           <p:cNvPicPr>
             <a:picLocks noChangeAspect="1"/>
           </p:cNvPicPr>
@@ -7450,7 +6737,7 @@
       </p:pic>
       <p:sp>
         <p:nvSpPr>
-          <p:cNvPr id="10" name="TextBox 9"/>
+          <p:cNvPr id="9" name="TextBox 8"/>
           <p:cNvSpPr txBox="1"/>
           <p:nvPr/>
         </p:nvSpPr>
@@ -7479,41 +6766,6 @@
                 <a:latin typeface="Century Schoolbook"/>
               </a:rPr>
               <a:t>Answer it.</a:t>
-            </a:r>
-          </a:p>
-        </p:txBody>
-      </p:sp>
-      <p:sp>
-        <p:nvSpPr>
-          <p:cNvPr id="11" name="TextBox 10"/>
-          <p:cNvSpPr txBox="1"/>
-          <p:nvPr/>
-        </p:nvSpPr>
-        <p:spPr>
-          <a:xfrm>
-            <a:off x="777240" y="4828032"/>
-            <a:ext cx="10607040" cy="365760"/>
-          </a:xfrm>
-          <a:prstGeom prst="rect">
-            <a:avLst/>
-          </a:prstGeom>
-          <a:noFill/>
-        </p:spPr>
-        <p:txBody>
-          <a:bodyPr wrap="square" lIns="45720" rIns="45720" tIns="18288" bIns="18288" anchor="t">
-            <a:spAutoFit/>
-          </a:bodyPr>
-          <a:lstStyle/>
-          <a:p>
-            <a:pPr algn="ctr"/>
-            <a:r>
-              <a:rPr sz="1900" b="0" i="1">
-                <a:solidFill>
-                  <a:srgbClr val="6B6B6B"/>
-                </a:solidFill>
-                <a:latin typeface="Century Schoolbook"/>
-              </a:rPr>
-              <a:t>Find the value.</a:t>
             </a:r>
           </a:p>
         </p:txBody>
@@ -7641,44 +6893,9 @@
           </a:fontRef>
         </p:style>
       </p:cxnSp>
-      <p:sp>
-        <p:nvSpPr>
-          <p:cNvPr id="5" name="TextBox 4"/>
-          <p:cNvSpPr txBox="1"/>
-          <p:nvPr/>
-        </p:nvSpPr>
-        <p:spPr>
-          <a:xfrm>
-            <a:off x="777240" y="1261872"/>
-            <a:ext cx="10607040" cy="310896"/>
-          </a:xfrm>
-          <a:prstGeom prst="rect">
-            <a:avLst/>
-          </a:prstGeom>
-          <a:noFill/>
-        </p:spPr>
-        <p:txBody>
-          <a:bodyPr wrap="square" lIns="45720" rIns="45720" tIns="18288" bIns="18288" anchor="t">
-            <a:spAutoFit/>
-          </a:bodyPr>
-          <a:lstStyle/>
-          <a:p>
-            <a:pPr algn="l"/>
-            <a:r>
-              <a:rPr sz="1700" b="0" i="1">
-                <a:solidFill>
-                  <a:srgbClr val="6B6B6B"/>
-                </a:solidFill>
-                <a:latin typeface="Century Schoolbook"/>
-              </a:rPr>
-              <a:t>On your own. Four minutes. No notes.</a:t>
-            </a:r>
-          </a:p>
-        </p:txBody>
-      </p:sp>
       <p:cxnSp>
         <p:nvCxnSpPr>
-          <p:cNvPr id="6" name="Connector 5"/>
+          <p:cNvPr id="5" name="Connector 4"/>
           <p:cNvCxnSpPr/>
           <p:nvPr/>
         </p:nvCxnSpPr>
@@ -7713,7 +6930,7 @@
       </p:cxnSp>
       <p:sp>
         <p:nvSpPr>
-          <p:cNvPr id="7" name="TextBox 6"/>
+          <p:cNvPr id="6" name="TextBox 5"/>
           <p:cNvSpPr txBox="1"/>
           <p:nvPr/>
         </p:nvSpPr>
@@ -7748,7 +6965,7 @@
       </p:sp>
       <p:sp>
         <p:nvSpPr>
-          <p:cNvPr id="8" name="TextBox 7"/>
+          <p:cNvPr id="7" name="TextBox 6"/>
           <p:cNvSpPr txBox="1"/>
           <p:nvPr/>
         </p:nvSpPr>
@@ -7783,13 +7000,13 @@
       </p:sp>
       <p:sp>
         <p:nvSpPr>
-          <p:cNvPr id="9" name="TextBox 8"/>
-          <p:cNvSpPr txBox="1"/>
-          <p:nvPr/>
-        </p:nvSpPr>
-        <p:spPr>
-          <a:xfrm>
-            <a:off x="1874519" y="1760220"/>
+          <p:cNvPr id="8" name="TextBox 7"/>
+          <p:cNvSpPr txBox="1"/>
+          <p:nvPr/>
+        </p:nvSpPr>
+        <p:spPr>
+          <a:xfrm>
+            <a:off x="1874519" y="1440180"/>
             <a:ext cx="3698600" cy="457200"/>
           </a:xfrm>
           <a:prstGeom prst="rect">
@@ -7818,7 +7035,7 @@
       </p:sp>
       <p:pic>
         <p:nvPicPr>
-          <p:cNvPr id="10" name="Picture 9" descr="d71efaf91c1d965e.png"/>
+          <p:cNvPr id="9" name="Picture 8" descr="d71efaf91c1d965e.png"/>
           <p:cNvPicPr>
             <a:picLocks noChangeAspect="1"/>
           </p:cNvPicPr>
@@ -7832,7 +7049,7 @@
         </p:blipFill>
         <p:spPr>
           <a:xfrm>
-            <a:off x="5435960" y="1848611"/>
+            <a:off x="5435960" y="1528572"/>
             <a:ext cx="746760" cy="280416"/>
           </a:xfrm>
           <a:prstGeom prst="rect">
@@ -7842,13 +7059,13 @@
       </p:pic>
       <p:sp>
         <p:nvSpPr>
-          <p:cNvPr id="11" name="TextBox 10"/>
-          <p:cNvSpPr txBox="1"/>
-          <p:nvPr/>
-        </p:nvSpPr>
-        <p:spPr>
-          <a:xfrm>
-            <a:off x="1874519" y="2372868"/>
+          <p:cNvPr id="10" name="TextBox 9"/>
+          <p:cNvSpPr txBox="1"/>
+          <p:nvPr/>
+        </p:nvSpPr>
+        <p:spPr>
+          <a:xfrm>
+            <a:off x="1874519" y="2052828"/>
             <a:ext cx="726811" cy="457200"/>
           </a:xfrm>
           <a:prstGeom prst="rect">
@@ -7877,7 +7094,7 @@
       </p:sp>
       <p:pic>
         <p:nvPicPr>
-          <p:cNvPr id="12" name="Picture 11" descr="38e9b447bed4dddc.png"/>
+          <p:cNvPr id="11" name="Picture 10" descr="38e9b447bed4dddc.png"/>
           <p:cNvPicPr>
             <a:picLocks noChangeAspect="1"/>
           </p:cNvPicPr>
@@ -7891,7 +7108,7 @@
         </p:blipFill>
         <p:spPr>
           <a:xfrm>
-            <a:off x="2464171" y="2397252"/>
+            <a:off x="2464171" y="2077212"/>
             <a:ext cx="914400" cy="408432"/>
           </a:xfrm>
           <a:prstGeom prst="rect">
@@ -7901,13 +7118,13 @@
       </p:pic>
       <p:sp>
         <p:nvSpPr>
-          <p:cNvPr id="13" name="TextBox 12"/>
-          <p:cNvSpPr txBox="1"/>
-          <p:nvPr/>
-        </p:nvSpPr>
-        <p:spPr>
-          <a:xfrm>
-            <a:off x="1874519" y="2985516"/>
+          <p:cNvPr id="12" name="TextBox 11"/>
+          <p:cNvSpPr txBox="1"/>
+          <p:nvPr/>
+        </p:nvSpPr>
+        <p:spPr>
+          <a:xfrm>
+            <a:off x="1874519" y="2665476"/>
             <a:ext cx="1652008" cy="457200"/>
           </a:xfrm>
           <a:prstGeom prst="rect">
@@ -7936,7 +7153,7 @@
       </p:sp>
       <p:pic>
         <p:nvPicPr>
-          <p:cNvPr id="14" name="Picture 13" descr="73f8d0478760fca0.png"/>
+          <p:cNvPr id="13" name="Picture 12" descr="73f8d0478760fca0.png"/>
           <p:cNvPicPr>
             <a:picLocks noChangeAspect="1"/>
           </p:cNvPicPr>
@@ -7950,7 +7167,7 @@
         </p:blipFill>
         <p:spPr>
           <a:xfrm>
-            <a:off x="3389368" y="3093720"/>
+            <a:off x="3389368" y="2773680"/>
             <a:ext cx="1405128" cy="240791"/>
           </a:xfrm>
           <a:prstGeom prst="rect">
@@ -7960,13 +7177,13 @@
       </p:pic>
       <p:sp>
         <p:nvSpPr>
-          <p:cNvPr id="15" name="TextBox 14"/>
-          <p:cNvSpPr txBox="1"/>
-          <p:nvPr/>
-        </p:nvSpPr>
-        <p:spPr>
-          <a:xfrm>
-            <a:off x="1874519" y="3677412"/>
+          <p:cNvPr id="14" name="TextBox 13"/>
+          <p:cNvSpPr txBox="1"/>
+          <p:nvPr/>
+        </p:nvSpPr>
+        <p:spPr>
+          <a:xfrm>
+            <a:off x="1874519" y="3357372"/>
             <a:ext cx="2099724" cy="457200"/>
           </a:xfrm>
           <a:prstGeom prst="rect">
@@ -7995,7 +7212,7 @@
       </p:sp>
       <p:pic>
         <p:nvPicPr>
-          <p:cNvPr id="16" name="Picture 15" descr="18ea63a1522c269c.png"/>
+          <p:cNvPr id="15" name="Picture 14" descr="18ea63a1522c269c.png"/>
           <p:cNvPicPr>
             <a:picLocks noChangeAspect="1"/>
           </p:cNvPicPr>
@@ -8009,7 +7226,7 @@
         </p:blipFill>
         <p:spPr>
           <a:xfrm>
-            <a:off x="3837084" y="3621024"/>
+            <a:off x="3837084" y="3300984"/>
             <a:ext cx="880872" cy="569976"/>
           </a:xfrm>
           <a:prstGeom prst="rect">
@@ -8140,44 +7357,9 @@
           </a:fontRef>
         </p:style>
       </p:cxnSp>
-      <p:sp>
-        <p:nvSpPr>
-          <p:cNvPr id="5" name="TextBox 4"/>
-          <p:cNvSpPr txBox="1"/>
-          <p:nvPr/>
-        </p:nvSpPr>
-        <p:spPr>
-          <a:xfrm>
-            <a:off x="777240" y="1261872"/>
-            <a:ext cx="10607040" cy="310896"/>
-          </a:xfrm>
-          <a:prstGeom prst="rect">
-            <a:avLst/>
-          </a:prstGeom>
-          <a:noFill/>
-        </p:spPr>
-        <p:txBody>
-          <a:bodyPr wrap="square" lIns="45720" rIns="45720" tIns="18288" bIns="18288" anchor="t">
-            <a:spAutoFit/>
-          </a:bodyPr>
-          <a:lstStyle/>
-          <a:p>
-            <a:pPr algn="l"/>
-            <a:r>
-              <a:rPr sz="1700" b="0" i="1">
-                <a:solidFill>
-                  <a:srgbClr val="6B6B6B"/>
-                </a:solidFill>
-                <a:latin typeface="Century Schoolbook"/>
-              </a:rPr>
-              <a:t>Answer.</a:t>
-            </a:r>
-          </a:p>
-        </p:txBody>
-      </p:sp>
       <p:cxnSp>
         <p:nvCxnSpPr>
-          <p:cNvPr id="6" name="Connector 5"/>
+          <p:cNvPr id="5" name="Connector 4"/>
           <p:cNvCxnSpPr/>
           <p:nvPr/>
         </p:nvCxnSpPr>
@@ -8212,7 +7394,7 @@
       </p:cxnSp>
       <p:sp>
         <p:nvSpPr>
-          <p:cNvPr id="7" name="TextBox 6"/>
+          <p:cNvPr id="6" name="TextBox 5"/>
           <p:cNvSpPr txBox="1"/>
           <p:nvPr/>
         </p:nvSpPr>
@@ -8247,7 +7429,7 @@
       </p:sp>
       <p:sp>
         <p:nvSpPr>
-          <p:cNvPr id="8" name="TextBox 7"/>
+          <p:cNvPr id="7" name="TextBox 6"/>
           <p:cNvSpPr txBox="1"/>
           <p:nvPr/>
         </p:nvSpPr>
@@ -8282,7 +7464,7 @@
       </p:sp>
       <p:pic>
         <p:nvPicPr>
-          <p:cNvPr id="9" name="Picture 8" descr="e97669c0d54b74f0.png"/>
+          <p:cNvPr id="8" name="Picture 7" descr="e97669c0d54b74f0.png"/>
           <p:cNvPicPr>
             <a:picLocks noChangeAspect="1"/>
           </p:cNvPicPr>
@@ -8306,51 +7488,7 @@
       </p:pic>
       <p:sp>
         <p:nvSpPr>
-          <p:cNvPr id="10" name="TextBox 9"/>
-          <p:cNvSpPr txBox="1"/>
-          <p:nvPr/>
-        </p:nvSpPr>
-        <p:spPr>
-          <a:xfrm>
-            <a:off x="1828800" y="3569207"/>
-            <a:ext cx="8503920" cy="548640"/>
-          </a:xfrm>
-          <a:prstGeom prst="rect">
-            <a:avLst/>
-          </a:prstGeom>
-          <a:noFill/>
-        </p:spPr>
-        <p:txBody>
-          <a:bodyPr wrap="square" lIns="45720" rIns="45720" tIns="18288" bIns="18288" anchor="t">
-            <a:spAutoFit/>
-          </a:bodyPr>
-          <a:lstStyle/>
-          <a:p>
-            <a:pPr algn="ctr"/>
-            <a:r>
-              <a:rPr sz="2400" b="0" i="0">
-                <a:solidFill>
-                  <a:srgbClr val="6B6B6B"/>
-                </a:solidFill>
-                <a:latin typeface="Century Schoolbook"/>
-              </a:rPr>
-              <a:t>(−6)</a:t>
-            </a:r>
-            <a:r>
-              <a:rPr sz="2400" b="0" i="0" baseline="30000">
-                <a:solidFill>
-                  <a:srgbClr val="6B6B6B"/>
-                </a:solidFill>
-                <a:latin typeface="Century Schoolbook"/>
-              </a:rPr>
-              <a:t>1</a:t>
-            </a:r>
-          </a:p>
-        </p:txBody>
-      </p:sp>
-      <p:sp>
-        <p:nvSpPr>
-          <p:cNvPr id="11" name="TextBox 10"/>
+          <p:cNvPr id="9" name="TextBox 8"/>
           <p:cNvSpPr txBox="1"/>
           <p:nvPr/>
         </p:nvSpPr>
@@ -8506,44 +7644,9 @@
           </a:fontRef>
         </p:style>
       </p:cxnSp>
-      <p:sp>
-        <p:nvSpPr>
-          <p:cNvPr id="5" name="TextBox 4"/>
-          <p:cNvSpPr txBox="1"/>
-          <p:nvPr/>
-        </p:nvSpPr>
-        <p:spPr>
-          <a:xfrm>
-            <a:off x="777240" y="1261872"/>
-            <a:ext cx="10607040" cy="310896"/>
-          </a:xfrm>
-          <a:prstGeom prst="rect">
-            <a:avLst/>
-          </a:prstGeom>
-          <a:noFill/>
-        </p:spPr>
-        <p:txBody>
-          <a:bodyPr wrap="square" lIns="45720" rIns="45720" tIns="18288" bIns="18288" anchor="t">
-            <a:spAutoFit/>
-          </a:bodyPr>
-          <a:lstStyle/>
-          <a:p>
-            <a:pPr algn="l"/>
-            <a:r>
-              <a:rPr sz="1700" b="0" i="1">
-                <a:solidFill>
-                  <a:srgbClr val="6B6B6B"/>
-                </a:solidFill>
-                <a:latin typeface="Century Schoolbook"/>
-              </a:rPr>
-              <a:t>Boards up on three.</a:t>
-            </a:r>
-          </a:p>
-        </p:txBody>
-      </p:sp>
       <p:cxnSp>
         <p:nvCxnSpPr>
-          <p:cNvPr id="6" name="Connector 5"/>
+          <p:cNvPr id="5" name="Connector 4"/>
           <p:cNvCxnSpPr/>
           <p:nvPr/>
         </p:nvCxnSpPr>
@@ -8578,7 +7681,7 @@
       </p:cxnSp>
       <p:sp>
         <p:nvSpPr>
-          <p:cNvPr id="7" name="TextBox 6"/>
+          <p:cNvPr id="6" name="TextBox 5"/>
           <p:cNvSpPr txBox="1"/>
           <p:nvPr/>
         </p:nvSpPr>
@@ -8613,7 +7716,7 @@
       </p:sp>
       <p:sp>
         <p:nvSpPr>
-          <p:cNvPr id="8" name="TextBox 7"/>
+          <p:cNvPr id="7" name="TextBox 6"/>
           <p:cNvSpPr txBox="1"/>
           <p:nvPr/>
         </p:nvSpPr>
@@ -8648,7 +7751,7 @@
       </p:sp>
       <p:pic>
         <p:nvPicPr>
-          <p:cNvPr id="9" name="Picture 8" descr="615f3e719211e489.png"/>
+          <p:cNvPr id="8" name="Picture 7" descr="615f3e719211e489.png"/>
           <p:cNvPicPr>
             <a:picLocks noChangeAspect="1"/>
           </p:cNvPicPr>
@@ -8672,7 +7775,7 @@
       </p:pic>
       <p:sp>
         <p:nvSpPr>
-          <p:cNvPr id="10" name="TextBox 9"/>
+          <p:cNvPr id="9" name="TextBox 8"/>
           <p:cNvSpPr txBox="1"/>
           <p:nvPr/>
         </p:nvSpPr>
@@ -8701,41 +7804,6 @@
                 <a:latin typeface="Century Schoolbook"/>
               </a:rPr>
               <a:t>Answer it.</a:t>
-            </a:r>
-          </a:p>
-        </p:txBody>
-      </p:sp>
-      <p:sp>
-        <p:nvSpPr>
-          <p:cNvPr id="11" name="TextBox 10"/>
-          <p:cNvSpPr txBox="1"/>
-          <p:nvPr/>
-        </p:nvSpPr>
-        <p:spPr>
-          <a:xfrm>
-            <a:off x="777240" y="4828032"/>
-            <a:ext cx="10607040" cy="365760"/>
-          </a:xfrm>
-          <a:prstGeom prst="rect">
-            <a:avLst/>
-          </a:prstGeom>
-          <a:noFill/>
-        </p:spPr>
-        <p:txBody>
-          <a:bodyPr wrap="square" lIns="45720" rIns="45720" tIns="18288" bIns="18288" anchor="t">
-            <a:spAutoFit/>
-          </a:bodyPr>
-          <a:lstStyle/>
-          <a:p>
-            <a:pPr algn="ctr"/>
-            <a:r>
-              <a:rPr sz="1900" b="0" i="1">
-                <a:solidFill>
-                  <a:srgbClr val="6B6B6B"/>
-                </a:solidFill>
-                <a:latin typeface="Century Schoolbook"/>
-              </a:rPr>
-              <a:t>Apply the power of a quotient law. Do not simplify.</a:t>
             </a:r>
           </a:p>
         </p:txBody>
@@ -8863,44 +7931,9 @@
           </a:fontRef>
         </p:style>
       </p:cxnSp>
-      <p:sp>
-        <p:nvSpPr>
-          <p:cNvPr id="5" name="TextBox 4"/>
-          <p:cNvSpPr txBox="1"/>
-          <p:nvPr/>
-        </p:nvSpPr>
-        <p:spPr>
-          <a:xfrm>
-            <a:off x="777240" y="1261872"/>
-            <a:ext cx="10607040" cy="310896"/>
-          </a:xfrm>
-          <a:prstGeom prst="rect">
-            <a:avLst/>
-          </a:prstGeom>
-          <a:noFill/>
-        </p:spPr>
-        <p:txBody>
-          <a:bodyPr wrap="square" lIns="45720" rIns="45720" tIns="18288" bIns="18288" anchor="t">
-            <a:spAutoFit/>
-          </a:bodyPr>
-          <a:lstStyle/>
-          <a:p>
-            <a:pPr algn="l"/>
-            <a:r>
-              <a:rPr sz="1700" b="0" i="1">
-                <a:solidFill>
-                  <a:srgbClr val="6B6B6B"/>
-                </a:solidFill>
-                <a:latin typeface="Century Schoolbook"/>
-              </a:rPr>
-              <a:t>Answer.</a:t>
-            </a:r>
-          </a:p>
-        </p:txBody>
-      </p:sp>
       <p:cxnSp>
         <p:nvCxnSpPr>
-          <p:cNvPr id="6" name="Connector 5"/>
+          <p:cNvPr id="5" name="Connector 4"/>
           <p:cNvCxnSpPr/>
           <p:nvPr/>
         </p:nvCxnSpPr>
@@ -8935,7 +7968,7 @@
       </p:cxnSp>
       <p:sp>
         <p:nvSpPr>
-          <p:cNvPr id="7" name="TextBox 6"/>
+          <p:cNvPr id="6" name="TextBox 5"/>
           <p:cNvSpPr txBox="1"/>
           <p:nvPr/>
         </p:nvSpPr>
@@ -8970,7 +8003,7 @@
       </p:sp>
       <p:sp>
         <p:nvSpPr>
-          <p:cNvPr id="8" name="TextBox 7"/>
+          <p:cNvPr id="7" name="TextBox 6"/>
           <p:cNvSpPr txBox="1"/>
           <p:nvPr/>
         </p:nvSpPr>
@@ -9005,7 +8038,7 @@
       </p:sp>
       <p:pic>
         <p:nvPicPr>
-          <p:cNvPr id="9" name="Picture 8" descr="260e9dabd7b640fb.png"/>
+          <p:cNvPr id="8" name="Picture 7" descr="260e9dabd7b640fb.png"/>
           <p:cNvPicPr>
             <a:picLocks noChangeAspect="1"/>
           </p:cNvPicPr>
@@ -9029,42 +8062,7 @@
       </p:pic>
       <p:sp>
         <p:nvSpPr>
-          <p:cNvPr id="10" name="TextBox 9"/>
-          <p:cNvSpPr txBox="1"/>
-          <p:nvPr/>
-        </p:nvSpPr>
-        <p:spPr>
-          <a:xfrm>
-            <a:off x="1828800" y="3249167"/>
-            <a:ext cx="8503920" cy="548640"/>
-          </a:xfrm>
-          <a:prstGeom prst="rect">
-            <a:avLst/>
-          </a:prstGeom>
-          <a:noFill/>
-        </p:spPr>
-        <p:txBody>
-          <a:bodyPr wrap="square" lIns="45720" rIns="45720" tIns="18288" bIns="18288" anchor="t">
-            <a:spAutoFit/>
-          </a:bodyPr>
-          <a:lstStyle/>
-          <a:p>
-            <a:pPr algn="ctr"/>
-            <a:r>
-              <a:rPr sz="2400" b="0" i="0">
-                <a:solidFill>
-                  <a:srgbClr val="6B6B6B"/>
-                </a:solidFill>
-                <a:latin typeface="Century Schoolbook"/>
-              </a:rPr>
-              <a:t>the exponent goes to both</a:t>
-            </a:r>
-          </a:p>
-        </p:txBody>
-      </p:sp>
-      <p:sp>
-        <p:nvSpPr>
-          <p:cNvPr id="11" name="TextBox 10"/>
+          <p:cNvPr id="9" name="TextBox 8"/>
           <p:cNvSpPr txBox="1"/>
           <p:nvPr/>
         </p:nvSpPr>
@@ -9099,7 +8097,7 @@
       </p:sp>
       <p:pic>
         <p:nvPicPr>
-          <p:cNvPr id="12" name="Picture 11" descr="a55647924d788565.png"/>
+          <p:cNvPr id="10" name="Picture 9" descr="a55647924d788565.png"/>
           <p:cNvPicPr>
             <a:picLocks noChangeAspect="1"/>
           </p:cNvPicPr>
@@ -9244,44 +8242,9 @@
           </a:fontRef>
         </p:style>
       </p:cxnSp>
-      <p:sp>
-        <p:nvSpPr>
-          <p:cNvPr id="5" name="TextBox 4"/>
-          <p:cNvSpPr txBox="1"/>
-          <p:nvPr/>
-        </p:nvSpPr>
-        <p:spPr>
-          <a:xfrm>
-            <a:off x="777240" y="1261872"/>
-            <a:ext cx="10607040" cy="310896"/>
-          </a:xfrm>
-          <a:prstGeom prst="rect">
-            <a:avLst/>
-          </a:prstGeom>
-          <a:noFill/>
-        </p:spPr>
-        <p:txBody>
-          <a:bodyPr wrap="square" lIns="45720" rIns="45720" tIns="18288" bIns="18288" anchor="t">
-            <a:spAutoFit/>
-          </a:bodyPr>
-          <a:lstStyle/>
-          <a:p>
-            <a:pPr algn="l"/>
-            <a:r>
-              <a:rPr sz="1700" b="0" i="1">
-                <a:solidFill>
-                  <a:srgbClr val="6B6B6B"/>
-                </a:solidFill>
-                <a:latin typeface="Century Schoolbook"/>
-              </a:rPr>
-              <a:t>Boards up on three.</a:t>
-            </a:r>
-          </a:p>
-        </p:txBody>
-      </p:sp>
       <p:cxnSp>
         <p:nvCxnSpPr>
-          <p:cNvPr id="6" name="Connector 5"/>
+          <p:cNvPr id="5" name="Connector 4"/>
           <p:cNvCxnSpPr/>
           <p:nvPr/>
         </p:nvCxnSpPr>
@@ -9316,7 +8279,7 @@
       </p:cxnSp>
       <p:sp>
         <p:nvSpPr>
-          <p:cNvPr id="7" name="TextBox 6"/>
+          <p:cNvPr id="6" name="TextBox 5"/>
           <p:cNvSpPr txBox="1"/>
           <p:nvPr/>
         </p:nvSpPr>
@@ -9351,7 +8314,7 @@
       </p:sp>
       <p:sp>
         <p:nvSpPr>
-          <p:cNvPr id="8" name="TextBox 7"/>
+          <p:cNvPr id="7" name="TextBox 6"/>
           <p:cNvSpPr txBox="1"/>
           <p:nvPr/>
         </p:nvSpPr>
@@ -9386,7 +8349,7 @@
       </p:sp>
       <p:pic>
         <p:nvPicPr>
-          <p:cNvPr id="9" name="Picture 8" descr="b00c54b2f2476e9e.png"/>
+          <p:cNvPr id="8" name="Picture 7" descr="b00c54b2f2476e9e.png"/>
           <p:cNvPicPr>
             <a:picLocks noChangeAspect="1"/>
           </p:cNvPicPr>
@@ -9410,7 +8373,7 @@
       </p:pic>
       <p:sp>
         <p:nvSpPr>
-          <p:cNvPr id="10" name="TextBox 9"/>
+          <p:cNvPr id="9" name="TextBox 8"/>
           <p:cNvSpPr txBox="1"/>
           <p:nvPr/>
         </p:nvSpPr>
@@ -9445,7 +8408,7 @@
       </p:sp>
       <p:sp>
         <p:nvSpPr>
-          <p:cNvPr id="11" name="TextBox 10"/>
+          <p:cNvPr id="10" name="TextBox 9"/>
           <p:cNvSpPr txBox="1"/>
           <p:nvPr/>
         </p:nvSpPr>
@@ -9489,7 +8452,7 @@
       </p:sp>
       <p:sp>
         <p:nvSpPr>
-          <p:cNvPr id="12" name="TextBox 11"/>
+          <p:cNvPr id="11" name="TextBox 10"/>
           <p:cNvSpPr txBox="1"/>
           <p:nvPr/>
         </p:nvSpPr>
@@ -9533,7 +8496,7 @@
       </p:sp>
       <p:sp>
         <p:nvSpPr>
-          <p:cNvPr id="13" name="TextBox 12"/>
+          <p:cNvPr id="12" name="TextBox 11"/>
           <p:cNvSpPr txBox="1"/>
           <p:nvPr/>
         </p:nvSpPr>
@@ -9577,7 +8540,7 @@
       </p:sp>
       <p:sp>
         <p:nvSpPr>
-          <p:cNvPr id="14" name="TextBox 13"/>
+          <p:cNvPr id="13" name="TextBox 12"/>
           <p:cNvSpPr txBox="1"/>
           <p:nvPr/>
         </p:nvSpPr>
@@ -9621,7 +8584,7 @@
       </p:sp>
       <p:sp>
         <p:nvSpPr>
-          <p:cNvPr id="15" name="TextBox 14"/>
+          <p:cNvPr id="14" name="TextBox 13"/>
           <p:cNvSpPr txBox="1"/>
           <p:nvPr/>
         </p:nvSpPr>
@@ -9777,44 +8740,9 @@
           </a:fontRef>
         </p:style>
       </p:cxnSp>
-      <p:sp>
-        <p:nvSpPr>
-          <p:cNvPr id="5" name="TextBox 4"/>
-          <p:cNvSpPr txBox="1"/>
-          <p:nvPr/>
-        </p:nvSpPr>
-        <p:spPr>
-          <a:xfrm>
-            <a:off x="777240" y="1261872"/>
-            <a:ext cx="10607040" cy="310896"/>
-          </a:xfrm>
-          <a:prstGeom prst="rect">
-            <a:avLst/>
-          </a:prstGeom>
-          <a:noFill/>
-        </p:spPr>
-        <p:txBody>
-          <a:bodyPr wrap="square" lIns="45720" rIns="45720" tIns="18288" bIns="18288" anchor="t">
-            <a:spAutoFit/>
-          </a:bodyPr>
-          <a:lstStyle/>
-          <a:p>
-            <a:pPr algn="l"/>
-            <a:r>
-              <a:rPr sz="1700" b="0" i="1">
-                <a:solidFill>
-                  <a:srgbClr val="6B6B6B"/>
-                </a:solidFill>
-                <a:latin typeface="Century Schoolbook"/>
-              </a:rPr>
-              <a:t>Answer.</a:t>
-            </a:r>
-          </a:p>
-        </p:txBody>
-      </p:sp>
       <p:cxnSp>
         <p:nvCxnSpPr>
-          <p:cNvPr id="6" name="Connector 5"/>
+          <p:cNvPr id="5" name="Connector 4"/>
           <p:cNvCxnSpPr/>
           <p:nvPr/>
         </p:nvCxnSpPr>
@@ -9849,7 +8777,7 @@
       </p:cxnSp>
       <p:sp>
         <p:nvSpPr>
-          <p:cNvPr id="7" name="TextBox 6"/>
+          <p:cNvPr id="6" name="TextBox 5"/>
           <p:cNvSpPr txBox="1"/>
           <p:nvPr/>
         </p:nvSpPr>
@@ -9884,7 +8812,7 @@
       </p:sp>
       <p:sp>
         <p:nvSpPr>
-          <p:cNvPr id="8" name="TextBox 7"/>
+          <p:cNvPr id="7" name="TextBox 6"/>
           <p:cNvSpPr txBox="1"/>
           <p:nvPr/>
         </p:nvSpPr>
@@ -9919,7 +8847,7 @@
       </p:sp>
       <p:pic>
         <p:nvPicPr>
-          <p:cNvPr id="9" name="Picture 8" descr="17e435e9fa7e4f09.png"/>
+          <p:cNvPr id="8" name="Picture 7" descr="17e435e9fa7e4f09.png"/>
           <p:cNvPicPr>
             <a:picLocks noChangeAspect="1"/>
           </p:cNvPicPr>
@@ -9943,7 +8871,7 @@
       </p:pic>
       <p:sp>
         <p:nvSpPr>
-          <p:cNvPr id="10" name="TextBox 9"/>
+          <p:cNvPr id="9" name="TextBox 8"/>
           <p:cNvSpPr txBox="1"/>
           <p:nvPr/>
         </p:nvSpPr>
@@ -9978,7 +8906,7 @@
       </p:sp>
       <p:sp>
         <p:nvSpPr>
-          <p:cNvPr id="11" name="TextBox 10"/>
+          <p:cNvPr id="10" name="TextBox 9"/>
           <p:cNvSpPr txBox="1"/>
           <p:nvPr/>
         </p:nvSpPr>
@@ -10022,7 +8950,7 @@
       </p:sp>
       <p:sp>
         <p:nvSpPr>
-          <p:cNvPr id="12" name="TextBox 11"/>
+          <p:cNvPr id="11" name="TextBox 10"/>
           <p:cNvSpPr txBox="1"/>
           <p:nvPr/>
         </p:nvSpPr>
@@ -10066,7 +8994,7 @@
       </p:sp>
       <p:sp>
         <p:nvSpPr>
-          <p:cNvPr id="13" name="TextBox 12"/>
+          <p:cNvPr id="12" name="TextBox 11"/>
           <p:cNvSpPr txBox="1"/>
           <p:nvPr/>
         </p:nvSpPr>
@@ -10110,7 +9038,7 @@
       </p:sp>
       <p:sp>
         <p:nvSpPr>
-          <p:cNvPr id="14" name="TextBox 13"/>
+          <p:cNvPr id="13" name="TextBox 12"/>
           <p:cNvSpPr txBox="1"/>
           <p:nvPr/>
         </p:nvSpPr>
@@ -10154,7 +9082,7 @@
       </p:sp>
       <p:sp>
         <p:nvSpPr>
-          <p:cNvPr id="15" name="TextBox 14"/>
+          <p:cNvPr id="14" name="TextBox 13"/>
           <p:cNvSpPr txBox="1"/>
           <p:nvPr/>
         </p:nvSpPr>
@@ -10310,44 +9238,9 @@
           </a:fontRef>
         </p:style>
       </p:cxnSp>
-      <p:sp>
-        <p:nvSpPr>
-          <p:cNvPr id="5" name="TextBox 4"/>
-          <p:cNvSpPr txBox="1"/>
-          <p:nvPr/>
-        </p:nvSpPr>
-        <p:spPr>
-          <a:xfrm>
-            <a:off x="777240" y="1261872"/>
-            <a:ext cx="10607040" cy="310896"/>
-          </a:xfrm>
-          <a:prstGeom prst="rect">
-            <a:avLst/>
-          </a:prstGeom>
-          <a:noFill/>
-        </p:spPr>
-        <p:txBody>
-          <a:bodyPr wrap="square" lIns="45720" rIns="45720" tIns="18288" bIns="18288" anchor="t">
-            <a:spAutoFit/>
-          </a:bodyPr>
-          <a:lstStyle/>
-          <a:p>
-            <a:pPr algn="l"/>
-            <a:r>
-              <a:rPr sz="1700" b="0" i="1">
-                <a:solidFill>
-                  <a:srgbClr val="6B6B6B"/>
-                </a:solidFill>
-                <a:latin typeface="Century Schoolbook"/>
-              </a:rPr>
-              <a:t>Boards up on three.</a:t>
-            </a:r>
-          </a:p>
-        </p:txBody>
-      </p:sp>
       <p:cxnSp>
         <p:nvCxnSpPr>
-          <p:cNvPr id="6" name="Connector 5"/>
+          <p:cNvPr id="5" name="Connector 4"/>
           <p:cNvCxnSpPr/>
           <p:nvPr/>
         </p:nvCxnSpPr>
@@ -10382,7 +9275,7 @@
       </p:cxnSp>
       <p:sp>
         <p:nvSpPr>
-          <p:cNvPr id="7" name="TextBox 6"/>
+          <p:cNvPr id="6" name="TextBox 5"/>
           <p:cNvSpPr txBox="1"/>
           <p:nvPr/>
         </p:nvSpPr>
@@ -10417,7 +9310,7 @@
       </p:sp>
       <p:sp>
         <p:nvSpPr>
-          <p:cNvPr id="8" name="TextBox 7"/>
+          <p:cNvPr id="7" name="TextBox 6"/>
           <p:cNvSpPr txBox="1"/>
           <p:nvPr/>
         </p:nvSpPr>
@@ -10452,7 +9345,7 @@
       </p:sp>
       <p:pic>
         <p:nvPicPr>
-          <p:cNvPr id="9" name="Picture 8" descr="ad177fa159bf9adb.png"/>
+          <p:cNvPr id="8" name="Picture 7" descr="ad177fa159bf9adb.png"/>
           <p:cNvPicPr>
             <a:picLocks noChangeAspect="1"/>
           </p:cNvPicPr>
@@ -10476,7 +9369,7 @@
       </p:pic>
       <p:sp>
         <p:nvSpPr>
-          <p:cNvPr id="10" name="TextBox 9"/>
+          <p:cNvPr id="9" name="TextBox 8"/>
           <p:cNvSpPr txBox="1"/>
           <p:nvPr/>
         </p:nvSpPr>
@@ -10511,7 +9404,7 @@
       </p:sp>
       <p:sp>
         <p:nvSpPr>
-          <p:cNvPr id="11" name="TextBox 10"/>
+          <p:cNvPr id="10" name="TextBox 9"/>
           <p:cNvSpPr txBox="1"/>
           <p:nvPr/>
         </p:nvSpPr>
@@ -10564,7 +9457,7 @@
       </p:sp>
       <p:sp>
         <p:nvSpPr>
-          <p:cNvPr id="12" name="TextBox 11"/>
+          <p:cNvPr id="11" name="TextBox 10"/>
           <p:cNvSpPr txBox="1"/>
           <p:nvPr/>
         </p:nvSpPr>
@@ -10617,7 +9510,7 @@
       </p:sp>
       <p:sp>
         <p:nvSpPr>
-          <p:cNvPr id="13" name="TextBox 12"/>
+          <p:cNvPr id="12" name="TextBox 11"/>
           <p:cNvSpPr txBox="1"/>
           <p:nvPr/>
         </p:nvSpPr>
@@ -10670,7 +9563,7 @@
       </p:sp>
       <p:sp>
         <p:nvSpPr>
-          <p:cNvPr id="14" name="TextBox 13"/>
+          <p:cNvPr id="13" name="TextBox 12"/>
           <p:cNvSpPr txBox="1"/>
           <p:nvPr/>
         </p:nvSpPr>
@@ -10723,7 +9616,7 @@
       </p:sp>
       <p:sp>
         <p:nvSpPr>
-          <p:cNvPr id="15" name="TextBox 14"/>
+          <p:cNvPr id="14" name="TextBox 13"/>
           <p:cNvSpPr txBox="1"/>
           <p:nvPr/>
         </p:nvSpPr>
@@ -10879,44 +9772,9 @@
           </a:fontRef>
         </p:style>
       </p:cxnSp>
-      <p:sp>
-        <p:nvSpPr>
-          <p:cNvPr id="5" name="TextBox 4"/>
-          <p:cNvSpPr txBox="1"/>
-          <p:nvPr/>
-        </p:nvSpPr>
-        <p:spPr>
-          <a:xfrm>
-            <a:off x="777240" y="1261872"/>
-            <a:ext cx="10607040" cy="310896"/>
-          </a:xfrm>
-          <a:prstGeom prst="rect">
-            <a:avLst/>
-          </a:prstGeom>
-          <a:noFill/>
-        </p:spPr>
-        <p:txBody>
-          <a:bodyPr wrap="square" lIns="45720" rIns="45720" tIns="18288" bIns="18288" anchor="t">
-            <a:spAutoFit/>
-          </a:bodyPr>
-          <a:lstStyle/>
-          <a:p>
-            <a:pPr algn="l"/>
-            <a:r>
-              <a:rPr sz="1700" b="0" i="1">
-                <a:solidFill>
-                  <a:srgbClr val="6B6B6B"/>
-                </a:solidFill>
-                <a:latin typeface="Century Schoolbook"/>
-              </a:rPr>
-              <a:t>Answer.</a:t>
-            </a:r>
-          </a:p>
-        </p:txBody>
-      </p:sp>
       <p:cxnSp>
         <p:nvCxnSpPr>
-          <p:cNvPr id="6" name="Connector 5"/>
+          <p:cNvPr id="5" name="Connector 4"/>
           <p:cNvCxnSpPr/>
           <p:nvPr/>
         </p:nvCxnSpPr>
@@ -10951,7 +9809,7 @@
       </p:cxnSp>
       <p:sp>
         <p:nvSpPr>
-          <p:cNvPr id="7" name="TextBox 6"/>
+          <p:cNvPr id="6" name="TextBox 5"/>
           <p:cNvSpPr txBox="1"/>
           <p:nvPr/>
         </p:nvSpPr>
@@ -10986,7 +9844,7 @@
       </p:sp>
       <p:sp>
         <p:nvSpPr>
-          <p:cNvPr id="8" name="TextBox 7"/>
+          <p:cNvPr id="7" name="TextBox 6"/>
           <p:cNvSpPr txBox="1"/>
           <p:nvPr/>
         </p:nvSpPr>
@@ -11021,7 +9879,7 @@
       </p:sp>
       <p:pic>
         <p:nvPicPr>
-          <p:cNvPr id="9" name="Picture 8" descr="a899e53ebcbfa2dd.png"/>
+          <p:cNvPr id="8" name="Picture 7" descr="a899e53ebcbfa2dd.png"/>
           <p:cNvPicPr>
             <a:picLocks noChangeAspect="1"/>
           </p:cNvPicPr>
@@ -11045,7 +9903,7 @@
       </p:pic>
       <p:sp>
         <p:nvSpPr>
-          <p:cNvPr id="10" name="TextBox 9"/>
+          <p:cNvPr id="9" name="TextBox 8"/>
           <p:cNvSpPr txBox="1"/>
           <p:nvPr/>
         </p:nvSpPr>
@@ -11080,7 +9938,7 @@
       </p:sp>
       <p:sp>
         <p:nvSpPr>
-          <p:cNvPr id="11" name="TextBox 10"/>
+          <p:cNvPr id="10" name="TextBox 9"/>
           <p:cNvSpPr txBox="1"/>
           <p:nvPr/>
         </p:nvSpPr>
@@ -11133,7 +9991,7 @@
       </p:sp>
       <p:sp>
         <p:nvSpPr>
-          <p:cNvPr id="12" name="TextBox 11"/>
+          <p:cNvPr id="11" name="TextBox 10"/>
           <p:cNvSpPr txBox="1"/>
           <p:nvPr/>
         </p:nvSpPr>
@@ -11186,7 +10044,7 @@
       </p:sp>
       <p:sp>
         <p:nvSpPr>
-          <p:cNvPr id="13" name="TextBox 12"/>
+          <p:cNvPr id="12" name="TextBox 11"/>
           <p:cNvSpPr txBox="1"/>
           <p:nvPr/>
         </p:nvSpPr>
@@ -11239,7 +10097,7 @@
       </p:sp>
       <p:sp>
         <p:nvSpPr>
-          <p:cNvPr id="14" name="TextBox 13"/>
+          <p:cNvPr id="13" name="TextBox 12"/>
           <p:cNvSpPr txBox="1"/>
           <p:nvPr/>
         </p:nvSpPr>
@@ -11292,7 +10150,7 @@
       </p:sp>
       <p:sp>
         <p:nvSpPr>
-          <p:cNvPr id="15" name="TextBox 14"/>
+          <p:cNvPr id="14" name="TextBox 13"/>
           <p:cNvSpPr txBox="1"/>
           <p:nvPr/>
         </p:nvSpPr>
@@ -11457,44 +10315,9 @@
           </a:fontRef>
         </p:style>
       </p:cxnSp>
-      <p:sp>
-        <p:nvSpPr>
-          <p:cNvPr id="5" name="TextBox 4"/>
-          <p:cNvSpPr txBox="1"/>
-          <p:nvPr/>
-        </p:nvSpPr>
-        <p:spPr>
-          <a:xfrm>
-            <a:off x="777240" y="1261872"/>
-            <a:ext cx="10607040" cy="310896"/>
-          </a:xfrm>
-          <a:prstGeom prst="rect">
-            <a:avLst/>
-          </a:prstGeom>
-          <a:noFill/>
-        </p:spPr>
-        <p:txBody>
-          <a:bodyPr wrap="square" lIns="45720" rIns="45720" tIns="18288" bIns="18288" anchor="t">
-            <a:spAutoFit/>
-          </a:bodyPr>
-          <a:lstStyle/>
-          <a:p>
-            <a:pPr algn="l"/>
-            <a:r>
-              <a:rPr sz="1700" b="0" i="1">
-                <a:solidFill>
-                  <a:srgbClr val="6B6B6B"/>
-                </a:solidFill>
-                <a:latin typeface="Century Schoolbook"/>
-              </a:rPr>
-              <a:t>Boards up on three.</a:t>
-            </a:r>
-          </a:p>
-        </p:txBody>
-      </p:sp>
       <p:cxnSp>
         <p:nvCxnSpPr>
-          <p:cNvPr id="6" name="Connector 5"/>
+          <p:cNvPr id="5" name="Connector 4"/>
           <p:cNvCxnSpPr/>
           <p:nvPr/>
         </p:nvCxnSpPr>
@@ -11529,7 +10352,7 @@
       </p:cxnSp>
       <p:sp>
         <p:nvSpPr>
-          <p:cNvPr id="7" name="TextBox 6"/>
+          <p:cNvPr id="6" name="TextBox 5"/>
           <p:cNvSpPr txBox="1"/>
           <p:nvPr/>
         </p:nvSpPr>
@@ -11564,7 +10387,7 @@
       </p:sp>
       <p:sp>
         <p:nvSpPr>
-          <p:cNvPr id="8" name="TextBox 7"/>
+          <p:cNvPr id="7" name="TextBox 6"/>
           <p:cNvSpPr txBox="1"/>
           <p:nvPr/>
         </p:nvSpPr>
@@ -11599,7 +10422,7 @@
       </p:sp>
       <p:pic>
         <p:nvPicPr>
-          <p:cNvPr id="9" name="Picture 8" descr="7fd8a7336ddfafc1.png"/>
+          <p:cNvPr id="8" name="Picture 7" descr="7fd8a7336ddfafc1.png"/>
           <p:cNvPicPr>
             <a:picLocks noChangeAspect="1"/>
           </p:cNvPicPr>
@@ -11623,7 +10446,7 @@
       </p:pic>
       <p:sp>
         <p:nvSpPr>
-          <p:cNvPr id="10" name="TextBox 9"/>
+          <p:cNvPr id="9" name="TextBox 8"/>
           <p:cNvSpPr txBox="1"/>
           <p:nvPr/>
         </p:nvSpPr>
@@ -11652,41 +10475,6 @@
                 <a:latin typeface="Century Schoolbook"/>
               </a:rPr>
               <a:t>Answer it.</a:t>
-            </a:r>
-          </a:p>
-        </p:txBody>
-      </p:sp>
-      <p:sp>
-        <p:nvSpPr>
-          <p:cNvPr id="11" name="TextBox 10"/>
-          <p:cNvSpPr txBox="1"/>
-          <p:nvPr/>
-        </p:nvSpPr>
-        <p:spPr>
-          <a:xfrm>
-            <a:off x="777240" y="4828032"/>
-            <a:ext cx="10607040" cy="365760"/>
-          </a:xfrm>
-          <a:prstGeom prst="rect">
-            <a:avLst/>
-          </a:prstGeom>
-          <a:noFill/>
-        </p:spPr>
-        <p:txBody>
-          <a:bodyPr wrap="square" lIns="45720" rIns="45720" tIns="18288" bIns="18288" anchor="t">
-            <a:spAutoFit/>
-          </a:bodyPr>
-          <a:lstStyle/>
-          <a:p>
-            <a:pPr algn="ctr"/>
-            <a:r>
-              <a:rPr sz="1900" b="0" i="1">
-                <a:solidFill>
-                  <a:srgbClr val="6B6B6B"/>
-                </a:solidFill>
-                <a:latin typeface="Century Schoolbook"/>
-              </a:rPr>
-              <a:t>Find the value.</a:t>
             </a:r>
           </a:p>
         </p:txBody>
@@ -11814,44 +10602,9 @@
           </a:fontRef>
         </p:style>
       </p:cxnSp>
-      <p:sp>
-        <p:nvSpPr>
-          <p:cNvPr id="5" name="TextBox 4"/>
-          <p:cNvSpPr txBox="1"/>
-          <p:nvPr/>
-        </p:nvSpPr>
-        <p:spPr>
-          <a:xfrm>
-            <a:off x="777240" y="1261872"/>
-            <a:ext cx="10607040" cy="310896"/>
-          </a:xfrm>
-          <a:prstGeom prst="rect">
-            <a:avLst/>
-          </a:prstGeom>
-          <a:noFill/>
-        </p:spPr>
-        <p:txBody>
-          <a:bodyPr wrap="square" lIns="45720" rIns="45720" tIns="18288" bIns="18288" anchor="t">
-            <a:spAutoFit/>
-          </a:bodyPr>
-          <a:lstStyle/>
-          <a:p>
-            <a:pPr algn="l"/>
-            <a:r>
-              <a:rPr sz="1700" b="0" i="1">
-                <a:solidFill>
-                  <a:srgbClr val="6B6B6B"/>
-                </a:solidFill>
-                <a:latin typeface="Century Schoolbook"/>
-              </a:rPr>
-              <a:t>Answer.</a:t>
-            </a:r>
-          </a:p>
-        </p:txBody>
-      </p:sp>
       <p:cxnSp>
         <p:nvCxnSpPr>
-          <p:cNvPr id="6" name="Connector 5"/>
+          <p:cNvPr id="5" name="Connector 4"/>
           <p:cNvCxnSpPr/>
           <p:nvPr/>
         </p:nvCxnSpPr>
@@ -11886,7 +10639,7 @@
       </p:cxnSp>
       <p:sp>
         <p:nvSpPr>
-          <p:cNvPr id="7" name="TextBox 6"/>
+          <p:cNvPr id="6" name="TextBox 5"/>
           <p:cNvSpPr txBox="1"/>
           <p:nvPr/>
         </p:nvSpPr>
@@ -11921,7 +10674,7 @@
       </p:sp>
       <p:sp>
         <p:nvSpPr>
-          <p:cNvPr id="8" name="TextBox 7"/>
+          <p:cNvPr id="7" name="TextBox 6"/>
           <p:cNvSpPr txBox="1"/>
           <p:nvPr/>
         </p:nvSpPr>
@@ -11956,7 +10709,7 @@
       </p:sp>
       <p:pic>
         <p:nvPicPr>
-          <p:cNvPr id="9" name="Picture 8" descr="73bf2466d9323c91.png"/>
+          <p:cNvPr id="8" name="Picture 7" descr="73bf2466d9323c91.png"/>
           <p:cNvPicPr>
             <a:picLocks noChangeAspect="1"/>
           </p:cNvPicPr>
@@ -11980,51 +10733,7 @@
       </p:pic>
       <p:sp>
         <p:nvSpPr>
-          <p:cNvPr id="10" name="TextBox 9"/>
-          <p:cNvSpPr txBox="1"/>
-          <p:nvPr/>
-        </p:nvSpPr>
-        <p:spPr>
-          <a:xfrm>
-            <a:off x="1828800" y="3395471"/>
-            <a:ext cx="8503920" cy="548640"/>
-          </a:xfrm>
-          <a:prstGeom prst="rect">
-            <a:avLst/>
-          </a:prstGeom>
-          <a:noFill/>
-        </p:spPr>
-        <p:txBody>
-          <a:bodyPr wrap="square" lIns="45720" rIns="45720" tIns="18288" bIns="18288" anchor="t">
-            <a:spAutoFit/>
-          </a:bodyPr>
-          <a:lstStyle/>
-          <a:p>
-            <a:pPr algn="ctr"/>
-            <a:r>
-              <a:rPr sz="2400" b="0" i="0">
-                <a:solidFill>
-                  <a:srgbClr val="6B6B6B"/>
-                </a:solidFill>
-                <a:latin typeface="Century Schoolbook"/>
-              </a:rPr>
-              <a:t>0.5</a:t>
-            </a:r>
-            <a:r>
-              <a:rPr sz="2400" b="0" i="0" baseline="30000">
-                <a:solidFill>
-                  <a:srgbClr val="6B6B6B"/>
-                </a:solidFill>
-                <a:latin typeface="Century Schoolbook"/>
-              </a:rPr>
-              <a:t>3</a:t>
-            </a:r>
-          </a:p>
-        </p:txBody>
-      </p:sp>
-      <p:sp>
-        <p:nvSpPr>
-          <p:cNvPr id="11" name="TextBox 10"/>
+          <p:cNvPr id="9" name="TextBox 8"/>
           <p:cNvSpPr txBox="1"/>
           <p:nvPr/>
         </p:nvSpPr>
@@ -12180,44 +10889,9 @@
           </a:fontRef>
         </p:style>
       </p:cxnSp>
-      <p:sp>
-        <p:nvSpPr>
-          <p:cNvPr id="5" name="TextBox 4"/>
-          <p:cNvSpPr txBox="1"/>
-          <p:nvPr/>
-        </p:nvSpPr>
-        <p:spPr>
-          <a:xfrm>
-            <a:off x="777240" y="1261872"/>
-            <a:ext cx="10607040" cy="310896"/>
-          </a:xfrm>
-          <a:prstGeom prst="rect">
-            <a:avLst/>
-          </a:prstGeom>
-          <a:noFill/>
-        </p:spPr>
-        <p:txBody>
-          <a:bodyPr wrap="square" lIns="45720" rIns="45720" tIns="18288" bIns="18288" anchor="t">
-            <a:spAutoFit/>
-          </a:bodyPr>
-          <a:lstStyle/>
-          <a:p>
-            <a:pPr algn="l"/>
-            <a:r>
-              <a:rPr sz="1700" b="0" i="1">
-                <a:solidFill>
-                  <a:srgbClr val="6B6B6B"/>
-                </a:solidFill>
-                <a:latin typeface="Century Schoolbook"/>
-              </a:rPr>
-              <a:t>Boards up on three.</a:t>
-            </a:r>
-          </a:p>
-        </p:txBody>
-      </p:sp>
       <p:cxnSp>
         <p:nvCxnSpPr>
-          <p:cNvPr id="6" name="Connector 5"/>
+          <p:cNvPr id="5" name="Connector 4"/>
           <p:cNvCxnSpPr/>
           <p:nvPr/>
         </p:nvCxnSpPr>
@@ -12252,7 +10926,7 @@
       </p:cxnSp>
       <p:sp>
         <p:nvSpPr>
-          <p:cNvPr id="7" name="TextBox 6"/>
+          <p:cNvPr id="6" name="TextBox 5"/>
           <p:cNvSpPr txBox="1"/>
           <p:nvPr/>
         </p:nvSpPr>
@@ -12287,7 +10961,7 @@
       </p:sp>
       <p:sp>
         <p:nvSpPr>
-          <p:cNvPr id="8" name="TextBox 7"/>
+          <p:cNvPr id="7" name="TextBox 6"/>
           <p:cNvSpPr txBox="1"/>
           <p:nvPr/>
         </p:nvSpPr>
@@ -12322,7 +10996,7 @@
       </p:sp>
       <p:pic>
         <p:nvPicPr>
-          <p:cNvPr id="9" name="Picture 8" descr="41e42a07b25976eb.png"/>
+          <p:cNvPr id="8" name="Picture 7" descr="41e42a07b25976eb.png"/>
           <p:cNvPicPr>
             <a:picLocks noChangeAspect="1"/>
           </p:cNvPicPr>
@@ -12346,7 +11020,7 @@
       </p:pic>
       <p:sp>
         <p:nvSpPr>
-          <p:cNvPr id="10" name="TextBox 9"/>
+          <p:cNvPr id="9" name="TextBox 8"/>
           <p:cNvSpPr txBox="1"/>
           <p:nvPr/>
         </p:nvSpPr>
@@ -12375,41 +11049,6 @@
                 <a:latin typeface="Century Schoolbook"/>
               </a:rPr>
               <a:t>Answer it.</a:t>
-            </a:r>
-          </a:p>
-        </p:txBody>
-      </p:sp>
-      <p:sp>
-        <p:nvSpPr>
-          <p:cNvPr id="11" name="TextBox 10"/>
-          <p:cNvSpPr txBox="1"/>
-          <p:nvPr/>
-        </p:nvSpPr>
-        <p:spPr>
-          <a:xfrm>
-            <a:off x="777240" y="4828032"/>
-            <a:ext cx="10607040" cy="365760"/>
-          </a:xfrm>
-          <a:prstGeom prst="rect">
-            <a:avLst/>
-          </a:prstGeom>
-          <a:noFill/>
-        </p:spPr>
-        <p:txBody>
-          <a:bodyPr wrap="square" lIns="45720" rIns="45720" tIns="18288" bIns="18288" anchor="t">
-            <a:spAutoFit/>
-          </a:bodyPr>
-          <a:lstStyle/>
-          <a:p>
-            <a:pPr algn="ctr"/>
-            <a:r>
-              <a:rPr sz="1900" b="0" i="1">
-                <a:solidFill>
-                  <a:srgbClr val="6B6B6B"/>
-                </a:solidFill>
-                <a:latin typeface="Century Schoolbook"/>
-              </a:rPr>
-              <a:t>Find the value.</a:t>
             </a:r>
           </a:p>
         </p:txBody>
@@ -12537,44 +11176,9 @@
           </a:fontRef>
         </p:style>
       </p:cxnSp>
-      <p:sp>
-        <p:nvSpPr>
-          <p:cNvPr id="5" name="TextBox 4"/>
-          <p:cNvSpPr txBox="1"/>
-          <p:nvPr/>
-        </p:nvSpPr>
-        <p:spPr>
-          <a:xfrm>
-            <a:off x="777240" y="1261872"/>
-            <a:ext cx="10607040" cy="310896"/>
-          </a:xfrm>
-          <a:prstGeom prst="rect">
-            <a:avLst/>
-          </a:prstGeom>
-          <a:noFill/>
-        </p:spPr>
-        <p:txBody>
-          <a:bodyPr wrap="square" lIns="45720" rIns="45720" tIns="18288" bIns="18288" anchor="t">
-            <a:spAutoFit/>
-          </a:bodyPr>
-          <a:lstStyle/>
-          <a:p>
-            <a:pPr algn="l"/>
-            <a:r>
-              <a:rPr sz="1700" b="0" i="1">
-                <a:solidFill>
-                  <a:srgbClr val="6B6B6B"/>
-                </a:solidFill>
-                <a:latin typeface="Century Schoolbook"/>
-              </a:rPr>
-              <a:t>Answers.</a:t>
-            </a:r>
-          </a:p>
-        </p:txBody>
-      </p:sp>
       <p:cxnSp>
         <p:nvCxnSpPr>
-          <p:cNvPr id="6" name="Connector 5"/>
+          <p:cNvPr id="5" name="Connector 4"/>
           <p:cNvCxnSpPr/>
           <p:nvPr/>
         </p:nvCxnSpPr>
@@ -12609,7 +11213,7 @@
       </p:cxnSp>
       <p:sp>
         <p:nvSpPr>
-          <p:cNvPr id="7" name="TextBox 6"/>
+          <p:cNvPr id="6" name="TextBox 5"/>
           <p:cNvSpPr txBox="1"/>
           <p:nvPr/>
         </p:nvSpPr>
@@ -12644,7 +11248,7 @@
       </p:sp>
       <p:sp>
         <p:nvSpPr>
-          <p:cNvPr id="8" name="TextBox 7"/>
+          <p:cNvPr id="7" name="TextBox 6"/>
           <p:cNvSpPr txBox="1"/>
           <p:nvPr/>
         </p:nvSpPr>
@@ -12679,13 +11283,13 @@
       </p:sp>
       <p:sp>
         <p:nvSpPr>
-          <p:cNvPr id="9" name="TextBox 8"/>
-          <p:cNvSpPr txBox="1"/>
-          <p:nvPr/>
-        </p:nvSpPr>
-        <p:spPr>
-          <a:xfrm>
-            <a:off x="1874519" y="1760220"/>
+          <p:cNvPr id="8" name="TextBox 7"/>
+          <p:cNvSpPr txBox="1"/>
+          <p:nvPr/>
+        </p:nvSpPr>
+        <p:spPr>
+          <a:xfrm>
+            <a:off x="1874519" y="1440180"/>
             <a:ext cx="3698600" cy="457200"/>
           </a:xfrm>
           <a:prstGeom prst="rect">
@@ -12714,7 +11318,7 @@
       </p:sp>
       <p:pic>
         <p:nvPicPr>
-          <p:cNvPr id="10" name="Picture 9" descr="d71efaf91c1d965e.png"/>
+          <p:cNvPr id="9" name="Picture 8" descr="d71efaf91c1d965e.png"/>
           <p:cNvPicPr>
             <a:picLocks noChangeAspect="1"/>
           </p:cNvPicPr>
@@ -12728,7 +11332,7 @@
         </p:blipFill>
         <p:spPr>
           <a:xfrm>
-            <a:off x="5435960" y="1848611"/>
+            <a:off x="5435960" y="1528572"/>
             <a:ext cx="746760" cy="280416"/>
           </a:xfrm>
           <a:prstGeom prst="rect">
@@ -12738,7 +11342,7 @@
       </p:pic>
       <p:pic>
         <p:nvPicPr>
-          <p:cNvPr id="11" name="Picture 10" descr="fe5bb28ba59f7af0.png"/>
+          <p:cNvPr id="10" name="Picture 9" descr="fe5bb28ba59f7af0.png"/>
           <p:cNvPicPr>
             <a:picLocks noChangeAspect="1"/>
           </p:cNvPicPr>
@@ -12752,7 +11356,7 @@
         </p:blipFill>
         <p:spPr>
           <a:xfrm>
-            <a:off x="6731360" y="1848611"/>
+            <a:off x="6731360" y="1528572"/>
             <a:ext cx="259080" cy="280416"/>
           </a:xfrm>
           <a:prstGeom prst="rect">
@@ -12762,13 +11366,13 @@
       </p:pic>
       <p:sp>
         <p:nvSpPr>
-          <p:cNvPr id="12" name="TextBox 11"/>
-          <p:cNvSpPr txBox="1"/>
-          <p:nvPr/>
-        </p:nvSpPr>
-        <p:spPr>
-          <a:xfrm>
-            <a:off x="1874519" y="2372868"/>
+          <p:cNvPr id="11" name="TextBox 10"/>
+          <p:cNvSpPr txBox="1"/>
+          <p:nvPr/>
+        </p:nvSpPr>
+        <p:spPr>
+          <a:xfrm>
+            <a:off x="1874519" y="2052828"/>
             <a:ext cx="726811" cy="457200"/>
           </a:xfrm>
           <a:prstGeom prst="rect">
@@ -12797,7 +11401,7 @@
       </p:sp>
       <p:pic>
         <p:nvPicPr>
-          <p:cNvPr id="13" name="Picture 12" descr="38e9b447bed4dddc.png"/>
+          <p:cNvPr id="12" name="Picture 11" descr="38e9b447bed4dddc.png"/>
           <p:cNvPicPr>
             <a:picLocks noChangeAspect="1"/>
           </p:cNvPicPr>
@@ -12811,7 +11415,7 @@
         </p:blipFill>
         <p:spPr>
           <a:xfrm>
-            <a:off x="2464171" y="2397252"/>
+            <a:off x="2464171" y="2077212"/>
             <a:ext cx="914400" cy="408432"/>
           </a:xfrm>
           <a:prstGeom prst="rect">
@@ -12821,13 +11425,13 @@
       </p:pic>
       <p:sp>
         <p:nvSpPr>
-          <p:cNvPr id="14" name="TextBox 13"/>
-          <p:cNvSpPr txBox="1"/>
-          <p:nvPr/>
-        </p:nvSpPr>
-        <p:spPr>
-          <a:xfrm>
-            <a:off x="3927211" y="2372868"/>
+          <p:cNvPr id="13" name="TextBox 12"/>
+          <p:cNvSpPr txBox="1"/>
+          <p:nvPr/>
+        </p:nvSpPr>
+        <p:spPr>
+          <a:xfrm>
+            <a:off x="3927211" y="2052828"/>
             <a:ext cx="575679" cy="457200"/>
           </a:xfrm>
           <a:prstGeom prst="rect">
@@ -12856,13 +11460,13 @@
       </p:sp>
       <p:sp>
         <p:nvSpPr>
-          <p:cNvPr id="15" name="TextBox 14"/>
-          <p:cNvSpPr txBox="1"/>
-          <p:nvPr/>
-        </p:nvSpPr>
-        <p:spPr>
-          <a:xfrm>
-            <a:off x="1874519" y="2985516"/>
+          <p:cNvPr id="14" name="TextBox 13"/>
+          <p:cNvSpPr txBox="1"/>
+          <p:nvPr/>
+        </p:nvSpPr>
+        <p:spPr>
+          <a:xfrm>
+            <a:off x="1874519" y="2665476"/>
             <a:ext cx="1652008" cy="457200"/>
           </a:xfrm>
           <a:prstGeom prst="rect">
@@ -12891,7 +11495,7 @@
       </p:sp>
       <p:pic>
         <p:nvPicPr>
-          <p:cNvPr id="16" name="Picture 15" descr="73f8d0478760fca0.png"/>
+          <p:cNvPr id="15" name="Picture 14" descr="73f8d0478760fca0.png"/>
           <p:cNvPicPr>
             <a:picLocks noChangeAspect="1"/>
           </p:cNvPicPr>
@@ -12905,7 +11509,7 @@
         </p:blipFill>
         <p:spPr>
           <a:xfrm>
-            <a:off x="3389368" y="3093720"/>
+            <a:off x="3389368" y="2773680"/>
             <a:ext cx="1405128" cy="240791"/>
           </a:xfrm>
           <a:prstGeom prst="rect">
@@ -12915,13 +11519,13 @@
       </p:pic>
       <p:sp>
         <p:nvSpPr>
-          <p:cNvPr id="17" name="TextBox 16"/>
-          <p:cNvSpPr txBox="1"/>
-          <p:nvPr/>
-        </p:nvSpPr>
-        <p:spPr>
-          <a:xfrm>
-            <a:off x="5343136" y="2985516"/>
+          <p:cNvPr id="16" name="TextBox 15"/>
+          <p:cNvSpPr txBox="1"/>
+          <p:nvPr/>
+        </p:nvSpPr>
+        <p:spPr>
+          <a:xfrm>
+            <a:off x="5343136" y="2665476"/>
             <a:ext cx="942623" cy="457200"/>
           </a:xfrm>
           <a:prstGeom prst="rect">
@@ -12950,13 +11554,13 @@
       </p:sp>
       <p:sp>
         <p:nvSpPr>
-          <p:cNvPr id="18" name="TextBox 17"/>
-          <p:cNvSpPr txBox="1"/>
-          <p:nvPr/>
-        </p:nvSpPr>
-        <p:spPr>
-          <a:xfrm>
-            <a:off x="1874519" y="3677412"/>
+          <p:cNvPr id="17" name="TextBox 16"/>
+          <p:cNvSpPr txBox="1"/>
+          <p:nvPr/>
+        </p:nvSpPr>
+        <p:spPr>
+          <a:xfrm>
+            <a:off x="1874519" y="3357372"/>
             <a:ext cx="2099724" cy="457200"/>
           </a:xfrm>
           <a:prstGeom prst="rect">
@@ -12985,7 +11589,7 @@
       </p:sp>
       <p:pic>
         <p:nvPicPr>
-          <p:cNvPr id="19" name="Picture 18" descr="18ea63a1522c269c.png"/>
+          <p:cNvPr id="18" name="Picture 17" descr="18ea63a1522c269c.png"/>
           <p:cNvPicPr>
             <a:picLocks noChangeAspect="1"/>
           </p:cNvPicPr>
@@ -12999,7 +11603,7 @@
         </p:blipFill>
         <p:spPr>
           <a:xfrm>
-            <a:off x="3837084" y="3621024"/>
+            <a:off x="3837084" y="3300984"/>
             <a:ext cx="880872" cy="569976"/>
           </a:xfrm>
           <a:prstGeom prst="rect">
@@ -13009,13 +11613,13 @@
       </p:pic>
       <p:sp>
         <p:nvSpPr>
-          <p:cNvPr id="20" name="TextBox 19"/>
-          <p:cNvSpPr txBox="1"/>
-          <p:nvPr/>
-        </p:nvSpPr>
-        <p:spPr>
-          <a:xfrm>
-            <a:off x="5266596" y="3598164"/>
+          <p:cNvPr id="19" name="TextBox 18"/>
+          <p:cNvSpPr txBox="1"/>
+          <p:nvPr/>
+        </p:nvSpPr>
+        <p:spPr>
+          <a:xfrm>
+            <a:off x="5266596" y="3278124"/>
             <a:ext cx="388052" cy="457200"/>
           </a:xfrm>
           <a:prstGeom prst="rect">
@@ -13165,44 +11769,9 @@
           </a:fontRef>
         </p:style>
       </p:cxnSp>
-      <p:sp>
-        <p:nvSpPr>
-          <p:cNvPr id="5" name="TextBox 4"/>
-          <p:cNvSpPr txBox="1"/>
-          <p:nvPr/>
-        </p:nvSpPr>
-        <p:spPr>
-          <a:xfrm>
-            <a:off x="777240" y="1261872"/>
-            <a:ext cx="10607040" cy="310896"/>
-          </a:xfrm>
-          <a:prstGeom prst="rect">
-            <a:avLst/>
-          </a:prstGeom>
-          <a:noFill/>
-        </p:spPr>
-        <p:txBody>
-          <a:bodyPr wrap="square" lIns="45720" rIns="45720" tIns="18288" bIns="18288" anchor="t">
-            <a:spAutoFit/>
-          </a:bodyPr>
-          <a:lstStyle/>
-          <a:p>
-            <a:pPr algn="l"/>
-            <a:r>
-              <a:rPr sz="1700" b="0" i="1">
-                <a:solidFill>
-                  <a:srgbClr val="6B6B6B"/>
-                </a:solidFill>
-                <a:latin typeface="Century Schoolbook"/>
-              </a:rPr>
-              <a:t>Answer.</a:t>
-            </a:r>
-          </a:p>
-        </p:txBody>
-      </p:sp>
       <p:cxnSp>
         <p:nvCxnSpPr>
-          <p:cNvPr id="6" name="Connector 5"/>
+          <p:cNvPr id="5" name="Connector 4"/>
           <p:cNvCxnSpPr/>
           <p:nvPr/>
         </p:nvCxnSpPr>
@@ -13237,7 +11806,7 @@
       </p:cxnSp>
       <p:sp>
         <p:nvSpPr>
-          <p:cNvPr id="7" name="TextBox 6"/>
+          <p:cNvPr id="6" name="TextBox 5"/>
           <p:cNvSpPr txBox="1"/>
           <p:nvPr/>
         </p:nvSpPr>
@@ -13272,7 +11841,7 @@
       </p:sp>
       <p:sp>
         <p:nvSpPr>
-          <p:cNvPr id="8" name="TextBox 7"/>
+          <p:cNvPr id="7" name="TextBox 6"/>
           <p:cNvSpPr txBox="1"/>
           <p:nvPr/>
         </p:nvSpPr>
@@ -13307,7 +11876,7 @@
       </p:sp>
       <p:pic>
         <p:nvPicPr>
-          <p:cNvPr id="9" name="Picture 8" descr="262fa2692961318a.png"/>
+          <p:cNvPr id="8" name="Picture 7" descr="262fa2692961318a.png"/>
           <p:cNvPicPr>
             <a:picLocks noChangeAspect="1"/>
           </p:cNvPicPr>
@@ -13331,42 +11900,7 @@
       </p:pic>
       <p:sp>
         <p:nvSpPr>
-          <p:cNvPr id="10" name="TextBox 9"/>
-          <p:cNvSpPr txBox="1"/>
-          <p:nvPr/>
-        </p:nvSpPr>
-        <p:spPr>
-          <a:xfrm>
-            <a:off x="1828800" y="3236975"/>
-            <a:ext cx="8503920" cy="548640"/>
-          </a:xfrm>
-          <a:prstGeom prst="rect">
-            <a:avLst/>
-          </a:prstGeom>
-          <a:noFill/>
-        </p:spPr>
-        <p:txBody>
-          <a:bodyPr wrap="square" lIns="45720" rIns="45720" tIns="18288" bIns="18288" anchor="t">
-            <a:spAutoFit/>
-          </a:bodyPr>
-          <a:lstStyle/>
-          <a:p>
-            <a:pPr algn="ctr"/>
-            <a:r>
-              <a:rPr sz="2400" b="0" i="0">
-                <a:solidFill>
-                  <a:srgbClr val="6B6B6B"/>
-                </a:solidFill>
-                <a:latin typeface="Century Schoolbook"/>
-              </a:rPr>
-              <a:t>any nonzero base to the zero power</a:t>
-            </a:r>
-          </a:p>
-        </p:txBody>
-      </p:sp>
-      <p:sp>
-        <p:nvSpPr>
-          <p:cNvPr id="11" name="TextBox 10"/>
+          <p:cNvPr id="9" name="TextBox 8"/>
           <p:cNvSpPr txBox="1"/>
           <p:nvPr/>
         </p:nvSpPr>
@@ -13522,44 +12056,9 @@
           </a:fontRef>
         </p:style>
       </p:cxnSp>
-      <p:sp>
-        <p:nvSpPr>
-          <p:cNvPr id="5" name="TextBox 4"/>
-          <p:cNvSpPr txBox="1"/>
-          <p:nvPr/>
-        </p:nvSpPr>
-        <p:spPr>
-          <a:xfrm>
-            <a:off x="777240" y="1261872"/>
-            <a:ext cx="10607040" cy="310896"/>
-          </a:xfrm>
-          <a:prstGeom prst="rect">
-            <a:avLst/>
-          </a:prstGeom>
-          <a:noFill/>
-        </p:spPr>
-        <p:txBody>
-          <a:bodyPr wrap="square" lIns="45720" rIns="45720" tIns="18288" bIns="18288" anchor="t">
-            <a:spAutoFit/>
-          </a:bodyPr>
-          <a:lstStyle/>
-          <a:p>
-            <a:pPr algn="l"/>
-            <a:r>
-              <a:rPr sz="1700" b="0" i="1">
-                <a:solidFill>
-                  <a:srgbClr val="6B6B6B"/>
-                </a:solidFill>
-                <a:latin typeface="Century Schoolbook"/>
-              </a:rPr>
-              <a:t>Take your time. Boards up when you have written it.</a:t>
-            </a:r>
-          </a:p>
-        </p:txBody>
-      </p:sp>
       <p:cxnSp>
         <p:nvCxnSpPr>
-          <p:cNvPr id="6" name="Connector 5"/>
+          <p:cNvPr id="5" name="Connector 4"/>
           <p:cNvCxnSpPr/>
           <p:nvPr/>
         </p:nvCxnSpPr>
@@ -13594,7 +12093,7 @@
       </p:cxnSp>
       <p:sp>
         <p:nvSpPr>
-          <p:cNvPr id="7" name="TextBox 6"/>
+          <p:cNvPr id="6" name="TextBox 5"/>
           <p:cNvSpPr txBox="1"/>
           <p:nvPr/>
         </p:nvSpPr>
@@ -13629,7 +12128,7 @@
       </p:sp>
       <p:sp>
         <p:nvSpPr>
-          <p:cNvPr id="8" name="TextBox 7"/>
+          <p:cNvPr id="7" name="TextBox 6"/>
           <p:cNvSpPr txBox="1"/>
           <p:nvPr/>
         </p:nvSpPr>
@@ -13664,7 +12163,7 @@
       </p:sp>
       <p:sp>
         <p:nvSpPr>
-          <p:cNvPr id="9" name="TextBox 8"/>
+          <p:cNvPr id="8" name="TextBox 7"/>
           <p:cNvSpPr txBox="1"/>
           <p:nvPr/>
         </p:nvSpPr>
@@ -13699,7 +12198,7 @@
       </p:sp>
       <p:pic>
         <p:nvPicPr>
-          <p:cNvPr id="10" name="Picture 9" descr="62ec99fb62ba2937.png"/>
+          <p:cNvPr id="9" name="Picture 8" descr="62ec99fb62ba2937.png"/>
           <p:cNvPicPr>
             <a:picLocks noChangeAspect="1"/>
           </p:cNvPicPr>
@@ -13723,7 +12222,7 @@
       </p:pic>
       <p:sp>
         <p:nvSpPr>
-          <p:cNvPr id="11" name="TextBox 10"/>
+          <p:cNvPr id="10" name="TextBox 9"/>
           <p:cNvSpPr txBox="1"/>
           <p:nvPr/>
         </p:nvSpPr>
@@ -13758,7 +12257,7 @@
       </p:sp>
       <p:pic>
         <p:nvPicPr>
-          <p:cNvPr id="12" name="Picture 11" descr="814e799b3c3f0420.png"/>
+          <p:cNvPr id="11" name="Picture 10" descr="814e799b3c3f0420.png"/>
           <p:cNvPicPr>
             <a:picLocks noChangeAspect="1"/>
           </p:cNvPicPr>
@@ -13782,7 +12281,7 @@
       </p:pic>
       <p:sp>
         <p:nvSpPr>
-          <p:cNvPr id="13" name="TextBox 12"/>
+          <p:cNvPr id="12" name="TextBox 11"/>
           <p:cNvSpPr txBox="1"/>
           <p:nvPr/>
         </p:nvSpPr>
@@ -13817,7 +12316,7 @@
       </p:sp>
       <p:sp>
         <p:nvSpPr>
-          <p:cNvPr id="14" name="TextBox 13"/>
+          <p:cNvPr id="13" name="TextBox 12"/>
           <p:cNvSpPr txBox="1"/>
           <p:nvPr/>
         </p:nvSpPr>
@@ -13852,7 +12351,7 @@
       </p:sp>
       <p:sp>
         <p:nvSpPr>
-          <p:cNvPr id="15" name="TextBox 14"/>
+          <p:cNvPr id="14" name="TextBox 13"/>
           <p:cNvSpPr txBox="1"/>
           <p:nvPr/>
         </p:nvSpPr>
@@ -13881,59 +12380,6 @@
                 <a:latin typeface="Century Schoolbook"/>
               </a:rPr>
               <a:t>Write your answer in sentences.</a:t>
-            </a:r>
-          </a:p>
-        </p:txBody>
-      </p:sp>
-      <p:sp>
-        <p:nvSpPr>
-          <p:cNvPr id="16" name="TextBox 15"/>
-          <p:cNvSpPr txBox="1"/>
-          <p:nvPr/>
-        </p:nvSpPr>
-        <p:spPr>
-          <a:xfrm>
-            <a:off x="777240" y="4828032"/>
-            <a:ext cx="10607040" cy="365760"/>
-          </a:xfrm>
-          <a:prstGeom prst="rect">
-            <a:avLst/>
-          </a:prstGeom>
-          <a:noFill/>
-        </p:spPr>
-        <p:txBody>
-          <a:bodyPr wrap="square" lIns="45720" rIns="45720" tIns="18288" bIns="18288" anchor="t">
-            <a:spAutoFit/>
-          </a:bodyPr>
-          <a:lstStyle/>
-          <a:p>
-            <a:pPr algn="ctr"/>
-            <a:r>
-              <a:rPr sz="1900" b="0" i="1">
-                <a:solidFill>
-                  <a:srgbClr val="6B6B6B"/>
-                </a:solidFill>
-                <a:latin typeface="Century Schoolbook"/>
-              </a:rPr>
-              <a:t>Say what each one did, and what it tells you about 2</a:t>
-            </a:r>
-            <a:r>
-              <a:rPr sz="1900" b="0" i="1" baseline="30000">
-                <a:solidFill>
-                  <a:srgbClr val="6B6B6B"/>
-                </a:solidFill>
-                <a:latin typeface="Century Schoolbook"/>
-              </a:rPr>
-              <a:t>0</a:t>
-            </a:r>
-            <a:r>
-              <a:rPr sz="1900" b="0" i="1">
-                <a:solidFill>
-                  <a:srgbClr val="6B6B6B"/>
-                </a:solidFill>
-                <a:latin typeface="Century Schoolbook"/>
-              </a:rPr>
-              <a:t>.</a:t>
             </a:r>
           </a:p>
         </p:txBody>
@@ -14061,44 +12507,9 @@
           </a:fontRef>
         </p:style>
       </p:cxnSp>
-      <p:sp>
-        <p:nvSpPr>
-          <p:cNvPr id="5" name="TextBox 4"/>
-          <p:cNvSpPr txBox="1"/>
-          <p:nvPr/>
-        </p:nvSpPr>
-        <p:spPr>
-          <a:xfrm>
-            <a:off x="777240" y="1261872"/>
-            <a:ext cx="10607040" cy="310896"/>
-          </a:xfrm>
-          <a:prstGeom prst="rect">
-            <a:avLst/>
-          </a:prstGeom>
-          <a:noFill/>
-        </p:spPr>
-        <p:txBody>
-          <a:bodyPr wrap="square" lIns="45720" rIns="45720" tIns="18288" bIns="18288" anchor="t">
-            <a:spAutoFit/>
-          </a:bodyPr>
-          <a:lstStyle/>
-          <a:p>
-            <a:pPr algn="l"/>
-            <a:r>
-              <a:rPr sz="1700" b="0" i="1">
-                <a:solidFill>
-                  <a:srgbClr val="6B6B6B"/>
-                </a:solidFill>
-                <a:latin typeface="Century Schoolbook"/>
-              </a:rPr>
-              <a:t>Answer.</a:t>
-            </a:r>
-          </a:p>
-        </p:txBody>
-      </p:sp>
       <p:cxnSp>
         <p:nvCxnSpPr>
-          <p:cNvPr id="6" name="Connector 5"/>
+          <p:cNvPr id="5" name="Connector 4"/>
           <p:cNvCxnSpPr/>
           <p:nvPr/>
         </p:nvCxnSpPr>
@@ -14133,7 +12544,7 @@
       </p:cxnSp>
       <p:sp>
         <p:nvSpPr>
-          <p:cNvPr id="7" name="TextBox 6"/>
+          <p:cNvPr id="6" name="TextBox 5"/>
           <p:cNvSpPr txBox="1"/>
           <p:nvPr/>
         </p:nvSpPr>
@@ -14168,7 +12579,7 @@
       </p:sp>
       <p:sp>
         <p:nvSpPr>
-          <p:cNvPr id="8" name="TextBox 7"/>
+          <p:cNvPr id="7" name="TextBox 6"/>
           <p:cNvSpPr txBox="1"/>
           <p:nvPr/>
         </p:nvSpPr>
@@ -14203,7 +12614,7 @@
       </p:sp>
       <p:sp>
         <p:nvSpPr>
-          <p:cNvPr id="9" name="TextBox 8"/>
+          <p:cNvPr id="8" name="TextBox 7"/>
           <p:cNvSpPr txBox="1"/>
           <p:nvPr/>
         </p:nvSpPr>
@@ -14238,7 +12649,7 @@
       </p:sp>
       <p:pic>
         <p:nvPicPr>
-          <p:cNvPr id="10" name="Picture 9" descr="3c353a5052ea24b7.png"/>
+          <p:cNvPr id="9" name="Picture 8" descr="3c353a5052ea24b7.png"/>
           <p:cNvPicPr>
             <a:picLocks noChangeAspect="1"/>
           </p:cNvPicPr>
@@ -14262,7 +12673,7 @@
       </p:pic>
       <p:sp>
         <p:nvSpPr>
-          <p:cNvPr id="11" name="TextBox 10"/>
+          <p:cNvPr id="10" name="TextBox 9"/>
           <p:cNvSpPr txBox="1"/>
           <p:nvPr/>
         </p:nvSpPr>
@@ -14297,7 +12708,7 @@
       </p:sp>
       <p:pic>
         <p:nvPicPr>
-          <p:cNvPr id="12" name="Picture 11" descr="1b1a2270832c817b.png"/>
+          <p:cNvPr id="11" name="Picture 10" descr="1b1a2270832c817b.png"/>
           <p:cNvPicPr>
             <a:picLocks noChangeAspect="1"/>
           </p:cNvPicPr>
@@ -14321,7 +12732,7 @@
       </p:pic>
       <p:sp>
         <p:nvSpPr>
-          <p:cNvPr id="13" name="TextBox 12"/>
+          <p:cNvPr id="12" name="TextBox 11"/>
           <p:cNvSpPr txBox="1"/>
           <p:nvPr/>
         </p:nvSpPr>
@@ -14356,7 +12767,7 @@
       </p:sp>
       <p:sp>
         <p:nvSpPr>
-          <p:cNvPr id="14" name="TextBox 13"/>
+          <p:cNvPr id="13" name="TextBox 12"/>
           <p:cNvSpPr txBox="1"/>
           <p:nvPr/>
         </p:nvSpPr>
@@ -14391,60 +12802,7 @@
       </p:sp>
       <p:sp>
         <p:nvSpPr>
-          <p:cNvPr id="15" name="TextBox 14"/>
-          <p:cNvSpPr txBox="1"/>
-          <p:nvPr/>
-        </p:nvSpPr>
-        <p:spPr>
-          <a:xfrm>
-            <a:off x="1828800" y="3796615"/>
-            <a:ext cx="8503920" cy="548640"/>
-          </a:xfrm>
-          <a:prstGeom prst="rect">
-            <a:avLst/>
-          </a:prstGeom>
-          <a:noFill/>
-        </p:spPr>
-        <p:txBody>
-          <a:bodyPr wrap="square" lIns="45720" rIns="45720" tIns="18288" bIns="18288" anchor="t">
-            <a:spAutoFit/>
-          </a:bodyPr>
-          <a:lstStyle/>
-          <a:p>
-            <a:pPr algn="ctr"/>
-            <a:r>
-              <a:rPr sz="2400" b="0" i="0">
-                <a:solidFill>
-                  <a:srgbClr val="6B6B6B"/>
-                </a:solidFill>
-                <a:latin typeface="Century Schoolbook"/>
-              </a:rPr>
-              <a:t>both are right, so 2</a:t>
-            </a:r>
-            <a:r>
-              <a:rPr sz="2400" b="0" i="0" baseline="30000">
-                <a:solidFill>
-                  <a:srgbClr val="6B6B6B"/>
-                </a:solidFill>
-                <a:latin typeface="Century Schoolbook"/>
-              </a:rPr>
-              <a:t>0</a:t>
-            </a:r>
-            <a:r>
-              <a:rPr sz="2400" b="0" i="0">
-                <a:solidFill>
-                  <a:srgbClr val="6B6B6B"/>
-                </a:solidFill>
-                <a:latin typeface="Century Schoolbook"/>
-              </a:rPr>
-              <a:t> must equal 1</a:t>
-            </a:r>
-          </a:p>
-        </p:txBody>
-      </p:sp>
-      <p:sp>
-        <p:nvSpPr>
-          <p:cNvPr id="16" name="TextBox 15"/>
+          <p:cNvPr id="14" name="TextBox 13"/>
           <p:cNvSpPr txBox="1"/>
           <p:nvPr/>
         </p:nvSpPr>
@@ -14618,44 +12976,9 @@
           </a:fontRef>
         </p:style>
       </p:cxnSp>
-      <p:sp>
-        <p:nvSpPr>
-          <p:cNvPr id="5" name="TextBox 4"/>
-          <p:cNvSpPr txBox="1"/>
-          <p:nvPr/>
-        </p:nvSpPr>
-        <p:spPr>
-          <a:xfrm>
-            <a:off x="777240" y="1261872"/>
-            <a:ext cx="10607040" cy="310896"/>
-          </a:xfrm>
-          <a:prstGeom prst="rect">
-            <a:avLst/>
-          </a:prstGeom>
-          <a:noFill/>
-        </p:spPr>
-        <p:txBody>
-          <a:bodyPr wrap="square" lIns="45720" rIns="45720" tIns="18288" bIns="18288" anchor="t">
-            <a:spAutoFit/>
-          </a:bodyPr>
-          <a:lstStyle/>
-          <a:p>
-            <a:pPr algn="l"/>
-            <a:r>
-              <a:rPr sz="1700" b="0" i="1">
-                <a:solidFill>
-                  <a:srgbClr val="6B6B6B"/>
-                </a:solidFill>
-                <a:latin typeface="Century Schoolbook"/>
-              </a:rPr>
-              <a:t>Six questions. On your own, in silence.</a:t>
-            </a:r>
-          </a:p>
-        </p:txBody>
-      </p:sp>
       <p:cxnSp>
         <p:nvCxnSpPr>
-          <p:cNvPr id="6" name="Connector 5"/>
+          <p:cNvPr id="5" name="Connector 4"/>
           <p:cNvCxnSpPr/>
           <p:nvPr/>
         </p:nvCxnSpPr>
@@ -14690,7 +13013,7 @@
       </p:cxnSp>
       <p:sp>
         <p:nvSpPr>
-          <p:cNvPr id="7" name="TextBox 6"/>
+          <p:cNvPr id="6" name="TextBox 5"/>
           <p:cNvSpPr txBox="1"/>
           <p:nvPr/>
         </p:nvSpPr>
@@ -14725,7 +13048,7 @@
       </p:sp>
       <p:sp>
         <p:nvSpPr>
-          <p:cNvPr id="8" name="TextBox 7"/>
+          <p:cNvPr id="7" name="TextBox 6"/>
           <p:cNvSpPr txBox="1"/>
           <p:nvPr/>
         </p:nvSpPr>
@@ -14760,7 +13083,7 @@
       </p:sp>
       <p:sp>
         <p:nvSpPr>
-          <p:cNvPr id="9" name="TextBox 8"/>
+          <p:cNvPr id="8" name="TextBox 7"/>
           <p:cNvSpPr txBox="1"/>
           <p:nvPr/>
         </p:nvSpPr>
@@ -14795,7 +13118,7 @@
       </p:sp>
       <p:sp>
         <p:nvSpPr>
-          <p:cNvPr id="10" name="TextBox 9"/>
+          <p:cNvPr id="9" name="TextBox 8"/>
           <p:cNvSpPr txBox="1"/>
           <p:nvPr/>
         </p:nvSpPr>
@@ -14830,7 +13153,7 @@
       </p:sp>
       <p:sp>
         <p:nvSpPr>
-          <p:cNvPr id="11" name="TextBox 10"/>
+          <p:cNvPr id="10" name="TextBox 9"/>
           <p:cNvSpPr txBox="1"/>
           <p:nvPr/>
         </p:nvSpPr>
@@ -14865,7 +13188,7 @@
       </p:sp>
       <p:sp>
         <p:nvSpPr>
-          <p:cNvPr id="12" name="TextBox 11"/>
+          <p:cNvPr id="11" name="TextBox 10"/>
           <p:cNvSpPr txBox="1"/>
           <p:nvPr/>
         </p:nvSpPr>
@@ -14900,7 +13223,7 @@
       </p:sp>
       <p:sp>
         <p:nvSpPr>
-          <p:cNvPr id="13" name="TextBox 12"/>
+          <p:cNvPr id="12" name="TextBox 11"/>
           <p:cNvSpPr txBox="1"/>
           <p:nvPr/>
         </p:nvSpPr>
@@ -14935,7 +13258,7 @@
       </p:sp>
       <p:sp>
         <p:nvSpPr>
-          <p:cNvPr id="14" name="TextBox 13"/>
+          <p:cNvPr id="13" name="TextBox 12"/>
           <p:cNvSpPr txBox="1"/>
           <p:nvPr/>
         </p:nvSpPr>
@@ -15091,44 +13414,9 @@
           </a:fontRef>
         </p:style>
       </p:cxnSp>
-      <p:sp>
-        <p:nvSpPr>
-          <p:cNvPr id="5" name="TextBox 4"/>
-          <p:cNvSpPr txBox="1"/>
-          <p:nvPr/>
-        </p:nvSpPr>
-        <p:spPr>
-          <a:xfrm>
-            <a:off x="777240" y="1261872"/>
-            <a:ext cx="10607040" cy="310896"/>
-          </a:xfrm>
-          <a:prstGeom prst="rect">
-            <a:avLst/>
-          </a:prstGeom>
-          <a:noFill/>
-        </p:spPr>
-        <p:txBody>
-          <a:bodyPr wrap="square" lIns="45720" rIns="45720" tIns="18288" bIns="18288" anchor="t">
-            <a:spAutoFit/>
-          </a:bodyPr>
-          <a:lstStyle/>
-          <a:p>
-            <a:pPr algn="l"/>
-            <a:r>
-              <a:rPr sz="1700" b="0" i="1">
-                <a:solidFill>
-                  <a:srgbClr val="6B6B6B"/>
-                </a:solidFill>
-                <a:latin typeface="Century Schoolbook"/>
-              </a:rPr>
-              <a:t>Last five minutes.</a:t>
-            </a:r>
-          </a:p>
-        </p:txBody>
-      </p:sp>
       <p:cxnSp>
         <p:nvCxnSpPr>
-          <p:cNvPr id="6" name="Connector 5"/>
+          <p:cNvPr id="5" name="Connector 4"/>
           <p:cNvCxnSpPr/>
           <p:nvPr/>
         </p:nvCxnSpPr>
@@ -15163,7 +13451,7 @@
       </p:cxnSp>
       <p:sp>
         <p:nvSpPr>
-          <p:cNvPr id="7" name="TextBox 6"/>
+          <p:cNvPr id="6" name="TextBox 5"/>
           <p:cNvSpPr txBox="1"/>
           <p:nvPr/>
         </p:nvSpPr>
@@ -15198,7 +13486,7 @@
       </p:sp>
       <p:sp>
         <p:nvSpPr>
-          <p:cNvPr id="8" name="TextBox 7"/>
+          <p:cNvPr id="7" name="TextBox 6"/>
           <p:cNvSpPr txBox="1"/>
           <p:nvPr/>
         </p:nvSpPr>
@@ -15233,7 +13521,7 @@
       </p:sp>
       <p:sp>
         <p:nvSpPr>
-          <p:cNvPr id="9" name="TextBox 8"/>
+          <p:cNvPr id="8" name="TextBox 7"/>
           <p:cNvSpPr txBox="1"/>
           <p:nvPr/>
         </p:nvSpPr>
@@ -15268,7 +13556,7 @@
       </p:sp>
       <p:sp>
         <p:nvSpPr>
-          <p:cNvPr id="10" name="TextBox 9"/>
+          <p:cNvPr id="9" name="TextBox 8"/>
           <p:cNvSpPr txBox="1"/>
           <p:nvPr/>
         </p:nvSpPr>
@@ -15303,7 +13591,7 @@
       </p:sp>
       <p:sp>
         <p:nvSpPr>
-          <p:cNvPr id="11" name="TextBox 10"/>
+          <p:cNvPr id="10" name="TextBox 9"/>
           <p:cNvSpPr txBox="1"/>
           <p:nvPr/>
         </p:nvSpPr>
@@ -15338,7 +13626,7 @@
       </p:sp>
       <p:sp>
         <p:nvSpPr>
-          <p:cNvPr id="12" name="TextBox 11"/>
+          <p:cNvPr id="11" name="TextBox 10"/>
           <p:cNvSpPr txBox="1"/>
           <p:nvPr/>
         </p:nvSpPr>
@@ -15373,7 +13661,7 @@
       </p:sp>
       <p:sp>
         <p:nvSpPr>
-          <p:cNvPr id="13" name="TextBox 12"/>
+          <p:cNvPr id="12" name="TextBox 11"/>
           <p:cNvSpPr txBox="1"/>
           <p:nvPr/>
         </p:nvSpPr>
@@ -15408,7 +13696,7 @@
       </p:sp>
       <p:sp>
         <p:nvSpPr>
-          <p:cNvPr id="14" name="TextBox 13"/>
+          <p:cNvPr id="13" name="TextBox 12"/>
           <p:cNvSpPr txBox="1"/>
           <p:nvPr/>
         </p:nvSpPr>
@@ -15443,7 +13731,7 @@
       </p:sp>
       <p:sp>
         <p:nvSpPr>
-          <p:cNvPr id="15" name="TextBox 14"/>
+          <p:cNvPr id="14" name="TextBox 13"/>
           <p:cNvSpPr txBox="1"/>
           <p:nvPr/>
         </p:nvSpPr>
@@ -15478,7 +13766,7 @@
       </p:sp>
       <p:sp>
         <p:nvSpPr>
-          <p:cNvPr id="16" name="TextBox 15"/>
+          <p:cNvPr id="15" name="TextBox 14"/>
           <p:cNvSpPr txBox="1"/>
           <p:nvPr/>
         </p:nvSpPr>
@@ -15513,7 +13801,7 @@
       </p:sp>
       <p:sp>
         <p:nvSpPr>
-          <p:cNvPr id="17" name="TextBox 16"/>
+          <p:cNvPr id="16" name="TextBox 15"/>
           <p:cNvSpPr txBox="1"/>
           <p:nvPr/>
         </p:nvSpPr>
@@ -15548,7 +13836,7 @@
       </p:sp>
       <p:sp>
         <p:nvSpPr>
-          <p:cNvPr id="18" name="TextBox 17"/>
+          <p:cNvPr id="17" name="TextBox 16"/>
           <p:cNvSpPr txBox="1"/>
           <p:nvPr/>
         </p:nvSpPr>
@@ -15704,44 +13992,9 @@
           </a:fontRef>
         </p:style>
       </p:cxnSp>
-      <p:sp>
-        <p:nvSpPr>
-          <p:cNvPr id="5" name="TextBox 4"/>
-          <p:cNvSpPr txBox="1"/>
-          <p:nvPr/>
-        </p:nvSpPr>
-        <p:spPr>
-          <a:xfrm>
-            <a:off x="777240" y="1261872"/>
-            <a:ext cx="10607040" cy="310896"/>
-          </a:xfrm>
-          <a:prstGeom prst="rect">
-            <a:avLst/>
-          </a:prstGeom>
-          <a:noFill/>
-        </p:spPr>
-        <p:txBody>
-          <a:bodyPr wrap="square" lIns="45720" rIns="45720" tIns="18288" bIns="18288" anchor="t">
-            <a:spAutoFit/>
-          </a:bodyPr>
-          <a:lstStyle/>
-          <a:p>
-            <a:pPr algn="l"/>
-            <a:r>
-              <a:rPr sz="1700" b="0" i="1">
-                <a:solidFill>
-                  <a:srgbClr val="6B6B6B"/>
-                </a:solidFill>
-                <a:latin typeface="Century Schoolbook"/>
-              </a:rPr>
-              <a:t>Where the rule comes from.</a:t>
-            </a:r>
-          </a:p>
-        </p:txBody>
-      </p:sp>
       <p:cxnSp>
         <p:nvCxnSpPr>
-          <p:cNvPr id="6" name="Connector 5"/>
+          <p:cNvPr id="5" name="Connector 4"/>
           <p:cNvCxnSpPr/>
           <p:nvPr/>
         </p:nvCxnSpPr>
@@ -15776,7 +14029,7 @@
       </p:cxnSp>
       <p:sp>
         <p:nvSpPr>
-          <p:cNvPr id="7" name="TextBox 6"/>
+          <p:cNvPr id="6" name="TextBox 5"/>
           <p:cNvSpPr txBox="1"/>
           <p:nvPr/>
         </p:nvSpPr>
@@ -15811,7 +14064,7 @@
       </p:sp>
       <p:sp>
         <p:nvSpPr>
-          <p:cNvPr id="8" name="TextBox 7"/>
+          <p:cNvPr id="7" name="TextBox 6"/>
           <p:cNvSpPr txBox="1"/>
           <p:nvPr/>
         </p:nvSpPr>
@@ -15846,13 +14099,13 @@
       </p:sp>
       <p:sp>
         <p:nvSpPr>
-          <p:cNvPr id="9" name="TextBox 8"/>
-          <p:cNvSpPr txBox="1"/>
-          <p:nvPr/>
-        </p:nvSpPr>
-        <p:spPr>
-          <a:xfrm>
-            <a:off x="777240" y="1737360"/>
+          <p:cNvPr id="8" name="TextBox 7"/>
+          <p:cNvSpPr txBox="1"/>
+          <p:nvPr/>
+        </p:nvSpPr>
+        <p:spPr>
+          <a:xfrm>
+            <a:off x="777240" y="1389888"/>
             <a:ext cx="10607040" cy="402336"/>
           </a:xfrm>
           <a:prstGeom prst="rect">
@@ -15881,13 +14134,13 @@
       </p:sp>
       <p:cxnSp>
         <p:nvCxnSpPr>
-          <p:cNvPr id="10" name="Connector 9"/>
+          <p:cNvPr id="9" name="Connector 8"/>
           <p:cNvCxnSpPr/>
           <p:nvPr/>
         </p:nvCxnSpPr>
         <p:spPr>
           <a:xfrm>
-            <a:off x="777240" y="2176272"/>
+            <a:off x="777240" y="1828800"/>
             <a:ext cx="10607040" cy="0"/>
           </a:xfrm>
           <a:prstGeom prst="line">
@@ -15916,7 +14169,7 @@
       </p:cxnSp>
       <p:pic>
         <p:nvPicPr>
-          <p:cNvPr id="11" name="Picture 10" descr="0fc742bc47e6f651.png"/>
+          <p:cNvPr id="10" name="Picture 9" descr="0fc742bc47e6f651.png"/>
           <p:cNvPicPr>
             <a:picLocks noChangeAspect="1"/>
           </p:cNvPicPr>
@@ -15930,7 +14183,7 @@
         </p:blipFill>
         <p:spPr>
           <a:xfrm>
-            <a:off x="3349752" y="2340864"/>
+            <a:off x="3349752" y="1993392"/>
             <a:ext cx="5462016" cy="813816"/>
           </a:xfrm>
           <a:prstGeom prst="rect">
@@ -15940,13 +14193,13 @@
       </p:pic>
       <p:sp>
         <p:nvSpPr>
-          <p:cNvPr id="12" name="TextBox 11"/>
-          <p:cNvSpPr txBox="1"/>
-          <p:nvPr/>
-        </p:nvSpPr>
-        <p:spPr>
-          <a:xfrm>
-            <a:off x="987552" y="3581400"/>
+          <p:cNvPr id="11" name="TextBox 10"/>
+          <p:cNvSpPr txBox="1"/>
+          <p:nvPr/>
+        </p:nvSpPr>
+        <p:spPr>
+          <a:xfrm>
+            <a:off x="987552" y="3233928"/>
             <a:ext cx="3534479" cy="457200"/>
           </a:xfrm>
           <a:prstGeom prst="rect">
@@ -15975,7 +14228,7 @@
       </p:sp>
       <p:pic>
         <p:nvPicPr>
-          <p:cNvPr id="13" name="Picture 12" descr="99376a582dd7223c.png"/>
+          <p:cNvPr id="12" name="Picture 11" descr="99376a582dd7223c.png"/>
           <p:cNvPicPr>
             <a:picLocks noChangeAspect="1"/>
           </p:cNvPicPr>
@@ -15989,7 +14242,7 @@
         </p:blipFill>
         <p:spPr>
           <a:xfrm>
-            <a:off x="4384871" y="3474720"/>
+            <a:off x="4384871" y="3127248"/>
             <a:ext cx="1749552" cy="670560"/>
           </a:xfrm>
           <a:prstGeom prst="rect">
@@ -15999,13 +14252,13 @@
       </p:pic>
       <p:sp>
         <p:nvSpPr>
-          <p:cNvPr id="14" name="TextBox 13"/>
-          <p:cNvSpPr txBox="1"/>
-          <p:nvPr/>
-        </p:nvSpPr>
-        <p:spPr>
-          <a:xfrm>
-            <a:off x="6134423" y="3581400"/>
+          <p:cNvPr id="13" name="TextBox 12"/>
+          <p:cNvSpPr txBox="1"/>
+          <p:nvPr/>
+        </p:nvSpPr>
+        <p:spPr>
+          <a:xfrm>
+            <a:off x="6134423" y="3233928"/>
             <a:ext cx="597344" cy="457200"/>
           </a:xfrm>
           <a:prstGeom prst="rect">
@@ -16034,7 +14287,7 @@
       </p:sp>
       <p:pic>
         <p:nvPicPr>
-          <p:cNvPr id="15" name="Picture 14" descr="6a9975e145b437dd.png"/>
+          <p:cNvPr id="14" name="Picture 13" descr="6a9975e145b437dd.png"/>
           <p:cNvPicPr>
             <a:picLocks noChangeAspect="1"/>
           </p:cNvPicPr>
@@ -16048,7 +14301,7 @@
         </p:blipFill>
         <p:spPr>
           <a:xfrm>
-            <a:off x="6594607" y="3640836"/>
+            <a:off x="6594607" y="3293364"/>
             <a:ext cx="789432" cy="338328"/>
           </a:xfrm>
           <a:prstGeom prst="rect">
@@ -16058,13 +14311,13 @@
       </p:pic>
       <p:sp>
         <p:nvSpPr>
-          <p:cNvPr id="16" name="TextBox 15"/>
-          <p:cNvSpPr txBox="1"/>
-          <p:nvPr/>
-        </p:nvSpPr>
-        <p:spPr>
-          <a:xfrm>
-            <a:off x="7384039" y="3581400"/>
+          <p:cNvPr id="15" name="TextBox 14"/>
+          <p:cNvSpPr txBox="1"/>
+          <p:nvPr/>
+        </p:nvSpPr>
+        <p:spPr>
+          <a:xfrm>
+            <a:off x="7384039" y="3233928"/>
             <a:ext cx="330733" cy="457200"/>
           </a:xfrm>
           <a:prstGeom prst="rect">
@@ -16093,13 +14346,13 @@
       </p:sp>
       <p:sp>
         <p:nvSpPr>
-          <p:cNvPr id="17" name="TextBox 16"/>
-          <p:cNvSpPr txBox="1"/>
-          <p:nvPr/>
-        </p:nvSpPr>
-        <p:spPr>
-          <a:xfrm>
-            <a:off x="987552" y="4579620"/>
+          <p:cNvPr id="16" name="TextBox 15"/>
+          <p:cNvSpPr txBox="1"/>
+          <p:nvPr/>
+        </p:nvSpPr>
+        <p:spPr>
+          <a:xfrm>
+            <a:off x="987552" y="4232148"/>
             <a:ext cx="3088445" cy="457200"/>
           </a:xfrm>
           <a:prstGeom prst="rect">
@@ -16128,7 +14381,7 @@
       </p:sp>
       <p:pic>
         <p:nvPicPr>
-          <p:cNvPr id="18" name="Picture 17" descr="74344545705a48f9.png"/>
+          <p:cNvPr id="17" name="Picture 16" descr="74344545705a48f9.png"/>
           <p:cNvPicPr>
             <a:picLocks noChangeAspect="1"/>
           </p:cNvPicPr>
@@ -16142,7 +14395,7 @@
         </p:blipFill>
         <p:spPr>
           <a:xfrm>
-            <a:off x="3938837" y="4401312"/>
+            <a:off x="3938837" y="4053840"/>
             <a:ext cx="3621024" cy="813816"/>
           </a:xfrm>
           <a:prstGeom prst="rect">
@@ -16386,7 +14639,7 @@
         </p:nvSpPr>
         <p:spPr>
           <a:xfrm>
-            <a:off x="777240" y="1737360"/>
+            <a:off x="777240" y="1389888"/>
             <a:ext cx="10607040" cy="402336"/>
           </a:xfrm>
           <a:prstGeom prst="rect">
@@ -16421,7 +14674,7 @@
         </p:nvCxnSpPr>
         <p:spPr>
           <a:xfrm>
-            <a:off x="777240" y="2176272"/>
+            <a:off x="777240" y="1828800"/>
             <a:ext cx="10607040" cy="0"/>
           </a:xfrm>
           <a:prstGeom prst="line">
@@ -16464,7 +14717,7 @@
         </p:blipFill>
         <p:spPr>
           <a:xfrm>
-            <a:off x="2903220" y="2340864"/>
+            <a:off x="2903220" y="1993392"/>
             <a:ext cx="6355080" cy="810768"/>
           </a:xfrm>
           <a:prstGeom prst="rect">
@@ -16480,7 +14733,7 @@
         </p:nvSpPr>
         <p:spPr>
           <a:xfrm>
-            <a:off x="987552" y="3584448"/>
+            <a:off x="987552" y="3236976"/>
             <a:ext cx="3613463" cy="457200"/>
           </a:xfrm>
           <a:prstGeom prst="rect">
@@ -16523,7 +14776,7 @@
         </p:blipFill>
         <p:spPr>
           <a:xfrm>
-            <a:off x="4463855" y="3471672"/>
+            <a:off x="4463855" y="3124200"/>
             <a:ext cx="1691640" cy="682752"/>
           </a:xfrm>
           <a:prstGeom prst="rect">
@@ -16539,7 +14792,7 @@
         </p:nvSpPr>
         <p:spPr>
           <a:xfrm>
-            <a:off x="6155495" y="3584448"/>
+            <a:off x="6155495" y="3236976"/>
             <a:ext cx="597344" cy="457200"/>
           </a:xfrm>
           <a:prstGeom prst="rect">
@@ -16582,7 +14835,7 @@
         </p:blipFill>
         <p:spPr>
           <a:xfrm>
-            <a:off x="6615680" y="3642359"/>
+            <a:off x="6615680" y="3294887"/>
             <a:ext cx="786384" cy="341376"/>
           </a:xfrm>
           <a:prstGeom prst="rect">
@@ -16598,7 +14851,7 @@
         </p:nvSpPr>
         <p:spPr>
           <a:xfrm>
-            <a:off x="7402064" y="3584448"/>
+            <a:off x="7402064" y="3236976"/>
             <a:ext cx="330733" cy="457200"/>
           </a:xfrm>
           <a:prstGeom prst="rect">
@@ -16633,7 +14886,7 @@
         </p:nvSpPr>
         <p:spPr>
           <a:xfrm>
-            <a:off x="987552" y="4587240"/>
+            <a:off x="987552" y="4239768"/>
             <a:ext cx="2033729" cy="457200"/>
           </a:xfrm>
           <a:prstGeom prst="rect">
@@ -16676,7 +14929,7 @@
         </p:blipFill>
         <p:spPr>
           <a:xfrm>
-            <a:off x="2884121" y="4410456"/>
+            <a:off x="2884121" y="4062984"/>
             <a:ext cx="3188208" cy="810768"/>
           </a:xfrm>
           <a:prstGeom prst="rect">
@@ -16692,7 +14945,7 @@
         </p:nvSpPr>
         <p:spPr>
           <a:xfrm>
-            <a:off x="6072329" y="4587240"/>
+            <a:off x="6072329" y="4239768"/>
             <a:ext cx="1265922" cy="457200"/>
           </a:xfrm>
           <a:prstGeom prst="rect">
@@ -16735,7 +14988,7 @@
         </p:blipFill>
         <p:spPr>
           <a:xfrm>
-            <a:off x="7201091" y="4611624"/>
+            <a:off x="7201091" y="4264152"/>
             <a:ext cx="2231136" cy="408432"/>
           </a:xfrm>
           <a:prstGeom prst="rect">
@@ -16979,7 +15232,7 @@
         </p:nvSpPr>
         <p:spPr>
           <a:xfrm>
-            <a:off x="777240" y="1737360"/>
+            <a:off x="777240" y="1389888"/>
             <a:ext cx="10607040" cy="402336"/>
           </a:xfrm>
           <a:prstGeom prst="rect">
@@ -17014,7 +15267,7 @@
         </p:nvCxnSpPr>
         <p:spPr>
           <a:xfrm>
-            <a:off x="777240" y="2176272"/>
+            <a:off x="777240" y="1828800"/>
             <a:ext cx="10607040" cy="0"/>
           </a:xfrm>
           <a:prstGeom prst="line">
@@ -17050,7 +15303,7 @@
           <p:nvPr/>
         </p:nvGraphicFramePr>
         <p:xfrm>
-          <a:off x="2423160" y="2340864"/>
+          <a:off x="2423160" y="1993392"/>
           <a:ext cx="7315200" cy="768096"/>
         </p:xfrm>
         <a:graphic>
@@ -17605,7 +15858,7 @@
         </p:blipFill>
         <p:spPr>
           <a:xfrm>
-            <a:off x="1917885" y="3337560"/>
+            <a:off x="1917885" y="2990088"/>
             <a:ext cx="1630680" cy="798576"/>
           </a:xfrm>
           <a:prstGeom prst="rect">
@@ -17621,7 +15874,7 @@
         </p:nvSpPr>
         <p:spPr>
           <a:xfrm>
-            <a:off x="3548565" y="3508248"/>
+            <a:off x="3548565" y="3160776"/>
             <a:ext cx="1987138" cy="457200"/>
           </a:xfrm>
           <a:prstGeom prst="rect">
@@ -17664,7 +15917,7 @@
         </p:blipFill>
         <p:spPr>
           <a:xfrm>
-            <a:off x="5398543" y="3337560"/>
+            <a:off x="5398543" y="2990088"/>
             <a:ext cx="2350008" cy="798576"/>
           </a:xfrm>
           <a:prstGeom prst="rect">
@@ -17680,7 +15933,7 @@
         </p:nvSpPr>
         <p:spPr>
           <a:xfrm>
-            <a:off x="7748551" y="3508248"/>
+            <a:off x="7748551" y="3160776"/>
             <a:ext cx="1714795" cy="457200"/>
           </a:xfrm>
           <a:prstGeom prst="rect">
@@ -17723,7 +15976,7 @@
         </p:blipFill>
         <p:spPr>
           <a:xfrm>
-            <a:off x="9326186" y="3567683"/>
+            <a:off x="9326186" y="3220212"/>
             <a:ext cx="917448" cy="338328"/>
           </a:xfrm>
           <a:prstGeom prst="rect">
@@ -17739,7 +15992,7 @@
         </p:nvSpPr>
         <p:spPr>
           <a:xfrm>
-            <a:off x="987552" y="4433315"/>
+            <a:off x="987552" y="4085843"/>
             <a:ext cx="2787443" cy="457200"/>
           </a:xfrm>
           <a:prstGeom prst="rect">
@@ -17782,7 +16035,7 @@
         </p:blipFill>
         <p:spPr>
           <a:xfrm>
-            <a:off x="3637835" y="4491228"/>
+            <a:off x="3637835" y="4143755"/>
             <a:ext cx="941832" cy="341376"/>
           </a:xfrm>
           <a:prstGeom prst="rect">
@@ -17798,7 +16051,7 @@
         </p:nvSpPr>
         <p:spPr>
           <a:xfrm>
-            <a:off x="4579667" y="4433315"/>
+            <a:off x="4579667" y="4085843"/>
             <a:ext cx="3406485" cy="457200"/>
           </a:xfrm>
           <a:prstGeom prst="rect">
@@ -17841,7 +16094,7 @@
         </p:blipFill>
         <p:spPr>
           <a:xfrm>
-            <a:off x="7848992" y="4570476"/>
+            <a:off x="7848992" y="4223004"/>
             <a:ext cx="188976" cy="182880"/>
           </a:xfrm>
           <a:prstGeom prst="rect">
@@ -17972,44 +16225,9 @@
           </a:fontRef>
         </p:style>
       </p:cxnSp>
-      <p:sp>
-        <p:nvSpPr>
-          <p:cNvPr id="5" name="TextBox 4"/>
-          <p:cNvSpPr txBox="1"/>
-          <p:nvPr/>
-        </p:nvSpPr>
-        <p:spPr>
-          <a:xfrm>
-            <a:off x="777240" y="1261872"/>
-            <a:ext cx="10607040" cy="310896"/>
-          </a:xfrm>
-          <a:prstGeom prst="rect">
-            <a:avLst/>
-          </a:prstGeom>
-          <a:noFill/>
-        </p:spPr>
-        <p:txBody>
-          <a:bodyPr wrap="square" lIns="45720" rIns="45720" tIns="18288" bIns="18288" anchor="t">
-            <a:spAutoFit/>
-          </a:bodyPr>
-          <a:lstStyle/>
-          <a:p>
-            <a:pPr algn="l"/>
-            <a:r>
-              <a:rPr sz="1700" b="0" i="1">
-                <a:solidFill>
-                  <a:srgbClr val="6B6B6B"/>
-                </a:solidFill>
-                <a:latin typeface="Century Schoolbook"/>
-              </a:rPr>
-              <a:t>A negative base.</a:t>
-            </a:r>
-          </a:p>
-        </p:txBody>
-      </p:sp>
       <p:cxnSp>
         <p:nvCxnSpPr>
-          <p:cNvPr id="6" name="Connector 5"/>
+          <p:cNvPr id="5" name="Connector 4"/>
           <p:cNvCxnSpPr/>
           <p:nvPr/>
         </p:nvCxnSpPr>
@@ -18044,7 +16262,7 @@
       </p:cxnSp>
       <p:sp>
         <p:nvSpPr>
-          <p:cNvPr id="7" name="TextBox 6"/>
+          <p:cNvPr id="6" name="TextBox 5"/>
           <p:cNvSpPr txBox="1"/>
           <p:nvPr/>
         </p:nvSpPr>
@@ -18079,7 +16297,7 @@
       </p:sp>
       <p:sp>
         <p:nvSpPr>
-          <p:cNvPr id="8" name="TextBox 7"/>
+          <p:cNvPr id="7" name="TextBox 6"/>
           <p:cNvSpPr txBox="1"/>
           <p:nvPr/>
         </p:nvSpPr>
@@ -18114,7 +16332,7 @@
       </p:sp>
       <p:pic>
         <p:nvPicPr>
-          <p:cNvPr id="9" name="Picture 8" descr="66659ac1f0ea0461.png"/>
+          <p:cNvPr id="8" name="Picture 7" descr="66659ac1f0ea0461.png"/>
           <p:cNvPicPr>
             <a:picLocks noChangeAspect="1"/>
           </p:cNvPicPr>
@@ -18138,7 +16356,7 @@
       </p:pic>
       <p:sp>
         <p:nvSpPr>
-          <p:cNvPr id="10" name="TextBox 9"/>
+          <p:cNvPr id="9" name="TextBox 8"/>
           <p:cNvSpPr txBox="1"/>
           <p:nvPr/>
         </p:nvSpPr>
@@ -18294,44 +16512,9 @@
           </a:fontRef>
         </p:style>
       </p:cxnSp>
-      <p:sp>
-        <p:nvSpPr>
-          <p:cNvPr id="5" name="TextBox 4"/>
-          <p:cNvSpPr txBox="1"/>
-          <p:nvPr/>
-        </p:nvSpPr>
-        <p:spPr>
-          <a:xfrm>
-            <a:off x="777240" y="1261872"/>
-            <a:ext cx="10607040" cy="310896"/>
-          </a:xfrm>
-          <a:prstGeom prst="rect">
-            <a:avLst/>
-          </a:prstGeom>
-          <a:noFill/>
-        </p:spPr>
-        <p:txBody>
-          <a:bodyPr wrap="square" lIns="45720" rIns="45720" tIns="18288" bIns="18288" anchor="t">
-            <a:spAutoFit/>
-          </a:bodyPr>
-          <a:lstStyle/>
-          <a:p>
-            <a:pPr algn="l"/>
-            <a:r>
-              <a:rPr sz="1700" b="0" i="1">
-                <a:solidFill>
-                  <a:srgbClr val="6B6B6B"/>
-                </a:solidFill>
-                <a:latin typeface="Century Schoolbook"/>
-              </a:rPr>
-              <a:t>Worked.</a:t>
-            </a:r>
-          </a:p>
-        </p:txBody>
-      </p:sp>
       <p:cxnSp>
         <p:nvCxnSpPr>
-          <p:cNvPr id="6" name="Connector 5"/>
+          <p:cNvPr id="5" name="Connector 4"/>
           <p:cNvCxnSpPr/>
           <p:nvPr/>
         </p:nvCxnSpPr>
@@ -18366,7 +16549,7 @@
       </p:cxnSp>
       <p:sp>
         <p:nvSpPr>
-          <p:cNvPr id="7" name="TextBox 6"/>
+          <p:cNvPr id="6" name="TextBox 5"/>
           <p:cNvSpPr txBox="1"/>
           <p:nvPr/>
         </p:nvSpPr>
@@ -18401,7 +16584,7 @@
       </p:sp>
       <p:sp>
         <p:nvSpPr>
-          <p:cNvPr id="8" name="TextBox 7"/>
+          <p:cNvPr id="7" name="TextBox 6"/>
           <p:cNvSpPr txBox="1"/>
           <p:nvPr/>
         </p:nvSpPr>
@@ -18436,7 +16619,7 @@
       </p:sp>
       <p:pic>
         <p:nvPicPr>
-          <p:cNvPr id="9" name="Picture 8" descr="8665e93b2158cddb.png"/>
+          <p:cNvPr id="8" name="Picture 7" descr="8665e93b2158cddb.png"/>
           <p:cNvPicPr>
             <a:picLocks noChangeAspect="1"/>
           </p:cNvPicPr>
@@ -18458,44 +16641,9 @@
           </a:prstGeom>
         </p:spPr>
       </p:pic>
-      <p:sp>
-        <p:nvSpPr>
-          <p:cNvPr id="10" name="TextBox 9"/>
-          <p:cNvSpPr txBox="1"/>
-          <p:nvPr/>
-        </p:nvSpPr>
-        <p:spPr>
-          <a:xfrm>
-            <a:off x="6272784" y="2164080"/>
-            <a:ext cx="5111495" cy="502920"/>
-          </a:xfrm>
-          <a:prstGeom prst="rect">
-            <a:avLst/>
-          </a:prstGeom>
-          <a:noFill/>
-        </p:spPr>
-        <p:txBody>
-          <a:bodyPr wrap="square" lIns="45720" rIns="45720" tIns="18288" bIns="18288" anchor="ctr">
-            <a:spAutoFit/>
-          </a:bodyPr>
-          <a:lstStyle/>
-          <a:p>
-            <a:pPr algn="l"/>
-            <a:r>
-              <a:rPr sz="2100" b="0" i="1">
-                <a:solidFill>
-                  <a:srgbClr val="6B6B6B"/>
-                </a:solidFill>
-                <a:latin typeface="Century Schoolbook"/>
-              </a:rPr>
-              <a:t>quotient of powers: subtract</a:t>
-            </a:r>
-          </a:p>
-        </p:txBody>
-      </p:sp>
       <p:pic>
         <p:nvPicPr>
-          <p:cNvPr id="11" name="Picture 10" descr="a6bb031371915f0d.png"/>
+          <p:cNvPr id="9" name="Picture 8" descr="a6bb031371915f0d.png"/>
           <p:cNvPicPr>
             <a:picLocks noChangeAspect="1"/>
           </p:cNvPicPr>
@@ -18517,44 +16665,9 @@
           </a:prstGeom>
         </p:spPr>
       </p:pic>
-      <p:sp>
-        <p:nvSpPr>
-          <p:cNvPr id="12" name="TextBox 11"/>
-          <p:cNvSpPr txBox="1"/>
-          <p:nvPr/>
-        </p:nvSpPr>
-        <p:spPr>
-          <a:xfrm>
-            <a:off x="4044696" y="3115056"/>
-            <a:ext cx="6400800" cy="502920"/>
-          </a:xfrm>
-          <a:prstGeom prst="rect">
-            <a:avLst/>
-          </a:prstGeom>
-          <a:noFill/>
-        </p:spPr>
-        <p:txBody>
-          <a:bodyPr wrap="square" lIns="45720" rIns="45720" tIns="18288" bIns="18288" anchor="ctr">
-            <a:spAutoFit/>
-          </a:bodyPr>
-          <a:lstStyle/>
-          <a:p>
-            <a:pPr algn="l"/>
-            <a:r>
-              <a:rPr sz="2100" b="0" i="1">
-                <a:solidFill>
-                  <a:srgbClr val="6B6B6B"/>
-                </a:solidFill>
-                <a:latin typeface="Century Schoolbook"/>
-              </a:rPr>
-              <a:t>three negative factors</a:t>
-            </a:r>
-          </a:p>
-        </p:txBody>
-      </p:sp>
       <p:pic>
         <p:nvPicPr>
-          <p:cNvPr id="13" name="Picture 12" descr="1a7fe49e913d88f6.png"/>
+          <p:cNvPr id="10" name="Picture 9" descr="1a7fe49e913d88f6.png"/>
           <p:cNvPicPr>
             <a:picLocks noChangeAspect="1"/>
           </p:cNvPicPr>
@@ -18578,42 +16691,7 @@
       </p:pic>
       <p:sp>
         <p:nvSpPr>
-          <p:cNvPr id="14" name="TextBox 13"/>
-          <p:cNvSpPr txBox="1"/>
-          <p:nvPr/>
-        </p:nvSpPr>
-        <p:spPr>
-          <a:xfrm>
-            <a:off x="4639056" y="3768852"/>
-            <a:ext cx="6400800" cy="502920"/>
-          </a:xfrm>
-          <a:prstGeom prst="rect">
-            <a:avLst/>
-          </a:prstGeom>
-          <a:noFill/>
-        </p:spPr>
-        <p:txBody>
-          <a:bodyPr wrap="square" lIns="45720" rIns="45720" tIns="18288" bIns="18288" anchor="ctr">
-            <a:spAutoFit/>
-          </a:bodyPr>
-          <a:lstStyle/>
-          <a:p>
-            <a:pPr algn="l"/>
-            <a:r>
-              <a:rPr sz="2100" b="0" i="1">
-                <a:solidFill>
-                  <a:srgbClr val="6B6B6B"/>
-                </a:solidFill>
-                <a:latin typeface="Century Schoolbook"/>
-              </a:rPr>
-              <a:t>check: evaluate each, then divide</a:t>
-            </a:r>
-          </a:p>
-        </p:txBody>
-      </p:sp>
-      <p:sp>
-        <p:nvSpPr>
-          <p:cNvPr id="15" name="TextBox 14"/>
+          <p:cNvPr id="11" name="TextBox 10"/>
           <p:cNvSpPr txBox="1"/>
           <p:nvPr/>
         </p:nvSpPr>
@@ -18769,44 +16847,9 @@
           </a:fontRef>
         </p:style>
       </p:cxnSp>
-      <p:sp>
-        <p:nvSpPr>
-          <p:cNvPr id="5" name="TextBox 4"/>
-          <p:cNvSpPr txBox="1"/>
-          <p:nvPr/>
-        </p:nvSpPr>
-        <p:spPr>
-          <a:xfrm>
-            <a:off x="777240" y="1261872"/>
-            <a:ext cx="10607040" cy="310896"/>
-          </a:xfrm>
-          <a:prstGeom prst="rect">
-            <a:avLst/>
-          </a:prstGeom>
-          <a:noFill/>
-        </p:spPr>
-        <p:txBody>
-          <a:bodyPr wrap="square" lIns="45720" rIns="45720" tIns="18288" bIns="18288" anchor="t">
-            <a:spAutoFit/>
-          </a:bodyPr>
-          <a:lstStyle/>
-          <a:p>
-            <a:pPr algn="l"/>
-            <a:r>
-              <a:rPr sz="1700" b="0" i="1">
-                <a:solidFill>
-                  <a:srgbClr val="6B6B6B"/>
-                </a:solidFill>
-                <a:latin typeface="Century Schoolbook"/>
-              </a:rPr>
-              <a:t>Same steps, your numbers. Boards up when done.</a:t>
-            </a:r>
-          </a:p>
-        </p:txBody>
-      </p:sp>
       <p:cxnSp>
         <p:nvCxnSpPr>
-          <p:cNvPr id="6" name="Connector 5"/>
+          <p:cNvPr id="5" name="Connector 4"/>
           <p:cNvCxnSpPr/>
           <p:nvPr/>
         </p:nvCxnSpPr>
@@ -18841,7 +16884,7 @@
       </p:cxnSp>
       <p:sp>
         <p:nvSpPr>
-          <p:cNvPr id="7" name="TextBox 6"/>
+          <p:cNvPr id="6" name="TextBox 5"/>
           <p:cNvSpPr txBox="1"/>
           <p:nvPr/>
         </p:nvSpPr>
@@ -18876,7 +16919,7 @@
       </p:sp>
       <p:sp>
         <p:nvSpPr>
-          <p:cNvPr id="8" name="TextBox 7"/>
+          <p:cNvPr id="7" name="TextBox 6"/>
           <p:cNvSpPr txBox="1"/>
           <p:nvPr/>
         </p:nvSpPr>
@@ -18911,7 +16954,7 @@
       </p:sp>
       <p:pic>
         <p:nvPicPr>
-          <p:cNvPr id="9" name="Picture 8" descr="309fc1c6c87d6fce.png"/>
+          <p:cNvPr id="8" name="Picture 7" descr="309fc1c6c87d6fce.png"/>
           <p:cNvPicPr>
             <a:picLocks noChangeAspect="1"/>
           </p:cNvPicPr>
@@ -18933,6 +16976,41 @@
           </a:prstGeom>
         </p:spPr>
       </p:pic>
+      <p:sp>
+        <p:nvSpPr>
+          <p:cNvPr id="9" name="TextBox 8"/>
+          <p:cNvSpPr txBox="1"/>
+          <p:nvPr/>
+        </p:nvSpPr>
+        <p:spPr>
+          <a:xfrm>
+            <a:off x="777240" y="3718560"/>
+            <a:ext cx="10607040" cy="429370"/>
+          </a:xfrm>
+          <a:prstGeom prst="rect">
+            <a:avLst/>
+          </a:prstGeom>
+          <a:noFill/>
+        </p:spPr>
+        <p:txBody>
+          <a:bodyPr wrap="square" lIns="45720" rIns="45720" tIns="18288" bIns="18288" anchor="t">
+            <a:spAutoFit/>
+          </a:bodyPr>
+          <a:lstStyle/>
+          <a:p>
+            <a:pPr algn="ctr"/>
+            <a:r>
+              <a:rPr sz="2400" b="1" i="0">
+                <a:solidFill>
+                  <a:srgbClr val="1A1A1A"/>
+                </a:solidFill>
+                <a:latin typeface="Century Schoolbook"/>
+              </a:rPr>
+              <a:t>Which law? Then find the value.</a:t>
+            </a:r>
+          </a:p>
+        </p:txBody>
+      </p:sp>
     </p:spTree>
   </p:cSld>
   <p:clrMapOvr>

--- a/a7/packages/A7 Unit 3 - Exponents and Scientific Notation/Lessons/3.02/A7 3.02 Quotient Laws of Exponents - Slides.pptx
+++ b/a7/packages/A7 Unit 3 - Exponents and Scientific Notation/Lessons/3.02/A7 3.02 Quotient Laws of Exponents - Slides.pptx
@@ -13089,23 +13089,23 @@
         </p:nvSpPr>
         <p:spPr>
           <a:xfrm>
-            <a:off x="960120" y="2011680"/>
-            <a:ext cx="548640" cy="356616"/>
-          </a:xfrm>
-          <a:prstGeom prst="rect">
-            <a:avLst/>
-          </a:prstGeom>
-          <a:noFill/>
-        </p:spPr>
-        <p:txBody>
-          <a:bodyPr wrap="square" lIns="45720" rIns="45720" tIns="18288" bIns="18288" anchor="t">
+            <a:off x="960120" y="1600995"/>
+            <a:ext cx="548640" cy="377686"/>
+          </a:xfrm>
+          <a:prstGeom prst="rect">
+            <a:avLst/>
+          </a:prstGeom>
+          <a:noFill/>
+        </p:spPr>
+        <p:txBody>
+          <a:bodyPr wrap="square" lIns="45720" rIns="45720" tIns="18288" bIns="18288" anchor="ctr">
             <a:spAutoFit/>
           </a:bodyPr>
           <a:lstStyle/>
           <a:p>
             <a:pPr algn="l"/>
             <a:r>
-              <a:rPr sz="2100" b="1" i="0">
+              <a:rPr sz="1900" b="1" i="0">
                 <a:solidFill>
                   <a:srgbClr val="0B5394"/>
                 </a:solidFill>
@@ -13124,173 +13124,586 @@
         </p:nvSpPr>
         <p:spPr>
           <a:xfrm>
-            <a:off x="1554480" y="2011680"/>
-            <a:ext cx="9829800" cy="411480"/>
-          </a:xfrm>
-          <a:prstGeom prst="rect">
-            <a:avLst/>
-          </a:prstGeom>
-          <a:noFill/>
-        </p:spPr>
-        <p:txBody>
-          <a:bodyPr wrap="square" lIns="45720" rIns="45720" tIns="18288" bIns="18288" anchor="t">
+            <a:off x="1554480" y="1600995"/>
+            <a:ext cx="2653665" cy="377686"/>
+          </a:xfrm>
+          <a:prstGeom prst="rect">
+            <a:avLst/>
+          </a:prstGeom>
+          <a:noFill/>
+        </p:spPr>
+        <p:txBody>
+          <a:bodyPr wrap="none" lIns="45720" rIns="45720" tIns="18288" bIns="18288" anchor="ctr">
+            <a:noAutofit/>
+          </a:bodyPr>
+          <a:lstStyle/>
+          <a:p>
+            <a:pPr algn="l"/>
+            <a:r>
+              <a:rPr sz="1900" b="0" i="0">
+                <a:solidFill>
+                  <a:srgbClr val="1A1A1A"/>
+                </a:solidFill>
+                <a:latin typeface="Century Schoolbook"/>
+              </a:rPr>
+              <a:t>Write as one power.  </a:t>
+            </a:r>
+          </a:p>
+        </p:txBody>
+      </p:sp>
+      <p:pic>
+        <p:nvPicPr>
+          <p:cNvPr id="10" name="Picture 9" descr="902eda9aed980d69.png"/>
+          <p:cNvPicPr>
+            <a:picLocks noChangeAspect="1"/>
+          </p:cNvPicPr>
+          <p:nvPr/>
+        </p:nvPicPr>
+        <p:blipFill>
+          <a:blip r:embed="rId2"/>
+          <a:stretch>
+            <a:fillRect/>
+          </a:stretch>
+        </p:blipFill>
+        <p:spPr>
+          <a:xfrm>
+            <a:off x="4070985" y="1517904"/>
+            <a:ext cx="251791" cy="543869"/>
+          </a:xfrm>
+          <a:prstGeom prst="rect">
+            <a:avLst/>
+          </a:prstGeom>
+        </p:spPr>
+      </p:pic>
+      <p:sp>
+        <p:nvSpPr>
+          <p:cNvPr id="11" name="TextBox 10"/>
+          <p:cNvSpPr txBox="1"/>
+          <p:nvPr/>
+        </p:nvSpPr>
+        <p:spPr>
+          <a:xfrm>
+            <a:off x="960120" y="2276657"/>
+            <a:ext cx="548640" cy="377686"/>
+          </a:xfrm>
+          <a:prstGeom prst="rect">
+            <a:avLst/>
+          </a:prstGeom>
+          <a:noFill/>
+        </p:spPr>
+        <p:txBody>
+          <a:bodyPr wrap="square" lIns="45720" rIns="45720" tIns="18288" bIns="18288" anchor="ctr">
             <a:spAutoFit/>
           </a:bodyPr>
           <a:lstStyle/>
           <a:p>
             <a:pPr algn="l"/>
             <a:r>
-              <a:rPr sz="2100" b="0" i="0">
+              <a:rPr sz="1900" b="1" i="0">
+                <a:solidFill>
+                  <a:srgbClr val="0B5394"/>
+                </a:solidFill>
+                <a:latin typeface="Century Schoolbook"/>
+              </a:rPr>
+              <a:t>2.</a:t>
+            </a:r>
+          </a:p>
+        </p:txBody>
+      </p:sp>
+      <p:sp>
+        <p:nvSpPr>
+          <p:cNvPr id="12" name="TextBox 11"/>
+          <p:cNvSpPr txBox="1"/>
+          <p:nvPr/>
+        </p:nvSpPr>
+        <p:spPr>
+          <a:xfrm>
+            <a:off x="1554480" y="2276657"/>
+            <a:ext cx="2141635" cy="377686"/>
+          </a:xfrm>
+          <a:prstGeom prst="rect">
+            <a:avLst/>
+          </a:prstGeom>
+          <a:noFill/>
+        </p:spPr>
+        <p:txBody>
+          <a:bodyPr wrap="none" lIns="45720" rIns="45720" tIns="18288" bIns="18288" anchor="ctr">
+            <a:noAutofit/>
+          </a:bodyPr>
+          <a:lstStyle/>
+          <a:p>
+            <a:pPr algn="l"/>
+            <a:r>
+              <a:rPr sz="1900" b="0" i="0">
                 <a:solidFill>
                   <a:srgbClr val="1A1A1A"/>
                 </a:solidFill>
                 <a:latin typeface="Century Schoolbook"/>
               </a:rPr>
-              <a:t>Six questions. Work down the page.</a:t>
-            </a:r>
-          </a:p>
-        </p:txBody>
-      </p:sp>
-      <p:sp>
-        <p:nvSpPr>
-          <p:cNvPr id="10" name="TextBox 9"/>
-          <p:cNvSpPr txBox="1"/>
-          <p:nvPr/>
-        </p:nvSpPr>
-        <p:spPr>
-          <a:xfrm>
-            <a:off x="960120" y="2551176"/>
-            <a:ext cx="548640" cy="356616"/>
-          </a:xfrm>
-          <a:prstGeom prst="rect">
-            <a:avLst/>
-          </a:prstGeom>
-          <a:noFill/>
-        </p:spPr>
-        <p:txBody>
-          <a:bodyPr wrap="square" lIns="45720" rIns="45720" tIns="18288" bIns="18288" anchor="t">
+              <a:t>Find the value.  </a:t>
+            </a:r>
+          </a:p>
+        </p:txBody>
+      </p:sp>
+      <p:pic>
+        <p:nvPicPr>
+          <p:cNvPr id="13" name="Picture 12" descr="50981f95c1e46864.png"/>
+          <p:cNvPicPr>
+            <a:picLocks noChangeAspect="1"/>
+          </p:cNvPicPr>
+          <p:nvPr/>
+        </p:nvPicPr>
+        <p:blipFill>
+          <a:blip r:embed="rId3"/>
+          <a:stretch>
+            <a:fillRect/>
+          </a:stretch>
+        </p:blipFill>
+        <p:spPr>
+          <a:xfrm>
+            <a:off x="3558955" y="2189789"/>
+            <a:ext cx="251791" cy="551422"/>
+          </a:xfrm>
+          <a:prstGeom prst="rect">
+            <a:avLst/>
+          </a:prstGeom>
+        </p:spPr>
+      </p:pic>
+      <p:sp>
+        <p:nvSpPr>
+          <p:cNvPr id="14" name="TextBox 13"/>
+          <p:cNvSpPr txBox="1"/>
+          <p:nvPr/>
+        </p:nvSpPr>
+        <p:spPr>
+          <a:xfrm>
+            <a:off x="960120" y="3000159"/>
+            <a:ext cx="548640" cy="377686"/>
+          </a:xfrm>
+          <a:prstGeom prst="rect">
+            <a:avLst/>
+          </a:prstGeom>
+          <a:noFill/>
+        </p:spPr>
+        <p:txBody>
+          <a:bodyPr wrap="square" lIns="45720" rIns="45720" tIns="18288" bIns="18288" anchor="ctr">
             <a:spAutoFit/>
           </a:bodyPr>
           <a:lstStyle/>
           <a:p>
             <a:pPr algn="l"/>
             <a:r>
-              <a:rPr sz="2100" b="1" i="0">
+              <a:rPr sz="1900" b="1" i="0">
                 <a:solidFill>
                   <a:srgbClr val="0B5394"/>
                 </a:solidFill>
                 <a:latin typeface="Century Schoolbook"/>
               </a:rPr>
-              <a:t>2.</a:t>
-            </a:r>
-          </a:p>
-        </p:txBody>
-      </p:sp>
-      <p:sp>
-        <p:nvSpPr>
-          <p:cNvPr id="11" name="TextBox 10"/>
-          <p:cNvSpPr txBox="1"/>
-          <p:nvPr/>
-        </p:nvSpPr>
-        <p:spPr>
-          <a:xfrm>
-            <a:off x="1554480" y="2551176"/>
-            <a:ext cx="9829800" cy="411480"/>
-          </a:xfrm>
-          <a:prstGeom prst="rect">
-            <a:avLst/>
-          </a:prstGeom>
-          <a:noFill/>
-        </p:spPr>
-        <p:txBody>
-          <a:bodyPr wrap="square" lIns="45720" rIns="45720" tIns="18288" bIns="18288" anchor="t">
+              <a:t>3.</a:t>
+            </a:r>
+          </a:p>
+        </p:txBody>
+      </p:sp>
+      <p:sp>
+        <p:nvSpPr>
+          <p:cNvPr id="15" name="TextBox 14"/>
+          <p:cNvSpPr txBox="1"/>
+          <p:nvPr/>
+        </p:nvSpPr>
+        <p:spPr>
+          <a:xfrm>
+            <a:off x="1554480" y="3000159"/>
+            <a:ext cx="2141635" cy="377686"/>
+          </a:xfrm>
+          <a:prstGeom prst="rect">
+            <a:avLst/>
+          </a:prstGeom>
+          <a:noFill/>
+        </p:spPr>
+        <p:txBody>
+          <a:bodyPr wrap="none" lIns="45720" rIns="45720" tIns="18288" bIns="18288" anchor="ctr">
+            <a:noAutofit/>
+          </a:bodyPr>
+          <a:lstStyle/>
+          <a:p>
+            <a:pPr algn="l"/>
+            <a:r>
+              <a:rPr sz="1900" b="0" i="0">
+                <a:solidFill>
+                  <a:srgbClr val="1A1A1A"/>
+                </a:solidFill>
+                <a:latin typeface="Century Schoolbook"/>
+              </a:rPr>
+              <a:t>Find the value.  </a:t>
+            </a:r>
+          </a:p>
+        </p:txBody>
+      </p:sp>
+      <p:pic>
+        <p:nvPicPr>
+          <p:cNvPr id="16" name="Picture 15" descr="406d0c52d10417b5.png"/>
+          <p:cNvPicPr>
+            <a:picLocks noChangeAspect="1"/>
+          </p:cNvPicPr>
+          <p:nvPr/>
+        </p:nvPicPr>
+        <p:blipFill>
+          <a:blip r:embed="rId4"/>
+          <a:stretch>
+            <a:fillRect/>
+          </a:stretch>
+        </p:blipFill>
+        <p:spPr>
+          <a:xfrm>
+            <a:off x="3558955" y="2869228"/>
+            <a:ext cx="621924" cy="639549"/>
+          </a:xfrm>
+          <a:prstGeom prst="rect">
+            <a:avLst/>
+          </a:prstGeom>
+        </p:spPr>
+      </p:pic>
+      <p:sp>
+        <p:nvSpPr>
+          <p:cNvPr id="17" name="TextBox 16"/>
+          <p:cNvSpPr txBox="1"/>
+          <p:nvPr/>
+        </p:nvSpPr>
+        <p:spPr>
+          <a:xfrm>
+            <a:off x="960120" y="3677080"/>
+            <a:ext cx="548640" cy="377686"/>
+          </a:xfrm>
+          <a:prstGeom prst="rect">
+            <a:avLst/>
+          </a:prstGeom>
+          <a:noFill/>
+        </p:spPr>
+        <p:txBody>
+          <a:bodyPr wrap="square" lIns="45720" rIns="45720" tIns="18288" bIns="18288" anchor="ctr">
             <a:spAutoFit/>
           </a:bodyPr>
           <a:lstStyle/>
           <a:p>
             <a:pPr algn="l"/>
             <a:r>
-              <a:rPr sz="2100" b="0" i="0">
+              <a:rPr sz="1900" b="1" i="0">
+                <a:solidFill>
+                  <a:srgbClr val="0B5394"/>
+                </a:solidFill>
+                <a:latin typeface="Century Schoolbook"/>
+              </a:rPr>
+              <a:t>4.</a:t>
+            </a:r>
+          </a:p>
+        </p:txBody>
+      </p:sp>
+      <p:sp>
+        <p:nvSpPr>
+          <p:cNvPr id="18" name="TextBox 17"/>
+          <p:cNvSpPr txBox="1"/>
+          <p:nvPr/>
+        </p:nvSpPr>
+        <p:spPr>
+          <a:xfrm>
+            <a:off x="1554480" y="3677080"/>
+            <a:ext cx="8572632" cy="377686"/>
+          </a:xfrm>
+          <a:prstGeom prst="rect">
+            <a:avLst/>
+          </a:prstGeom>
+          <a:noFill/>
+        </p:spPr>
+        <p:txBody>
+          <a:bodyPr wrap="none" lIns="45720" rIns="45720" tIns="18288" bIns="18288" anchor="ctr">
+            <a:noAutofit/>
+          </a:bodyPr>
+          <a:lstStyle/>
+          <a:p>
+            <a:pPr algn="l"/>
+            <a:r>
+              <a:rPr sz="1900" b="0" i="0">
                 <a:solidFill>
                   <a:srgbClr val="1A1A1A"/>
                 </a:solidFill>
                 <a:latin typeface="Century Schoolbook"/>
               </a:rPr>
-              <a:t>Show the step that does the work, not just the answer.</a:t>
-            </a:r>
-          </a:p>
-        </p:txBody>
-      </p:sp>
-      <p:sp>
-        <p:nvSpPr>
-          <p:cNvPr id="12" name="TextBox 11"/>
-          <p:cNvSpPr txBox="1"/>
-          <p:nvPr/>
-        </p:nvSpPr>
-        <p:spPr>
-          <a:xfrm>
-            <a:off x="960120" y="3090672"/>
-            <a:ext cx="548640" cy="356616"/>
-          </a:xfrm>
-          <a:prstGeom prst="rect">
-            <a:avLst/>
-          </a:prstGeom>
-          <a:noFill/>
-        </p:spPr>
-        <p:txBody>
-          <a:bodyPr wrap="square" lIns="45720" rIns="45720" tIns="18288" bIns="18288" anchor="t">
+              <a:t>Rewrite so the exponent is on the numerator and on the denominator.  </a:t>
+            </a:r>
+          </a:p>
+        </p:txBody>
+      </p:sp>
+      <p:pic>
+        <p:nvPicPr>
+          <p:cNvPr id="19" name="Picture 18" descr="7680a96943fc6563.png"/>
+          <p:cNvPicPr>
+            <a:picLocks noChangeAspect="1"/>
+          </p:cNvPicPr>
+          <p:nvPr/>
+        </p:nvPicPr>
+        <p:blipFill>
+          <a:blip r:embed="rId5"/>
+          <a:stretch>
+            <a:fillRect/>
+          </a:stretch>
+        </p:blipFill>
+        <p:spPr>
+          <a:xfrm>
+            <a:off x="9989952" y="3636794"/>
+            <a:ext cx="526243" cy="458260"/>
+          </a:xfrm>
+          <a:prstGeom prst="rect">
+            <a:avLst/>
+          </a:prstGeom>
+        </p:spPr>
+      </p:pic>
+      <p:sp>
+        <p:nvSpPr>
+          <p:cNvPr id="20" name="TextBox 19"/>
+          <p:cNvSpPr txBox="1"/>
+          <p:nvPr/>
+        </p:nvSpPr>
+        <p:spPr>
+          <a:xfrm>
+            <a:off x="960120" y="4265874"/>
+            <a:ext cx="548640" cy="377686"/>
+          </a:xfrm>
+          <a:prstGeom prst="rect">
+            <a:avLst/>
+          </a:prstGeom>
+          <a:noFill/>
+        </p:spPr>
+        <p:txBody>
+          <a:bodyPr wrap="square" lIns="45720" rIns="45720" tIns="18288" bIns="18288" anchor="ctr">
             <a:spAutoFit/>
           </a:bodyPr>
           <a:lstStyle/>
           <a:p>
             <a:pPr algn="l"/>
             <a:r>
-              <a:rPr sz="2100" b="1" i="0">
+              <a:rPr sz="1900" b="1" i="0">
                 <a:solidFill>
                   <a:srgbClr val="0B5394"/>
                 </a:solidFill>
                 <a:latin typeface="Century Schoolbook"/>
               </a:rPr>
-              <a:t>3.</a:t>
-            </a:r>
-          </a:p>
-        </p:txBody>
-      </p:sp>
-      <p:sp>
-        <p:nvSpPr>
-          <p:cNvPr id="13" name="TextBox 12"/>
-          <p:cNvSpPr txBox="1"/>
-          <p:nvPr/>
-        </p:nvSpPr>
-        <p:spPr>
-          <a:xfrm>
-            <a:off x="1554480" y="3090672"/>
-            <a:ext cx="9829800" cy="411480"/>
-          </a:xfrm>
-          <a:prstGeom prst="rect">
-            <a:avLst/>
-          </a:prstGeom>
-          <a:noFill/>
-        </p:spPr>
-        <p:txBody>
-          <a:bodyPr wrap="square" lIns="45720" rIns="45720" tIns="18288" bIns="18288" anchor="t">
+              <a:t>5.</a:t>
+            </a:r>
+          </a:p>
+        </p:txBody>
+      </p:sp>
+      <p:sp>
+        <p:nvSpPr>
+          <p:cNvPr id="21" name="TextBox 20"/>
+          <p:cNvSpPr txBox="1"/>
+          <p:nvPr/>
+        </p:nvSpPr>
+        <p:spPr>
+          <a:xfrm>
+            <a:off x="1554480" y="4265874"/>
+            <a:ext cx="2141635" cy="377686"/>
+          </a:xfrm>
+          <a:prstGeom prst="rect">
+            <a:avLst/>
+          </a:prstGeom>
+          <a:noFill/>
+        </p:spPr>
+        <p:txBody>
+          <a:bodyPr wrap="none" lIns="45720" rIns="45720" tIns="18288" bIns="18288" anchor="ctr">
+            <a:noAutofit/>
+          </a:bodyPr>
+          <a:lstStyle/>
+          <a:p>
+            <a:pPr algn="l"/>
+            <a:r>
+              <a:rPr sz="1900" b="0" i="0">
+                <a:solidFill>
+                  <a:srgbClr val="1A1A1A"/>
+                </a:solidFill>
+                <a:latin typeface="Century Schoolbook"/>
+              </a:rPr>
+              <a:t>Find the value.  </a:t>
+            </a:r>
+          </a:p>
+        </p:txBody>
+      </p:sp>
+      <p:pic>
+        <p:nvPicPr>
+          <p:cNvPr id="22" name="Picture 21" descr="bb269878437e8ee9.png"/>
+          <p:cNvPicPr>
+            <a:picLocks noChangeAspect="1"/>
+          </p:cNvPicPr>
+          <p:nvPr/>
+        </p:nvPicPr>
+        <p:blipFill>
+          <a:blip r:embed="rId6"/>
+          <a:stretch>
+            <a:fillRect/>
+          </a:stretch>
+        </p:blipFill>
+        <p:spPr>
+          <a:xfrm>
+            <a:off x="3558955" y="4223070"/>
+            <a:ext cx="669764" cy="463295"/>
+          </a:xfrm>
+          <a:prstGeom prst="rect">
+            <a:avLst/>
+          </a:prstGeom>
+        </p:spPr>
+      </p:pic>
+      <p:sp>
+        <p:nvSpPr>
+          <p:cNvPr id="23" name="TextBox 22"/>
+          <p:cNvSpPr txBox="1"/>
+          <p:nvPr/>
+        </p:nvSpPr>
+        <p:spPr>
+          <a:xfrm>
+            <a:off x="960120" y="4874812"/>
+            <a:ext cx="548640" cy="377686"/>
+          </a:xfrm>
+          <a:prstGeom prst="rect">
+            <a:avLst/>
+          </a:prstGeom>
+          <a:noFill/>
+        </p:spPr>
+        <p:txBody>
+          <a:bodyPr wrap="square" lIns="45720" rIns="45720" tIns="18288" bIns="18288" anchor="ctr">
             <a:spAutoFit/>
           </a:bodyPr>
           <a:lstStyle/>
           <a:p>
             <a:pPr algn="l"/>
             <a:r>
-              <a:rPr sz="2100" b="0" i="0">
+              <a:rPr sz="1900" b="1" i="0">
+                <a:solidFill>
+                  <a:srgbClr val="0B5394"/>
+                </a:solidFill>
+                <a:latin typeface="Century Schoolbook"/>
+              </a:rPr>
+              <a:t>6.</a:t>
+            </a:r>
+          </a:p>
+        </p:txBody>
+      </p:sp>
+      <p:sp>
+        <p:nvSpPr>
+          <p:cNvPr id="24" name="TextBox 23"/>
+          <p:cNvSpPr txBox="1"/>
+          <p:nvPr/>
+        </p:nvSpPr>
+        <p:spPr>
+          <a:xfrm>
+            <a:off x="1554480" y="4874812"/>
+            <a:ext cx="2283617" cy="377686"/>
+          </a:xfrm>
+          <a:prstGeom prst="rect">
+            <a:avLst/>
+          </a:prstGeom>
+          <a:noFill/>
+        </p:spPr>
+        <p:txBody>
+          <a:bodyPr wrap="none" lIns="45720" rIns="45720" tIns="18288" bIns="18288" anchor="ctr">
+            <a:noAutofit/>
+          </a:bodyPr>
+          <a:lstStyle/>
+          <a:p>
+            <a:pPr algn="l"/>
+            <a:r>
+              <a:rPr sz="1900" b="0" i="0">
                 <a:solidFill>
                   <a:srgbClr val="1A1A1A"/>
                 </a:solidFill>
                 <a:latin typeface="Century Schoolbook"/>
               </a:rPr>
-              <a:t>Silence until the six minutes are up.</a:t>
-            </a:r>
-          </a:p>
-        </p:txBody>
-      </p:sp>
+              <a:t>Find the value of </a:t>
+            </a:r>
+          </a:p>
+        </p:txBody>
+      </p:sp>
+      <p:pic>
+        <p:nvPicPr>
+          <p:cNvPr id="25" name="Picture 24" descr="0afe177f69dd5e06.png"/>
+          <p:cNvPicPr>
+            <a:picLocks noChangeAspect="1"/>
+          </p:cNvPicPr>
+          <p:nvPr/>
+        </p:nvPicPr>
+        <p:blipFill>
+          <a:blip r:embed="rId7"/>
+          <a:stretch>
+            <a:fillRect/>
+          </a:stretch>
+        </p:blipFill>
+        <p:spPr>
+          <a:xfrm>
+            <a:off x="3700937" y="5001966"/>
+            <a:ext cx="128413" cy="123377"/>
+          </a:xfrm>
+          <a:prstGeom prst="rect">
+            <a:avLst/>
+          </a:prstGeom>
+        </p:spPr>
+      </p:pic>
+      <p:sp>
+        <p:nvSpPr>
+          <p:cNvPr id="26" name="TextBox 25"/>
+          <p:cNvSpPr txBox="1"/>
+          <p:nvPr/>
+        </p:nvSpPr>
+        <p:spPr>
+          <a:xfrm>
+            <a:off x="3829351" y="4874812"/>
+            <a:ext cx="423600" cy="377686"/>
+          </a:xfrm>
+          <a:prstGeom prst="rect">
+            <a:avLst/>
+          </a:prstGeom>
+          <a:noFill/>
+        </p:spPr>
+        <p:txBody>
+          <a:bodyPr wrap="none" lIns="45720" rIns="45720" tIns="18288" bIns="18288" anchor="ctr">
+            <a:noAutofit/>
+          </a:bodyPr>
+          <a:lstStyle/>
+          <a:p>
+            <a:pPr algn="l"/>
+            <a:r>
+              <a:rPr sz="1900" b="0" i="0">
+                <a:solidFill>
+                  <a:srgbClr val="1A1A1A"/>
+                </a:solidFill>
+                <a:latin typeface="Century Schoolbook"/>
+              </a:rPr>
+              <a:t>.  </a:t>
+            </a:r>
+          </a:p>
+        </p:txBody>
+      </p:sp>
+      <p:pic>
+        <p:nvPicPr>
+          <p:cNvPr id="27" name="Picture 26" descr="e9a852f8219a3abf.png"/>
+          <p:cNvPicPr>
+            <a:picLocks noChangeAspect="1"/>
+          </p:cNvPicPr>
+          <p:nvPr/>
+        </p:nvPicPr>
+        <p:blipFill>
+          <a:blip r:embed="rId8"/>
+          <a:stretch>
+            <a:fillRect/>
+          </a:stretch>
+        </p:blipFill>
+        <p:spPr>
+          <a:xfrm>
+            <a:off x="4115791" y="4814382"/>
+            <a:ext cx="778035" cy="498546"/>
+          </a:xfrm>
+          <a:prstGeom prst="rect">
+            <a:avLst/>
+          </a:prstGeom>
+        </p:spPr>
+      </p:pic>
     </p:spTree>
   </p:cSld>
   <p:clrMapOvr>

--- a/a7/packages/A7 Unit 3 - Exponents and Scientific Notation/Lessons/3.02/A7 3.02 Quotient Laws of Exponents - Slides.pptx
+++ b/a7/packages/A7 Unit 3 - Exponents and Scientific Notation/Lessons/3.02/A7 3.02 Quotient Laws of Exponents - Slides.pptx
@@ -3145,11 +3145,11 @@
           <a:p>
             <a:pPr algn="ctr"/>
             <a:r>
-              <a:rPr sz="1500" b="0" i="0">
+              <a:rPr sz="1420" b="0" i="0">
                 <a:solidFill>
                   <a:srgbClr val="6B6B6B"/>
                 </a:solidFill>
-                <a:latin typeface="Century Schoolbook"/>
+                <a:latin typeface="Lexend"/>
               </a:rPr>
               <a:t>GRADE 7 ACCELERATED  ·  UNIT 3  ·  LESSON 2</a:t>
             </a:r>
@@ -3180,11 +3180,11 @@
           <a:p>
             <a:pPr algn="ctr"/>
             <a:r>
-              <a:rPr sz="3400" b="1" i="0">
+              <a:rPr sz="3229" b="1" i="0">
                 <a:solidFill>
                   <a:srgbClr val="1A1A1A"/>
                 </a:solidFill>
-                <a:latin typeface="Century Schoolbook"/>
+                <a:latin typeface="Lexend"/>
               </a:rPr>
               <a:t>Quotient Laws of Exponents</a:t>
             </a:r>
@@ -3285,11 +3285,11 @@
           <a:p>
             <a:pPr algn="ctr"/>
             <a:r>
-              <a:rPr sz="1600" b="1" i="0">
+              <a:rPr sz="1520" b="1" i="0">
                 <a:solidFill>
                   <a:srgbClr val="1A1A1A"/>
                 </a:solidFill>
-                <a:latin typeface="Century Schoolbook"/>
+                <a:latin typeface="Lexend"/>
               </a:rPr>
               <a:t>MA.7.NSO.1.1</a:t>
             </a:r>
@@ -3320,11 +3320,11 @@
           <a:p>
             <a:pPr algn="ctr"/>
             <a:r>
-              <a:rPr sz="1900" b="0" i="1">
+              <a:rPr sz="1810" b="0" i="0">
                 <a:solidFill>
                   <a:srgbClr val="1A1A1A"/>
                 </a:solidFill>
-                <a:latin typeface="Century Schoolbook"/>
+                <a:latin typeface="Lexend"/>
               </a:rPr>
               <a:t>I can use the quotient of powers, power of a quotient and zero exponent laws to rewrite and evaluate a numerical expression.</a:t>
             </a:r>
@@ -3390,11 +3390,11 @@
           <a:p>
             <a:pPr algn="l"/>
             <a:r>
-              <a:rPr sz="1100" b="0" i="1">
+              <a:rPr sz="1040" b="0" i="0">
                 <a:solidFill>
                   <a:srgbClr val="6B6B6B"/>
                 </a:solidFill>
-                <a:latin typeface="Century Schoolbook"/>
+                <a:latin typeface="Lexend"/>
               </a:rPr>
               <a:t>Grade 7 Accelerated · Unit 3 · Lesson 2 — Quotient Laws of Exponents</a:t>
             </a:r>
@@ -3425,11 +3425,11 @@
           <a:p>
             <a:pPr algn="r"/>
             <a:r>
-              <a:rPr sz="1100" b="0" i="0">
+              <a:rPr sz="1040" b="0" i="0">
                 <a:solidFill>
                   <a:srgbClr val="6B6B6B"/>
                 </a:solidFill>
-                <a:latin typeface="Century Schoolbook"/>
+                <a:latin typeface="Lexend"/>
               </a:rPr>
               <a:t>1</a:t>
             </a:r>
@@ -3478,11 +3478,11 @@
           <a:p>
             <a:pPr algn="l"/>
             <a:r>
-              <a:rPr sz="3600" b="1" i="0">
+              <a:rPr sz="3420" b="1" i="0">
                 <a:solidFill>
                   <a:srgbClr val="1A1A1A"/>
                 </a:solidFill>
-                <a:latin typeface="Century Schoolbook"/>
+                <a:latin typeface="Lexend"/>
               </a:rPr>
               <a:t>Your Turn</a:t>
             </a:r>
@@ -3618,11 +3618,11 @@
           <a:p>
             <a:pPr algn="l"/>
             <a:r>
-              <a:rPr sz="1100" b="0" i="1">
+              <a:rPr sz="1040" b="0" i="0">
                 <a:solidFill>
                   <a:srgbClr val="6B6B6B"/>
                 </a:solidFill>
-                <a:latin typeface="Century Schoolbook"/>
+                <a:latin typeface="Lexend"/>
               </a:rPr>
               <a:t>Grade 7 Accelerated · Unit 3 · Lesson 2 — Quotient Laws of Exponents</a:t>
             </a:r>
@@ -3653,11 +3653,11 @@
           <a:p>
             <a:pPr algn="r"/>
             <a:r>
-              <a:rPr sz="1100" b="0" i="0">
+              <a:rPr sz="1040" b="0" i="0">
                 <a:solidFill>
                   <a:srgbClr val="6B6B6B"/>
                 </a:solidFill>
-                <a:latin typeface="Century Schoolbook"/>
+                <a:latin typeface="Lexend"/>
               </a:rPr>
               <a:t>10</a:t>
             </a:r>
@@ -3666,7 +3666,7 @@
       </p:sp>
       <p:pic>
         <p:nvPicPr>
-          <p:cNvPr id="8" name="Picture 7" descr="b0a43ae0750e3ab4.png"/>
+          <p:cNvPr id="8" name="Picture 7" descr="9a555cc0fb30ff53.png"/>
           <p:cNvPicPr>
             <a:picLocks noChangeAspect="1"/>
           </p:cNvPicPr>
@@ -3680,8 +3680,8 @@
         </p:blipFill>
         <p:spPr>
           <a:xfrm>
-            <a:off x="5849112" y="2194560"/>
-            <a:ext cx="463296" cy="1018032"/>
+            <a:off x="5850635" y="1600200"/>
+            <a:ext cx="460247" cy="996696"/>
           </a:xfrm>
           <a:prstGeom prst="rect">
             <a:avLst/>
@@ -3696,7 +3696,7 @@
         </p:nvSpPr>
         <p:spPr>
           <a:xfrm>
-            <a:off x="777240" y="3715512"/>
+            <a:off x="777240" y="3099816"/>
             <a:ext cx="10607040" cy="429370"/>
           </a:xfrm>
           <a:prstGeom prst="rect">
@@ -3712,26 +3712,74 @@
           <a:p>
             <a:pPr algn="ctr"/>
             <a:r>
-              <a:rPr sz="2400" b="1" i="0">
+              <a:rPr sz="2280" b="1" i="0">
                 <a:solidFill>
                   <a:srgbClr val="1A1A1A"/>
                 </a:solidFill>
-                <a:latin typeface="Century Schoolbook"/>
+                <a:latin typeface="Lexend"/>
               </a:rPr>
               <a:t>Which law? Then find the value.</a:t>
             </a:r>
           </a:p>
         </p:txBody>
       </p:sp>
-      <p:sp>
-        <p:nvSpPr>
-          <p:cNvPr id="10" name="TextBox 9"/>
-          <p:cNvSpPr txBox="1"/>
-          <p:nvPr/>
-        </p:nvSpPr>
-        <p:spPr>
-          <a:xfrm>
-            <a:off x="777240" y="4572000"/>
+      <p:pic>
+        <p:nvPicPr>
+          <p:cNvPr id="10" name="Picture 9" descr="a96092e33ee7290d.png"/>
+          <p:cNvPicPr>
+            <a:picLocks noChangeAspect="1"/>
+          </p:cNvPicPr>
+          <p:nvPr/>
+        </p:nvPicPr>
+        <p:blipFill>
+          <a:blip r:embed="rId3"/>
+          <a:stretch>
+            <a:fillRect/>
+          </a:stretch>
+        </p:blipFill>
+        <p:spPr>
+          <a:xfrm>
+            <a:off x="5105399" y="3712066"/>
+            <a:ext cx="2063496" cy="722376"/>
+          </a:xfrm>
+          <a:prstGeom prst="rect">
+            <a:avLst/>
+          </a:prstGeom>
+        </p:spPr>
+      </p:pic>
+      <p:pic>
+        <p:nvPicPr>
+          <p:cNvPr id="11" name="Picture 10" descr="2d0acfb864622b9c.png"/>
+          <p:cNvPicPr>
+            <a:picLocks noChangeAspect="1"/>
+          </p:cNvPicPr>
+          <p:nvPr/>
+        </p:nvPicPr>
+        <p:blipFill>
+          <a:blip r:embed="rId4"/>
+          <a:stretch>
+            <a:fillRect/>
+          </a:stretch>
+        </p:blipFill>
+        <p:spPr>
+          <a:xfrm>
+            <a:off x="5105399" y="4615798"/>
+            <a:ext cx="1030224" cy="304800"/>
+          </a:xfrm>
+          <a:prstGeom prst="rect">
+            <a:avLst/>
+          </a:prstGeom>
+        </p:spPr>
+      </p:pic>
+      <p:sp>
+        <p:nvSpPr>
+          <p:cNvPr id="12" name="TextBox 11"/>
+          <p:cNvSpPr txBox="1"/>
+          <p:nvPr/>
+        </p:nvSpPr>
+        <p:spPr>
+          <a:xfrm>
+            <a:off x="777240" y="5111098"/>
             <a:ext cx="10607040" cy="548640"/>
           </a:xfrm>
           <a:prstGeom prst="rect">
@@ -3747,29 +3795,29 @@
           <a:p>
             <a:pPr algn="ctr"/>
             <a:r>
-              <a:rPr sz="3200" b="1" i="0">
+              <a:rPr sz="3040" b="1" i="0">
                 <a:solidFill>
                   <a:srgbClr val="9E1B32"/>
                 </a:solidFill>
-                <a:latin typeface="Century Schoolbook"/>
+                <a:latin typeface="Lexend"/>
               </a:rPr>
               <a:t>Answer:   3</a:t>
             </a:r>
             <a:r>
-              <a:rPr sz="3200" b="1" i="0" baseline="30000">
+              <a:rPr sz="3040" b="1" i="0" baseline="30000">
                 <a:solidFill>
                   <a:srgbClr val="9E1B32"/>
                 </a:solidFill>
-                <a:latin typeface="Century Schoolbook"/>
+                <a:latin typeface="Lexend"/>
               </a:rPr>
               <a:t>4</a:t>
             </a:r>
             <a:r>
-              <a:rPr sz="3200" b="1" i="0">
+              <a:rPr sz="3040" b="1" i="0">
                 <a:solidFill>
                   <a:srgbClr val="9E1B32"/>
                 </a:solidFill>
-                <a:latin typeface="Century Schoolbook"/>
+                <a:latin typeface="Lexend"/>
               </a:rPr>
               <a:t> = 81</a:t>
             </a:r>
@@ -3818,11 +3866,11 @@
           <a:p>
             <a:pPr algn="l"/>
             <a:r>
-              <a:rPr sz="3600" b="1" i="0">
+              <a:rPr sz="3420" b="1" i="0">
                 <a:solidFill>
                   <a:srgbClr val="1A1A1A"/>
                 </a:solidFill>
-                <a:latin typeface="Century Schoolbook"/>
+                <a:latin typeface="Lexend"/>
               </a:rPr>
               <a:t>Example 2</a:t>
             </a:r>
@@ -3958,11 +4006,11 @@
           <a:p>
             <a:pPr algn="l"/>
             <a:r>
-              <a:rPr sz="1100" b="0" i="1">
+              <a:rPr sz="1040" b="0" i="0">
                 <a:solidFill>
                   <a:srgbClr val="6B6B6B"/>
                 </a:solidFill>
-                <a:latin typeface="Century Schoolbook"/>
+                <a:latin typeface="Lexend"/>
               </a:rPr>
               <a:t>Grade 7 Accelerated · Unit 3 · Lesson 2 — Quotient Laws of Exponents</a:t>
             </a:r>
@@ -3993,11 +4041,11 @@
           <a:p>
             <a:pPr algn="r"/>
             <a:r>
-              <a:rPr sz="1100" b="0" i="0">
+              <a:rPr sz="1040" b="0" i="0">
                 <a:solidFill>
                   <a:srgbClr val="6B6B6B"/>
                 </a:solidFill>
-                <a:latin typeface="Century Schoolbook"/>
+                <a:latin typeface="Lexend"/>
               </a:rPr>
               <a:t>11</a:t>
             </a:r>
@@ -4006,7 +4054,7 @@
       </p:sp>
       <p:pic>
         <p:nvPicPr>
-          <p:cNvPr id="8" name="Picture 7" descr="b43cc8ad2e0eadb2.png"/>
+          <p:cNvPr id="8" name="Picture 7" descr="02fe0df1b08bc8c2.png"/>
           <p:cNvPicPr>
             <a:picLocks noChangeAspect="1"/>
           </p:cNvPicPr>
@@ -4020,8 +4068,8 @@
         </p:blipFill>
         <p:spPr>
           <a:xfrm>
-            <a:off x="5532120" y="2103120"/>
-            <a:ext cx="1097280" cy="688848"/>
+            <a:off x="5515356" y="2103120"/>
+            <a:ext cx="1130808" cy="673608"/>
           </a:xfrm>
           <a:prstGeom prst="rect">
             <a:avLst/>
@@ -4036,7 +4084,7 @@
         </p:nvSpPr>
         <p:spPr>
           <a:xfrm>
-            <a:off x="777240" y="3294888"/>
+            <a:off x="777240" y="3279648"/>
             <a:ext cx="10607040" cy="429370"/>
           </a:xfrm>
           <a:prstGeom prst="rect">
@@ -4052,11 +4100,11 @@
           <a:p>
             <a:pPr algn="ctr"/>
             <a:r>
-              <a:rPr sz="2400" b="1" i="0">
+              <a:rPr sz="2280" b="1" i="0">
                 <a:solidFill>
                   <a:srgbClr val="1A1A1A"/>
                 </a:solidFill>
-                <a:latin typeface="Century Schoolbook"/>
+                <a:latin typeface="Lexend"/>
               </a:rPr>
               <a:t>Find the value.</a:t>
             </a:r>
@@ -4105,11 +4153,11 @@
           <a:p>
             <a:pPr algn="l"/>
             <a:r>
-              <a:rPr sz="3600" b="1" i="0">
+              <a:rPr sz="3420" b="1" i="0">
                 <a:solidFill>
                   <a:srgbClr val="1A1A1A"/>
                 </a:solidFill>
-                <a:latin typeface="Century Schoolbook"/>
+                <a:latin typeface="Lexend"/>
               </a:rPr>
               <a:t>Example 2</a:t>
             </a:r>
@@ -4245,11 +4293,11 @@
           <a:p>
             <a:pPr algn="l"/>
             <a:r>
-              <a:rPr sz="1100" b="0" i="1">
+              <a:rPr sz="1040" b="0" i="0">
                 <a:solidFill>
                   <a:srgbClr val="6B6B6B"/>
                 </a:solidFill>
-                <a:latin typeface="Century Schoolbook"/>
+                <a:latin typeface="Lexend"/>
               </a:rPr>
               <a:t>Grade 7 Accelerated · Unit 3 · Lesson 2 — Quotient Laws of Exponents</a:t>
             </a:r>
@@ -4280,11 +4328,11 @@
           <a:p>
             <a:pPr algn="r"/>
             <a:r>
-              <a:rPr sz="1100" b="0" i="0">
+              <a:rPr sz="1040" b="0" i="0">
                 <a:solidFill>
                   <a:srgbClr val="6B6B6B"/>
                 </a:solidFill>
-                <a:latin typeface="Century Schoolbook"/>
+                <a:latin typeface="Lexend"/>
               </a:rPr>
               <a:t>12</a:t>
             </a:r>
@@ -4293,7 +4341,7 @@
       </p:sp>
       <p:pic>
         <p:nvPicPr>
-          <p:cNvPr id="8" name="Picture 7" descr="7ab80e4044f30348.png"/>
+          <p:cNvPr id="8" name="Picture 7" descr="d097b929243b7c86.png"/>
           <p:cNvPicPr>
             <a:picLocks noChangeAspect="1"/>
           </p:cNvPicPr>
@@ -4308,7 +4356,7 @@
         <p:spPr>
           <a:xfrm>
             <a:off x="1828800" y="1920240"/>
-            <a:ext cx="3755136" cy="813816"/>
+            <a:ext cx="3834384" cy="795528"/>
           </a:xfrm>
           <a:prstGeom prst="rect">
             <a:avLst/>
@@ -4317,7 +4365,7 @@
       </p:pic>
       <p:pic>
         <p:nvPicPr>
-          <p:cNvPr id="9" name="Picture 8" descr="e1269a6bd0483359.png"/>
+          <p:cNvPr id="9" name="Picture 8" descr="798f0955cfae5705.png"/>
           <p:cNvPicPr>
             <a:picLocks noChangeAspect="1"/>
           </p:cNvPicPr>
@@ -4331,8 +4379,8 @@
         </p:blipFill>
         <p:spPr>
           <a:xfrm>
-            <a:off x="1828800" y="3008376"/>
-            <a:ext cx="3486912" cy="691896"/>
+            <a:off x="1828800" y="2990088"/>
+            <a:ext cx="3733799" cy="682752"/>
           </a:xfrm>
           <a:prstGeom prst="rect">
             <a:avLst/>
@@ -4341,7 +4389,7 @@
       </p:pic>
       <p:pic>
         <p:nvPicPr>
-          <p:cNvPr id="10" name="Picture 9" descr="ac2b58a90d22f614.png"/>
+          <p:cNvPr id="10" name="Picture 9" descr="66e59263d2af30b8.png"/>
           <p:cNvPicPr>
             <a:picLocks noChangeAspect="1"/>
           </p:cNvPicPr>
@@ -4355,8 +4403,8 @@
         </p:blipFill>
         <p:spPr>
           <a:xfrm>
-            <a:off x="1828800" y="3974592"/>
-            <a:ext cx="3447288" cy="411480"/>
+            <a:off x="1828800" y="3947160"/>
+            <a:ext cx="3703320" cy="408432"/>
           </a:xfrm>
           <a:prstGeom prst="rect">
             <a:avLst/>
@@ -4371,7 +4419,7 @@
         </p:nvSpPr>
         <p:spPr>
           <a:xfrm>
-            <a:off x="777240" y="4843272"/>
+            <a:off x="777240" y="4812791"/>
             <a:ext cx="10607040" cy="548640"/>
           </a:xfrm>
           <a:prstGeom prst="rect">
@@ -4387,11 +4435,11 @@
           <a:p>
             <a:pPr algn="ctr"/>
             <a:r>
-              <a:rPr sz="3200" b="1" i="0">
+              <a:rPr sz="3040" b="1" i="0">
                 <a:solidFill>
                   <a:srgbClr val="9E1B32"/>
                 </a:solidFill>
-                <a:latin typeface="Century Schoolbook"/>
+                <a:latin typeface="Lexend"/>
               </a:rPr>
               <a:t>Answer:   0.00000016</a:t>
             </a:r>
@@ -4440,11 +4488,11 @@
           <a:p>
             <a:pPr algn="l"/>
             <a:r>
-              <a:rPr sz="3600" b="1" i="0">
+              <a:rPr sz="3420" b="1" i="0">
                 <a:solidFill>
                   <a:srgbClr val="1A1A1A"/>
                 </a:solidFill>
-                <a:latin typeface="Century Schoolbook"/>
+                <a:latin typeface="Lexend"/>
               </a:rPr>
               <a:t>Your Turn</a:t>
             </a:r>
@@ -4580,11 +4628,11 @@
           <a:p>
             <a:pPr algn="l"/>
             <a:r>
-              <a:rPr sz="1100" b="0" i="1">
+              <a:rPr sz="1040" b="0" i="0">
                 <a:solidFill>
                   <a:srgbClr val="6B6B6B"/>
                 </a:solidFill>
-                <a:latin typeface="Century Schoolbook"/>
+                <a:latin typeface="Lexend"/>
               </a:rPr>
               <a:t>Grade 7 Accelerated · Unit 3 · Lesson 2 — Quotient Laws of Exponents</a:t>
             </a:r>
@@ -4615,11 +4663,11 @@
           <a:p>
             <a:pPr algn="r"/>
             <a:r>
-              <a:rPr sz="1100" b="0" i="0">
+              <a:rPr sz="1040" b="0" i="0">
                 <a:solidFill>
                   <a:srgbClr val="6B6B6B"/>
                 </a:solidFill>
-                <a:latin typeface="Century Schoolbook"/>
+                <a:latin typeface="Lexend"/>
               </a:rPr>
               <a:t>13</a:t>
             </a:r>
@@ -4628,7 +4676,7 @@
       </p:sp>
       <p:pic>
         <p:nvPicPr>
-          <p:cNvPr id="8" name="Picture 7" descr="e60d4cb6647beeea.png"/>
+          <p:cNvPr id="8" name="Picture 7" descr="44e7eea339e5c1d1.png"/>
           <p:cNvPicPr>
             <a:picLocks noChangeAspect="1"/>
           </p:cNvPicPr>
@@ -4642,8 +4690,8 @@
         </p:blipFill>
         <p:spPr>
           <a:xfrm>
-            <a:off x="5597651" y="2194560"/>
-            <a:ext cx="966216" cy="853440"/>
+            <a:off x="5576315" y="1600200"/>
+            <a:ext cx="1008888" cy="835152"/>
           </a:xfrm>
           <a:prstGeom prst="rect">
             <a:avLst/>
@@ -4658,7 +4706,7 @@
         </p:nvSpPr>
         <p:spPr>
           <a:xfrm>
-            <a:off x="777240" y="3550920"/>
+            <a:off x="777240" y="2938272"/>
             <a:ext cx="10607040" cy="429370"/>
           </a:xfrm>
           <a:prstGeom prst="rect">
@@ -4674,11 +4722,11 @@
           <a:p>
             <a:pPr algn="ctr"/>
             <a:r>
-              <a:rPr sz="2400" b="1" i="0">
+              <a:rPr sz="2280" b="1" i="0">
                 <a:solidFill>
                   <a:srgbClr val="1A1A1A"/>
                 </a:solidFill>
-                <a:latin typeface="Century Schoolbook"/>
+                <a:latin typeface="Lexend"/>
               </a:rPr>
               <a:t>Find the value.</a:t>
             </a:r>
@@ -4727,11 +4775,11 @@
           <a:p>
             <a:pPr algn="l"/>
             <a:r>
-              <a:rPr sz="3600" b="1" i="0">
+              <a:rPr sz="3420" b="1" i="0">
                 <a:solidFill>
                   <a:srgbClr val="1A1A1A"/>
                 </a:solidFill>
-                <a:latin typeface="Century Schoolbook"/>
+                <a:latin typeface="Lexend"/>
               </a:rPr>
               <a:t>Your Turn</a:t>
             </a:r>
@@ -4867,11 +4915,11 @@
           <a:p>
             <a:pPr algn="l"/>
             <a:r>
-              <a:rPr sz="1100" b="0" i="1">
+              <a:rPr sz="1040" b="0" i="0">
                 <a:solidFill>
                   <a:srgbClr val="6B6B6B"/>
                 </a:solidFill>
-                <a:latin typeface="Century Schoolbook"/>
+                <a:latin typeface="Lexend"/>
               </a:rPr>
               <a:t>Grade 7 Accelerated · Unit 3 · Lesson 2 — Quotient Laws of Exponents</a:t>
             </a:r>
@@ -4902,11 +4950,11 @@
           <a:p>
             <a:pPr algn="r"/>
             <a:r>
-              <a:rPr sz="1100" b="0" i="0">
+              <a:rPr sz="1040" b="0" i="0">
                 <a:solidFill>
                   <a:srgbClr val="6B6B6B"/>
                 </a:solidFill>
-                <a:latin typeface="Century Schoolbook"/>
+                <a:latin typeface="Lexend"/>
               </a:rPr>
               <a:t>14</a:t>
             </a:r>
@@ -4915,7 +4963,7 @@
       </p:sp>
       <p:pic>
         <p:nvPicPr>
-          <p:cNvPr id="8" name="Picture 7" descr="74bc3eff5c14b1ec.png"/>
+          <p:cNvPr id="8" name="Picture 7" descr="be6f9f06f866032a.png"/>
           <p:cNvPicPr>
             <a:picLocks noChangeAspect="1"/>
           </p:cNvPicPr>
@@ -4929,8 +4977,8 @@
         </p:blipFill>
         <p:spPr>
           <a:xfrm>
-            <a:off x="5594604" y="2194560"/>
-            <a:ext cx="972311" cy="856488"/>
+            <a:off x="5574791" y="1600200"/>
+            <a:ext cx="1011936" cy="835152"/>
           </a:xfrm>
           <a:prstGeom prst="rect">
             <a:avLst/>
@@ -4945,7 +4993,7 @@
         </p:nvSpPr>
         <p:spPr>
           <a:xfrm>
-            <a:off x="777240" y="3553968"/>
+            <a:off x="777240" y="2938272"/>
             <a:ext cx="10607040" cy="429370"/>
           </a:xfrm>
           <a:prstGeom prst="rect">
@@ -4961,55 +5009,20 @@
           <a:p>
             <a:pPr algn="ctr"/>
             <a:r>
-              <a:rPr sz="2400" b="1" i="0">
+              <a:rPr sz="2280" b="1" i="0">
                 <a:solidFill>
                   <a:srgbClr val="1A1A1A"/>
                 </a:solidFill>
-                <a:latin typeface="Century Schoolbook"/>
+                <a:latin typeface="Lexend"/>
               </a:rPr>
               <a:t>Find the value.</a:t>
-            </a:r>
-          </a:p>
-        </p:txBody>
-      </p:sp>
-      <p:sp>
-        <p:nvSpPr>
-          <p:cNvPr id="10" name="TextBox 9"/>
-          <p:cNvSpPr txBox="1"/>
-          <p:nvPr/>
-        </p:nvSpPr>
-        <p:spPr>
-          <a:xfrm>
-            <a:off x="4864607" y="4639056"/>
-            <a:ext cx="1920240" cy="548640"/>
-          </a:xfrm>
-          <a:prstGeom prst="rect">
-            <a:avLst/>
-          </a:prstGeom>
-          <a:noFill/>
-        </p:spPr>
-        <p:txBody>
-          <a:bodyPr wrap="square" lIns="45720" rIns="45720" tIns="18288" bIns="18288" anchor="ctr">
-            <a:spAutoFit/>
-          </a:bodyPr>
-          <a:lstStyle/>
-          <a:p>
-            <a:pPr algn="l"/>
-            <a:r>
-              <a:rPr sz="3200" b="1" i="0">
-                <a:solidFill>
-                  <a:srgbClr val="9E1B32"/>
-                </a:solidFill>
-                <a:latin typeface="Century Schoolbook"/>
-              </a:rPr>
-              <a:t>Answer:</a:t>
             </a:r>
           </a:p>
         </p:txBody>
       </p:sp>
       <p:pic>
         <p:nvPicPr>
-          <p:cNvPr id="11" name="Picture 10" descr="78fdb0141a7d8d23.png"/>
+          <p:cNvPr id="10" name="Picture 9" descr="02ea3d3dd2c1ff1c.png"/>
           <p:cNvPicPr>
             <a:picLocks noChangeAspect="1"/>
           </p:cNvPicPr>
@@ -5023,8 +5036,67 @@
         </p:blipFill>
         <p:spPr>
           <a:xfrm>
-            <a:off x="6784848" y="4480560"/>
-            <a:ext cx="512064" cy="865632"/>
+            <a:off x="5024627" y="3550522"/>
+            <a:ext cx="2215896" cy="713232"/>
+          </a:xfrm>
+          <a:prstGeom prst="rect">
+            <a:avLst/>
+          </a:prstGeom>
+        </p:spPr>
+      </p:pic>
+      <p:sp>
+        <p:nvSpPr>
+          <p:cNvPr id="11" name="TextBox 10"/>
+          <p:cNvSpPr txBox="1"/>
+          <p:nvPr/>
+        </p:nvSpPr>
+        <p:spPr>
+          <a:xfrm>
+            <a:off x="4834128" y="4625340"/>
+            <a:ext cx="1920240" cy="548640"/>
+          </a:xfrm>
+          <a:prstGeom prst="rect">
+            <a:avLst/>
+          </a:prstGeom>
+          <a:noFill/>
+        </p:spPr>
+        <p:txBody>
+          <a:bodyPr wrap="square" lIns="45720" rIns="45720" tIns="18288" bIns="18288" anchor="ctr">
+            <a:spAutoFit/>
+          </a:bodyPr>
+          <a:lstStyle/>
+          <a:p>
+            <a:pPr algn="l"/>
+            <a:r>
+              <a:rPr sz="3040" b="1" i="0">
+                <a:solidFill>
+                  <a:srgbClr val="9E1B32"/>
+                </a:solidFill>
+                <a:latin typeface="Lexend"/>
+              </a:rPr>
+              <a:t>Answer:</a:t>
+            </a:r>
+          </a:p>
+        </p:txBody>
+      </p:sp>
+      <p:pic>
+        <p:nvPicPr>
+          <p:cNvPr id="12" name="Picture 11" descr="b8c676244c610a84.png"/>
+          <p:cNvPicPr>
+            <a:picLocks noChangeAspect="1"/>
+          </p:cNvPicPr>
+          <p:nvPr/>
+        </p:nvPicPr>
+        <p:blipFill>
+          <a:blip r:embed="rId4"/>
+          <a:stretch>
+            <a:fillRect/>
+          </a:stretch>
+        </p:blipFill>
+        <p:spPr>
+          <a:xfrm>
+            <a:off x="6754368" y="4480560"/>
+            <a:ext cx="573024" cy="838200"/>
           </a:xfrm>
           <a:prstGeom prst="rect">
             <a:avLst/>
@@ -5073,11 +5145,11 @@
           <a:p>
             <a:pPr algn="l"/>
             <a:r>
-              <a:rPr sz="3400" b="1" i="0">
+              <a:rPr sz="3229" b="1" i="0">
                 <a:solidFill>
                   <a:srgbClr val="1A1A1A"/>
                 </a:solidFill>
-                <a:latin typeface="Century Schoolbook"/>
+                <a:latin typeface="Lexend"/>
               </a:rPr>
               <a:t>Whiteboards   ·   Question 1 of 9</a:t>
             </a:r>
@@ -5213,11 +5285,11 @@
           <a:p>
             <a:pPr algn="l"/>
             <a:r>
-              <a:rPr sz="1100" b="0" i="1">
+              <a:rPr sz="1040" b="0" i="0">
                 <a:solidFill>
                   <a:srgbClr val="6B6B6B"/>
                 </a:solidFill>
-                <a:latin typeface="Century Schoolbook"/>
+                <a:latin typeface="Lexend"/>
               </a:rPr>
               <a:t>Grade 7 Accelerated · Unit 3 · Lesson 2 — Quotient Laws of Exponents</a:t>
             </a:r>
@@ -5248,11 +5320,11 @@
           <a:p>
             <a:pPr algn="r"/>
             <a:r>
-              <a:rPr sz="1100" b="0" i="0">
+              <a:rPr sz="1040" b="0" i="0">
                 <a:solidFill>
                   <a:srgbClr val="6B6B6B"/>
                 </a:solidFill>
-                <a:latin typeface="Century Schoolbook"/>
+                <a:latin typeface="Lexend"/>
               </a:rPr>
               <a:t>15</a:t>
             </a:r>
@@ -5261,7 +5333,7 @@
       </p:sp>
       <p:pic>
         <p:nvPicPr>
-          <p:cNvPr id="8" name="Picture 7" descr="858f7499cc3aa9e8.png"/>
+          <p:cNvPr id="8" name="Picture 7" descr="3e9756fa540e4cb8.png"/>
           <p:cNvPicPr>
             <a:picLocks noChangeAspect="1"/>
           </p:cNvPicPr>
@@ -5275,8 +5347,8 @@
         </p:blipFill>
         <p:spPr>
           <a:xfrm>
-            <a:off x="5721095" y="2194560"/>
-            <a:ext cx="719328" cy="1014984"/>
+            <a:off x="5707380" y="2194560"/>
+            <a:ext cx="746760" cy="990599"/>
           </a:xfrm>
           <a:prstGeom prst="rect">
             <a:avLst/>
@@ -5307,11 +5379,11 @@
           <a:p>
             <a:pPr algn="ctr"/>
             <a:r>
-              <a:rPr sz="2600" b="1" i="0">
+              <a:rPr sz="2470" b="1" i="0">
                 <a:solidFill>
                   <a:srgbClr val="1A1A1A"/>
                 </a:solidFill>
-                <a:latin typeface="Century Schoolbook"/>
+                <a:latin typeface="Lexend"/>
               </a:rPr>
               <a:t>Answer it.</a:t>
             </a:r>
@@ -5360,11 +5432,11 @@
           <a:p>
             <a:pPr algn="l"/>
             <a:r>
-              <a:rPr sz="3400" b="1" i="0">
+              <a:rPr sz="3229" b="1" i="0">
                 <a:solidFill>
                   <a:srgbClr val="1A1A1A"/>
                 </a:solidFill>
-                <a:latin typeface="Century Schoolbook"/>
+                <a:latin typeface="Lexend"/>
               </a:rPr>
               <a:t>Whiteboards   ·   Question 1 of 9</a:t>
             </a:r>
@@ -5500,11 +5572,11 @@
           <a:p>
             <a:pPr algn="l"/>
             <a:r>
-              <a:rPr sz="1100" b="0" i="1">
+              <a:rPr sz="1040" b="0" i="0">
                 <a:solidFill>
                   <a:srgbClr val="6B6B6B"/>
                 </a:solidFill>
-                <a:latin typeface="Century Schoolbook"/>
+                <a:latin typeface="Lexend"/>
               </a:rPr>
               <a:t>Grade 7 Accelerated · Unit 3 · Lesson 2 — Quotient Laws of Exponents</a:t>
             </a:r>
@@ -5535,11 +5607,11 @@
           <a:p>
             <a:pPr algn="r"/>
             <a:r>
-              <a:rPr sz="1100" b="0" i="0">
+              <a:rPr sz="1040" b="0" i="0">
                 <a:solidFill>
                   <a:srgbClr val="6B6B6B"/>
                 </a:solidFill>
-                <a:latin typeface="Century Schoolbook"/>
+                <a:latin typeface="Lexend"/>
               </a:rPr>
               <a:t>16</a:t>
             </a:r>
@@ -5548,7 +5620,7 @@
       </p:sp>
       <p:pic>
         <p:nvPicPr>
-          <p:cNvPr id="8" name="Picture 7" descr="b0b61f7be1f45fff.png"/>
+          <p:cNvPr id="8" name="Picture 7" descr="ca365731157fa0d2.png"/>
           <p:cNvPicPr>
             <a:picLocks noChangeAspect="1"/>
           </p:cNvPicPr>
@@ -5562,52 +5634,17 @@
         </p:blipFill>
         <p:spPr>
           <a:xfrm>
-            <a:off x="5722620" y="2103120"/>
-            <a:ext cx="716280" cy="1018032"/>
+            <a:off x="5708904" y="2103120"/>
+            <a:ext cx="743712" cy="990599"/>
           </a:xfrm>
           <a:prstGeom prst="rect">
             <a:avLst/>
           </a:prstGeom>
         </p:spPr>
       </p:pic>
-      <p:sp>
-        <p:nvSpPr>
-          <p:cNvPr id="9" name="TextBox 8"/>
-          <p:cNvSpPr txBox="1"/>
-          <p:nvPr/>
-        </p:nvSpPr>
-        <p:spPr>
-          <a:xfrm>
-            <a:off x="4805172" y="4605528"/>
-            <a:ext cx="1920240" cy="548640"/>
-          </a:xfrm>
-          <a:prstGeom prst="rect">
-            <a:avLst/>
-          </a:prstGeom>
-          <a:noFill/>
-        </p:spPr>
-        <p:txBody>
-          <a:bodyPr wrap="square" lIns="45720" rIns="45720" tIns="18288" bIns="18288" anchor="ctr">
-            <a:spAutoFit/>
-          </a:bodyPr>
-          <a:lstStyle/>
-          <a:p>
-            <a:pPr algn="l"/>
-            <a:r>
-              <a:rPr sz="3200" b="1" i="0">
-                <a:solidFill>
-                  <a:srgbClr val="9E1B32"/>
-                </a:solidFill>
-                <a:latin typeface="Century Schoolbook"/>
-              </a:rPr>
-              <a:t>Answer:</a:t>
-            </a:r>
-          </a:p>
-        </p:txBody>
-      </p:sp>
       <p:pic>
         <p:nvPicPr>
-          <p:cNvPr id="10" name="Picture 9" descr="6677a7c756544677.png"/>
+          <p:cNvPr id="9" name="Picture 8" descr="f1d501cf95f3572e.png"/>
           <p:cNvPicPr>
             <a:picLocks noChangeAspect="1"/>
           </p:cNvPicPr>
@@ -5621,8 +5658,67 @@
         </p:blipFill>
         <p:spPr>
           <a:xfrm>
-            <a:off x="6725412" y="4663440"/>
-            <a:ext cx="630936" cy="432816"/>
+            <a:off x="4808219" y="3395471"/>
+            <a:ext cx="2654808" cy="716280"/>
+          </a:xfrm>
+          <a:prstGeom prst="rect">
+            <a:avLst/>
+          </a:prstGeom>
+        </p:spPr>
+      </p:pic>
+      <p:sp>
+        <p:nvSpPr>
+          <p:cNvPr id="10" name="TextBox 9"/>
+          <p:cNvSpPr txBox="1"/>
+          <p:nvPr/>
+        </p:nvSpPr>
+        <p:spPr>
+          <a:xfrm>
+            <a:off x="4783836" y="4600956"/>
+            <a:ext cx="1920240" cy="548640"/>
+          </a:xfrm>
+          <a:prstGeom prst="rect">
+            <a:avLst/>
+          </a:prstGeom>
+          <a:noFill/>
+        </p:spPr>
+        <p:txBody>
+          <a:bodyPr wrap="square" lIns="45720" rIns="45720" tIns="18288" bIns="18288" anchor="ctr">
+            <a:spAutoFit/>
+          </a:bodyPr>
+          <a:lstStyle/>
+          <a:p>
+            <a:pPr algn="l"/>
+            <a:r>
+              <a:rPr sz="3040" b="1" i="0">
+                <a:solidFill>
+                  <a:srgbClr val="9E1B32"/>
+                </a:solidFill>
+                <a:latin typeface="Lexend"/>
+              </a:rPr>
+              <a:t>Answer:</a:t>
+            </a:r>
+          </a:p>
+        </p:txBody>
+      </p:sp>
+      <p:pic>
+        <p:nvPicPr>
+          <p:cNvPr id="11" name="Picture 10" descr="20daecf28d212846.png"/>
+          <p:cNvPicPr>
+            <a:picLocks noChangeAspect="1"/>
+          </p:cNvPicPr>
+          <p:nvPr/>
+        </p:nvPicPr>
+        <p:blipFill>
+          <a:blip r:embed="rId4"/>
+          <a:stretch>
+            <a:fillRect/>
+          </a:stretch>
+        </p:blipFill>
+        <p:spPr>
+          <a:xfrm>
+            <a:off x="6704076" y="4663440"/>
+            <a:ext cx="673608" cy="423672"/>
           </a:xfrm>
           <a:prstGeom prst="rect">
             <a:avLst/>
@@ -5671,11 +5767,11 @@
           <a:p>
             <a:pPr algn="l"/>
             <a:r>
-              <a:rPr sz="3400" b="1" i="0">
+              <a:rPr sz="3229" b="1" i="0">
                 <a:solidFill>
                   <a:srgbClr val="1A1A1A"/>
                 </a:solidFill>
-                <a:latin typeface="Century Schoolbook"/>
+                <a:latin typeface="Lexend"/>
               </a:rPr>
               <a:t>Whiteboards   ·   Question 2 of 9</a:t>
             </a:r>
@@ -5811,11 +5907,11 @@
           <a:p>
             <a:pPr algn="l"/>
             <a:r>
-              <a:rPr sz="1100" b="0" i="1">
+              <a:rPr sz="1040" b="0" i="0">
                 <a:solidFill>
                   <a:srgbClr val="6B6B6B"/>
                 </a:solidFill>
-                <a:latin typeface="Century Schoolbook"/>
+                <a:latin typeface="Lexend"/>
               </a:rPr>
               <a:t>Grade 7 Accelerated · Unit 3 · Lesson 2 — Quotient Laws of Exponents</a:t>
             </a:r>
@@ -5846,11 +5942,11 @@
           <a:p>
             <a:pPr algn="r"/>
             <a:r>
-              <a:rPr sz="1100" b="0" i="0">
+              <a:rPr sz="1040" b="0" i="0">
                 <a:solidFill>
                   <a:srgbClr val="6B6B6B"/>
                 </a:solidFill>
-                <a:latin typeface="Century Schoolbook"/>
+                <a:latin typeface="Lexend"/>
               </a:rPr>
               <a:t>17</a:t>
             </a:r>
@@ -5866,7 +5962,7 @@
         <p:spPr>
           <a:xfrm>
             <a:off x="1234440" y="1851660"/>
-            <a:ext cx="2584093" cy="457200"/>
+            <a:ext cx="2561920" cy="457200"/>
           </a:xfrm>
           <a:prstGeom prst="rect">
             <a:avLst/>
@@ -5881,11 +5977,11 @@
           <a:p>
             <a:pPr algn="l"/>
             <a:r>
-              <a:rPr sz="2400" b="0" i="0">
+              <a:rPr sz="2280" b="0" i="0">
                 <a:solidFill>
                   <a:srgbClr val="1A1A1A"/>
                 </a:solidFill>
-                <a:latin typeface="Century Schoolbook"/>
+                <a:latin typeface="Lexend"/>
               </a:rPr>
               <a:t>A website puts  </a:t>
             </a:r>
@@ -5894,7 +5990,7 @@
       </p:sp>
       <p:pic>
         <p:nvPicPr>
-          <p:cNvPr id="9" name="Picture 8" descr="138fda7418465782.png"/>
+          <p:cNvPr id="9" name="Picture 8" descr="d7dee7bac0eb5ce9.png"/>
           <p:cNvPicPr>
             <a:picLocks noChangeAspect="1"/>
           </p:cNvPicPr>
@@ -5908,8 +6004,8 @@
         </p:blipFill>
         <p:spPr>
           <a:xfrm>
-            <a:off x="3681373" y="1938527"/>
-            <a:ext cx="259080" cy="283464"/>
+            <a:off x="3659200" y="1946147"/>
+            <a:ext cx="295656" cy="268224"/>
           </a:xfrm>
           <a:prstGeom prst="rect">
             <a:avLst/>
@@ -5924,8 +6020,8 @@
         </p:nvSpPr>
         <p:spPr>
           <a:xfrm>
-            <a:off x="3940453" y="1851660"/>
-            <a:ext cx="4495119" cy="457200"/>
+            <a:off x="3954856" y="1851660"/>
+            <a:ext cx="4474161" cy="457200"/>
           </a:xfrm>
           <a:prstGeom prst="rect">
             <a:avLst/>
@@ -5940,11 +6036,11 @@
           <a:p>
             <a:pPr algn="l"/>
             <a:r>
-              <a:rPr sz="2400" b="0" i="0">
+              <a:rPr sz="2280" b="0" i="0">
                 <a:solidFill>
                   <a:srgbClr val="1A1A1A"/>
                 </a:solidFill>
-                <a:latin typeface="Century Schoolbook"/>
+                <a:latin typeface="Lexend"/>
               </a:rPr>
               <a:t>  photos into 8 equal albums.</a:t>
             </a:r>
@@ -5975,11 +6071,11 @@
           <a:p>
             <a:pPr algn="l"/>
             <a:r>
-              <a:rPr sz="2400" b="0" i="0">
+              <a:rPr sz="2280" b="0" i="0">
                 <a:solidFill>
                   <a:srgbClr val="1A1A1A"/>
                 </a:solidFill>
-                <a:latin typeface="Century Schoolbook"/>
+                <a:latin typeface="Lexend"/>
               </a:rPr>
               <a:t>The site is 30 days old.</a:t>
             </a:r>
@@ -6010,11 +6106,11 @@
           <a:p>
             <a:pPr algn="l"/>
             <a:r>
-              <a:rPr sz="2400" b="1" i="0">
+              <a:rPr sz="2280" b="1" i="0">
                 <a:solidFill>
                   <a:srgbClr val="1A1A1A"/>
                 </a:solidFill>
-                <a:latin typeface="Century Schoolbook"/>
+                <a:latin typeface="Lexend"/>
               </a:rPr>
               <a:t>How many photos are in each album?</a:t>
             </a:r>
@@ -6045,11 +6141,11 @@
           <a:p>
             <a:pPr algn="ctr"/>
             <a:r>
-              <a:rPr sz="2600" b="1" i="0">
+              <a:rPr sz="2470" b="1" i="0">
                 <a:solidFill>
                   <a:srgbClr val="1A1A1A"/>
                 </a:solidFill>
-                <a:latin typeface="Century Schoolbook"/>
+                <a:latin typeface="Lexend"/>
               </a:rPr>
               <a:t>Answer it.</a:t>
             </a:r>
@@ -6098,11 +6194,11 @@
           <a:p>
             <a:pPr algn="l"/>
             <a:r>
-              <a:rPr sz="3400" b="1" i="0">
+              <a:rPr sz="3229" b="1" i="0">
                 <a:solidFill>
                   <a:srgbClr val="1A1A1A"/>
                 </a:solidFill>
-                <a:latin typeface="Century Schoolbook"/>
+                <a:latin typeface="Lexend"/>
               </a:rPr>
               <a:t>Whiteboards   ·   Question 2 of 9</a:t>
             </a:r>
@@ -6238,11 +6334,11 @@
           <a:p>
             <a:pPr algn="l"/>
             <a:r>
-              <a:rPr sz="1100" b="0" i="1">
+              <a:rPr sz="1040" b="0" i="0">
                 <a:solidFill>
                   <a:srgbClr val="6B6B6B"/>
                 </a:solidFill>
-                <a:latin typeface="Century Schoolbook"/>
+                <a:latin typeface="Lexend"/>
               </a:rPr>
               <a:t>Grade 7 Accelerated · Unit 3 · Lesson 2 — Quotient Laws of Exponents</a:t>
             </a:r>
@@ -6273,11 +6369,11 @@
           <a:p>
             <a:pPr algn="r"/>
             <a:r>
-              <a:rPr sz="1100" b="0" i="0">
+              <a:rPr sz="1040" b="0" i="0">
                 <a:solidFill>
                   <a:srgbClr val="6B6B6B"/>
                 </a:solidFill>
-                <a:latin typeface="Century Schoolbook"/>
+                <a:latin typeface="Lexend"/>
               </a:rPr>
               <a:t>18</a:t>
             </a:r>
@@ -6293,7 +6389,7 @@
         <p:spPr>
           <a:xfrm>
             <a:off x="1234440" y="1851660"/>
-            <a:ext cx="2584093" cy="457200"/>
+            <a:ext cx="2561920" cy="457200"/>
           </a:xfrm>
           <a:prstGeom prst="rect">
             <a:avLst/>
@@ -6308,11 +6404,11 @@
           <a:p>
             <a:pPr algn="l"/>
             <a:r>
-              <a:rPr sz="2400" b="0" i="0">
+              <a:rPr sz="2280" b="0" i="0">
                 <a:solidFill>
                   <a:srgbClr val="1A1A1A"/>
                 </a:solidFill>
-                <a:latin typeface="Century Schoolbook"/>
+                <a:latin typeface="Lexend"/>
               </a:rPr>
               <a:t>A website puts  </a:t>
             </a:r>
@@ -6321,7 +6417,7 @@
       </p:sp>
       <p:pic>
         <p:nvPicPr>
-          <p:cNvPr id="9" name="Picture 8" descr="7c23c9fd82d9d425.png"/>
+          <p:cNvPr id="9" name="Picture 8" descr="249c39e603376802.png"/>
           <p:cNvPicPr>
             <a:picLocks noChangeAspect="1"/>
           </p:cNvPicPr>
@@ -6335,8 +6431,8 @@
         </p:blipFill>
         <p:spPr>
           <a:xfrm>
-            <a:off x="3681373" y="1940052"/>
-            <a:ext cx="265176" cy="280416"/>
+            <a:off x="3659200" y="1944623"/>
+            <a:ext cx="295656" cy="271272"/>
           </a:xfrm>
           <a:prstGeom prst="rect">
             <a:avLst/>
@@ -6351,8 +6447,8 @@
         </p:nvSpPr>
         <p:spPr>
           <a:xfrm>
-            <a:off x="3946549" y="1851660"/>
-            <a:ext cx="4495119" cy="457200"/>
+            <a:off x="3954856" y="1851660"/>
+            <a:ext cx="4474161" cy="457200"/>
           </a:xfrm>
           <a:prstGeom prst="rect">
             <a:avLst/>
@@ -6367,11 +6463,11 @@
           <a:p>
             <a:pPr algn="l"/>
             <a:r>
-              <a:rPr sz="2400" b="0" i="0">
+              <a:rPr sz="2280" b="0" i="0">
                 <a:solidFill>
                   <a:srgbClr val="1A1A1A"/>
                 </a:solidFill>
-                <a:latin typeface="Century Schoolbook"/>
+                <a:latin typeface="Lexend"/>
               </a:rPr>
               <a:t>  photos into 8 equal albums.</a:t>
             </a:r>
@@ -6402,11 +6498,11 @@
           <a:p>
             <a:pPr algn="l"/>
             <a:r>
-              <a:rPr sz="2400" b="0" i="0">
+              <a:rPr sz="2280" b="0" i="0">
                 <a:solidFill>
                   <a:srgbClr val="1A1A1A"/>
                 </a:solidFill>
-                <a:latin typeface="Century Schoolbook"/>
+                <a:latin typeface="Lexend"/>
               </a:rPr>
               <a:t>The site is 30 days old.</a:t>
             </a:r>
@@ -6437,26 +6533,74 @@
           <a:p>
             <a:pPr algn="l"/>
             <a:r>
-              <a:rPr sz="2400" b="1" i="0">
+              <a:rPr sz="2280" b="1" i="0">
                 <a:solidFill>
                   <a:srgbClr val="1A1A1A"/>
                 </a:solidFill>
-                <a:latin typeface="Century Schoolbook"/>
+                <a:latin typeface="Lexend"/>
               </a:rPr>
               <a:t>How many photos are in each album?</a:t>
             </a:r>
           </a:p>
         </p:txBody>
       </p:sp>
-      <p:sp>
-        <p:nvSpPr>
-          <p:cNvPr id="13" name="TextBox 12"/>
-          <p:cNvSpPr txBox="1"/>
-          <p:nvPr/>
-        </p:nvSpPr>
-        <p:spPr>
-          <a:xfrm>
-            <a:off x="777240" y="4663440"/>
+      <p:pic>
+        <p:nvPicPr>
+          <p:cNvPr id="13" name="Picture 12" descr="6c1f346a6254f114.png"/>
+          <p:cNvPicPr>
+            <a:picLocks noChangeAspect="1"/>
+          </p:cNvPicPr>
+          <p:nvPr/>
+        </p:nvPicPr>
+        <p:blipFill>
+          <a:blip r:embed="rId3"/>
+          <a:stretch>
+            <a:fillRect/>
+          </a:stretch>
+        </p:blipFill>
+        <p:spPr>
+          <a:xfrm>
+            <a:off x="4773167" y="3739100"/>
+            <a:ext cx="2727960" cy="301752"/>
+          </a:xfrm>
+          <a:prstGeom prst="rect">
+            <a:avLst/>
+          </a:prstGeom>
+        </p:spPr>
+      </p:pic>
+      <p:pic>
+        <p:nvPicPr>
+          <p:cNvPr id="14" name="Picture 13" descr="7e3b81dbc2bff30b.png"/>
+          <p:cNvPicPr>
+            <a:picLocks noChangeAspect="1"/>
+          </p:cNvPicPr>
+          <p:nvPr/>
+        </p:nvPicPr>
+        <p:blipFill>
+          <a:blip r:embed="rId4"/>
+          <a:stretch>
+            <a:fillRect/>
+          </a:stretch>
+        </p:blipFill>
+        <p:spPr>
+          <a:xfrm>
+            <a:off x="4773167" y="4277072"/>
+            <a:ext cx="1213104" cy="304800"/>
+          </a:xfrm>
+          <a:prstGeom prst="rect">
+            <a:avLst/>
+          </a:prstGeom>
+        </p:spPr>
+      </p:pic>
+      <p:sp>
+        <p:nvSpPr>
+          <p:cNvPr id="15" name="TextBox 14"/>
+          <p:cNvSpPr txBox="1"/>
+          <p:nvPr/>
+        </p:nvSpPr>
+        <p:spPr>
+          <a:xfrm>
+            <a:off x="777240" y="4772372"/>
             <a:ext cx="10607040" cy="548640"/>
           </a:xfrm>
           <a:prstGeom prst="rect">
@@ -6472,11 +6616,11 @@
           <a:p>
             <a:pPr algn="ctr"/>
             <a:r>
-              <a:rPr sz="3200" b="1" i="0">
+              <a:rPr sz="3040" b="1" i="0">
                 <a:solidFill>
                   <a:srgbClr val="9E1B32"/>
                 </a:solidFill>
-                <a:latin typeface="Century Schoolbook"/>
+                <a:latin typeface="Lexend"/>
               </a:rPr>
               <a:t>Answer:   512</a:t>
             </a:r>
@@ -6525,11 +6669,11 @@
           <a:p>
             <a:pPr algn="l"/>
             <a:r>
-              <a:rPr sz="3400" b="1" i="0">
+              <a:rPr sz="3229" b="1" i="0">
                 <a:solidFill>
                   <a:srgbClr val="1A1A1A"/>
                 </a:solidFill>
-                <a:latin typeface="Century Schoolbook"/>
+                <a:latin typeface="Lexend"/>
               </a:rPr>
               <a:t>Whiteboards   ·   Question 3 of 9</a:t>
             </a:r>
@@ -6665,11 +6809,11 @@
           <a:p>
             <a:pPr algn="l"/>
             <a:r>
-              <a:rPr sz="1100" b="0" i="1">
+              <a:rPr sz="1040" b="0" i="0">
                 <a:solidFill>
                   <a:srgbClr val="6B6B6B"/>
                 </a:solidFill>
-                <a:latin typeface="Century Schoolbook"/>
+                <a:latin typeface="Lexend"/>
               </a:rPr>
               <a:t>Grade 7 Accelerated · Unit 3 · Lesson 2 — Quotient Laws of Exponents</a:t>
             </a:r>
@@ -6700,11 +6844,11 @@
           <a:p>
             <a:pPr algn="r"/>
             <a:r>
-              <a:rPr sz="1100" b="0" i="0">
+              <a:rPr sz="1040" b="0" i="0">
                 <a:solidFill>
                   <a:srgbClr val="6B6B6B"/>
                 </a:solidFill>
-                <a:latin typeface="Century Schoolbook"/>
+                <a:latin typeface="Lexend"/>
               </a:rPr>
               <a:t>19</a:t>
             </a:r>
@@ -6713,7 +6857,7 @@
       </p:sp>
       <p:pic>
         <p:nvPicPr>
-          <p:cNvPr id="8" name="Picture 7" descr="1252d608a87976a6.png"/>
+          <p:cNvPr id="8" name="Picture 7" descr="65357565e2967fbb.png"/>
           <p:cNvPicPr>
             <a:picLocks noChangeAspect="1"/>
           </p:cNvPicPr>
@@ -6727,8 +6871,8 @@
         </p:blipFill>
         <p:spPr>
           <a:xfrm>
-            <a:off x="5504688" y="2194560"/>
-            <a:ext cx="1152144" cy="1197864"/>
+            <a:off x="5522975" y="2194560"/>
+            <a:ext cx="1115568" cy="1167384"/>
           </a:xfrm>
           <a:prstGeom prst="rect">
             <a:avLst/>
@@ -6759,11 +6903,11 @@
           <a:p>
             <a:pPr algn="ctr"/>
             <a:r>
-              <a:rPr sz="2600" b="1" i="0">
+              <a:rPr sz="2470" b="1" i="0">
                 <a:solidFill>
                   <a:srgbClr val="1A1A1A"/>
                 </a:solidFill>
-                <a:latin typeface="Century Schoolbook"/>
+                <a:latin typeface="Lexend"/>
               </a:rPr>
               <a:t>Answer it.</a:t>
             </a:r>
@@ -6812,11 +6956,11 @@
           <a:p>
             <a:pPr algn="l"/>
             <a:r>
-              <a:rPr sz="3600" b="1" i="0">
+              <a:rPr sz="3420" b="1" i="0">
                 <a:solidFill>
                   <a:srgbClr val="1A1A1A"/>
                 </a:solidFill>
-                <a:latin typeface="Century Schoolbook"/>
+                <a:latin typeface="Lexend"/>
               </a:rPr>
               <a:t>Warm-Up</a:t>
             </a:r>
@@ -6952,11 +7096,11 @@
           <a:p>
             <a:pPr algn="l"/>
             <a:r>
-              <a:rPr sz="1100" b="0" i="1">
+              <a:rPr sz="1040" b="0" i="0">
                 <a:solidFill>
                   <a:srgbClr val="6B6B6B"/>
                 </a:solidFill>
-                <a:latin typeface="Century Schoolbook"/>
+                <a:latin typeface="Lexend"/>
               </a:rPr>
               <a:t>Grade 7 Accelerated · Unit 3 · Lesson 2 — Quotient Laws of Exponents</a:t>
             </a:r>
@@ -6987,11 +7131,11 @@
           <a:p>
             <a:pPr algn="r"/>
             <a:r>
-              <a:rPr sz="1100" b="0" i="0">
+              <a:rPr sz="1040" b="0" i="0">
                 <a:solidFill>
                   <a:srgbClr val="6B6B6B"/>
                 </a:solidFill>
-                <a:latin typeface="Century Schoolbook"/>
+                <a:latin typeface="Lexend"/>
               </a:rPr>
               <a:t>2</a:t>
             </a:r>
@@ -7007,7 +7151,7 @@
         <p:spPr>
           <a:xfrm>
             <a:off x="1874519" y="1440180"/>
-            <a:ext cx="3698600" cy="457200"/>
+            <a:ext cx="3664414" cy="457200"/>
           </a:xfrm>
           <a:prstGeom prst="rect">
             <a:avLst/>
@@ -7022,11 +7166,11 @@
           <a:p>
             <a:pPr algn="l"/>
             <a:r>
-              <a:rPr sz="2300" b="0" i="0">
+              <a:rPr sz="2180" b="0" i="0">
                 <a:solidFill>
                   <a:srgbClr val="1A1A1A"/>
                 </a:solidFill>
-                <a:latin typeface="Century Schoolbook"/>
+                <a:latin typeface="Lexend"/>
               </a:rPr>
               <a:t>1.   Write as one power:  </a:t>
             </a:r>
@@ -7035,7 +7179,7 @@
       </p:sp>
       <p:pic>
         <p:nvPicPr>
-          <p:cNvPr id="9" name="Picture 8" descr="d71efaf91c1d965e.png"/>
+          <p:cNvPr id="9" name="Picture 8" descr="0edb9b2424bafeab.png"/>
           <p:cNvPicPr>
             <a:picLocks noChangeAspect="1"/>
           </p:cNvPicPr>
@@ -7049,8 +7193,8 @@
         </p:blipFill>
         <p:spPr>
           <a:xfrm>
-            <a:off x="5435960" y="1528572"/>
-            <a:ext cx="746760" cy="280416"/>
+            <a:off x="5401774" y="1530096"/>
+            <a:ext cx="758952" cy="277368"/>
           </a:xfrm>
           <a:prstGeom prst="rect">
             <a:avLst/>
@@ -7066,7 +7210,7 @@
         <p:spPr>
           <a:xfrm>
             <a:off x="1874519" y="2052828"/>
-            <a:ext cx="726811" cy="457200"/>
+            <a:ext cx="685699" cy="457200"/>
           </a:xfrm>
           <a:prstGeom prst="rect">
             <a:avLst/>
@@ -7081,11 +7225,11 @@
           <a:p>
             <a:pPr algn="l"/>
             <a:r>
-              <a:rPr sz="2300" b="0" i="0">
+              <a:rPr sz="2180" b="0" i="0">
                 <a:solidFill>
                   <a:srgbClr val="1A1A1A"/>
                 </a:solidFill>
-                <a:latin typeface="Century Schoolbook"/>
+                <a:latin typeface="Lexend"/>
               </a:rPr>
               <a:t>2.   </a:t>
             </a:r>
@@ -7094,7 +7238,7 @@
       </p:sp>
       <p:pic>
         <p:nvPicPr>
-          <p:cNvPr id="11" name="Picture 10" descr="38e9b447bed4dddc.png"/>
+          <p:cNvPr id="11" name="Picture 10" descr="58c968e8bf18d130.png"/>
           <p:cNvPicPr>
             <a:picLocks noChangeAspect="1"/>
           </p:cNvPicPr>
@@ -7108,8 +7252,8 @@
         </p:blipFill>
         <p:spPr>
           <a:xfrm>
-            <a:off x="2464171" y="2077212"/>
-            <a:ext cx="914400" cy="408432"/>
+            <a:off x="2423059" y="2086356"/>
+            <a:ext cx="862584" cy="390144"/>
           </a:xfrm>
           <a:prstGeom prst="rect">
             <a:avLst/>
@@ -7125,7 +7269,7 @@
         <p:spPr>
           <a:xfrm>
             <a:off x="1874519" y="2665476"/>
-            <a:ext cx="1652008" cy="457200"/>
+            <a:ext cx="1612295" cy="457200"/>
           </a:xfrm>
           <a:prstGeom prst="rect">
             <a:avLst/>
@@ -7140,11 +7284,11 @@
           <a:p>
             <a:pPr algn="l"/>
             <a:r>
-              <a:rPr sz="2300" b="0" i="0">
+              <a:rPr sz="2180" b="0" i="0">
                 <a:solidFill>
                   <a:srgbClr val="1A1A1A"/>
                 </a:solidFill>
-                <a:latin typeface="Century Schoolbook"/>
+                <a:latin typeface="Lexend"/>
               </a:rPr>
               <a:t>3.   Solve  </a:t>
             </a:r>
@@ -7153,7 +7297,7 @@
       </p:sp>
       <p:pic>
         <p:nvPicPr>
-          <p:cNvPr id="13" name="Picture 12" descr="73f8d0478760fca0.png"/>
+          <p:cNvPr id="13" name="Picture 12" descr="ff0aa95dcc400816.png"/>
           <p:cNvPicPr>
             <a:picLocks noChangeAspect="1"/>
           </p:cNvPicPr>
@@ -7167,8 +7311,8 @@
         </p:blipFill>
         <p:spPr>
           <a:xfrm>
-            <a:off x="3389368" y="2773680"/>
-            <a:ext cx="1405128" cy="240791"/>
+            <a:off x="3349655" y="2781300"/>
+            <a:ext cx="1374648" cy="225552"/>
           </a:xfrm>
           <a:prstGeom prst="rect">
             <a:avLst/>
@@ -7183,8 +7327,8 @@
         </p:nvSpPr>
         <p:spPr>
           <a:xfrm>
-            <a:off x="1874519" y="3357372"/>
-            <a:ext cx="2099724" cy="457200"/>
+            <a:off x="1874519" y="3340608"/>
+            <a:ext cx="2035577" cy="457200"/>
           </a:xfrm>
           <a:prstGeom prst="rect">
             <a:avLst/>
@@ -7199,11 +7343,11 @@
           <a:p>
             <a:pPr algn="l"/>
             <a:r>
-              <a:rPr sz="2300" b="0" i="0">
+              <a:rPr sz="2180" b="0" i="0">
                 <a:solidFill>
                   <a:srgbClr val="1A1A1A"/>
                 </a:solidFill>
-                <a:latin typeface="Century Schoolbook"/>
+                <a:latin typeface="Lexend"/>
               </a:rPr>
               <a:t>4.   Simplify  </a:t>
             </a:r>
@@ -7212,7 +7356,7 @@
       </p:sp>
       <p:pic>
         <p:nvPicPr>
-          <p:cNvPr id="15" name="Picture 14" descr="18ea63a1522c269c.png"/>
+          <p:cNvPr id="15" name="Picture 14" descr="f6a28b8ae12f374d.png"/>
           <p:cNvPicPr>
             <a:picLocks noChangeAspect="1"/>
           </p:cNvPicPr>
@@ -7226,8 +7370,8 @@
         </p:blipFill>
         <p:spPr>
           <a:xfrm>
-            <a:off x="3837084" y="3300984"/>
-            <a:ext cx="880872" cy="569976"/>
+            <a:off x="3772937" y="3300984"/>
+            <a:ext cx="923544" cy="536448"/>
           </a:xfrm>
           <a:prstGeom prst="rect">
             <a:avLst/>
@@ -7276,11 +7420,11 @@
           <a:p>
             <a:pPr algn="l"/>
             <a:r>
-              <a:rPr sz="3400" b="1" i="0">
+              <a:rPr sz="3229" b="1" i="0">
                 <a:solidFill>
                   <a:srgbClr val="1A1A1A"/>
                 </a:solidFill>
-                <a:latin typeface="Century Schoolbook"/>
+                <a:latin typeface="Lexend"/>
               </a:rPr>
               <a:t>Whiteboards   ·   Question 3 of 9</a:t>
             </a:r>
@@ -7416,11 +7560,11 @@
           <a:p>
             <a:pPr algn="l"/>
             <a:r>
-              <a:rPr sz="1100" b="0" i="1">
+              <a:rPr sz="1040" b="0" i="0">
                 <a:solidFill>
                   <a:srgbClr val="6B6B6B"/>
                 </a:solidFill>
-                <a:latin typeface="Century Schoolbook"/>
+                <a:latin typeface="Lexend"/>
               </a:rPr>
               <a:t>Grade 7 Accelerated · Unit 3 · Lesson 2 — Quotient Laws of Exponents</a:t>
             </a:r>
@@ -7451,11 +7595,11 @@
           <a:p>
             <a:pPr algn="r"/>
             <a:r>
-              <a:rPr sz="1100" b="0" i="0">
+              <a:rPr sz="1040" b="0" i="0">
                 <a:solidFill>
                   <a:srgbClr val="6B6B6B"/>
                 </a:solidFill>
-                <a:latin typeface="Century Schoolbook"/>
+                <a:latin typeface="Lexend"/>
               </a:rPr>
               <a:t>20</a:t>
             </a:r>
@@ -7464,7 +7608,7 @@
       </p:sp>
       <p:pic>
         <p:nvPicPr>
-          <p:cNvPr id="8" name="Picture 7" descr="e97669c0d54b74f0.png"/>
+          <p:cNvPr id="8" name="Picture 7" descr="7a2d988691ed7859.png"/>
           <p:cNvPicPr>
             <a:picLocks noChangeAspect="1"/>
           </p:cNvPicPr>
@@ -7478,17 +7622,41 @@
         </p:blipFill>
         <p:spPr>
           <a:xfrm>
-            <a:off x="5506212" y="2103120"/>
-            <a:ext cx="1149096" cy="1191768"/>
+            <a:off x="5524499" y="2103120"/>
+            <a:ext cx="1112520" cy="1167384"/>
           </a:xfrm>
           <a:prstGeom prst="rect">
             <a:avLst/>
           </a:prstGeom>
         </p:spPr>
       </p:pic>
-      <p:sp>
-        <p:nvSpPr>
-          <p:cNvPr id="9" name="TextBox 8"/>
+      <p:pic>
+        <p:nvPicPr>
+          <p:cNvPr id="9" name="Picture 8" descr="9ede1db765067981.png"/>
+          <p:cNvPicPr>
+            <a:picLocks noChangeAspect="1"/>
+          </p:cNvPicPr>
+          <p:nvPr/>
+        </p:nvPicPr>
+        <p:blipFill>
+          <a:blip r:embed="rId3"/>
+          <a:stretch>
+            <a:fillRect/>
+          </a:stretch>
+        </p:blipFill>
+        <p:spPr>
+          <a:xfrm>
+            <a:off x="4047743" y="3572255"/>
+            <a:ext cx="4178808" cy="847344"/>
+          </a:xfrm>
+          <a:prstGeom prst="rect">
+            <a:avLst/>
+          </a:prstGeom>
+        </p:spPr>
+      </p:pic>
+      <p:sp>
+        <p:nvSpPr>
+          <p:cNvPr id="10" name="TextBox 9"/>
           <p:cNvSpPr txBox="1"/>
           <p:nvPr/>
         </p:nvSpPr>
@@ -7510,11 +7678,11 @@
           <a:p>
             <a:pPr algn="ctr"/>
             <a:r>
-              <a:rPr sz="3200" b="1" i="0">
+              <a:rPr sz="3040" b="1" i="0">
                 <a:solidFill>
                   <a:srgbClr val="9E1B32"/>
                 </a:solidFill>
-                <a:latin typeface="Century Schoolbook"/>
+                <a:latin typeface="Lexend"/>
               </a:rPr>
               <a:t>Answer:   −6</a:t>
             </a:r>
@@ -7563,11 +7731,11 @@
           <a:p>
             <a:pPr algn="l"/>
             <a:r>
-              <a:rPr sz="3400" b="1" i="0">
+              <a:rPr sz="3229" b="1" i="0">
                 <a:solidFill>
                   <a:srgbClr val="1A1A1A"/>
                 </a:solidFill>
-                <a:latin typeface="Century Schoolbook"/>
+                <a:latin typeface="Lexend"/>
               </a:rPr>
               <a:t>Whiteboards   ·   Question 4 of 9</a:t>
             </a:r>
@@ -7703,11 +7871,11 @@
           <a:p>
             <a:pPr algn="l"/>
             <a:r>
-              <a:rPr sz="1100" b="0" i="1">
+              <a:rPr sz="1040" b="0" i="0">
                 <a:solidFill>
                   <a:srgbClr val="6B6B6B"/>
                 </a:solidFill>
-                <a:latin typeface="Century Schoolbook"/>
+                <a:latin typeface="Lexend"/>
               </a:rPr>
               <a:t>Grade 7 Accelerated · Unit 3 · Lesson 2 — Quotient Laws of Exponents</a:t>
             </a:r>
@@ -7738,11 +7906,11 @@
           <a:p>
             <a:pPr algn="r"/>
             <a:r>
-              <a:rPr sz="1100" b="0" i="0">
+              <a:rPr sz="1040" b="0" i="0">
                 <a:solidFill>
                   <a:srgbClr val="6B6B6B"/>
                 </a:solidFill>
-                <a:latin typeface="Century Schoolbook"/>
+                <a:latin typeface="Lexend"/>
               </a:rPr>
               <a:t>21</a:t>
             </a:r>
@@ -7751,7 +7919,7 @@
       </p:sp>
       <p:pic>
         <p:nvPicPr>
-          <p:cNvPr id="8" name="Picture 7" descr="615f3e719211e489.png"/>
+          <p:cNvPr id="8" name="Picture 7" descr="dda27b062e079023.png"/>
           <p:cNvPicPr>
             <a:picLocks noChangeAspect="1"/>
           </p:cNvPicPr>
@@ -7765,8 +7933,8 @@
         </p:blipFill>
         <p:spPr>
           <a:xfrm>
-            <a:off x="5414771" y="2194560"/>
-            <a:ext cx="1331976" cy="871728"/>
+            <a:off x="5443728" y="2194560"/>
+            <a:ext cx="1274064" cy="841248"/>
           </a:xfrm>
           <a:prstGeom prst="rect">
             <a:avLst/>
@@ -7797,11 +7965,11 @@
           <a:p>
             <a:pPr algn="ctr"/>
             <a:r>
-              <a:rPr sz="2600" b="1" i="0">
+              <a:rPr sz="2470" b="1" i="0">
                 <a:solidFill>
                   <a:srgbClr val="1A1A1A"/>
                 </a:solidFill>
-                <a:latin typeface="Century Schoolbook"/>
+                <a:latin typeface="Lexend"/>
               </a:rPr>
               <a:t>Answer it.</a:t>
             </a:r>
@@ -7850,11 +8018,11 @@
           <a:p>
             <a:pPr algn="l"/>
             <a:r>
-              <a:rPr sz="3400" b="1" i="0">
+              <a:rPr sz="3229" b="1" i="0">
                 <a:solidFill>
                   <a:srgbClr val="1A1A1A"/>
                 </a:solidFill>
-                <a:latin typeface="Century Schoolbook"/>
+                <a:latin typeface="Lexend"/>
               </a:rPr>
               <a:t>Whiteboards   ·   Question 4 of 9</a:t>
             </a:r>
@@ -7990,11 +8158,11 @@
           <a:p>
             <a:pPr algn="l"/>
             <a:r>
-              <a:rPr sz="1100" b="0" i="1">
+              <a:rPr sz="1040" b="0" i="0">
                 <a:solidFill>
                   <a:srgbClr val="6B6B6B"/>
                 </a:solidFill>
-                <a:latin typeface="Century Schoolbook"/>
+                <a:latin typeface="Lexend"/>
               </a:rPr>
               <a:t>Grade 7 Accelerated · Unit 3 · Lesson 2 — Quotient Laws of Exponents</a:t>
             </a:r>
@@ -8025,11 +8193,11 @@
           <a:p>
             <a:pPr algn="r"/>
             <a:r>
-              <a:rPr sz="1100" b="0" i="0">
+              <a:rPr sz="1040" b="0" i="0">
                 <a:solidFill>
                   <a:srgbClr val="6B6B6B"/>
                 </a:solidFill>
-                <a:latin typeface="Century Schoolbook"/>
+                <a:latin typeface="Lexend"/>
               </a:rPr>
               <a:t>22</a:t>
             </a:r>
@@ -8038,7 +8206,7 @@
       </p:sp>
       <p:pic>
         <p:nvPicPr>
-          <p:cNvPr id="8" name="Picture 7" descr="260e9dabd7b640fb.png"/>
+          <p:cNvPr id="8" name="Picture 7" descr="2be21e0d759d6fd5.png"/>
           <p:cNvPicPr>
             <a:picLocks noChangeAspect="1"/>
           </p:cNvPicPr>
@@ -8052,52 +8220,17 @@
         </p:blipFill>
         <p:spPr>
           <a:xfrm>
-            <a:off x="5414771" y="2103120"/>
-            <a:ext cx="1331976" cy="871728"/>
+            <a:off x="5443728" y="2103120"/>
+            <a:ext cx="1274064" cy="841248"/>
           </a:xfrm>
           <a:prstGeom prst="rect">
             <a:avLst/>
           </a:prstGeom>
         </p:spPr>
       </p:pic>
-      <p:sp>
-        <p:nvSpPr>
-          <p:cNvPr id="9" name="TextBox 8"/>
-          <p:cNvSpPr txBox="1"/>
-          <p:nvPr/>
-        </p:nvSpPr>
-        <p:spPr>
-          <a:xfrm>
-            <a:off x="4544568" y="4933188"/>
-            <a:ext cx="1920240" cy="548640"/>
-          </a:xfrm>
-          <a:prstGeom prst="rect">
-            <a:avLst/>
-          </a:prstGeom>
-          <a:noFill/>
-        </p:spPr>
-        <p:txBody>
-          <a:bodyPr wrap="square" lIns="45720" rIns="45720" tIns="18288" bIns="18288" anchor="ctr">
-            <a:spAutoFit/>
-          </a:bodyPr>
-          <a:lstStyle/>
-          <a:p>
-            <a:pPr algn="l"/>
-            <a:r>
-              <a:rPr sz="3200" b="1" i="0">
-                <a:solidFill>
-                  <a:srgbClr val="9E1B32"/>
-                </a:solidFill>
-                <a:latin typeface="Century Schoolbook"/>
-              </a:rPr>
-              <a:t>Answer:</a:t>
-            </a:r>
-          </a:p>
-        </p:txBody>
-      </p:sp>
       <p:pic>
         <p:nvPicPr>
-          <p:cNvPr id="10" name="Picture 9" descr="a55647924d788565.png"/>
+          <p:cNvPr id="9" name="Picture 8" descr="3578dff92cd33651.png"/>
           <p:cNvPicPr>
             <a:picLocks noChangeAspect="1"/>
           </p:cNvPicPr>
@@ -8111,8 +8244,67 @@
         </p:blipFill>
         <p:spPr>
           <a:xfrm>
-            <a:off x="6464808" y="4663440"/>
-            <a:ext cx="1152144" cy="1088136"/>
+            <a:off x="5099303" y="3246120"/>
+            <a:ext cx="2069591" cy="777240"/>
+          </a:xfrm>
+          <a:prstGeom prst="rect">
+            <a:avLst/>
+          </a:prstGeom>
+        </p:spPr>
+      </p:pic>
+      <p:sp>
+        <p:nvSpPr>
+          <p:cNvPr id="10" name="TextBox 9"/>
+          <p:cNvSpPr txBox="1"/>
+          <p:nvPr/>
+        </p:nvSpPr>
+        <p:spPr>
+          <a:xfrm>
+            <a:off x="4564380" y="4927091"/>
+            <a:ext cx="1920240" cy="548640"/>
+          </a:xfrm>
+          <a:prstGeom prst="rect">
+            <a:avLst/>
+          </a:prstGeom>
+          <a:noFill/>
+        </p:spPr>
+        <p:txBody>
+          <a:bodyPr wrap="square" lIns="45720" rIns="45720" tIns="18288" bIns="18288" anchor="ctr">
+            <a:spAutoFit/>
+          </a:bodyPr>
+          <a:lstStyle/>
+          <a:p>
+            <a:pPr algn="l"/>
+            <a:r>
+              <a:rPr sz="3040" b="1" i="0">
+                <a:solidFill>
+                  <a:srgbClr val="9E1B32"/>
+                </a:solidFill>
+                <a:latin typeface="Lexend"/>
+              </a:rPr>
+              <a:t>Answer:</a:t>
+            </a:r>
+          </a:p>
+        </p:txBody>
+      </p:sp>
+      <p:pic>
+        <p:nvPicPr>
+          <p:cNvPr id="11" name="Picture 10" descr="4ab832f314e81a08.png"/>
+          <p:cNvPicPr>
+            <a:picLocks noChangeAspect="1"/>
+          </p:cNvPicPr>
+          <p:nvPr/>
+        </p:nvPicPr>
+        <p:blipFill>
+          <a:blip r:embed="rId4"/>
+          <a:stretch>
+            <a:fillRect/>
+          </a:stretch>
+        </p:blipFill>
+        <p:spPr>
+          <a:xfrm>
+            <a:off x="6484620" y="4663440"/>
+            <a:ext cx="1112520" cy="1075944"/>
           </a:xfrm>
           <a:prstGeom prst="rect">
             <a:avLst/>
@@ -8161,11 +8353,11 @@
           <a:p>
             <a:pPr algn="l"/>
             <a:r>
-              <a:rPr sz="3400" b="1" i="0">
+              <a:rPr sz="3229" b="1" i="0">
                 <a:solidFill>
                   <a:srgbClr val="1A1A1A"/>
                 </a:solidFill>
-                <a:latin typeface="Century Schoolbook"/>
+                <a:latin typeface="Lexend"/>
               </a:rPr>
               <a:t>Whiteboards   ·   Question 5 of 9</a:t>
             </a:r>
@@ -8301,11 +8493,11 @@
           <a:p>
             <a:pPr algn="l"/>
             <a:r>
-              <a:rPr sz="1100" b="0" i="1">
+              <a:rPr sz="1040" b="0" i="0">
                 <a:solidFill>
                   <a:srgbClr val="6B6B6B"/>
                 </a:solidFill>
-                <a:latin typeface="Century Schoolbook"/>
+                <a:latin typeface="Lexend"/>
               </a:rPr>
               <a:t>Grade 7 Accelerated · Unit 3 · Lesson 2 — Quotient Laws of Exponents</a:t>
             </a:r>
@@ -8336,11 +8528,11 @@
           <a:p>
             <a:pPr algn="r"/>
             <a:r>
-              <a:rPr sz="1100" b="0" i="0">
+              <a:rPr sz="1040" b="0" i="0">
                 <a:solidFill>
                   <a:srgbClr val="6B6B6B"/>
                 </a:solidFill>
-                <a:latin typeface="Century Schoolbook"/>
+                <a:latin typeface="Lexend"/>
               </a:rPr>
               <a:t>23</a:t>
             </a:r>
@@ -8349,7 +8541,7 @@
       </p:sp>
       <p:pic>
         <p:nvPicPr>
-          <p:cNvPr id="8" name="Picture 7" descr="b00c54b2f2476e9e.png"/>
+          <p:cNvPr id="8" name="Picture 7" descr="24ad149a2162bcd8.png"/>
           <p:cNvPicPr>
             <a:picLocks noChangeAspect="1"/>
           </p:cNvPicPr>
@@ -8363,8 +8555,8 @@
         </p:blipFill>
         <p:spPr>
           <a:xfrm>
-            <a:off x="5873496" y="2194560"/>
-            <a:ext cx="414528" cy="435864"/>
+            <a:off x="5856731" y="2194560"/>
+            <a:ext cx="448056" cy="420624"/>
           </a:xfrm>
           <a:prstGeom prst="rect">
             <a:avLst/>
@@ -8379,7 +8571,7 @@
         </p:nvSpPr>
         <p:spPr>
           <a:xfrm>
-            <a:off x="777240" y="2859024"/>
+            <a:off x="777240" y="2843784"/>
             <a:ext cx="10607040" cy="465151"/>
           </a:xfrm>
           <a:prstGeom prst="rect">
@@ -8395,11 +8587,11 @@
           <a:p>
             <a:pPr algn="ctr"/>
             <a:r>
-              <a:rPr sz="2600" b="0" i="0">
+              <a:rPr sz="2470" b="0" i="0">
                 <a:solidFill>
                   <a:srgbClr val="1A1A1A"/>
                 </a:solidFill>
-                <a:latin typeface="Century Schoolbook"/>
+                <a:latin typeface="Lexend"/>
               </a:rPr>
               <a:t>Which is the value?</a:t>
             </a:r>
@@ -8414,7 +8606,7 @@
         </p:nvSpPr>
         <p:spPr>
           <a:xfrm>
-            <a:off x="1874519" y="3525343"/>
+            <a:off x="1874519" y="3510103"/>
             <a:ext cx="4572000" cy="548640"/>
           </a:xfrm>
           <a:prstGeom prst="rect">
@@ -8430,20 +8622,20 @@
           <a:p>
             <a:pPr algn="l"/>
             <a:r>
-              <a:rPr sz="2400" b="1" i="0">
+              <a:rPr sz="2280" b="1" i="0">
                 <a:solidFill>
                   <a:srgbClr val="1A1A1A"/>
                 </a:solidFill>
-                <a:latin typeface="Century Schoolbook"/>
+                <a:latin typeface="Lexend"/>
               </a:rPr>
               <a:t>A.   </a:t>
             </a:r>
             <a:r>
-              <a:rPr sz="2400" b="0" i="0">
+              <a:rPr sz="2280" b="0" i="0">
                 <a:solidFill>
                   <a:srgbClr val="1A1A1A"/>
                 </a:solidFill>
-                <a:latin typeface="Century Schoolbook"/>
+                <a:latin typeface="Lexend"/>
               </a:rPr>
               <a:t>1</a:t>
             </a:r>
@@ -8458,7 +8650,7 @@
         </p:nvSpPr>
         <p:spPr>
           <a:xfrm>
-            <a:off x="6629400" y="3525343"/>
+            <a:off x="6629400" y="3510103"/>
             <a:ext cx="4572000" cy="548640"/>
           </a:xfrm>
           <a:prstGeom prst="rect">
@@ -8474,20 +8666,20 @@
           <a:p>
             <a:pPr algn="l"/>
             <a:r>
-              <a:rPr sz="2400" b="1" i="0">
+              <a:rPr sz="2280" b="1" i="0">
                 <a:solidFill>
                   <a:srgbClr val="1A1A1A"/>
                 </a:solidFill>
-                <a:latin typeface="Century Schoolbook"/>
+                <a:latin typeface="Lexend"/>
               </a:rPr>
               <a:t>B.   </a:t>
             </a:r>
             <a:r>
-              <a:rPr sz="2400" b="0" i="0">
+              <a:rPr sz="2280" b="0" i="0">
                 <a:solidFill>
                   <a:srgbClr val="1A1A1A"/>
                 </a:solidFill>
-                <a:latin typeface="Century Schoolbook"/>
+                <a:latin typeface="Lexend"/>
               </a:rPr>
               <a:t>9</a:t>
             </a:r>
@@ -8502,7 +8694,7 @@
         </p:nvSpPr>
         <p:spPr>
           <a:xfrm>
-            <a:off x="1874519" y="4211143"/>
+            <a:off x="1874519" y="4195903"/>
             <a:ext cx="4572000" cy="548640"/>
           </a:xfrm>
           <a:prstGeom prst="rect">
@@ -8518,20 +8710,20 @@
           <a:p>
             <a:pPr algn="l"/>
             <a:r>
-              <a:rPr sz="2400" b="1" i="0">
+              <a:rPr sz="2280" b="1" i="0">
                 <a:solidFill>
                   <a:srgbClr val="1A1A1A"/>
                 </a:solidFill>
-                <a:latin typeface="Century Schoolbook"/>
+                <a:latin typeface="Lexend"/>
               </a:rPr>
               <a:t>C.   </a:t>
             </a:r>
             <a:r>
-              <a:rPr sz="2400" b="0" i="0">
+              <a:rPr sz="2280" b="0" i="0">
                 <a:solidFill>
                   <a:srgbClr val="1A1A1A"/>
                 </a:solidFill>
-                <a:latin typeface="Century Schoolbook"/>
+                <a:latin typeface="Lexend"/>
               </a:rPr>
               <a:t>1/9</a:t>
             </a:r>
@@ -8546,7 +8738,7 @@
         </p:nvSpPr>
         <p:spPr>
           <a:xfrm>
-            <a:off x="6629400" y="4211143"/>
+            <a:off x="6629400" y="4195903"/>
             <a:ext cx="4572000" cy="548640"/>
           </a:xfrm>
           <a:prstGeom prst="rect">
@@ -8562,20 +8754,20 @@
           <a:p>
             <a:pPr algn="l"/>
             <a:r>
-              <a:rPr sz="2400" b="1" i="0">
+              <a:rPr sz="2280" b="1" i="0">
                 <a:solidFill>
                   <a:srgbClr val="1A1A1A"/>
                 </a:solidFill>
-                <a:latin typeface="Century Schoolbook"/>
+                <a:latin typeface="Lexend"/>
               </a:rPr>
               <a:t>D.   </a:t>
             </a:r>
             <a:r>
-              <a:rPr sz="2400" b="0" i="0">
+              <a:rPr sz="2280" b="0" i="0">
                 <a:solidFill>
                   <a:srgbClr val="1A1A1A"/>
                 </a:solidFill>
-                <a:latin typeface="Century Schoolbook"/>
+                <a:latin typeface="Lexend"/>
               </a:rPr>
               <a:t>0</a:t>
             </a:r>
@@ -8590,7 +8782,7 @@
         </p:nvSpPr>
         <p:spPr>
           <a:xfrm>
-            <a:off x="777240" y="5216983"/>
+            <a:off x="777240" y="5201743"/>
             <a:ext cx="10607040" cy="457200"/>
           </a:xfrm>
           <a:prstGeom prst="rect">
@@ -8606,11 +8798,11 @@
           <a:p>
             <a:pPr algn="ctr"/>
             <a:r>
-              <a:rPr sz="2600" b="1" i="0">
+              <a:rPr sz="2470" b="1" i="0">
                 <a:solidFill>
                   <a:srgbClr val="1A1A1A"/>
                 </a:solidFill>
-                <a:latin typeface="Century Schoolbook"/>
+                <a:latin typeface="Lexend"/>
               </a:rPr>
               <a:t>Answer it.</a:t>
             </a:r>
@@ -8659,11 +8851,11 @@
           <a:p>
             <a:pPr algn="l"/>
             <a:r>
-              <a:rPr sz="3400" b="1" i="0">
+              <a:rPr sz="3229" b="1" i="0">
                 <a:solidFill>
                   <a:srgbClr val="1A1A1A"/>
                 </a:solidFill>
-                <a:latin typeface="Century Schoolbook"/>
+                <a:latin typeface="Lexend"/>
               </a:rPr>
               <a:t>Whiteboards   ·   Question 5 of 9</a:t>
             </a:r>
@@ -8799,11 +8991,11 @@
           <a:p>
             <a:pPr algn="l"/>
             <a:r>
-              <a:rPr sz="1100" b="0" i="1">
+              <a:rPr sz="1040" b="0" i="0">
                 <a:solidFill>
                   <a:srgbClr val="6B6B6B"/>
                 </a:solidFill>
-                <a:latin typeface="Century Schoolbook"/>
+                <a:latin typeface="Lexend"/>
               </a:rPr>
               <a:t>Grade 7 Accelerated · Unit 3 · Lesson 2 — Quotient Laws of Exponents</a:t>
             </a:r>
@@ -8834,11 +9026,11 @@
           <a:p>
             <a:pPr algn="r"/>
             <a:r>
-              <a:rPr sz="1100" b="0" i="0">
+              <a:rPr sz="1040" b="0" i="0">
                 <a:solidFill>
                   <a:srgbClr val="6B6B6B"/>
                 </a:solidFill>
-                <a:latin typeface="Century Schoolbook"/>
+                <a:latin typeface="Lexend"/>
               </a:rPr>
               <a:t>24</a:t>
             </a:r>
@@ -8847,7 +9039,7 @@
       </p:sp>
       <p:pic>
         <p:nvPicPr>
-          <p:cNvPr id="8" name="Picture 7" descr="17e435e9fa7e4f09.png"/>
+          <p:cNvPr id="8" name="Picture 7" descr="1629cabbb0de35da.png"/>
           <p:cNvPicPr>
             <a:picLocks noChangeAspect="1"/>
           </p:cNvPicPr>
@@ -8861,8 +9053,8 @@
         </p:blipFill>
         <p:spPr>
           <a:xfrm>
-            <a:off x="5870447" y="2103120"/>
-            <a:ext cx="420624" cy="429768"/>
+            <a:off x="5856731" y="2103120"/>
+            <a:ext cx="448056" cy="420624"/>
           </a:xfrm>
           <a:prstGeom prst="rect">
             <a:avLst/>
@@ -8877,7 +9069,7 @@
         </p:nvSpPr>
         <p:spPr>
           <a:xfrm>
-            <a:off x="777240" y="2761487"/>
+            <a:off x="777240" y="2752344"/>
             <a:ext cx="10607040" cy="465151"/>
           </a:xfrm>
           <a:prstGeom prst="rect">
@@ -8893,11 +9085,11 @@
           <a:p>
             <a:pPr algn="ctr"/>
             <a:r>
-              <a:rPr sz="2600" b="0" i="0">
+              <a:rPr sz="2470" b="0" i="0">
                 <a:solidFill>
                   <a:srgbClr val="1A1A1A"/>
                 </a:solidFill>
-                <a:latin typeface="Century Schoolbook"/>
+                <a:latin typeface="Lexend"/>
               </a:rPr>
               <a:t>Which is the value?</a:t>
             </a:r>
@@ -8912,8 +9104,67 @@
         </p:nvSpPr>
         <p:spPr>
           <a:xfrm>
-            <a:off x="1874519" y="3427807"/>
-            <a:ext cx="4572000" cy="548640"/>
+            <a:off x="2453450" y="3377515"/>
+            <a:ext cx="7391778" cy="457200"/>
+          </a:xfrm>
+          <a:prstGeom prst="rect">
+            <a:avLst/>
+          </a:prstGeom>
+          <a:noFill/>
+        </p:spPr>
+        <p:txBody>
+          <a:bodyPr wrap="none" lIns="45720" rIns="45720" tIns="18288" bIns="18288" anchor="ctr">
+            <a:noAutofit/>
+          </a:bodyPr>
+          <a:lstStyle/>
+          <a:p>
+            <a:pPr algn="l"/>
+            <a:r>
+              <a:rPr sz="2750" b="0" i="0">
+                <a:solidFill>
+                  <a:srgbClr val="1A1A1A"/>
+                </a:solidFill>
+                <a:latin typeface="Lexend"/>
+              </a:rPr>
+              <a:t>Any nonzero number to the power 0 is 1.</a:t>
+            </a:r>
+          </a:p>
+        </p:txBody>
+      </p:sp>
+      <p:pic>
+        <p:nvPicPr>
+          <p:cNvPr id="11" name="Picture 10" descr="c09f26f770b7cba1.png"/>
+          <p:cNvPicPr>
+            <a:picLocks noChangeAspect="1"/>
+          </p:cNvPicPr>
+          <p:nvPr/>
+        </p:nvPicPr>
+        <p:blipFill>
+          <a:blip r:embed="rId3"/>
+          <a:stretch>
+            <a:fillRect/>
+          </a:stretch>
+        </p:blipFill>
+        <p:spPr>
+          <a:xfrm>
+            <a:off x="2508314" y="3994735"/>
+            <a:ext cx="826008" cy="301752"/>
+          </a:xfrm>
+          <a:prstGeom prst="rect">
+            <a:avLst/>
+          </a:prstGeom>
+        </p:spPr>
+      </p:pic>
+      <p:sp>
+        <p:nvSpPr>
+          <p:cNvPr id="12" name="TextBox 11"/>
+          <p:cNvSpPr txBox="1"/>
+          <p:nvPr/>
+        </p:nvSpPr>
+        <p:spPr>
+          <a:xfrm>
+            <a:off x="777240" y="4663440"/>
+            <a:ext cx="10607040" cy="548640"/>
           </a:xfrm>
           <a:prstGeom prst="rect">
             <a:avLst/>
@@ -8926,189 +9177,13 @@
           </a:bodyPr>
           <a:lstStyle/>
           <a:p>
-            <a:pPr algn="l"/>
-            <a:r>
-              <a:rPr sz="2400" b="1" i="0">
+            <a:pPr algn="ctr"/>
+            <a:r>
+              <a:rPr sz="3040" b="1" i="0">
                 <a:solidFill>
                   <a:srgbClr val="9E1B32"/>
                 </a:solidFill>
-                <a:latin typeface="Century Schoolbook"/>
-              </a:rPr>
-              <a:t>A.   </a:t>
-            </a:r>
-            <a:r>
-              <a:rPr sz="2400" b="1" i="0">
-                <a:solidFill>
-                  <a:srgbClr val="9E1B32"/>
-                </a:solidFill>
-                <a:latin typeface="Century Schoolbook"/>
-              </a:rPr>
-              <a:t>1</a:t>
-            </a:r>
-          </a:p>
-        </p:txBody>
-      </p:sp>
-      <p:sp>
-        <p:nvSpPr>
-          <p:cNvPr id="11" name="TextBox 10"/>
-          <p:cNvSpPr txBox="1"/>
-          <p:nvPr/>
-        </p:nvSpPr>
-        <p:spPr>
-          <a:xfrm>
-            <a:off x="6629400" y="3427807"/>
-            <a:ext cx="4572000" cy="548640"/>
-          </a:xfrm>
-          <a:prstGeom prst="rect">
-            <a:avLst/>
-          </a:prstGeom>
-          <a:noFill/>
-        </p:spPr>
-        <p:txBody>
-          <a:bodyPr wrap="square" lIns="45720" rIns="45720" tIns="18288" bIns="18288" anchor="t">
-            <a:spAutoFit/>
-          </a:bodyPr>
-          <a:lstStyle/>
-          <a:p>
-            <a:pPr algn="l"/>
-            <a:r>
-              <a:rPr sz="2400" b="1" i="0">
-                <a:solidFill>
-                  <a:srgbClr val="1A1A1A"/>
-                </a:solidFill>
-                <a:latin typeface="Century Schoolbook"/>
-              </a:rPr>
-              <a:t>B.   </a:t>
-            </a:r>
-            <a:r>
-              <a:rPr sz="2400" b="0" i="0">
-                <a:solidFill>
-                  <a:srgbClr val="1A1A1A"/>
-                </a:solidFill>
-                <a:latin typeface="Century Schoolbook"/>
-              </a:rPr>
-              <a:t>9</a:t>
-            </a:r>
-          </a:p>
-        </p:txBody>
-      </p:sp>
-      <p:sp>
-        <p:nvSpPr>
-          <p:cNvPr id="12" name="TextBox 11"/>
-          <p:cNvSpPr txBox="1"/>
-          <p:nvPr/>
-        </p:nvSpPr>
-        <p:spPr>
-          <a:xfrm>
-            <a:off x="1874519" y="4113607"/>
-            <a:ext cx="4572000" cy="548640"/>
-          </a:xfrm>
-          <a:prstGeom prst="rect">
-            <a:avLst/>
-          </a:prstGeom>
-          <a:noFill/>
-        </p:spPr>
-        <p:txBody>
-          <a:bodyPr wrap="square" lIns="45720" rIns="45720" tIns="18288" bIns="18288" anchor="t">
-            <a:spAutoFit/>
-          </a:bodyPr>
-          <a:lstStyle/>
-          <a:p>
-            <a:pPr algn="l"/>
-            <a:r>
-              <a:rPr sz="2400" b="1" i="0">
-                <a:solidFill>
-                  <a:srgbClr val="1A1A1A"/>
-                </a:solidFill>
-                <a:latin typeface="Century Schoolbook"/>
-              </a:rPr>
-              <a:t>C.   </a:t>
-            </a:r>
-            <a:r>
-              <a:rPr sz="2400" b="0" i="0">
-                <a:solidFill>
-                  <a:srgbClr val="1A1A1A"/>
-                </a:solidFill>
-                <a:latin typeface="Century Schoolbook"/>
-              </a:rPr>
-              <a:t>1/9</a:t>
-            </a:r>
-          </a:p>
-        </p:txBody>
-      </p:sp>
-      <p:sp>
-        <p:nvSpPr>
-          <p:cNvPr id="13" name="TextBox 12"/>
-          <p:cNvSpPr txBox="1"/>
-          <p:nvPr/>
-        </p:nvSpPr>
-        <p:spPr>
-          <a:xfrm>
-            <a:off x="6629400" y="4113607"/>
-            <a:ext cx="4572000" cy="548640"/>
-          </a:xfrm>
-          <a:prstGeom prst="rect">
-            <a:avLst/>
-          </a:prstGeom>
-          <a:noFill/>
-        </p:spPr>
-        <p:txBody>
-          <a:bodyPr wrap="square" lIns="45720" rIns="45720" tIns="18288" bIns="18288" anchor="t">
-            <a:spAutoFit/>
-          </a:bodyPr>
-          <a:lstStyle/>
-          <a:p>
-            <a:pPr algn="l"/>
-            <a:r>
-              <a:rPr sz="2400" b="1" i="0">
-                <a:solidFill>
-                  <a:srgbClr val="1A1A1A"/>
-                </a:solidFill>
-                <a:latin typeface="Century Schoolbook"/>
-              </a:rPr>
-              <a:t>D.   </a:t>
-            </a:r>
-            <a:r>
-              <a:rPr sz="2400" b="0" i="0">
-                <a:solidFill>
-                  <a:srgbClr val="1A1A1A"/>
-                </a:solidFill>
-                <a:latin typeface="Century Schoolbook"/>
-              </a:rPr>
-              <a:t>0</a:t>
-            </a:r>
-          </a:p>
-        </p:txBody>
-      </p:sp>
-      <p:sp>
-        <p:nvSpPr>
-          <p:cNvPr id="14" name="TextBox 13"/>
-          <p:cNvSpPr txBox="1"/>
-          <p:nvPr/>
-        </p:nvSpPr>
-        <p:spPr>
-          <a:xfrm>
-            <a:off x="777240" y="5119447"/>
-            <a:ext cx="10607040" cy="548640"/>
-          </a:xfrm>
-          <a:prstGeom prst="rect">
-            <a:avLst/>
-          </a:prstGeom>
-          <a:noFill/>
-        </p:spPr>
-        <p:txBody>
-          <a:bodyPr wrap="square" lIns="45720" rIns="45720" tIns="18288" bIns="18288" anchor="t">
-            <a:spAutoFit/>
-          </a:bodyPr>
-          <a:lstStyle/>
-          <a:p>
-            <a:pPr algn="ctr"/>
-            <a:r>
-              <a:rPr sz="3200" b="1" i="0">
-                <a:solidFill>
-                  <a:srgbClr val="9E1B32"/>
-                </a:solidFill>
-                <a:latin typeface="Century Schoolbook"/>
+                <a:latin typeface="Lexend"/>
               </a:rPr>
               <a:t>Answer:   A — 1</a:t>
             </a:r>
@@ -9157,11 +9232,11 @@
           <a:p>
             <a:pPr algn="l"/>
             <a:r>
-              <a:rPr sz="3400" b="1" i="0">
+              <a:rPr sz="3229" b="1" i="0">
                 <a:solidFill>
                   <a:srgbClr val="1A1A1A"/>
                 </a:solidFill>
-                <a:latin typeface="Century Schoolbook"/>
+                <a:latin typeface="Lexend"/>
               </a:rPr>
               <a:t>Whiteboards   ·   Question 6 of 9</a:t>
             </a:r>
@@ -9297,11 +9372,11 @@
           <a:p>
             <a:pPr algn="l"/>
             <a:r>
-              <a:rPr sz="1100" b="0" i="1">
+              <a:rPr sz="1040" b="0" i="0">
                 <a:solidFill>
                   <a:srgbClr val="6B6B6B"/>
                 </a:solidFill>
-                <a:latin typeface="Century Schoolbook"/>
+                <a:latin typeface="Lexend"/>
               </a:rPr>
               <a:t>Grade 7 Accelerated · Unit 3 · Lesson 2 — Quotient Laws of Exponents</a:t>
             </a:r>
@@ -9332,11 +9407,11 @@
           <a:p>
             <a:pPr algn="r"/>
             <a:r>
-              <a:rPr sz="1100" b="0" i="0">
+              <a:rPr sz="1040" b="0" i="0">
                 <a:solidFill>
                   <a:srgbClr val="6B6B6B"/>
                 </a:solidFill>
-                <a:latin typeface="Century Schoolbook"/>
+                <a:latin typeface="Lexend"/>
               </a:rPr>
               <a:t>25</a:t>
             </a:r>
@@ -9345,7 +9420,7 @@
       </p:sp>
       <p:pic>
         <p:nvPicPr>
-          <p:cNvPr id="8" name="Picture 7" descr="ad177fa159bf9adb.png"/>
+          <p:cNvPr id="8" name="Picture 7" descr="c64457c91756da6e.png"/>
           <p:cNvPicPr>
             <a:picLocks noChangeAspect="1"/>
           </p:cNvPicPr>
@@ -9359,8 +9434,8 @@
         </p:blipFill>
         <p:spPr>
           <a:xfrm>
-            <a:off x="5847588" y="2194560"/>
-            <a:ext cx="466344" cy="1002792"/>
+            <a:off x="5823204" y="2194560"/>
+            <a:ext cx="515112" cy="984504"/>
           </a:xfrm>
           <a:prstGeom prst="rect">
             <a:avLst/>
@@ -9375,7 +9450,7 @@
         </p:nvSpPr>
         <p:spPr>
           <a:xfrm>
-            <a:off x="777240" y="3425952"/>
+            <a:off x="777240" y="3407664"/>
             <a:ext cx="10607040" cy="465151"/>
           </a:xfrm>
           <a:prstGeom prst="rect">
@@ -9391,11 +9466,11 @@
           <a:p>
             <a:pPr algn="ctr"/>
             <a:r>
-              <a:rPr sz="2600" b="0" i="0">
+              <a:rPr sz="2470" b="0" i="0">
                 <a:solidFill>
                   <a:srgbClr val="1A1A1A"/>
                 </a:solidFill>
-                <a:latin typeface="Century Schoolbook"/>
+                <a:latin typeface="Lexend"/>
               </a:rPr>
               <a:t>Which expression is equivalent?</a:t>
             </a:r>
@@ -9410,7 +9485,7 @@
         </p:nvSpPr>
         <p:spPr>
           <a:xfrm>
-            <a:off x="1874519" y="4092271"/>
+            <a:off x="1874519" y="4073983"/>
             <a:ext cx="4572000" cy="548640"/>
           </a:xfrm>
           <a:prstGeom prst="rect">
@@ -9426,29 +9501,29 @@
           <a:p>
             <a:pPr algn="l"/>
             <a:r>
-              <a:rPr sz="2400" b="1" i="0">
+              <a:rPr sz="2280" b="1" i="0">
                 <a:solidFill>
                   <a:srgbClr val="1A1A1A"/>
                 </a:solidFill>
-                <a:latin typeface="Century Schoolbook"/>
+                <a:latin typeface="Lexend"/>
               </a:rPr>
               <a:t>A.   </a:t>
             </a:r>
             <a:r>
-              <a:rPr sz="2400" b="0" i="0">
+              <a:rPr sz="2280" b="0" i="0">
                 <a:solidFill>
                   <a:srgbClr val="1A1A1A"/>
                 </a:solidFill>
-                <a:latin typeface="Century Schoolbook"/>
+                <a:latin typeface="Lexend"/>
               </a:rPr>
               <a:t>1</a:t>
             </a:r>
             <a:r>
-              <a:rPr sz="2400" b="0" i="0" baseline="30000">
+              <a:rPr sz="2280" b="0" i="0" baseline="30000">
                 <a:solidFill>
                   <a:srgbClr val="1A1A1A"/>
                 </a:solidFill>
-                <a:latin typeface="Century Schoolbook"/>
+                <a:latin typeface="Lexend"/>
               </a:rPr>
               <a:t>6</a:t>
             </a:r>
@@ -9463,7 +9538,7 @@
         </p:nvSpPr>
         <p:spPr>
           <a:xfrm>
-            <a:off x="6629400" y="4092271"/>
+            <a:off x="6629400" y="4073983"/>
             <a:ext cx="4572000" cy="548640"/>
           </a:xfrm>
           <a:prstGeom prst="rect">
@@ -9479,29 +9554,29 @@
           <a:p>
             <a:pPr algn="l"/>
             <a:r>
-              <a:rPr sz="2400" b="1" i="0">
+              <a:rPr sz="2280" b="1" i="0">
                 <a:solidFill>
                   <a:srgbClr val="1A1A1A"/>
                 </a:solidFill>
-                <a:latin typeface="Century Schoolbook"/>
+                <a:latin typeface="Lexend"/>
               </a:rPr>
               <a:t>B.   </a:t>
             </a:r>
             <a:r>
-              <a:rPr sz="2400" b="0" i="0">
+              <a:rPr sz="2280" b="0" i="0">
                 <a:solidFill>
                   <a:srgbClr val="1A1A1A"/>
                 </a:solidFill>
-                <a:latin typeface="Century Schoolbook"/>
+                <a:latin typeface="Lexend"/>
               </a:rPr>
               <a:t>4</a:t>
             </a:r>
             <a:r>
-              <a:rPr sz="2400" b="0" i="0" baseline="30000">
+              <a:rPr sz="2280" b="0" i="0" baseline="30000">
                 <a:solidFill>
                   <a:srgbClr val="1A1A1A"/>
                 </a:solidFill>
-                <a:latin typeface="Century Schoolbook"/>
+                <a:latin typeface="Lexend"/>
               </a:rPr>
               <a:t>10</a:t>
             </a:r>
@@ -9516,7 +9591,7 @@
         </p:nvSpPr>
         <p:spPr>
           <a:xfrm>
-            <a:off x="1874519" y="4778071"/>
+            <a:off x="1874519" y="4759783"/>
             <a:ext cx="4572000" cy="548640"/>
           </a:xfrm>
           <a:prstGeom prst="rect">
@@ -9532,29 +9607,29 @@
           <a:p>
             <a:pPr algn="l"/>
             <a:r>
-              <a:rPr sz="2400" b="1" i="0">
+              <a:rPr sz="2280" b="1" i="0">
                 <a:solidFill>
                   <a:srgbClr val="1A1A1A"/>
                 </a:solidFill>
-                <a:latin typeface="Century Schoolbook"/>
+                <a:latin typeface="Lexend"/>
               </a:rPr>
               <a:t>C.   </a:t>
             </a:r>
             <a:r>
-              <a:rPr sz="2400" b="0" i="0">
+              <a:rPr sz="2280" b="0" i="0">
                 <a:solidFill>
                   <a:srgbClr val="1A1A1A"/>
                 </a:solidFill>
-                <a:latin typeface="Century Schoolbook"/>
+                <a:latin typeface="Lexend"/>
               </a:rPr>
               <a:t>4</a:t>
             </a:r>
             <a:r>
-              <a:rPr sz="2400" b="0" i="0" baseline="30000">
+              <a:rPr sz="2280" b="0" i="0" baseline="30000">
                 <a:solidFill>
                   <a:srgbClr val="1A1A1A"/>
                 </a:solidFill>
-                <a:latin typeface="Century Schoolbook"/>
+                <a:latin typeface="Lexend"/>
               </a:rPr>
               <a:t>6</a:t>
             </a:r>
@@ -9569,7 +9644,7 @@
         </p:nvSpPr>
         <p:spPr>
           <a:xfrm>
-            <a:off x="6629400" y="4778071"/>
+            <a:off x="6629400" y="4759783"/>
             <a:ext cx="4572000" cy="548640"/>
           </a:xfrm>
           <a:prstGeom prst="rect">
@@ -9585,29 +9660,29 @@
           <a:p>
             <a:pPr algn="l"/>
             <a:r>
-              <a:rPr sz="2400" b="1" i="0">
+              <a:rPr sz="2280" b="1" i="0">
                 <a:solidFill>
                   <a:srgbClr val="1A1A1A"/>
                 </a:solidFill>
-                <a:latin typeface="Century Schoolbook"/>
+                <a:latin typeface="Lexend"/>
               </a:rPr>
               <a:t>D.   </a:t>
             </a:r>
             <a:r>
-              <a:rPr sz="2400" b="0" i="0">
+              <a:rPr sz="2280" b="0" i="0">
                 <a:solidFill>
                   <a:srgbClr val="1A1A1A"/>
                 </a:solidFill>
-                <a:latin typeface="Century Schoolbook"/>
+                <a:latin typeface="Lexend"/>
               </a:rPr>
               <a:t>4</a:t>
             </a:r>
             <a:r>
-              <a:rPr sz="2400" b="0" i="0" baseline="30000">
+              <a:rPr sz="2280" b="0" i="0" baseline="30000">
                 <a:solidFill>
                   <a:srgbClr val="1A1A1A"/>
                 </a:solidFill>
-                <a:latin typeface="Century Schoolbook"/>
+                <a:latin typeface="Lexend"/>
               </a:rPr>
               <a:t>4</a:t>
             </a:r>
@@ -9638,11 +9713,11 @@
           <a:p>
             <a:pPr algn="ctr"/>
             <a:r>
-              <a:rPr sz="2600" b="1" i="0">
+              <a:rPr sz="2470" b="1" i="0">
                 <a:solidFill>
                   <a:srgbClr val="1A1A1A"/>
                 </a:solidFill>
-                <a:latin typeface="Century Schoolbook"/>
+                <a:latin typeface="Lexend"/>
               </a:rPr>
               <a:t>Answer it.</a:t>
             </a:r>
@@ -9691,11 +9766,11 @@
           <a:p>
             <a:pPr algn="l"/>
             <a:r>
-              <a:rPr sz="3400" b="1" i="0">
+              <a:rPr sz="3229" b="1" i="0">
                 <a:solidFill>
                   <a:srgbClr val="1A1A1A"/>
                 </a:solidFill>
-                <a:latin typeface="Century Schoolbook"/>
+                <a:latin typeface="Lexend"/>
               </a:rPr>
               <a:t>Whiteboards   ·   Question 6 of 9</a:t>
             </a:r>
@@ -9831,11 +9906,11 @@
           <a:p>
             <a:pPr algn="l"/>
             <a:r>
-              <a:rPr sz="1100" b="0" i="1">
+              <a:rPr sz="1040" b="0" i="0">
                 <a:solidFill>
                   <a:srgbClr val="6B6B6B"/>
                 </a:solidFill>
-                <a:latin typeface="Century Schoolbook"/>
+                <a:latin typeface="Lexend"/>
               </a:rPr>
               <a:t>Grade 7 Accelerated · Unit 3 · Lesson 2 — Quotient Laws of Exponents</a:t>
             </a:r>
@@ -9866,11 +9941,11 @@
           <a:p>
             <a:pPr algn="r"/>
             <a:r>
-              <a:rPr sz="1100" b="0" i="0">
+              <a:rPr sz="1040" b="0" i="0">
                 <a:solidFill>
                   <a:srgbClr val="6B6B6B"/>
                 </a:solidFill>
-                <a:latin typeface="Century Schoolbook"/>
+                <a:latin typeface="Lexend"/>
               </a:rPr>
               <a:t>26</a:t>
             </a:r>
@@ -9879,7 +9954,7 @@
       </p:sp>
       <p:pic>
         <p:nvPicPr>
-          <p:cNvPr id="8" name="Picture 7" descr="a899e53ebcbfa2dd.png"/>
+          <p:cNvPr id="8" name="Picture 7" descr="492b406a8f5b1466.png"/>
           <p:cNvPicPr>
             <a:picLocks noChangeAspect="1"/>
           </p:cNvPicPr>
@@ -9893,8 +9968,8 @@
         </p:blipFill>
         <p:spPr>
           <a:xfrm>
-            <a:off x="5849112" y="2103120"/>
-            <a:ext cx="463296" cy="999743"/>
+            <a:off x="5824727" y="2103120"/>
+            <a:ext cx="512064" cy="987552"/>
           </a:xfrm>
           <a:prstGeom prst="rect">
             <a:avLst/>
@@ -9909,7 +9984,7 @@
         </p:nvSpPr>
         <p:spPr>
           <a:xfrm>
-            <a:off x="777240" y="3331464"/>
+            <a:off x="777240" y="3319272"/>
             <a:ext cx="10607040" cy="465151"/>
           </a:xfrm>
           <a:prstGeom prst="rect">
@@ -9925,27 +10000,51 @@
           <a:p>
             <a:pPr algn="ctr"/>
             <a:r>
-              <a:rPr sz="2600" b="0" i="0">
+              <a:rPr sz="2470" b="0" i="0">
                 <a:solidFill>
                   <a:srgbClr val="1A1A1A"/>
                 </a:solidFill>
-                <a:latin typeface="Century Schoolbook"/>
+                <a:latin typeface="Lexend"/>
               </a:rPr>
               <a:t>Which expression is equivalent?</a:t>
             </a:r>
           </a:p>
         </p:txBody>
       </p:sp>
-      <p:sp>
-        <p:nvSpPr>
-          <p:cNvPr id="10" name="TextBox 9"/>
-          <p:cNvSpPr txBox="1"/>
-          <p:nvPr/>
-        </p:nvSpPr>
-        <p:spPr>
-          <a:xfrm>
-            <a:off x="1874519" y="3997783"/>
-            <a:ext cx="4572000" cy="548640"/>
+      <p:pic>
+        <p:nvPicPr>
+          <p:cNvPr id="10" name="Picture 9" descr="131314ea4788712d.png"/>
+          <p:cNvPicPr>
+            <a:picLocks noChangeAspect="1"/>
+          </p:cNvPicPr>
+          <p:nvPr/>
+        </p:nvPicPr>
+        <p:blipFill>
+          <a:blip r:embed="rId3"/>
+          <a:stretch>
+            <a:fillRect/>
+          </a:stretch>
+        </p:blipFill>
+        <p:spPr>
+          <a:xfrm>
+            <a:off x="5059679" y="3967303"/>
+            <a:ext cx="2154936" cy="713232"/>
+          </a:xfrm>
+          <a:prstGeom prst="rect">
+            <a:avLst/>
+          </a:prstGeom>
+        </p:spPr>
+      </p:pic>
+      <p:sp>
+        <p:nvSpPr>
+          <p:cNvPr id="11" name="TextBox 10"/>
+          <p:cNvSpPr txBox="1"/>
+          <p:nvPr/>
+        </p:nvSpPr>
+        <p:spPr>
+          <a:xfrm>
+            <a:off x="777240" y="4817695"/>
+            <a:ext cx="10607040" cy="548640"/>
           </a:xfrm>
           <a:prstGeom prst="rect">
             <a:avLst/>
@@ -9958,234 +10057,22 @@
           </a:bodyPr>
           <a:lstStyle/>
           <a:p>
-            <a:pPr algn="l"/>
-            <a:r>
-              <a:rPr sz="2400" b="1" i="0">
-                <a:solidFill>
-                  <a:srgbClr val="1A1A1A"/>
-                </a:solidFill>
-                <a:latin typeface="Century Schoolbook"/>
-              </a:rPr>
-              <a:t>A.   </a:t>
-            </a:r>
-            <a:r>
-              <a:rPr sz="2400" b="0" i="0">
-                <a:solidFill>
-                  <a:srgbClr val="1A1A1A"/>
-                </a:solidFill>
-                <a:latin typeface="Century Schoolbook"/>
-              </a:rPr>
-              <a:t>1</a:t>
-            </a:r>
-            <a:r>
-              <a:rPr sz="2400" b="0" i="0" baseline="30000">
-                <a:solidFill>
-                  <a:srgbClr val="1A1A1A"/>
-                </a:solidFill>
-                <a:latin typeface="Century Schoolbook"/>
-              </a:rPr>
-              <a:t>6</a:t>
-            </a:r>
-          </a:p>
-        </p:txBody>
-      </p:sp>
-      <p:sp>
-        <p:nvSpPr>
-          <p:cNvPr id="11" name="TextBox 10"/>
-          <p:cNvSpPr txBox="1"/>
-          <p:nvPr/>
-        </p:nvSpPr>
-        <p:spPr>
-          <a:xfrm>
-            <a:off x="6629400" y="3997783"/>
-            <a:ext cx="4572000" cy="548640"/>
-          </a:xfrm>
-          <a:prstGeom prst="rect">
-            <a:avLst/>
-          </a:prstGeom>
-          <a:noFill/>
-        </p:spPr>
-        <p:txBody>
-          <a:bodyPr wrap="square" lIns="45720" rIns="45720" tIns="18288" bIns="18288" anchor="t">
-            <a:spAutoFit/>
-          </a:bodyPr>
-          <a:lstStyle/>
-          <a:p>
-            <a:pPr algn="l"/>
-            <a:r>
-              <a:rPr sz="2400" b="1" i="0">
-                <a:solidFill>
-                  <a:srgbClr val="1A1A1A"/>
-                </a:solidFill>
-                <a:latin typeface="Century Schoolbook"/>
-              </a:rPr>
-              <a:t>B.   </a:t>
-            </a:r>
-            <a:r>
-              <a:rPr sz="2400" b="0" i="0">
-                <a:solidFill>
-                  <a:srgbClr val="1A1A1A"/>
-                </a:solidFill>
-                <a:latin typeface="Century Schoolbook"/>
-              </a:rPr>
-              <a:t>4</a:t>
-            </a:r>
-            <a:r>
-              <a:rPr sz="2400" b="0" i="0" baseline="30000">
-                <a:solidFill>
-                  <a:srgbClr val="1A1A1A"/>
-                </a:solidFill>
-                <a:latin typeface="Century Schoolbook"/>
-              </a:rPr>
-              <a:t>10</a:t>
-            </a:r>
-          </a:p>
-        </p:txBody>
-      </p:sp>
-      <p:sp>
-        <p:nvSpPr>
-          <p:cNvPr id="12" name="TextBox 11"/>
-          <p:cNvSpPr txBox="1"/>
-          <p:nvPr/>
-        </p:nvSpPr>
-        <p:spPr>
-          <a:xfrm>
-            <a:off x="1874519" y="4683583"/>
-            <a:ext cx="4572000" cy="548640"/>
-          </a:xfrm>
-          <a:prstGeom prst="rect">
-            <a:avLst/>
-          </a:prstGeom>
-          <a:noFill/>
-        </p:spPr>
-        <p:txBody>
-          <a:bodyPr wrap="square" lIns="45720" rIns="45720" tIns="18288" bIns="18288" anchor="t">
-            <a:spAutoFit/>
-          </a:bodyPr>
-          <a:lstStyle/>
-          <a:p>
-            <a:pPr algn="l"/>
-            <a:r>
-              <a:rPr sz="2400" b="1" i="0">
+            <a:pPr algn="ctr"/>
+            <a:r>
+              <a:rPr sz="3040" b="1" i="0">
                 <a:solidFill>
                   <a:srgbClr val="9E1B32"/>
                 </a:solidFill>
-                <a:latin typeface="Century Schoolbook"/>
-              </a:rPr>
-              <a:t>C.   </a:t>
-            </a:r>
-            <a:r>
-              <a:rPr sz="2400" b="1" i="0">
+                <a:latin typeface="Lexend"/>
+              </a:rPr>
+              <a:t>Answer:   C — 4</a:t>
+            </a:r>
+            <a:r>
+              <a:rPr sz="3040" b="1" i="0" baseline="30000">
                 <a:solidFill>
                   <a:srgbClr val="9E1B32"/>
                 </a:solidFill>
-                <a:latin typeface="Century Schoolbook"/>
-              </a:rPr>
-              <a:t>4</a:t>
-            </a:r>
-            <a:r>
-              <a:rPr sz="2400" b="1" i="0" baseline="30000">
-                <a:solidFill>
-                  <a:srgbClr val="9E1B32"/>
-                </a:solidFill>
-                <a:latin typeface="Century Schoolbook"/>
-              </a:rPr>
-              <a:t>6</a:t>
-            </a:r>
-          </a:p>
-        </p:txBody>
-      </p:sp>
-      <p:sp>
-        <p:nvSpPr>
-          <p:cNvPr id="13" name="TextBox 12"/>
-          <p:cNvSpPr txBox="1"/>
-          <p:nvPr/>
-        </p:nvSpPr>
-        <p:spPr>
-          <a:xfrm>
-            <a:off x="6629400" y="4683583"/>
-            <a:ext cx="4572000" cy="548640"/>
-          </a:xfrm>
-          <a:prstGeom prst="rect">
-            <a:avLst/>
-          </a:prstGeom>
-          <a:noFill/>
-        </p:spPr>
-        <p:txBody>
-          <a:bodyPr wrap="square" lIns="45720" rIns="45720" tIns="18288" bIns="18288" anchor="t">
-            <a:spAutoFit/>
-          </a:bodyPr>
-          <a:lstStyle/>
-          <a:p>
-            <a:pPr algn="l"/>
-            <a:r>
-              <a:rPr sz="2400" b="1" i="0">
-                <a:solidFill>
-                  <a:srgbClr val="1A1A1A"/>
-                </a:solidFill>
-                <a:latin typeface="Century Schoolbook"/>
-              </a:rPr>
-              <a:t>D.   </a:t>
-            </a:r>
-            <a:r>
-              <a:rPr sz="2400" b="0" i="0">
-                <a:solidFill>
-                  <a:srgbClr val="1A1A1A"/>
-                </a:solidFill>
-                <a:latin typeface="Century Schoolbook"/>
-              </a:rPr>
-              <a:t>4</a:t>
-            </a:r>
-            <a:r>
-              <a:rPr sz="2400" b="0" i="0" baseline="30000">
-                <a:solidFill>
-                  <a:srgbClr val="1A1A1A"/>
-                </a:solidFill>
-                <a:latin typeface="Century Schoolbook"/>
-              </a:rPr>
-              <a:t>4</a:t>
-            </a:r>
-          </a:p>
-        </p:txBody>
-      </p:sp>
-      <p:sp>
-        <p:nvSpPr>
-          <p:cNvPr id="14" name="TextBox 13"/>
-          <p:cNvSpPr txBox="1"/>
-          <p:nvPr/>
-        </p:nvSpPr>
-        <p:spPr>
-          <a:xfrm>
-            <a:off x="777240" y="5632704"/>
-            <a:ext cx="10607040" cy="548640"/>
-          </a:xfrm>
-          <a:prstGeom prst="rect">
-            <a:avLst/>
-          </a:prstGeom>
-          <a:noFill/>
-        </p:spPr>
-        <p:txBody>
-          <a:bodyPr wrap="square" lIns="45720" rIns="45720" tIns="18288" bIns="18288" anchor="t">
-            <a:spAutoFit/>
-          </a:bodyPr>
-          <a:lstStyle/>
-          <a:p>
-            <a:pPr algn="ctr"/>
-            <a:r>
-              <a:rPr sz="3200" b="1" i="0">
-                <a:solidFill>
-                  <a:srgbClr val="9E1B32"/>
-                </a:solidFill>
-                <a:latin typeface="Century Schoolbook"/>
-              </a:rPr>
-              <a:t>Answer:   C — 4</a:t>
-            </a:r>
-            <a:r>
-              <a:rPr sz="3200" b="1" i="0" baseline="30000">
-                <a:solidFill>
-                  <a:srgbClr val="9E1B32"/>
-                </a:solidFill>
-                <a:latin typeface="Century Schoolbook"/>
+                <a:latin typeface="Lexend"/>
               </a:rPr>
               <a:t>6</a:t>
             </a:r>
@@ -10234,11 +10121,11 @@
           <a:p>
             <a:pPr algn="l"/>
             <a:r>
-              <a:rPr sz="3400" b="1" i="0">
+              <a:rPr sz="3229" b="1" i="0">
                 <a:solidFill>
                   <a:srgbClr val="1A1A1A"/>
                 </a:solidFill>
-                <a:latin typeface="Century Schoolbook"/>
+                <a:latin typeface="Lexend"/>
               </a:rPr>
               <a:t>Whiteboards   ·   Question 7 of 9</a:t>
             </a:r>
@@ -10374,11 +10261,11 @@
           <a:p>
             <a:pPr algn="l"/>
             <a:r>
-              <a:rPr sz="1100" b="0" i="1">
+              <a:rPr sz="1040" b="0" i="0">
                 <a:solidFill>
                   <a:srgbClr val="6B6B6B"/>
                 </a:solidFill>
-                <a:latin typeface="Century Schoolbook"/>
+                <a:latin typeface="Lexend"/>
               </a:rPr>
               <a:t>Grade 7 Accelerated · Unit 3 · Lesson 2 — Quotient Laws of Exponents</a:t>
             </a:r>
@@ -10409,11 +10296,11 @@
           <a:p>
             <a:pPr algn="r"/>
             <a:r>
-              <a:rPr sz="1100" b="0" i="0">
+              <a:rPr sz="1040" b="0" i="0">
                 <a:solidFill>
                   <a:srgbClr val="6B6B6B"/>
                 </a:solidFill>
-                <a:latin typeface="Century Schoolbook"/>
+                <a:latin typeface="Lexend"/>
               </a:rPr>
               <a:t>27</a:t>
             </a:r>
@@ -10422,7 +10309,7 @@
       </p:sp>
       <p:pic>
         <p:nvPicPr>
-          <p:cNvPr id="8" name="Picture 7" descr="7fd8a7336ddfafc1.png"/>
+          <p:cNvPr id="8" name="Picture 7" descr="0538c15f498df93e.png"/>
           <p:cNvPicPr>
             <a:picLocks noChangeAspect="1"/>
           </p:cNvPicPr>
@@ -10436,8 +10323,8 @@
         </p:blipFill>
         <p:spPr>
           <a:xfrm>
-            <a:off x="5657088" y="2194560"/>
-            <a:ext cx="847344" cy="1021080"/>
+            <a:off x="5634228" y="2194560"/>
+            <a:ext cx="893064" cy="993648"/>
           </a:xfrm>
           <a:prstGeom prst="rect">
             <a:avLst/>
@@ -10468,11 +10355,11 @@
           <a:p>
             <a:pPr algn="ctr"/>
             <a:r>
-              <a:rPr sz="2600" b="1" i="0">
+              <a:rPr sz="2470" b="1" i="0">
                 <a:solidFill>
                   <a:srgbClr val="1A1A1A"/>
                 </a:solidFill>
-                <a:latin typeface="Century Schoolbook"/>
+                <a:latin typeface="Lexend"/>
               </a:rPr>
               <a:t>Answer it.</a:t>
             </a:r>
@@ -10521,11 +10408,11 @@
           <a:p>
             <a:pPr algn="l"/>
             <a:r>
-              <a:rPr sz="3400" b="1" i="0">
+              <a:rPr sz="3229" b="1" i="0">
                 <a:solidFill>
                   <a:srgbClr val="1A1A1A"/>
                 </a:solidFill>
-                <a:latin typeface="Century Schoolbook"/>
+                <a:latin typeface="Lexend"/>
               </a:rPr>
               <a:t>Whiteboards   ·   Question 7 of 9</a:t>
             </a:r>
@@ -10661,11 +10548,11 @@
           <a:p>
             <a:pPr algn="l"/>
             <a:r>
-              <a:rPr sz="1100" b="0" i="1">
+              <a:rPr sz="1040" b="0" i="0">
                 <a:solidFill>
                   <a:srgbClr val="6B6B6B"/>
                 </a:solidFill>
-                <a:latin typeface="Century Schoolbook"/>
+                <a:latin typeface="Lexend"/>
               </a:rPr>
               <a:t>Grade 7 Accelerated · Unit 3 · Lesson 2 — Quotient Laws of Exponents</a:t>
             </a:r>
@@ -10696,11 +10583,11 @@
           <a:p>
             <a:pPr algn="r"/>
             <a:r>
-              <a:rPr sz="1100" b="0" i="0">
+              <a:rPr sz="1040" b="0" i="0">
                 <a:solidFill>
                   <a:srgbClr val="6B6B6B"/>
                 </a:solidFill>
-                <a:latin typeface="Century Schoolbook"/>
+                <a:latin typeface="Lexend"/>
               </a:rPr>
               <a:t>28</a:t>
             </a:r>
@@ -10709,7 +10596,7 @@
       </p:sp>
       <p:pic>
         <p:nvPicPr>
-          <p:cNvPr id="8" name="Picture 7" descr="73bf2466d9323c91.png"/>
+          <p:cNvPr id="8" name="Picture 7" descr="0ae3b03db9ce2a86.png"/>
           <p:cNvPicPr>
             <a:picLocks noChangeAspect="1"/>
           </p:cNvPicPr>
@@ -10723,23 +10610,71 @@
         </p:blipFill>
         <p:spPr>
           <a:xfrm>
-            <a:off x="5658611" y="2103120"/>
-            <a:ext cx="844296" cy="1018032"/>
+            <a:off x="5635752" y="2103120"/>
+            <a:ext cx="890016" cy="993648"/>
           </a:xfrm>
           <a:prstGeom prst="rect">
             <a:avLst/>
           </a:prstGeom>
         </p:spPr>
       </p:pic>
-      <p:sp>
-        <p:nvSpPr>
-          <p:cNvPr id="9" name="TextBox 8"/>
-          <p:cNvSpPr txBox="1"/>
-          <p:nvPr/>
-        </p:nvSpPr>
-        <p:spPr>
-          <a:xfrm>
-            <a:off x="777240" y="4663440"/>
+      <p:pic>
+        <p:nvPicPr>
+          <p:cNvPr id="9" name="Picture 8" descr="f1adc35cb08825af.png"/>
+          <p:cNvPicPr>
+            <a:picLocks noChangeAspect="1"/>
+          </p:cNvPicPr>
+          <p:nvPr/>
+        </p:nvPicPr>
+        <p:blipFill>
+          <a:blip r:embed="rId3"/>
+          <a:stretch>
+            <a:fillRect/>
+          </a:stretch>
+        </p:blipFill>
+        <p:spPr>
+          <a:xfrm>
+            <a:off x="4649723" y="3398520"/>
+            <a:ext cx="2974848" cy="716280"/>
+          </a:xfrm>
+          <a:prstGeom prst="rect">
+            <a:avLst/>
+          </a:prstGeom>
+        </p:spPr>
+      </p:pic>
+      <p:pic>
+        <p:nvPicPr>
+          <p:cNvPr id="10" name="Picture 9" descr="0431727820ff0bdf.png"/>
+          <p:cNvPicPr>
+            <a:picLocks noChangeAspect="1"/>
+          </p:cNvPicPr>
+          <p:nvPr/>
+        </p:nvPicPr>
+        <p:blipFill>
+          <a:blip r:embed="rId4"/>
+          <a:stretch>
+            <a:fillRect/>
+          </a:stretch>
+        </p:blipFill>
+        <p:spPr>
+          <a:xfrm>
+            <a:off x="4649723" y="4296156"/>
+            <a:ext cx="1783080" cy="304800"/>
+          </a:xfrm>
+          <a:prstGeom prst="rect">
+            <a:avLst/>
+          </a:prstGeom>
+        </p:spPr>
+      </p:pic>
+      <p:sp>
+        <p:nvSpPr>
+          <p:cNvPr id="11" name="TextBox 10"/>
+          <p:cNvSpPr txBox="1"/>
+          <p:nvPr/>
+        </p:nvSpPr>
+        <p:spPr>
+          <a:xfrm>
+            <a:off x="777240" y="4791456"/>
             <a:ext cx="10607040" cy="548640"/>
           </a:xfrm>
           <a:prstGeom prst="rect">
@@ -10755,11 +10690,11 @@
           <a:p>
             <a:pPr algn="ctr"/>
             <a:r>
-              <a:rPr sz="3200" b="1" i="0">
+              <a:rPr sz="3040" b="1" i="0">
                 <a:solidFill>
                   <a:srgbClr val="9E1B32"/>
                 </a:solidFill>
-                <a:latin typeface="Century Schoolbook"/>
+                <a:latin typeface="Lexend"/>
               </a:rPr>
               <a:t>Answer:   0.125</a:t>
             </a:r>
@@ -10808,11 +10743,11 @@
           <a:p>
             <a:pPr algn="l"/>
             <a:r>
-              <a:rPr sz="3400" b="1" i="0">
+              <a:rPr sz="3229" b="1" i="0">
                 <a:solidFill>
                   <a:srgbClr val="1A1A1A"/>
                 </a:solidFill>
-                <a:latin typeface="Century Schoolbook"/>
+                <a:latin typeface="Lexend"/>
               </a:rPr>
               <a:t>Whiteboards   ·   Question 8 of 9</a:t>
             </a:r>
@@ -10948,11 +10883,11 @@
           <a:p>
             <a:pPr algn="l"/>
             <a:r>
-              <a:rPr sz="1100" b="0" i="1">
+              <a:rPr sz="1040" b="0" i="0">
                 <a:solidFill>
                   <a:srgbClr val="6B6B6B"/>
                 </a:solidFill>
-                <a:latin typeface="Century Schoolbook"/>
+                <a:latin typeface="Lexend"/>
               </a:rPr>
               <a:t>Grade 7 Accelerated · Unit 3 · Lesson 2 — Quotient Laws of Exponents</a:t>
             </a:r>
@@ -10983,11 +10918,11 @@
           <a:p>
             <a:pPr algn="r"/>
             <a:r>
-              <a:rPr sz="1100" b="0" i="0">
+              <a:rPr sz="1040" b="0" i="0">
                 <a:solidFill>
                   <a:srgbClr val="6B6B6B"/>
                 </a:solidFill>
-                <a:latin typeface="Century Schoolbook"/>
+                <a:latin typeface="Lexend"/>
               </a:rPr>
               <a:t>29</a:t>
             </a:r>
@@ -10996,7 +10931,7 @@
       </p:sp>
       <p:pic>
         <p:nvPicPr>
-          <p:cNvPr id="8" name="Picture 7" descr="41e42a07b25976eb.png"/>
+          <p:cNvPr id="8" name="Picture 7" descr="6b12155fed1886c4.png"/>
           <p:cNvPicPr>
             <a:picLocks noChangeAspect="1"/>
           </p:cNvPicPr>
@@ -11010,8 +10945,8 @@
         </p:blipFill>
         <p:spPr>
           <a:xfrm>
-            <a:off x="5460491" y="2194560"/>
-            <a:ext cx="1240536" cy="859536"/>
+            <a:off x="5443728" y="2194560"/>
+            <a:ext cx="1274064" cy="844296"/>
           </a:xfrm>
           <a:prstGeom prst="rect">
             <a:avLst/>
@@ -11042,11 +10977,11 @@
           <a:p>
             <a:pPr algn="ctr"/>
             <a:r>
-              <a:rPr sz="2600" b="1" i="0">
+              <a:rPr sz="2470" b="1" i="0">
                 <a:solidFill>
                   <a:srgbClr val="1A1A1A"/>
                 </a:solidFill>
-                <a:latin typeface="Century Schoolbook"/>
+                <a:latin typeface="Lexend"/>
               </a:rPr>
               <a:t>Answer it.</a:t>
             </a:r>
@@ -11095,11 +11030,11 @@
           <a:p>
             <a:pPr algn="l"/>
             <a:r>
-              <a:rPr sz="3600" b="1" i="0">
+              <a:rPr sz="3420" b="1" i="0">
                 <a:solidFill>
                   <a:srgbClr val="1A1A1A"/>
                 </a:solidFill>
-                <a:latin typeface="Century Schoolbook"/>
+                <a:latin typeface="Lexend"/>
               </a:rPr>
               <a:t>Warm-Up</a:t>
             </a:r>
@@ -11235,11 +11170,11 @@
           <a:p>
             <a:pPr algn="l"/>
             <a:r>
-              <a:rPr sz="1100" b="0" i="1">
+              <a:rPr sz="1040" b="0" i="0">
                 <a:solidFill>
                   <a:srgbClr val="6B6B6B"/>
                 </a:solidFill>
-                <a:latin typeface="Century Schoolbook"/>
+                <a:latin typeface="Lexend"/>
               </a:rPr>
               <a:t>Grade 7 Accelerated · Unit 3 · Lesson 2 — Quotient Laws of Exponents</a:t>
             </a:r>
@@ -11270,11 +11205,11 @@
           <a:p>
             <a:pPr algn="r"/>
             <a:r>
-              <a:rPr sz="1100" b="0" i="0">
+              <a:rPr sz="1040" b="0" i="0">
                 <a:solidFill>
                   <a:srgbClr val="6B6B6B"/>
                 </a:solidFill>
-                <a:latin typeface="Century Schoolbook"/>
+                <a:latin typeface="Lexend"/>
               </a:rPr>
               <a:t>3</a:t>
             </a:r>
@@ -11290,7 +11225,7 @@
         <p:spPr>
           <a:xfrm>
             <a:off x="1874519" y="1440180"/>
-            <a:ext cx="3698600" cy="457200"/>
+            <a:ext cx="3664414" cy="457200"/>
           </a:xfrm>
           <a:prstGeom prst="rect">
             <a:avLst/>
@@ -11305,11 +11240,11 @@
           <a:p>
             <a:pPr algn="l"/>
             <a:r>
-              <a:rPr sz="2300" b="0" i="0">
+              <a:rPr sz="2180" b="0" i="0">
                 <a:solidFill>
                   <a:srgbClr val="1A1A1A"/>
                 </a:solidFill>
-                <a:latin typeface="Century Schoolbook"/>
+                <a:latin typeface="Lexend"/>
               </a:rPr>
               <a:t>1.   Write as one power:  </a:t>
             </a:r>
@@ -11318,7 +11253,7 @@
       </p:sp>
       <p:pic>
         <p:nvPicPr>
-          <p:cNvPr id="9" name="Picture 8" descr="d71efaf91c1d965e.png"/>
+          <p:cNvPr id="9" name="Picture 8" descr="0edb9b2424bafeab.png"/>
           <p:cNvPicPr>
             <a:picLocks noChangeAspect="1"/>
           </p:cNvPicPr>
@@ -11332,8 +11267,8 @@
         </p:blipFill>
         <p:spPr>
           <a:xfrm>
-            <a:off x="5435960" y="1528572"/>
-            <a:ext cx="746760" cy="280416"/>
+            <a:off x="5401774" y="1530096"/>
+            <a:ext cx="758952" cy="277368"/>
           </a:xfrm>
           <a:prstGeom prst="rect">
             <a:avLst/>
@@ -11342,7 +11277,7 @@
       </p:pic>
       <p:pic>
         <p:nvPicPr>
-          <p:cNvPr id="10" name="Picture 9" descr="fe5bb28ba59f7af0.png"/>
+          <p:cNvPr id="10" name="Picture 9" descr="228b900b807e9041.png"/>
           <p:cNvPicPr>
             <a:picLocks noChangeAspect="1"/>
           </p:cNvPicPr>
@@ -11356,8 +11291,8 @@
         </p:blipFill>
         <p:spPr>
           <a:xfrm>
-            <a:off x="6731360" y="1528572"/>
-            <a:ext cx="259080" cy="280416"/>
+            <a:off x="6709366" y="1533144"/>
+            <a:ext cx="274320" cy="271272"/>
           </a:xfrm>
           <a:prstGeom prst="rect">
             <a:avLst/>
@@ -11373,7 +11308,7 @@
         <p:spPr>
           <a:xfrm>
             <a:off x="1874519" y="2052828"/>
-            <a:ext cx="726811" cy="457200"/>
+            <a:ext cx="685699" cy="457200"/>
           </a:xfrm>
           <a:prstGeom prst="rect">
             <a:avLst/>
@@ -11388,11 +11323,11 @@
           <a:p>
             <a:pPr algn="l"/>
             <a:r>
-              <a:rPr sz="2300" b="0" i="0">
+              <a:rPr sz="2180" b="0" i="0">
                 <a:solidFill>
                   <a:srgbClr val="1A1A1A"/>
                 </a:solidFill>
-                <a:latin typeface="Century Schoolbook"/>
+                <a:latin typeface="Lexend"/>
               </a:rPr>
               <a:t>2.   </a:t>
             </a:r>
@@ -11401,7 +11336,7 @@
       </p:sp>
       <p:pic>
         <p:nvPicPr>
-          <p:cNvPr id="12" name="Picture 11" descr="38e9b447bed4dddc.png"/>
+          <p:cNvPr id="12" name="Picture 11" descr="58c968e8bf18d130.png"/>
           <p:cNvPicPr>
             <a:picLocks noChangeAspect="1"/>
           </p:cNvPicPr>
@@ -11415,8 +11350,8 @@
         </p:blipFill>
         <p:spPr>
           <a:xfrm>
-            <a:off x="2464171" y="2077212"/>
-            <a:ext cx="914400" cy="408432"/>
+            <a:off x="2423059" y="2086356"/>
+            <a:ext cx="862584" cy="390144"/>
           </a:xfrm>
           <a:prstGeom prst="rect">
             <a:avLst/>
@@ -11431,8 +11366,8 @@
         </p:nvSpPr>
         <p:spPr>
           <a:xfrm>
-            <a:off x="3927211" y="2052828"/>
-            <a:ext cx="575679" cy="457200"/>
+            <a:off x="3834283" y="2052828"/>
+            <a:ext cx="554763" cy="457200"/>
           </a:xfrm>
           <a:prstGeom prst="rect">
             <a:avLst/>
@@ -11447,11 +11382,11 @@
           <a:p>
             <a:pPr algn="l"/>
             <a:r>
-              <a:rPr sz="2300" b="1" i="0">
+              <a:rPr sz="2180" b="1" i="0">
                 <a:solidFill>
                   <a:srgbClr val="9E1B32"/>
                 </a:solidFill>
-                <a:latin typeface="Century Schoolbook"/>
+                <a:latin typeface="Lexend"/>
               </a:rPr>
               <a:t>−3</a:t>
             </a:r>
@@ -11467,7 +11402,7 @@
         <p:spPr>
           <a:xfrm>
             <a:off x="1874519" y="2665476"/>
-            <a:ext cx="1652008" cy="457200"/>
+            <a:ext cx="1612295" cy="457200"/>
           </a:xfrm>
           <a:prstGeom prst="rect">
             <a:avLst/>
@@ -11482,11 +11417,11 @@
           <a:p>
             <a:pPr algn="l"/>
             <a:r>
-              <a:rPr sz="2300" b="0" i="0">
+              <a:rPr sz="2180" b="0" i="0">
                 <a:solidFill>
                   <a:srgbClr val="1A1A1A"/>
                 </a:solidFill>
-                <a:latin typeface="Century Schoolbook"/>
+                <a:latin typeface="Lexend"/>
               </a:rPr>
               <a:t>3.   Solve  </a:t>
             </a:r>
@@ -11495,7 +11430,7 @@
       </p:sp>
       <p:pic>
         <p:nvPicPr>
-          <p:cNvPr id="15" name="Picture 14" descr="73f8d0478760fca0.png"/>
+          <p:cNvPr id="15" name="Picture 14" descr="ff0aa95dcc400816.png"/>
           <p:cNvPicPr>
             <a:picLocks noChangeAspect="1"/>
           </p:cNvPicPr>
@@ -11509,8 +11444,8 @@
         </p:blipFill>
         <p:spPr>
           <a:xfrm>
-            <a:off x="3389368" y="2773680"/>
-            <a:ext cx="1405128" cy="240791"/>
+            <a:off x="3349655" y="2781300"/>
+            <a:ext cx="1374648" cy="225552"/>
           </a:xfrm>
           <a:prstGeom prst="rect">
             <a:avLst/>
@@ -11525,8 +11460,8 @@
         </p:nvSpPr>
         <p:spPr>
           <a:xfrm>
-            <a:off x="5343136" y="2665476"/>
-            <a:ext cx="942623" cy="457200"/>
+            <a:off x="5272943" y="2665476"/>
+            <a:ext cx="925940" cy="457200"/>
           </a:xfrm>
           <a:prstGeom prst="rect">
             <a:avLst/>
@@ -11541,11 +11476,11 @@
           <a:p>
             <a:pPr algn="l"/>
             <a:r>
-              <a:rPr sz="2300" b="1" i="0">
+              <a:rPr sz="2180" b="1" i="0">
                 <a:solidFill>
                   <a:srgbClr val="9E1B32"/>
                 </a:solidFill>
-                <a:latin typeface="Century Schoolbook"/>
+                <a:latin typeface="Lexend"/>
               </a:rPr>
               <a:t>x &lt; 4</a:t>
             </a:r>
@@ -11560,8 +11495,8 @@
         </p:nvSpPr>
         <p:spPr>
           <a:xfrm>
-            <a:off x="1874519" y="3357372"/>
-            <a:ext cx="2099724" cy="457200"/>
+            <a:off x="1874519" y="3340608"/>
+            <a:ext cx="2035577" cy="457200"/>
           </a:xfrm>
           <a:prstGeom prst="rect">
             <a:avLst/>
@@ -11576,11 +11511,11 @@
           <a:p>
             <a:pPr algn="l"/>
             <a:r>
-              <a:rPr sz="2300" b="0" i="0">
+              <a:rPr sz="2180" b="0" i="0">
                 <a:solidFill>
                   <a:srgbClr val="1A1A1A"/>
                 </a:solidFill>
-                <a:latin typeface="Century Schoolbook"/>
+                <a:latin typeface="Lexend"/>
               </a:rPr>
               <a:t>4.   Simplify  </a:t>
             </a:r>
@@ -11589,7 +11524,7 @@
       </p:sp>
       <p:pic>
         <p:nvPicPr>
-          <p:cNvPr id="18" name="Picture 17" descr="18ea63a1522c269c.png"/>
+          <p:cNvPr id="18" name="Picture 17" descr="f6a28b8ae12f374d.png"/>
           <p:cNvPicPr>
             <a:picLocks noChangeAspect="1"/>
           </p:cNvPicPr>
@@ -11603,8 +11538,8 @@
         </p:blipFill>
         <p:spPr>
           <a:xfrm>
-            <a:off x="3837084" y="3300984"/>
-            <a:ext cx="880872" cy="569976"/>
+            <a:off x="3772937" y="3300984"/>
+            <a:ext cx="923544" cy="536448"/>
           </a:xfrm>
           <a:prstGeom prst="rect">
             <a:avLst/>
@@ -11619,8 +11554,8 @@
         </p:nvSpPr>
         <p:spPr>
           <a:xfrm>
-            <a:off x="5266596" y="3278124"/>
-            <a:ext cx="388052" cy="457200"/>
+            <a:off x="5245121" y="3278124"/>
+            <a:ext cx="385609" cy="457200"/>
           </a:xfrm>
           <a:prstGeom prst="rect">
             <a:avLst/>
@@ -11635,11 +11570,11 @@
           <a:p>
             <a:pPr algn="l"/>
             <a:r>
-              <a:rPr sz="2300" b="1" i="0">
+              <a:rPr sz="2180" b="1" i="0">
                 <a:solidFill>
                   <a:srgbClr val="9E1B32"/>
                 </a:solidFill>
-                <a:latin typeface="Century Schoolbook"/>
+                <a:latin typeface="Lexend"/>
               </a:rPr>
               <a:t>5</a:t>
             </a:r>
@@ -11688,11 +11623,11 @@
           <a:p>
             <a:pPr algn="l"/>
             <a:r>
-              <a:rPr sz="3400" b="1" i="0">
+              <a:rPr sz="3229" b="1" i="0">
                 <a:solidFill>
                   <a:srgbClr val="1A1A1A"/>
                 </a:solidFill>
-                <a:latin typeface="Century Schoolbook"/>
+                <a:latin typeface="Lexend"/>
               </a:rPr>
               <a:t>Whiteboards   ·   Question 8 of 9</a:t>
             </a:r>
@@ -11828,11 +11763,11 @@
           <a:p>
             <a:pPr algn="l"/>
             <a:r>
-              <a:rPr sz="1100" b="0" i="1">
+              <a:rPr sz="1040" b="0" i="0">
                 <a:solidFill>
                   <a:srgbClr val="6B6B6B"/>
                 </a:solidFill>
-                <a:latin typeface="Century Schoolbook"/>
+                <a:latin typeface="Lexend"/>
               </a:rPr>
               <a:t>Grade 7 Accelerated · Unit 3 · Lesson 2 — Quotient Laws of Exponents</a:t>
             </a:r>
@@ -11863,11 +11798,11 @@
           <a:p>
             <a:pPr algn="r"/>
             <a:r>
-              <a:rPr sz="1100" b="0" i="0">
+              <a:rPr sz="1040" b="0" i="0">
                 <a:solidFill>
                   <a:srgbClr val="6B6B6B"/>
                 </a:solidFill>
-                <a:latin typeface="Century Schoolbook"/>
+                <a:latin typeface="Lexend"/>
               </a:rPr>
               <a:t>30</a:t>
             </a:r>
@@ -11876,7 +11811,7 @@
       </p:sp>
       <p:pic>
         <p:nvPicPr>
-          <p:cNvPr id="8" name="Picture 7" descr="262fa2692961318a.png"/>
+          <p:cNvPr id="8" name="Picture 7" descr="9336c4e0de941d80.png"/>
           <p:cNvPicPr>
             <a:picLocks noChangeAspect="1"/>
           </p:cNvPicPr>
@@ -11890,8 +11825,8 @@
         </p:blipFill>
         <p:spPr>
           <a:xfrm>
-            <a:off x="5460491" y="2103120"/>
-            <a:ext cx="1240536" cy="859536"/>
+            <a:off x="5443728" y="2103120"/>
+            <a:ext cx="1274064" cy="844296"/>
           </a:xfrm>
           <a:prstGeom prst="rect">
             <a:avLst/>
@@ -11901,6 +11836,65 @@
       <p:sp>
         <p:nvSpPr>
           <p:cNvPr id="9" name="TextBox 8"/>
+          <p:cNvSpPr txBox="1"/>
+          <p:nvPr/>
+        </p:nvSpPr>
+        <p:spPr>
+          <a:xfrm>
+            <a:off x="2453450" y="3226308"/>
+            <a:ext cx="7391778" cy="457200"/>
+          </a:xfrm>
+          <a:prstGeom prst="rect">
+            <a:avLst/>
+          </a:prstGeom>
+          <a:noFill/>
+        </p:spPr>
+        <p:txBody>
+          <a:bodyPr wrap="none" lIns="45720" rIns="45720" tIns="18288" bIns="18288" anchor="ctr">
+            <a:noAutofit/>
+          </a:bodyPr>
+          <a:lstStyle/>
+          <a:p>
+            <a:pPr algn="l"/>
+            <a:r>
+              <a:rPr sz="2750" b="0" i="0">
+                <a:solidFill>
+                  <a:srgbClr val="1A1A1A"/>
+                </a:solidFill>
+                <a:latin typeface="Lexend"/>
+              </a:rPr>
+              <a:t>Any nonzero number to the power 0 is 1.</a:t>
+            </a:r>
+          </a:p>
+        </p:txBody>
+      </p:sp>
+      <p:pic>
+        <p:nvPicPr>
+          <p:cNvPr id="10" name="Picture 9" descr="57a6de2c0fe6ec35.png"/>
+          <p:cNvPicPr>
+            <a:picLocks noChangeAspect="1"/>
+          </p:cNvPicPr>
+          <p:nvPr/>
+        </p:nvPicPr>
+        <p:blipFill>
+          <a:blip r:embed="rId3"/>
+          <a:stretch>
+            <a:fillRect/>
+          </a:stretch>
+        </p:blipFill>
+        <p:spPr>
+          <a:xfrm>
+            <a:off x="2508314" y="3788664"/>
+            <a:ext cx="1426464" cy="612648"/>
+          </a:xfrm>
+          <a:prstGeom prst="rect">
+            <a:avLst/>
+          </a:prstGeom>
+        </p:spPr>
+      </p:pic>
+      <p:sp>
+        <p:nvSpPr>
+          <p:cNvPr id="11" name="TextBox 10"/>
           <p:cNvSpPr txBox="1"/>
           <p:nvPr/>
         </p:nvSpPr>
@@ -11922,11 +11916,11 @@
           <a:p>
             <a:pPr algn="ctr"/>
             <a:r>
-              <a:rPr sz="3200" b="1" i="0">
+              <a:rPr sz="3040" b="1" i="0">
                 <a:solidFill>
                   <a:srgbClr val="9E1B32"/>
                 </a:solidFill>
-                <a:latin typeface="Century Schoolbook"/>
+                <a:latin typeface="Lexend"/>
               </a:rPr>
               <a:t>Answer:   1</a:t>
             </a:r>
@@ -11975,11 +11969,11 @@
           <a:p>
             <a:pPr algn="l"/>
             <a:r>
-              <a:rPr sz="3400" b="1" i="0">
+              <a:rPr sz="3229" b="1" i="0">
                 <a:solidFill>
                   <a:srgbClr val="1A1A1A"/>
                 </a:solidFill>
-                <a:latin typeface="Century Schoolbook"/>
+                <a:latin typeface="Lexend"/>
               </a:rPr>
               <a:t>Whiteboards   ·   Question 9 of 9</a:t>
             </a:r>
@@ -12115,11 +12109,11 @@
           <a:p>
             <a:pPr algn="l"/>
             <a:r>
-              <a:rPr sz="1100" b="0" i="1">
+              <a:rPr sz="1040" b="0" i="0">
                 <a:solidFill>
                   <a:srgbClr val="6B6B6B"/>
                 </a:solidFill>
-                <a:latin typeface="Century Schoolbook"/>
+                <a:latin typeface="Lexend"/>
               </a:rPr>
               <a:t>Grade 7 Accelerated · Unit 3 · Lesson 2 — Quotient Laws of Exponents</a:t>
             </a:r>
@@ -12150,11 +12144,11 @@
           <a:p>
             <a:pPr algn="r"/>
             <a:r>
-              <a:rPr sz="1100" b="0" i="0">
+              <a:rPr sz="1040" b="0" i="0">
                 <a:solidFill>
                   <a:srgbClr val="6B6B6B"/>
                 </a:solidFill>
-                <a:latin typeface="Century Schoolbook"/>
+                <a:latin typeface="Lexend"/>
               </a:rPr>
               <a:t>31</a:t>
             </a:r>
@@ -12169,8 +12163,8 @@
         </p:nvSpPr>
         <p:spPr>
           <a:xfrm>
-            <a:off x="1146338" y="2366772"/>
-            <a:ext cx="3088445" cy="457200"/>
+            <a:off x="1246769" y="1812036"/>
+            <a:ext cx="3034610" cy="457200"/>
           </a:xfrm>
           <a:prstGeom prst="rect">
             <a:avLst/>
@@ -12185,11 +12179,11 @@
           <a:p>
             <a:pPr algn="l"/>
             <a:r>
-              <a:rPr sz="2600" b="0" i="0">
+              <a:rPr sz="2470" b="0" i="0">
                 <a:solidFill>
                   <a:srgbClr val="1A1A1A"/>
                 </a:solidFill>
-                <a:latin typeface="Century Schoolbook"/>
+                <a:latin typeface="Lexend"/>
               </a:rPr>
               <a:t>Hannah cancels:  </a:t>
             </a:r>
@@ -12198,7 +12192,7 @@
       </p:sp>
       <p:pic>
         <p:nvPicPr>
-          <p:cNvPr id="9" name="Picture 8" descr="62ec99fb62ba2937.png"/>
+          <p:cNvPr id="9" name="Picture 8" descr="f187a11a89af76bf.png"/>
           <p:cNvPicPr>
             <a:picLocks noChangeAspect="1"/>
           </p:cNvPicPr>
@@ -12212,8 +12206,8 @@
         </p:blipFill>
         <p:spPr>
           <a:xfrm>
-            <a:off x="4097624" y="2194560"/>
-            <a:ext cx="1627632" cy="801624"/>
+            <a:off x="4144219" y="1645920"/>
+            <a:ext cx="1578864" cy="789432"/>
           </a:xfrm>
           <a:prstGeom prst="rect">
             <a:avLst/>
@@ -12228,8 +12222,8 @@
         </p:nvSpPr>
         <p:spPr>
           <a:xfrm>
-            <a:off x="5725256" y="2366772"/>
-            <a:ext cx="4095361" cy="457200"/>
+            <a:off x="5723083" y="1812036"/>
+            <a:ext cx="4036840" cy="457200"/>
           </a:xfrm>
           <a:prstGeom prst="rect">
             <a:avLst/>
@@ -12244,11 +12238,11 @@
           <a:p>
             <a:pPr algn="l"/>
             <a:r>
-              <a:rPr sz="2600" b="0" i="0">
+              <a:rPr sz="2470" b="0" i="0">
                 <a:solidFill>
                   <a:srgbClr val="1A1A1A"/>
                 </a:solidFill>
-                <a:latin typeface="Century Schoolbook"/>
+                <a:latin typeface="Lexend"/>
               </a:rPr>
               <a:t>.   Sebastian subtracts:  </a:t>
             </a:r>
@@ -12257,7 +12251,7 @@
       </p:sp>
       <p:pic>
         <p:nvPicPr>
-          <p:cNvPr id="11" name="Picture 10" descr="814e799b3c3f0420.png"/>
+          <p:cNvPr id="11" name="Picture 10" descr="f7fea7d63fe294ce.png"/>
           <p:cNvPicPr>
             <a:picLocks noChangeAspect="1"/>
           </p:cNvPicPr>
@@ -12271,8 +12265,8 @@
         </p:blipFill>
         <p:spPr>
           <a:xfrm>
-            <a:off x="9683457" y="2194560"/>
-            <a:ext cx="1161288" cy="801624"/>
+            <a:off x="9622764" y="1645920"/>
+            <a:ext cx="1143000" cy="789432"/>
           </a:xfrm>
           <a:prstGeom prst="rect">
             <a:avLst/>
@@ -12287,8 +12281,8 @@
         </p:nvSpPr>
         <p:spPr>
           <a:xfrm>
-            <a:off x="10844745" y="2366772"/>
-            <a:ext cx="307595" cy="457200"/>
+            <a:off x="10765764" y="1812036"/>
+            <a:ext cx="286146" cy="457200"/>
           </a:xfrm>
           <a:prstGeom prst="rect">
             <a:avLst/>
@@ -12303,11 +12297,11 @@
           <a:p>
             <a:pPr algn="l"/>
             <a:r>
-              <a:rPr sz="2600" b="0" i="0">
+              <a:rPr sz="2470" b="0" i="0">
                 <a:solidFill>
                   <a:srgbClr val="1A1A1A"/>
                 </a:solidFill>
-                <a:latin typeface="Century Schoolbook"/>
+                <a:latin typeface="Lexend"/>
               </a:rPr>
               <a:t>.</a:t>
             </a:r>
@@ -12322,7 +12316,7 @@
         </p:nvSpPr>
         <p:spPr>
           <a:xfrm>
-            <a:off x="777240" y="3270503"/>
+            <a:off x="777240" y="2709671"/>
             <a:ext cx="10607040" cy="465151"/>
           </a:xfrm>
           <a:prstGeom prst="rect">
@@ -12338,11 +12332,11 @@
           <a:p>
             <a:pPr algn="ctr"/>
             <a:r>
-              <a:rPr sz="2600" b="0" i="0">
+              <a:rPr sz="2470" b="0" i="0">
                 <a:solidFill>
                   <a:srgbClr val="1A1A1A"/>
                 </a:solidFill>
-                <a:latin typeface="Century Schoolbook"/>
+                <a:latin typeface="Lexend"/>
               </a:rPr>
               <a:t>Who is right?</a:t>
             </a:r>
@@ -12373,11 +12367,11 @@
           <a:p>
             <a:pPr algn="ctr"/>
             <a:r>
-              <a:rPr sz="2600" b="1" i="0">
+              <a:rPr sz="2470" b="1" i="0">
                 <a:solidFill>
                   <a:srgbClr val="1A1A1A"/>
                 </a:solidFill>
-                <a:latin typeface="Century Schoolbook"/>
+                <a:latin typeface="Lexend"/>
               </a:rPr>
               <a:t>Write your answer in sentences.</a:t>
             </a:r>
@@ -12426,11 +12420,11 @@
           <a:p>
             <a:pPr algn="l"/>
             <a:r>
-              <a:rPr sz="3400" b="1" i="0">
+              <a:rPr sz="3229" b="1" i="0">
                 <a:solidFill>
                   <a:srgbClr val="1A1A1A"/>
                 </a:solidFill>
-                <a:latin typeface="Century Schoolbook"/>
+                <a:latin typeface="Lexend"/>
               </a:rPr>
               <a:t>Whiteboards   ·   Question 9 of 9</a:t>
             </a:r>
@@ -12566,11 +12560,11 @@
           <a:p>
             <a:pPr algn="l"/>
             <a:r>
-              <a:rPr sz="1100" b="0" i="1">
+              <a:rPr sz="1040" b="0" i="0">
                 <a:solidFill>
                   <a:srgbClr val="6B6B6B"/>
                 </a:solidFill>
-                <a:latin typeface="Century Schoolbook"/>
+                <a:latin typeface="Lexend"/>
               </a:rPr>
               <a:t>Grade 7 Accelerated · Unit 3 · Lesson 2 — Quotient Laws of Exponents</a:t>
             </a:r>
@@ -12601,11 +12595,11 @@
           <a:p>
             <a:pPr algn="r"/>
             <a:r>
-              <a:rPr sz="1100" b="0" i="0">
+              <a:rPr sz="1040" b="0" i="0">
                 <a:solidFill>
                   <a:srgbClr val="6B6B6B"/>
                 </a:solidFill>
-                <a:latin typeface="Century Schoolbook"/>
+                <a:latin typeface="Lexend"/>
               </a:rPr>
               <a:t>32</a:t>
             </a:r>
@@ -12620,8 +12614,8 @@
         </p:nvSpPr>
         <p:spPr>
           <a:xfrm>
-            <a:off x="1143290" y="2273807"/>
-            <a:ext cx="3088445" cy="457200"/>
+            <a:off x="1243721" y="1810512"/>
+            <a:ext cx="3034610" cy="457200"/>
           </a:xfrm>
           <a:prstGeom prst="rect">
             <a:avLst/>
@@ -12636,11 +12630,11 @@
           <a:p>
             <a:pPr algn="l"/>
             <a:r>
-              <a:rPr sz="2600" b="0" i="0">
+              <a:rPr sz="2470" b="0" i="0">
                 <a:solidFill>
                   <a:srgbClr val="1A1A1A"/>
                 </a:solidFill>
-                <a:latin typeface="Century Schoolbook"/>
+                <a:latin typeface="Lexend"/>
               </a:rPr>
               <a:t>Hannah cancels:  </a:t>
             </a:r>
@@ -12649,7 +12643,7 @@
       </p:sp>
       <p:pic>
         <p:nvPicPr>
-          <p:cNvPr id="9" name="Picture 8" descr="3c353a5052ea24b7.png"/>
+          <p:cNvPr id="9" name="Picture 8" descr="36cadf9b5edf7664.png"/>
           <p:cNvPicPr>
             <a:picLocks noChangeAspect="1"/>
           </p:cNvPicPr>
@@ -12663,8 +12657,8 @@
         </p:blipFill>
         <p:spPr>
           <a:xfrm>
-            <a:off x="4094576" y="2103120"/>
-            <a:ext cx="1630680" cy="798576"/>
+            <a:off x="4141171" y="1645920"/>
+            <a:ext cx="1581912" cy="786384"/>
           </a:xfrm>
           <a:prstGeom prst="rect">
             <a:avLst/>
@@ -12679,8 +12673,8 @@
         </p:nvSpPr>
         <p:spPr>
           <a:xfrm>
-            <a:off x="5725256" y="2273807"/>
-            <a:ext cx="4095361" cy="457200"/>
+            <a:off x="5723083" y="1810512"/>
+            <a:ext cx="4036840" cy="457200"/>
           </a:xfrm>
           <a:prstGeom prst="rect">
             <a:avLst/>
@@ -12695,11 +12689,11 @@
           <a:p>
             <a:pPr algn="l"/>
             <a:r>
-              <a:rPr sz="2600" b="0" i="0">
+              <a:rPr sz="2470" b="0" i="0">
                 <a:solidFill>
                   <a:srgbClr val="1A1A1A"/>
                 </a:solidFill>
-                <a:latin typeface="Century Schoolbook"/>
+                <a:latin typeface="Lexend"/>
               </a:rPr>
               <a:t>.   Sebastian subtracts:  </a:t>
             </a:r>
@@ -12708,7 +12702,7 @@
       </p:sp>
       <p:pic>
         <p:nvPicPr>
-          <p:cNvPr id="11" name="Picture 10" descr="1b1a2270832c817b.png"/>
+          <p:cNvPr id="11" name="Picture 10" descr="481073d0dfc43449.png"/>
           <p:cNvPicPr>
             <a:picLocks noChangeAspect="1"/>
           </p:cNvPicPr>
@@ -12722,8 +12716,8 @@
         </p:blipFill>
         <p:spPr>
           <a:xfrm>
-            <a:off x="9683457" y="2103120"/>
-            <a:ext cx="1164336" cy="798576"/>
+            <a:off x="9622764" y="1645920"/>
+            <a:ext cx="1146048" cy="786384"/>
           </a:xfrm>
           <a:prstGeom prst="rect">
             <a:avLst/>
@@ -12738,8 +12732,8 @@
         </p:nvSpPr>
         <p:spPr>
           <a:xfrm>
-            <a:off x="10847793" y="2273807"/>
-            <a:ext cx="307595" cy="457200"/>
+            <a:off x="10768812" y="1810512"/>
+            <a:ext cx="286146" cy="457200"/>
           </a:xfrm>
           <a:prstGeom prst="rect">
             <a:avLst/>
@@ -12754,11 +12748,11 @@
           <a:p>
             <a:pPr algn="l"/>
             <a:r>
-              <a:rPr sz="2600" b="0" i="0">
+              <a:rPr sz="2470" b="0" i="0">
                 <a:solidFill>
                   <a:srgbClr val="1A1A1A"/>
                 </a:solidFill>
-                <a:latin typeface="Century Schoolbook"/>
+                <a:latin typeface="Lexend"/>
               </a:rPr>
               <a:t>.</a:t>
             </a:r>
@@ -12773,7 +12767,7 @@
         </p:nvSpPr>
         <p:spPr>
           <a:xfrm>
-            <a:off x="777240" y="3176015"/>
+            <a:off x="777240" y="2706624"/>
             <a:ext cx="10607040" cy="465151"/>
           </a:xfrm>
           <a:prstGeom prst="rect">
@@ -12789,11 +12783,11 @@
           <a:p>
             <a:pPr algn="ctr"/>
             <a:r>
-              <a:rPr sz="2600" b="0" i="0">
+              <a:rPr sz="2470" b="0" i="0">
                 <a:solidFill>
                   <a:srgbClr val="1A1A1A"/>
                 </a:solidFill>
-                <a:latin typeface="Century Schoolbook"/>
+                <a:latin typeface="Lexend"/>
               </a:rPr>
               <a:t>Who is right?</a:t>
             </a:r>
@@ -12808,7 +12802,184 @@
         </p:nvSpPr>
         <p:spPr>
           <a:xfrm>
-            <a:off x="777240" y="4663440"/>
+            <a:off x="4279017" y="3426283"/>
+            <a:ext cx="1651611" cy="457200"/>
+          </a:xfrm>
+          <a:prstGeom prst="rect">
+            <a:avLst/>
+          </a:prstGeom>
+          <a:noFill/>
+        </p:spPr>
+        <p:txBody>
+          <a:bodyPr wrap="none" lIns="45720" rIns="45720" tIns="18288" bIns="18288" anchor="ctr">
+            <a:noAutofit/>
+          </a:bodyPr>
+          <a:lstStyle/>
+          <a:p>
+            <a:pPr algn="l"/>
+            <a:r>
+              <a:rPr sz="2330" b="0" i="0">
+                <a:solidFill>
+                  <a:srgbClr val="1A1A1A"/>
+                </a:solidFill>
+                <a:latin typeface="Lexend"/>
+              </a:rPr>
+              <a:t>Hannah:  </a:t>
+            </a:r>
+          </a:p>
+        </p:txBody>
+      </p:sp>
+      <p:pic>
+        <p:nvPicPr>
+          <p:cNvPr id="15" name="Picture 14" descr="cccc3c74ba494fe3.png"/>
+          <p:cNvPicPr>
+            <a:picLocks noChangeAspect="1"/>
+          </p:cNvPicPr>
+          <p:nvPr/>
+        </p:nvPicPr>
+        <p:blipFill>
+          <a:blip r:embed="rId4"/>
+          <a:stretch>
+            <a:fillRect/>
+          </a:stretch>
+        </p:blipFill>
+        <p:spPr>
+          <a:xfrm>
+            <a:off x="5793468" y="3354655"/>
+            <a:ext cx="1213104" cy="600456"/>
+          </a:xfrm>
+          <a:prstGeom prst="rect">
+            <a:avLst/>
+          </a:prstGeom>
+        </p:spPr>
+      </p:pic>
+      <p:sp>
+        <p:nvSpPr>
+          <p:cNvPr id="16" name="TextBox 15"/>
+          <p:cNvSpPr txBox="1"/>
+          <p:nvPr/>
+        </p:nvSpPr>
+        <p:spPr>
+          <a:xfrm>
+            <a:off x="4279017" y="4118179"/>
+            <a:ext cx="1974280" cy="457200"/>
+          </a:xfrm>
+          <a:prstGeom prst="rect">
+            <a:avLst/>
+          </a:prstGeom>
+          <a:noFill/>
+        </p:spPr>
+        <p:txBody>
+          <a:bodyPr wrap="none" lIns="45720" rIns="45720" tIns="18288" bIns="18288" anchor="ctr">
+            <a:noAutofit/>
+          </a:bodyPr>
+          <a:lstStyle/>
+          <a:p>
+            <a:pPr algn="l"/>
+            <a:r>
+              <a:rPr sz="2330" b="0" i="0">
+                <a:solidFill>
+                  <a:srgbClr val="1A1A1A"/>
+                </a:solidFill>
+                <a:latin typeface="Lexend"/>
+              </a:rPr>
+              <a:t>Sebastian:  </a:t>
+            </a:r>
+          </a:p>
+        </p:txBody>
+      </p:sp>
+      <p:pic>
+        <p:nvPicPr>
+          <p:cNvPr id="17" name="Picture 16" descr="c39e2f4fb056822e.png"/>
+          <p:cNvPicPr>
+            <a:picLocks noChangeAspect="1"/>
+          </p:cNvPicPr>
+          <p:nvPr/>
+        </p:nvPicPr>
+        <p:blipFill>
+          <a:blip r:embed="rId5"/>
+          <a:stretch>
+            <a:fillRect/>
+          </a:stretch>
+        </p:blipFill>
+        <p:spPr>
+          <a:xfrm>
+            <a:off x="6116138" y="4046551"/>
+            <a:ext cx="1743456" cy="600456"/>
+          </a:xfrm>
+          <a:prstGeom prst="rect">
+            <a:avLst/>
+          </a:prstGeom>
+        </p:spPr>
+      </p:pic>
+      <p:sp>
+        <p:nvSpPr>
+          <p:cNvPr id="18" name="TextBox 17"/>
+          <p:cNvSpPr txBox="1"/>
+          <p:nvPr/>
+        </p:nvSpPr>
+        <p:spPr>
+          <a:xfrm>
+            <a:off x="4279017" y="4715587"/>
+            <a:ext cx="3048748" cy="457200"/>
+          </a:xfrm>
+          <a:prstGeom prst="rect">
+            <a:avLst/>
+          </a:prstGeom>
+          <a:noFill/>
+        </p:spPr>
+        <p:txBody>
+          <a:bodyPr wrap="none" lIns="45720" rIns="45720" tIns="18288" bIns="18288" anchor="ctr">
+            <a:noAutofit/>
+          </a:bodyPr>
+          <a:lstStyle/>
+          <a:p>
+            <a:pPr algn="l"/>
+            <a:r>
+              <a:rPr sz="2330" b="0" i="0">
+                <a:solidFill>
+                  <a:srgbClr val="1A1A1A"/>
+                </a:solidFill>
+                <a:latin typeface="Lexend"/>
+              </a:rPr>
+              <a:t>Same fraction, so  </a:t>
+            </a:r>
+          </a:p>
+        </p:txBody>
+      </p:sp>
+      <p:pic>
+        <p:nvPicPr>
+          <p:cNvPr id="19" name="Picture 18" descr="c474a6f40cf41139.png"/>
+          <p:cNvPicPr>
+            <a:picLocks noChangeAspect="1"/>
+          </p:cNvPicPr>
+          <p:nvPr/>
+        </p:nvPicPr>
+        <p:blipFill>
+          <a:blip r:embed="rId6"/>
+          <a:stretch>
+            <a:fillRect/>
+          </a:stretch>
+        </p:blipFill>
+        <p:spPr>
+          <a:xfrm>
+            <a:off x="7190606" y="4814647"/>
+            <a:ext cx="691896" cy="259080"/>
+          </a:xfrm>
+          <a:prstGeom prst="rect">
+            <a:avLst/>
+          </a:prstGeom>
+        </p:spPr>
+      </p:pic>
+      <p:sp>
+        <p:nvSpPr>
+          <p:cNvPr id="20" name="TextBox 19"/>
+          <p:cNvSpPr txBox="1"/>
+          <p:nvPr/>
+        </p:nvSpPr>
+        <p:spPr>
+          <a:xfrm>
+            <a:off x="777240" y="5287087"/>
             <a:ext cx="10607040" cy="548640"/>
           </a:xfrm>
           <a:prstGeom prst="rect">
@@ -12824,29 +12995,29 @@
           <a:p>
             <a:pPr algn="ctr"/>
             <a:r>
-              <a:rPr sz="3200" b="1" i="0">
+              <a:rPr sz="3040" b="1" i="0">
                 <a:solidFill>
                   <a:srgbClr val="9E1B32"/>
                 </a:solidFill>
-                <a:latin typeface="Century Schoolbook"/>
+                <a:latin typeface="Lexend"/>
               </a:rPr>
               <a:t>Answer:   Both — 2</a:t>
             </a:r>
             <a:r>
-              <a:rPr sz="3200" b="1" i="0" baseline="30000">
+              <a:rPr sz="3040" b="1" i="0" baseline="30000">
                 <a:solidFill>
                   <a:srgbClr val="9E1B32"/>
                 </a:solidFill>
-                <a:latin typeface="Century Schoolbook"/>
+                <a:latin typeface="Lexend"/>
               </a:rPr>
               <a:t>0</a:t>
             </a:r>
             <a:r>
-              <a:rPr sz="3200" b="1" i="0">
+              <a:rPr sz="3040" b="1" i="0">
                 <a:solidFill>
                   <a:srgbClr val="9E1B32"/>
                 </a:solidFill>
-                <a:latin typeface="Century Schoolbook"/>
+                <a:latin typeface="Lexend"/>
               </a:rPr>
               <a:t> = 1</a:t>
             </a:r>
@@ -12895,11 +13066,11 @@
           <a:p>
             <a:pPr algn="l"/>
             <a:r>
-              <a:rPr sz="3600" b="1" i="0">
+              <a:rPr sz="3420" b="1" i="0">
                 <a:solidFill>
                   <a:srgbClr val="1A1A1A"/>
                 </a:solidFill>
-                <a:latin typeface="Century Schoolbook"/>
+                <a:latin typeface="Lexend"/>
               </a:rPr>
               <a:t>Independent Set</a:t>
             </a:r>
@@ -13035,11 +13206,11 @@
           <a:p>
             <a:pPr algn="l"/>
             <a:r>
-              <a:rPr sz="1100" b="0" i="1">
+              <a:rPr sz="1040" b="0" i="0">
                 <a:solidFill>
                   <a:srgbClr val="6B6B6B"/>
                 </a:solidFill>
-                <a:latin typeface="Century Schoolbook"/>
+                <a:latin typeface="Lexend"/>
               </a:rPr>
               <a:t>Grade 7 Accelerated · Unit 3 · Lesson 2 — Quotient Laws of Exponents</a:t>
             </a:r>
@@ -13070,11 +13241,11 @@
           <a:p>
             <a:pPr algn="r"/>
             <a:r>
-              <a:rPr sz="1100" b="0" i="0">
+              <a:rPr sz="1040" b="0" i="0">
                 <a:solidFill>
                   <a:srgbClr val="6B6B6B"/>
                 </a:solidFill>
-                <a:latin typeface="Century Schoolbook"/>
+                <a:latin typeface="Lexend"/>
               </a:rPr>
               <a:t>33</a:t>
             </a:r>
@@ -13089,7 +13260,7 @@
         </p:nvSpPr>
         <p:spPr>
           <a:xfrm>
-            <a:off x="960120" y="1600995"/>
+            <a:off x="960120" y="1592182"/>
             <a:ext cx="548640" cy="377686"/>
           </a:xfrm>
           <a:prstGeom prst="rect">
@@ -13105,11 +13276,11 @@
           <a:p>
             <a:pPr algn="l"/>
             <a:r>
-              <a:rPr sz="1900" b="1" i="0">
+              <a:rPr sz="1810" b="1" i="0">
                 <a:solidFill>
                   <a:srgbClr val="0B5394"/>
                 </a:solidFill>
-                <a:latin typeface="Century Schoolbook"/>
+                <a:latin typeface="Lexend"/>
               </a:rPr>
               <a:t>1.</a:t>
             </a:r>
@@ -13124,8 +13295,8 @@
         </p:nvSpPr>
         <p:spPr>
           <a:xfrm>
-            <a:off x="1554480" y="1600995"/>
-            <a:ext cx="2653665" cy="377686"/>
+            <a:off x="1554480" y="1592182"/>
+            <a:ext cx="2654990" cy="377686"/>
           </a:xfrm>
           <a:prstGeom prst="rect">
             <a:avLst/>
@@ -13140,11 +13311,11 @@
           <a:p>
             <a:pPr algn="l"/>
             <a:r>
-              <a:rPr sz="1900" b="0" i="0">
+              <a:rPr sz="1810" b="0" i="0">
                 <a:solidFill>
                   <a:srgbClr val="1A1A1A"/>
                 </a:solidFill>
-                <a:latin typeface="Century Schoolbook"/>
+                <a:latin typeface="Lexend"/>
               </a:rPr>
               <a:t>Write as one power.  </a:t>
             </a:r>
@@ -13153,7 +13324,7 @@
       </p:sp>
       <p:pic>
         <p:nvPicPr>
-          <p:cNvPr id="10" name="Picture 9" descr="902eda9aed980d69.png"/>
+          <p:cNvPr id="10" name="Picture 9" descr="a20fd9ba3a575f2d.png"/>
           <p:cNvPicPr>
             <a:picLocks noChangeAspect="1"/>
           </p:cNvPicPr>
@@ -13167,8 +13338,8 @@
         </p:blipFill>
         <p:spPr>
           <a:xfrm>
-            <a:off x="4070985" y="1517904"/>
-            <a:ext cx="251791" cy="543869"/>
+            <a:off x="4072310" y="1517904"/>
+            <a:ext cx="254309" cy="526243"/>
           </a:xfrm>
           <a:prstGeom prst="rect">
             <a:avLst/>
@@ -13183,7 +13354,7 @@
         </p:nvSpPr>
         <p:spPr>
           <a:xfrm>
-            <a:off x="960120" y="2276657"/>
+            <a:off x="960120" y="2250219"/>
             <a:ext cx="548640" cy="377686"/>
           </a:xfrm>
           <a:prstGeom prst="rect">
@@ -13199,11 +13370,11 @@
           <a:p>
             <a:pPr algn="l"/>
             <a:r>
-              <a:rPr sz="1900" b="1" i="0">
+              <a:rPr sz="1810" b="1" i="0">
                 <a:solidFill>
                   <a:srgbClr val="0B5394"/>
                 </a:solidFill>
-                <a:latin typeface="Century Schoolbook"/>
+                <a:latin typeface="Lexend"/>
               </a:rPr>
               <a:t>2.</a:t>
             </a:r>
@@ -13218,8 +13389,8 @@
         </p:nvSpPr>
         <p:spPr>
           <a:xfrm>
-            <a:off x="1554480" y="2276657"/>
-            <a:ext cx="2141635" cy="377686"/>
+            <a:off x="1554480" y="2250219"/>
+            <a:ext cx="2069198" cy="377686"/>
           </a:xfrm>
           <a:prstGeom prst="rect">
             <a:avLst/>
@@ -13234,11 +13405,11 @@
           <a:p>
             <a:pPr algn="l"/>
             <a:r>
-              <a:rPr sz="1900" b="0" i="0">
+              <a:rPr sz="1810" b="0" i="0">
                 <a:solidFill>
                   <a:srgbClr val="1A1A1A"/>
                 </a:solidFill>
-                <a:latin typeface="Century Schoolbook"/>
+                <a:latin typeface="Lexend"/>
               </a:rPr>
               <a:t>Find the value.  </a:t>
             </a:r>
@@ -13247,7 +13418,7 @@
       </p:sp>
       <p:pic>
         <p:nvPicPr>
-          <p:cNvPr id="13" name="Picture 12" descr="50981f95c1e46864.png"/>
+          <p:cNvPr id="13" name="Picture 12" descr="88fae2052833ae87.png"/>
           <p:cNvPicPr>
             <a:picLocks noChangeAspect="1"/>
           </p:cNvPicPr>
@@ -13261,8 +13432,8 @@
         </p:blipFill>
         <p:spPr>
           <a:xfrm>
-            <a:off x="3558955" y="2189789"/>
-            <a:ext cx="251791" cy="551422"/>
+            <a:off x="3486518" y="2172163"/>
+            <a:ext cx="271934" cy="533797"/>
           </a:xfrm>
           <a:prstGeom prst="rect">
             <a:avLst/>
@@ -13277,7 +13448,7 @@
         </p:nvSpPr>
         <p:spPr>
           <a:xfrm>
-            <a:off x="960120" y="3000159"/>
+            <a:off x="960120" y="2958614"/>
             <a:ext cx="548640" cy="377686"/>
           </a:xfrm>
           <a:prstGeom prst="rect">
@@ -13293,11 +13464,11 @@
           <a:p>
             <a:pPr algn="l"/>
             <a:r>
-              <a:rPr sz="1900" b="1" i="0">
+              <a:rPr sz="1810" b="1" i="0">
                 <a:solidFill>
                   <a:srgbClr val="0B5394"/>
                 </a:solidFill>
-                <a:latin typeface="Century Schoolbook"/>
+                <a:latin typeface="Lexend"/>
               </a:rPr>
               <a:t>3.</a:t>
             </a:r>
@@ -13312,8 +13483,8 @@
         </p:nvSpPr>
         <p:spPr>
           <a:xfrm>
-            <a:off x="1554480" y="3000159"/>
-            <a:ext cx="2141635" cy="377686"/>
+            <a:off x="1554480" y="2958614"/>
+            <a:ext cx="2069198" cy="377686"/>
           </a:xfrm>
           <a:prstGeom prst="rect">
             <a:avLst/>
@@ -13328,11 +13499,11 @@
           <a:p>
             <a:pPr algn="l"/>
             <a:r>
-              <a:rPr sz="1900" b="0" i="0">
+              <a:rPr sz="1810" b="0" i="0">
                 <a:solidFill>
                   <a:srgbClr val="1A1A1A"/>
                 </a:solidFill>
-                <a:latin typeface="Century Schoolbook"/>
+                <a:latin typeface="Lexend"/>
               </a:rPr>
               <a:t>Find the value.  </a:t>
             </a:r>
@@ -13341,7 +13512,7 @@
       </p:sp>
       <p:pic>
         <p:nvPicPr>
-          <p:cNvPr id="16" name="Picture 15" descr="406d0c52d10417b5.png"/>
+          <p:cNvPr id="16" name="Picture 15" descr="086531e7053a3b9d.png"/>
           <p:cNvPicPr>
             <a:picLocks noChangeAspect="1"/>
           </p:cNvPicPr>
@@ -13355,8 +13526,8 @@
         </p:blipFill>
         <p:spPr>
           <a:xfrm>
-            <a:off x="3558955" y="2869228"/>
-            <a:ext cx="621924" cy="639549"/>
+            <a:off x="3486518" y="2833977"/>
+            <a:ext cx="616888" cy="626960"/>
           </a:xfrm>
           <a:prstGeom prst="rect">
             <a:avLst/>
@@ -13371,7 +13542,7 @@
         </p:nvSpPr>
         <p:spPr>
           <a:xfrm>
-            <a:off x="960120" y="3677080"/>
+            <a:off x="960120" y="3622945"/>
             <a:ext cx="548640" cy="377686"/>
           </a:xfrm>
           <a:prstGeom prst="rect">
@@ -13387,11 +13558,11 @@
           <a:p>
             <a:pPr algn="l"/>
             <a:r>
-              <a:rPr sz="1900" b="1" i="0">
+              <a:rPr sz="1810" b="1" i="0">
                 <a:solidFill>
                   <a:srgbClr val="0B5394"/>
                 </a:solidFill>
-                <a:latin typeface="Century Schoolbook"/>
+                <a:latin typeface="Lexend"/>
               </a:rPr>
               <a:t>4.</a:t>
             </a:r>
@@ -13406,8 +13577,8 @@
         </p:nvSpPr>
         <p:spPr>
           <a:xfrm>
-            <a:off x="1554480" y="3677080"/>
-            <a:ext cx="8572632" cy="377686"/>
+            <a:off x="1554480" y="3622945"/>
+            <a:ext cx="8520898" cy="377686"/>
           </a:xfrm>
           <a:prstGeom prst="rect">
             <a:avLst/>
@@ -13422,11 +13593,11 @@
           <a:p>
             <a:pPr algn="l"/>
             <a:r>
-              <a:rPr sz="1900" b="0" i="0">
+              <a:rPr sz="1810" b="0" i="0">
                 <a:solidFill>
                   <a:srgbClr val="1A1A1A"/>
                 </a:solidFill>
-                <a:latin typeface="Century Schoolbook"/>
+                <a:latin typeface="Lexend"/>
               </a:rPr>
               <a:t>Rewrite so the exponent is on the numerator and on the denominator.  </a:t>
             </a:r>
@@ -13435,7 +13606,7 @@
       </p:sp>
       <p:pic>
         <p:nvPicPr>
-          <p:cNvPr id="19" name="Picture 18" descr="7680a96943fc6563.png"/>
+          <p:cNvPr id="19" name="Picture 18" descr="eb63da779674ef33.png"/>
           <p:cNvPicPr>
             <a:picLocks noChangeAspect="1"/>
           </p:cNvPicPr>
@@ -13449,8 +13620,8 @@
         </p:blipFill>
         <p:spPr>
           <a:xfrm>
-            <a:off x="9989952" y="3636794"/>
-            <a:ext cx="526243" cy="458260"/>
+            <a:off x="9938218" y="3588953"/>
+            <a:ext cx="533797" cy="445670"/>
           </a:xfrm>
           <a:prstGeom prst="rect">
             <a:avLst/>
@@ -13465,7 +13636,7 @@
         </p:nvSpPr>
         <p:spPr>
           <a:xfrm>
-            <a:off x="960120" y="4265874"/>
+            <a:off x="960120" y="4199150"/>
             <a:ext cx="548640" cy="377686"/>
           </a:xfrm>
           <a:prstGeom prst="rect">
@@ -13481,11 +13652,11 @@
           <a:p>
             <a:pPr algn="l"/>
             <a:r>
-              <a:rPr sz="1900" b="1" i="0">
+              <a:rPr sz="1810" b="1" i="0">
                 <a:solidFill>
                   <a:srgbClr val="0B5394"/>
                 </a:solidFill>
-                <a:latin typeface="Century Schoolbook"/>
+                <a:latin typeface="Lexend"/>
               </a:rPr>
               <a:t>5.</a:t>
             </a:r>
@@ -13500,8 +13671,8 @@
         </p:nvSpPr>
         <p:spPr>
           <a:xfrm>
-            <a:off x="1554480" y="4265874"/>
-            <a:ext cx="2141635" cy="377686"/>
+            <a:off x="1554480" y="4199150"/>
+            <a:ext cx="2069198" cy="377686"/>
           </a:xfrm>
           <a:prstGeom prst="rect">
             <a:avLst/>
@@ -13516,11 +13687,11 @@
           <a:p>
             <a:pPr algn="l"/>
             <a:r>
-              <a:rPr sz="1900" b="0" i="0">
+              <a:rPr sz="1810" b="0" i="0">
                 <a:solidFill>
                   <a:srgbClr val="1A1A1A"/>
                 </a:solidFill>
-                <a:latin typeface="Century Schoolbook"/>
+                <a:latin typeface="Lexend"/>
               </a:rPr>
               <a:t>Find the value.  </a:t>
             </a:r>
@@ -13529,7 +13700,7 @@
       </p:sp>
       <p:pic>
         <p:nvPicPr>
-          <p:cNvPr id="22" name="Picture 21" descr="bb269878437e8ee9.png"/>
+          <p:cNvPr id="22" name="Picture 21" descr="5724de55833e2de2.png"/>
           <p:cNvPicPr>
             <a:picLocks noChangeAspect="1"/>
           </p:cNvPicPr>
@@ -13543,8 +13714,8 @@
         </p:blipFill>
         <p:spPr>
           <a:xfrm>
-            <a:off x="3558955" y="4223070"/>
-            <a:ext cx="669764" cy="463295"/>
+            <a:off x="3486518" y="4162640"/>
+            <a:ext cx="667246" cy="450706"/>
           </a:xfrm>
           <a:prstGeom prst="rect">
             <a:avLst/>
@@ -13559,7 +13730,7 @@
         </p:nvSpPr>
         <p:spPr>
           <a:xfrm>
-            <a:off x="960120" y="4874812"/>
+            <a:off x="960120" y="4801792"/>
             <a:ext cx="548640" cy="377686"/>
           </a:xfrm>
           <a:prstGeom prst="rect">
@@ -13575,11 +13746,11 @@
           <a:p>
             <a:pPr algn="l"/>
             <a:r>
-              <a:rPr sz="1900" b="1" i="0">
+              <a:rPr sz="1810" b="1" i="0">
                 <a:solidFill>
                   <a:srgbClr val="0B5394"/>
                 </a:solidFill>
-                <a:latin typeface="Century Schoolbook"/>
+                <a:latin typeface="Lexend"/>
               </a:rPr>
               <a:t>6.</a:t>
             </a:r>
@@ -13594,8 +13765,8 @@
         </p:nvSpPr>
         <p:spPr>
           <a:xfrm>
-            <a:off x="1554480" y="4874812"/>
-            <a:ext cx="2283617" cy="377686"/>
+            <a:off x="1554480" y="4801792"/>
+            <a:ext cx="2253888" cy="377686"/>
           </a:xfrm>
           <a:prstGeom prst="rect">
             <a:avLst/>
@@ -13610,11 +13781,11 @@
           <a:p>
             <a:pPr algn="l"/>
             <a:r>
-              <a:rPr sz="1900" b="0" i="0">
+              <a:rPr sz="1810" b="0" i="0">
                 <a:solidFill>
                   <a:srgbClr val="1A1A1A"/>
                 </a:solidFill>
-                <a:latin typeface="Century Schoolbook"/>
+                <a:latin typeface="Lexend"/>
               </a:rPr>
               <a:t>Find the value of </a:t>
             </a:r>
@@ -13623,7 +13794,7 @@
       </p:sp>
       <p:pic>
         <p:nvPicPr>
-          <p:cNvPr id="25" name="Picture 24" descr="0afe177f69dd5e06.png"/>
+          <p:cNvPr id="25" name="Picture 24" descr="6d78c2be12150bf5.png"/>
           <p:cNvPicPr>
             <a:picLocks noChangeAspect="1"/>
           </p:cNvPicPr>
@@ -13637,8 +13808,8 @@
         </p:blipFill>
         <p:spPr>
           <a:xfrm>
-            <a:off x="3700937" y="5001966"/>
-            <a:ext cx="128413" cy="123377"/>
+            <a:off x="3671208" y="4921393"/>
+            <a:ext cx="120859" cy="138485"/>
           </a:xfrm>
           <a:prstGeom prst="rect">
             <a:avLst/>
@@ -13653,8 +13824,8 @@
         </p:nvSpPr>
         <p:spPr>
           <a:xfrm>
-            <a:off x="3829351" y="4874812"/>
-            <a:ext cx="423600" cy="377686"/>
+            <a:off x="3792068" y="4801792"/>
+            <a:ext cx="401795" cy="377686"/>
           </a:xfrm>
           <a:prstGeom prst="rect">
             <a:avLst/>
@@ -13669,11 +13840,11 @@
           <a:p>
             <a:pPr algn="l"/>
             <a:r>
-              <a:rPr sz="1900" b="0" i="0">
+              <a:rPr sz="1810" b="0" i="0">
                 <a:solidFill>
                   <a:srgbClr val="1A1A1A"/>
                 </a:solidFill>
-                <a:latin typeface="Century Schoolbook"/>
+                <a:latin typeface="Lexend"/>
               </a:rPr>
               <a:t>.  </a:t>
             </a:r>
@@ -13682,7 +13853,7 @@
       </p:sp>
       <p:pic>
         <p:nvPicPr>
-          <p:cNvPr id="27" name="Picture 26" descr="e9a852f8219a3abf.png"/>
+          <p:cNvPr id="27" name="Picture 26" descr="70948e8ce7156c12.png"/>
           <p:cNvPicPr>
             <a:picLocks noChangeAspect="1"/>
           </p:cNvPicPr>
@@ -13696,8 +13867,8 @@
         </p:blipFill>
         <p:spPr>
           <a:xfrm>
-            <a:off x="4115791" y="4814382"/>
-            <a:ext cx="778035" cy="498546"/>
+            <a:off x="4056703" y="4741362"/>
+            <a:ext cx="783070" cy="498546"/>
           </a:xfrm>
           <a:prstGeom prst="rect">
             <a:avLst/>
@@ -13746,11 +13917,11 @@
           <a:p>
             <a:pPr algn="l"/>
             <a:r>
-              <a:rPr sz="3600" b="1" i="0">
+              <a:rPr sz="3420" b="1" i="0">
                 <a:solidFill>
                   <a:srgbClr val="1A1A1A"/>
                 </a:solidFill>
-                <a:latin typeface="Century Schoolbook"/>
+                <a:latin typeface="Lexend"/>
               </a:rPr>
               <a:t>IXL</a:t>
             </a:r>
@@ -13886,11 +14057,11 @@
           <a:p>
             <a:pPr algn="l"/>
             <a:r>
-              <a:rPr sz="1100" b="0" i="1">
+              <a:rPr sz="1040" b="0" i="0">
                 <a:solidFill>
                   <a:srgbClr val="6B6B6B"/>
                 </a:solidFill>
-                <a:latin typeface="Century Schoolbook"/>
+                <a:latin typeface="Lexend"/>
               </a:rPr>
               <a:t>Grade 7 Accelerated · Unit 3 · Lesson 2 — Quotient Laws of Exponents</a:t>
             </a:r>
@@ -13921,11 +14092,11 @@
           <a:p>
             <a:pPr algn="r"/>
             <a:r>
-              <a:rPr sz="1100" b="0" i="0">
+              <a:rPr sz="1040" b="0" i="0">
                 <a:solidFill>
                   <a:srgbClr val="6B6B6B"/>
                 </a:solidFill>
-                <a:latin typeface="Century Schoolbook"/>
+                <a:latin typeface="Lexend"/>
               </a:rPr>
               <a:t>34</a:t>
             </a:r>
@@ -13956,11 +14127,11 @@
           <a:p>
             <a:pPr algn="l"/>
             <a:r>
-              <a:rPr sz="2100" b="1" i="0">
+              <a:rPr sz="1989" b="1" i="0">
                 <a:solidFill>
                   <a:srgbClr val="0B5394"/>
                 </a:solidFill>
-                <a:latin typeface="Century Schoolbook"/>
+                <a:latin typeface="Lexend"/>
               </a:rPr>
               <a:t>1.</a:t>
             </a:r>
@@ -13991,11 +14162,11 @@
           <a:p>
             <a:pPr algn="l"/>
             <a:r>
-              <a:rPr sz="2100" b="0" i="0">
+              <a:rPr sz="1989" b="0" i="0">
                 <a:solidFill>
                   <a:srgbClr val="1A1A1A"/>
                 </a:solidFill>
-                <a:latin typeface="Century Schoolbook"/>
+                <a:latin typeface="Lexend"/>
               </a:rPr>
               <a:t>Open IXL and start today's skills.</a:t>
             </a:r>
@@ -14026,11 +14197,11 @@
           <a:p>
             <a:pPr algn="l"/>
             <a:r>
-              <a:rPr sz="2100" b="1" i="0">
+              <a:rPr sz="1989" b="1" i="0">
                 <a:solidFill>
                   <a:srgbClr val="0B5394"/>
                 </a:solidFill>
-                <a:latin typeface="Century Schoolbook"/>
+                <a:latin typeface="Lexend"/>
               </a:rPr>
               <a:t>2.</a:t>
             </a:r>
@@ -14061,11 +14232,11 @@
           <a:p>
             <a:pPr algn="l"/>
             <a:r>
-              <a:rPr sz="2100" b="0" i="0">
+              <a:rPr sz="1989" b="0" i="0">
                 <a:solidFill>
                   <a:srgbClr val="1A1A1A"/>
                 </a:solidFill>
-                <a:latin typeface="Century Schoolbook"/>
+                <a:latin typeface="Lexend"/>
               </a:rPr>
               <a:t>Work on paper where the question needs work. The answer box does not show it.</a:t>
             </a:r>
@@ -14096,11 +14267,11 @@
           <a:p>
             <a:pPr algn="l"/>
             <a:r>
-              <a:rPr sz="2100" b="1" i="0">
+              <a:rPr sz="1989" b="1" i="0">
                 <a:solidFill>
                   <a:srgbClr val="0B5394"/>
                 </a:solidFill>
-                <a:latin typeface="Century Schoolbook"/>
+                <a:latin typeface="Lexend"/>
               </a:rPr>
               <a:t>3.</a:t>
             </a:r>
@@ -14131,11 +14302,11 @@
           <a:p>
             <a:pPr algn="l"/>
             <a:r>
-              <a:rPr sz="2100" b="0" i="0">
+              <a:rPr sz="1989" b="0" i="0">
                 <a:solidFill>
                   <a:srgbClr val="1A1A1A"/>
                 </a:solidFill>
-                <a:latin typeface="Century Schoolbook"/>
+                <a:latin typeface="Lexend"/>
               </a:rPr>
               <a:t>Every skill listed is required, to a SmartScore of 67. Due at the start of the next class.</a:t>
             </a:r>
@@ -14166,11 +14337,11 @@
           <a:p>
             <a:pPr algn="l"/>
             <a:r>
-              <a:rPr sz="2100" b="1" i="0">
+              <a:rPr sz="1989" b="1" i="0">
                 <a:solidFill>
                   <a:srgbClr val="1A1A1A"/>
                 </a:solidFill>
-                <a:latin typeface="Century Schoolbook"/>
+                <a:latin typeface="Lexend"/>
               </a:rPr>
               <a:t>Today's skills — all required</a:t>
             </a:r>
@@ -14201,11 +14372,11 @@
           <a:p>
             <a:pPr algn="l"/>
             <a:r>
-              <a:rPr sz="1900" b="0" i="0">
+              <a:rPr sz="1810" b="0" i="0">
                 <a:solidFill>
                   <a:srgbClr val="1A1A1A"/>
                 </a:solidFill>
-                <a:latin typeface="Century Schoolbook"/>
+                <a:latin typeface="Lexend"/>
               </a:rPr>
               <a:t>Powers with negative bases — WFW</a:t>
             </a:r>
@@ -14236,11 +14407,11 @@
           <a:p>
             <a:pPr algn="l"/>
             <a:r>
-              <a:rPr sz="1900" b="0" i="0">
+              <a:rPr sz="1810" b="0" i="0">
                 <a:solidFill>
                   <a:srgbClr val="1A1A1A"/>
                 </a:solidFill>
-                <a:latin typeface="Century Schoolbook"/>
+                <a:latin typeface="Lexend"/>
               </a:rPr>
               <a:t>Division with exponents — XNC</a:t>
             </a:r>
@@ -14271,11 +14442,11 @@
           <a:p>
             <a:pPr algn="l"/>
             <a:r>
-              <a:rPr sz="1900" b="0" i="0">
+              <a:rPr sz="1810" b="0" i="0">
                 <a:solidFill>
                   <a:srgbClr val="1A1A1A"/>
                 </a:solidFill>
-                <a:latin typeface="Century Schoolbook"/>
+                <a:latin typeface="Lexend"/>
               </a:rPr>
               <a:t>Identify equivalent expressions involving whole-number exponents — KBE</a:t>
             </a:r>
@@ -14324,11 +14495,11 @@
           <a:p>
             <a:pPr algn="l"/>
             <a:r>
-              <a:rPr sz="3600" b="1" i="0">
+              <a:rPr sz="3420" b="1" i="0">
                 <a:solidFill>
                   <a:srgbClr val="1A1A1A"/>
                 </a:solidFill>
-                <a:latin typeface="Century Schoolbook"/>
+                <a:latin typeface="Lexend"/>
               </a:rPr>
               <a:t>Notes</a:t>
             </a:r>
@@ -14464,11 +14635,11 @@
           <a:p>
             <a:pPr algn="l"/>
             <a:r>
-              <a:rPr sz="1100" b="0" i="1">
+              <a:rPr sz="1040" b="0" i="0">
                 <a:solidFill>
                   <a:srgbClr val="6B6B6B"/>
                 </a:solidFill>
-                <a:latin typeface="Century Schoolbook"/>
+                <a:latin typeface="Lexend"/>
               </a:rPr>
               <a:t>Grade 7 Accelerated · Unit 3 · Lesson 2 — Quotient Laws of Exponents</a:t>
             </a:r>
@@ -14499,11 +14670,11 @@
           <a:p>
             <a:pPr algn="r"/>
             <a:r>
-              <a:rPr sz="1100" b="0" i="0">
+              <a:rPr sz="1040" b="0" i="0">
                 <a:solidFill>
                   <a:srgbClr val="6B6B6B"/>
                 </a:solidFill>
-                <a:latin typeface="Century Schoolbook"/>
+                <a:latin typeface="Lexend"/>
               </a:rPr>
               <a:t>4</a:t>
             </a:r>
@@ -14534,11 +14705,11 @@
           <a:p>
             <a:pPr algn="l"/>
             <a:r>
-              <a:rPr sz="2500" b="1" i="0">
+              <a:rPr sz="2380" b="1" i="0">
                 <a:solidFill>
                   <a:srgbClr val="1A1A1A"/>
                 </a:solidFill>
-                <a:latin typeface="Century Schoolbook"/>
+                <a:latin typeface="Lexend"/>
               </a:rPr>
               <a:t>I.  Quotient of powers — same base, subtract the exponents</a:t>
             </a:r>
@@ -14582,7 +14753,7 @@
       </p:cxnSp>
       <p:pic>
         <p:nvPicPr>
-          <p:cNvPr id="10" name="Picture 9" descr="0fc742bc47e6f651.png"/>
+          <p:cNvPr id="10" name="Picture 9" descr="375c22fc6b7d891a.png"/>
           <p:cNvPicPr>
             <a:picLocks noChangeAspect="1"/>
           </p:cNvPicPr>
@@ -14596,8 +14767,8 @@
         </p:blipFill>
         <p:spPr>
           <a:xfrm>
-            <a:off x="3349752" y="1993392"/>
-            <a:ext cx="5462016" cy="813816"/>
+            <a:off x="3307080" y="1993392"/>
+            <a:ext cx="5547360" cy="795528"/>
           </a:xfrm>
           <a:prstGeom prst="rect">
             <a:avLst/>
@@ -14612,8 +14783,8 @@
         </p:nvSpPr>
         <p:spPr>
           <a:xfrm>
-            <a:off x="987552" y="3233928"/>
-            <a:ext cx="3534479" cy="457200"/>
+            <a:off x="987552" y="3232404"/>
+            <a:ext cx="3333101" cy="457200"/>
           </a:xfrm>
           <a:prstGeom prst="rect">
             <a:avLst/>
@@ -14628,11 +14799,11 @@
           <a:p>
             <a:pPr algn="l"/>
             <a:r>
-              <a:rPr sz="2300" b="1" i="0">
+              <a:rPr sz="2180" b="1" i="0">
                 <a:solidFill>
                   <a:srgbClr val="1A1A1A"/>
                 </a:solidFill>
-                <a:latin typeface="Century Schoolbook"/>
+                <a:latin typeface="Lexend"/>
               </a:rPr>
               <a:t>Quotient of powers:  </a:t>
             </a:r>
@@ -14641,7 +14812,7 @@
       </p:sp>
       <p:pic>
         <p:nvPicPr>
-          <p:cNvPr id="12" name="Picture 11" descr="99376a582dd7223c.png"/>
+          <p:cNvPr id="12" name="Picture 11" descr="2719c53adc764b54.png"/>
           <p:cNvPicPr>
             <a:picLocks noChangeAspect="1"/>
           </p:cNvPicPr>
@@ -14655,8 +14826,8 @@
         </p:blipFill>
         <p:spPr>
           <a:xfrm>
-            <a:off x="4384871" y="3127248"/>
-            <a:ext cx="1749552" cy="670560"/>
+            <a:off x="4183493" y="3108960"/>
+            <a:ext cx="1840991" cy="704088"/>
           </a:xfrm>
           <a:prstGeom prst="rect">
             <a:avLst/>
@@ -14671,8 +14842,8 @@
         </p:nvSpPr>
         <p:spPr>
           <a:xfrm>
-            <a:off x="6134423" y="3233928"/>
-            <a:ext cx="597344" cy="457200"/>
+            <a:off x="6024485" y="3232404"/>
+            <a:ext cx="607367" cy="457200"/>
           </a:xfrm>
           <a:prstGeom prst="rect">
             <a:avLst/>
@@ -14687,11 +14858,11 @@
           <a:p>
             <a:pPr algn="l"/>
             <a:r>
-              <a:rPr sz="2300" b="1" i="0">
+              <a:rPr sz="2180" b="1" i="0">
                 <a:solidFill>
                   <a:srgbClr val="1A1A1A"/>
                 </a:solidFill>
-                <a:latin typeface="Century Schoolbook"/>
+                <a:latin typeface="Lexend"/>
               </a:rPr>
               <a:t>   (</a:t>
             </a:r>
@@ -14700,7 +14871,7 @@
       </p:sp>
       <p:pic>
         <p:nvPicPr>
-          <p:cNvPr id="14" name="Picture 13" descr="6a9975e145b437dd.png"/>
+          <p:cNvPr id="14" name="Picture 13" descr="47b5f205461fb9cf.png"/>
           <p:cNvPicPr>
             <a:picLocks noChangeAspect="1"/>
           </p:cNvPicPr>
@@ -14714,8 +14885,8 @@
         </p:blipFill>
         <p:spPr>
           <a:xfrm>
-            <a:off x="6594607" y="3293364"/>
-            <a:ext cx="789432" cy="338328"/>
+            <a:off x="6494692" y="3322320"/>
+            <a:ext cx="810768" cy="277368"/>
           </a:xfrm>
           <a:prstGeom prst="rect">
             <a:avLst/>
@@ -14730,8 +14901,8 @@
         </p:nvSpPr>
         <p:spPr>
           <a:xfrm>
-            <a:off x="7384039" y="3233928"/>
-            <a:ext cx="330733" cy="457200"/>
+            <a:off x="7305460" y="3232404"/>
+            <a:ext cx="325012" cy="457200"/>
           </a:xfrm>
           <a:prstGeom prst="rect">
             <a:avLst/>
@@ -14746,11 +14917,11 @@
           <a:p>
             <a:pPr algn="l"/>
             <a:r>
-              <a:rPr sz="2300" b="1" i="0">
+              <a:rPr sz="2180" b="1" i="0">
                 <a:solidFill>
                   <a:srgbClr val="1A1A1A"/>
                 </a:solidFill>
-                <a:latin typeface="Century Schoolbook"/>
+                <a:latin typeface="Lexend"/>
               </a:rPr>
               <a:t>)</a:t>
             </a:r>
@@ -14765,8 +14936,8 @@
         </p:nvSpPr>
         <p:spPr>
           <a:xfrm>
-            <a:off x="987552" y="4232148"/>
-            <a:ext cx="3088445" cy="457200"/>
+            <a:off x="987552" y="4238244"/>
+            <a:ext cx="2997293" cy="457200"/>
           </a:xfrm>
           <a:prstGeom prst="rect">
             <a:avLst/>
@@ -14781,11 +14952,11 @@
           <a:p>
             <a:pPr algn="l"/>
             <a:r>
-              <a:rPr sz="2300" b="0" i="0">
+              <a:rPr sz="2180" b="0" i="0">
                 <a:solidFill>
                   <a:srgbClr val="1A1A1A"/>
                 </a:solidFill>
-                <a:latin typeface="Century Schoolbook"/>
+                <a:latin typeface="Lexend"/>
               </a:rPr>
               <a:t>Check with values:  </a:t>
             </a:r>
@@ -14794,7 +14965,7 @@
       </p:sp>
       <p:pic>
         <p:nvPicPr>
-          <p:cNvPr id="17" name="Picture 16" descr="74344545705a48f9.png"/>
+          <p:cNvPr id="17" name="Picture 16" descr="d483ca18e1ed7f43.png"/>
           <p:cNvPicPr>
             <a:picLocks noChangeAspect="1"/>
           </p:cNvPicPr>
@@ -14808,8 +14979,8 @@
         </p:blipFill>
         <p:spPr>
           <a:xfrm>
-            <a:off x="3938837" y="4053840"/>
-            <a:ext cx="3621024" cy="813816"/>
+            <a:off x="3847685" y="4069080"/>
+            <a:ext cx="3602736" cy="795528"/>
           </a:xfrm>
           <a:prstGeom prst="rect">
             <a:avLst/>
@@ -14858,11 +15029,11 @@
           <a:p>
             <a:pPr algn="l"/>
             <a:r>
-              <a:rPr sz="3600" b="1" i="0">
+              <a:rPr sz="3420" b="1" i="0">
                 <a:solidFill>
                   <a:srgbClr val="1A1A1A"/>
                 </a:solidFill>
-                <a:latin typeface="Century Schoolbook"/>
+                <a:latin typeface="Lexend"/>
               </a:rPr>
               <a:t>Notes</a:t>
             </a:r>
@@ -14998,11 +15169,11 @@
           <a:p>
             <a:pPr algn="l"/>
             <a:r>
-              <a:rPr sz="1100" b="0" i="1">
+              <a:rPr sz="1040" b="0" i="0">
                 <a:solidFill>
                   <a:srgbClr val="6B6B6B"/>
                 </a:solidFill>
-                <a:latin typeface="Century Schoolbook"/>
+                <a:latin typeface="Lexend"/>
               </a:rPr>
               <a:t>Grade 7 Accelerated · Unit 3 · Lesson 2 — Quotient Laws of Exponents</a:t>
             </a:r>
@@ -15033,11 +15204,11 @@
           <a:p>
             <a:pPr algn="r"/>
             <a:r>
-              <a:rPr sz="1100" b="0" i="0">
+              <a:rPr sz="1040" b="0" i="0">
                 <a:solidFill>
                   <a:srgbClr val="6B6B6B"/>
                 </a:solidFill>
-                <a:latin typeface="Century Schoolbook"/>
+                <a:latin typeface="Lexend"/>
               </a:rPr>
               <a:t>5</a:t>
             </a:r>
@@ -15068,11 +15239,11 @@
           <a:p>
             <a:pPr algn="l"/>
             <a:r>
-              <a:rPr sz="2500" b="1" i="0">
+              <a:rPr sz="2380" b="1" i="0">
                 <a:solidFill>
                   <a:srgbClr val="1A1A1A"/>
                 </a:solidFill>
-                <a:latin typeface="Century Schoolbook"/>
+                <a:latin typeface="Lexend"/>
               </a:rPr>
               <a:t>II.  Power of a quotient — the exponent goes top and bottom</a:t>
             </a:r>
@@ -15116,7 +15287,7 @@
       </p:cxnSp>
       <p:pic>
         <p:nvPicPr>
-          <p:cNvPr id="10" name="Picture 9" descr="e72c69fb4c92c91a.png"/>
+          <p:cNvPr id="10" name="Picture 9" descr="9c7f0c386a86fa4d.png"/>
           <p:cNvPicPr>
             <a:picLocks noChangeAspect="1"/>
           </p:cNvPicPr>
@@ -15130,8 +15301,8 @@
         </p:blipFill>
         <p:spPr>
           <a:xfrm>
-            <a:off x="2903220" y="1993392"/>
-            <a:ext cx="6355080" cy="810768"/>
+            <a:off x="2887980" y="1993392"/>
+            <a:ext cx="6385560" cy="792480"/>
           </a:xfrm>
           <a:prstGeom prst="rect">
             <a:avLst/>
@@ -15146,8 +15317,8 @@
         </p:nvSpPr>
         <p:spPr>
           <a:xfrm>
-            <a:off x="987552" y="3236976"/>
-            <a:ext cx="3613463" cy="457200"/>
+            <a:off x="987552" y="3230880"/>
+            <a:ext cx="3428069" cy="457200"/>
           </a:xfrm>
           <a:prstGeom prst="rect">
             <a:avLst/>
@@ -15162,11 +15333,11 @@
           <a:p>
             <a:pPr algn="l"/>
             <a:r>
-              <a:rPr sz="2300" b="1" i="0">
+              <a:rPr sz="2180" b="1" i="0">
                 <a:solidFill>
                   <a:srgbClr val="1A1A1A"/>
                 </a:solidFill>
-                <a:latin typeface="Century Schoolbook"/>
+                <a:latin typeface="Lexend"/>
               </a:rPr>
               <a:t>Power of a quotient:  </a:t>
             </a:r>
@@ -15175,7 +15346,7 @@
       </p:sp>
       <p:pic>
         <p:nvPicPr>
-          <p:cNvPr id="12" name="Picture 11" descr="669ee74891112a84.png"/>
+          <p:cNvPr id="12" name="Picture 11" descr="e37a07201392836d.png"/>
           <p:cNvPicPr>
             <a:picLocks noChangeAspect="1"/>
           </p:cNvPicPr>
@@ -15189,8 +15360,8 @@
         </p:blipFill>
         <p:spPr>
           <a:xfrm>
-            <a:off x="4463855" y="3124200"/>
-            <a:ext cx="1691640" cy="682752"/>
+            <a:off x="4278461" y="3105912"/>
+            <a:ext cx="1804416" cy="707136"/>
           </a:xfrm>
           <a:prstGeom prst="rect">
             <a:avLst/>
@@ -15205,8 +15376,8 @@
         </p:nvSpPr>
         <p:spPr>
           <a:xfrm>
-            <a:off x="6155495" y="3236976"/>
-            <a:ext cx="597344" cy="457200"/>
+            <a:off x="6082877" y="3230880"/>
+            <a:ext cx="607367" cy="457200"/>
           </a:xfrm>
           <a:prstGeom prst="rect">
             <a:avLst/>
@@ -15221,11 +15392,11 @@
           <a:p>
             <a:pPr algn="l"/>
             <a:r>
-              <a:rPr sz="2300" b="1" i="0">
+              <a:rPr sz="2180" b="1" i="0">
                 <a:solidFill>
                   <a:srgbClr val="1A1A1A"/>
                 </a:solidFill>
-                <a:latin typeface="Century Schoolbook"/>
+                <a:latin typeface="Lexend"/>
               </a:rPr>
               <a:t>   (</a:t>
             </a:r>
@@ -15234,7 +15405,7 @@
       </p:sp>
       <p:pic>
         <p:nvPicPr>
-          <p:cNvPr id="14" name="Picture 13" descr="a22d74845d9bf155.png"/>
+          <p:cNvPr id="14" name="Picture 13" descr="cc4966101ceb7e70.png"/>
           <p:cNvPicPr>
             <a:picLocks noChangeAspect="1"/>
           </p:cNvPicPr>
@@ -15248,8 +15419,8 @@
         </p:blipFill>
         <p:spPr>
           <a:xfrm>
-            <a:off x="6615680" y="3294887"/>
-            <a:ext cx="786384" cy="341376"/>
+            <a:off x="6553084" y="3314700"/>
+            <a:ext cx="798576" cy="289560"/>
           </a:xfrm>
           <a:prstGeom prst="rect">
             <a:avLst/>
@@ -15264,8 +15435,8 @@
         </p:nvSpPr>
         <p:spPr>
           <a:xfrm>
-            <a:off x="7402064" y="3236976"/>
-            <a:ext cx="330733" cy="457200"/>
+            <a:off x="7351660" y="3230880"/>
+            <a:ext cx="325012" cy="457200"/>
           </a:xfrm>
           <a:prstGeom prst="rect">
             <a:avLst/>
@@ -15280,11 +15451,11 @@
           <a:p>
             <a:pPr algn="l"/>
             <a:r>
-              <a:rPr sz="2300" b="1" i="0">
+              <a:rPr sz="2180" b="1" i="0">
                 <a:solidFill>
                   <a:srgbClr val="1A1A1A"/>
                 </a:solidFill>
-                <a:latin typeface="Century Schoolbook"/>
+                <a:latin typeface="Lexend"/>
               </a:rPr>
               <a:t>)</a:t>
             </a:r>
@@ -15299,8 +15470,8 @@
         </p:nvSpPr>
         <p:spPr>
           <a:xfrm>
-            <a:off x="987552" y="4239768"/>
-            <a:ext cx="2033729" cy="457200"/>
+            <a:off x="987552" y="4236720"/>
+            <a:ext cx="1950151" cy="457200"/>
           </a:xfrm>
           <a:prstGeom prst="rect">
             <a:avLst/>
@@ -15315,11 +15486,11 @@
           <a:p>
             <a:pPr algn="l"/>
             <a:r>
-              <a:rPr sz="2300" b="0" i="0">
+              <a:rPr sz="2180" b="0" i="0">
                 <a:solidFill>
                   <a:srgbClr val="1A1A1A"/>
                 </a:solidFill>
-                <a:latin typeface="Century Schoolbook"/>
+                <a:latin typeface="Lexend"/>
               </a:rPr>
               <a:t>Either way:  </a:t>
             </a:r>
@@ -15328,7 +15499,7 @@
       </p:sp>
       <p:pic>
         <p:nvPicPr>
-          <p:cNvPr id="17" name="Picture 16" descr="efb58e8ff7264b81.png"/>
+          <p:cNvPr id="17" name="Picture 16" descr="39a07b3eaa91d2f7.png"/>
           <p:cNvPicPr>
             <a:picLocks noChangeAspect="1"/>
           </p:cNvPicPr>
@@ -15342,8 +15513,8 @@
         </p:blipFill>
         <p:spPr>
           <a:xfrm>
-            <a:off x="2884121" y="4062984"/>
-            <a:ext cx="3188208" cy="810768"/>
+            <a:off x="2800543" y="4069080"/>
+            <a:ext cx="3233928" cy="792480"/>
           </a:xfrm>
           <a:prstGeom prst="rect">
             <a:avLst/>
@@ -15358,8 +15529,8 @@
         </p:nvSpPr>
         <p:spPr>
           <a:xfrm>
-            <a:off x="6072329" y="4239768"/>
-            <a:ext cx="1265922" cy="457200"/>
+            <a:off x="6034471" y="4236720"/>
+            <a:ext cx="1252257" cy="457200"/>
           </a:xfrm>
           <a:prstGeom prst="rect">
             <a:avLst/>
@@ -15374,11 +15545,11 @@
           <a:p>
             <a:pPr algn="l"/>
             <a:r>
-              <a:rPr sz="2300" b="0" i="0">
+              <a:rPr sz="2180" b="0" i="0">
                 <a:solidFill>
                   <a:srgbClr val="1A1A1A"/>
                 </a:solidFill>
-                <a:latin typeface="Century Schoolbook"/>
+                <a:latin typeface="Lexend"/>
               </a:rPr>
               <a:t>   and   </a:t>
             </a:r>
@@ -15387,7 +15558,7 @@
       </p:sp>
       <p:pic>
         <p:nvPicPr>
-          <p:cNvPr id="19" name="Picture 18" descr="1d8df7a17576def5.png"/>
+          <p:cNvPr id="19" name="Picture 18" descr="5df7a26ae56fb2a2.png"/>
           <p:cNvPicPr>
             <a:picLocks noChangeAspect="1"/>
           </p:cNvPicPr>
@@ -15401,8 +15572,8 @@
         </p:blipFill>
         <p:spPr>
           <a:xfrm>
-            <a:off x="7201091" y="4264152"/>
-            <a:ext cx="2231136" cy="408432"/>
+            <a:off x="7149569" y="4262628"/>
+            <a:ext cx="2240280" cy="405384"/>
           </a:xfrm>
           <a:prstGeom prst="rect">
             <a:avLst/>
@@ -15451,11 +15622,11 @@
           <a:p>
             <a:pPr algn="l"/>
             <a:r>
-              <a:rPr sz="3600" b="1" i="0">
+              <a:rPr sz="3420" b="1" i="0">
                 <a:solidFill>
                   <a:srgbClr val="1A1A1A"/>
                 </a:solidFill>
-                <a:latin typeface="Century Schoolbook"/>
+                <a:latin typeface="Lexend"/>
               </a:rPr>
               <a:t>Notes</a:t>
             </a:r>
@@ -15591,11 +15762,11 @@
           <a:p>
             <a:pPr algn="l"/>
             <a:r>
-              <a:rPr sz="1100" b="0" i="1">
+              <a:rPr sz="1040" b="0" i="0">
                 <a:solidFill>
                   <a:srgbClr val="6B6B6B"/>
                 </a:solidFill>
-                <a:latin typeface="Century Schoolbook"/>
+                <a:latin typeface="Lexend"/>
               </a:rPr>
               <a:t>Grade 7 Accelerated · Unit 3 · Lesson 2 — Quotient Laws of Exponents</a:t>
             </a:r>
@@ -15626,11 +15797,11 @@
           <a:p>
             <a:pPr algn="r"/>
             <a:r>
-              <a:rPr sz="1100" b="0" i="0">
+              <a:rPr sz="1040" b="0" i="0">
                 <a:solidFill>
                   <a:srgbClr val="6B6B6B"/>
                 </a:solidFill>
-                <a:latin typeface="Century Schoolbook"/>
+                <a:latin typeface="Lexend"/>
               </a:rPr>
               <a:t>6</a:t>
             </a:r>
@@ -15661,11 +15832,11 @@
           <a:p>
             <a:pPr algn="l"/>
             <a:r>
-              <a:rPr sz="2500" b="1" i="0">
+              <a:rPr sz="2380" b="1" i="0">
                 <a:solidFill>
                   <a:srgbClr val="1A1A1A"/>
                 </a:solidFill>
-                <a:latin typeface="Century Schoolbook"/>
+                <a:latin typeface="Lexend"/>
               </a:rPr>
               <a:t>III.  The zero exponent — two roads to the same answer</a:t>
             </a:r>
@@ -15740,20 +15911,20 @@
                     <a:p>
                       <a:pPr algn="ctr"/>
                       <a:r>
-                        <a:rPr sz="1800" b="1">
+                        <a:rPr sz="1710" b="1">
                           <a:solidFill>
                             <a:srgbClr val="1A1A1A"/>
                           </a:solidFill>
-                          <a:latin typeface="Century Schoolbook"/>
+                          <a:latin typeface="Lexend"/>
                         </a:rPr>
                         <a:t>2</a:t>
                       </a:r>
                       <a:r>
-                        <a:rPr sz="1800" b="1" baseline="30000">
+                        <a:rPr sz="1710" b="1" baseline="30000">
                           <a:solidFill>
                             <a:srgbClr val="1A1A1A"/>
                           </a:solidFill>
-                          <a:latin typeface="Century Schoolbook"/>
+                          <a:latin typeface="Lexend"/>
                         </a:rPr>
                         <a:t>4</a:t>
                       </a:r>
@@ -15796,20 +15967,20 @@
                     <a:p>
                       <a:pPr algn="ctr"/>
                       <a:r>
-                        <a:rPr sz="1800" b="1">
+                        <a:rPr sz="1710" b="1">
                           <a:solidFill>
                             <a:srgbClr val="1A1A1A"/>
                           </a:solidFill>
-                          <a:latin typeface="Century Schoolbook"/>
+                          <a:latin typeface="Lexend"/>
                         </a:rPr>
                         <a:t>2</a:t>
                       </a:r>
                       <a:r>
-                        <a:rPr sz="1800" b="1" baseline="30000">
+                        <a:rPr sz="1710" b="1" baseline="30000">
                           <a:solidFill>
                             <a:srgbClr val="1A1A1A"/>
                           </a:solidFill>
-                          <a:latin typeface="Century Schoolbook"/>
+                          <a:latin typeface="Lexend"/>
                         </a:rPr>
                         <a:t>3</a:t>
                       </a:r>
@@ -15852,20 +16023,20 @@
                     <a:p>
                       <a:pPr algn="ctr"/>
                       <a:r>
-                        <a:rPr sz="1800" b="1">
+                        <a:rPr sz="1710" b="1">
                           <a:solidFill>
                             <a:srgbClr val="1A1A1A"/>
                           </a:solidFill>
-                          <a:latin typeface="Century Schoolbook"/>
+                          <a:latin typeface="Lexend"/>
                         </a:rPr>
                         <a:t>2</a:t>
                       </a:r>
                       <a:r>
-                        <a:rPr sz="1800" b="1" baseline="30000">
+                        <a:rPr sz="1710" b="1" baseline="30000">
                           <a:solidFill>
                             <a:srgbClr val="1A1A1A"/>
                           </a:solidFill>
-                          <a:latin typeface="Century Schoolbook"/>
+                          <a:latin typeface="Lexend"/>
                         </a:rPr>
                         <a:t>2</a:t>
                       </a:r>
@@ -15908,20 +16079,20 @@
                     <a:p>
                       <a:pPr algn="ctr"/>
                       <a:r>
-                        <a:rPr sz="1800" b="1">
+                        <a:rPr sz="1710" b="1">
                           <a:solidFill>
                             <a:srgbClr val="1A1A1A"/>
                           </a:solidFill>
-                          <a:latin typeface="Century Schoolbook"/>
+                          <a:latin typeface="Lexend"/>
                         </a:rPr>
                         <a:t>2</a:t>
                       </a:r>
                       <a:r>
-                        <a:rPr sz="1800" b="1" baseline="30000">
+                        <a:rPr sz="1710" b="1" baseline="30000">
                           <a:solidFill>
                             <a:srgbClr val="1A1A1A"/>
                           </a:solidFill>
-                          <a:latin typeface="Century Schoolbook"/>
+                          <a:latin typeface="Lexend"/>
                         </a:rPr>
                         <a:t>1</a:t>
                       </a:r>
@@ -15964,20 +16135,20 @@
                     <a:p>
                       <a:pPr algn="ctr"/>
                       <a:r>
-                        <a:rPr sz="1800" b="1">
+                        <a:rPr sz="1710" b="1">
                           <a:solidFill>
                             <a:srgbClr val="1A1A1A"/>
                           </a:solidFill>
-                          <a:latin typeface="Century Schoolbook"/>
+                          <a:latin typeface="Lexend"/>
                         </a:rPr>
                         <a:t>2</a:t>
                       </a:r>
                       <a:r>
-                        <a:rPr sz="1800" b="1" baseline="30000">
+                        <a:rPr sz="1710" b="1" baseline="30000">
                           <a:solidFill>
                             <a:srgbClr val="1A1A1A"/>
                           </a:solidFill>
-                          <a:latin typeface="Century Schoolbook"/>
+                          <a:latin typeface="Lexend"/>
                         </a:rPr>
                         <a:t>0</a:t>
                       </a:r>
@@ -16022,11 +16193,11 @@
                     <a:p>
                       <a:pPr algn="ctr"/>
                       <a:r>
-                        <a:rPr sz="1800" b="0">
+                        <a:rPr sz="1710" b="0">
                           <a:solidFill>
                             <a:srgbClr val="1A1A1A"/>
                           </a:solidFill>
-                          <a:latin typeface="Century Schoolbook"/>
+                          <a:latin typeface="Lexend"/>
                         </a:rPr>
                         <a:t>16</a:t>
                       </a:r>
@@ -16069,11 +16240,11 @@
                     <a:p>
                       <a:pPr algn="ctr"/>
                       <a:r>
-                        <a:rPr sz="1800" b="0">
+                        <a:rPr sz="1710" b="0">
                           <a:solidFill>
                             <a:srgbClr val="1A1A1A"/>
                           </a:solidFill>
-                          <a:latin typeface="Century Schoolbook"/>
+                          <a:latin typeface="Lexend"/>
                         </a:rPr>
                         <a:t>8</a:t>
                       </a:r>
@@ -16116,11 +16287,11 @@
                     <a:p>
                       <a:pPr algn="ctr"/>
                       <a:r>
-                        <a:rPr sz="1800" b="0">
+                        <a:rPr sz="1710" b="0">
                           <a:solidFill>
                             <a:srgbClr val="1A1A1A"/>
                           </a:solidFill>
-                          <a:latin typeface="Century Schoolbook"/>
+                          <a:latin typeface="Lexend"/>
                         </a:rPr>
                         <a:t>4</a:t>
                       </a:r>
@@ -16163,11 +16334,11 @@
                     <a:p>
                       <a:pPr algn="ctr"/>
                       <a:r>
-                        <a:rPr sz="1800" b="0">
+                        <a:rPr sz="1710" b="0">
                           <a:solidFill>
                             <a:srgbClr val="1A1A1A"/>
                           </a:solidFill>
-                          <a:latin typeface="Century Schoolbook"/>
+                          <a:latin typeface="Lexend"/>
                         </a:rPr>
                         <a:t>2</a:t>
                       </a:r>
@@ -16210,11 +16381,11 @@
                     <a:p>
                       <a:pPr algn="ctr"/>
                       <a:r>
-                        <a:rPr sz="1800" b="0">
+                        <a:rPr sz="1710" b="0">
                           <a:solidFill>
                             <a:srgbClr val="1A1A1A"/>
                           </a:solidFill>
-                          <a:latin typeface="Century Schoolbook"/>
+                          <a:latin typeface="Lexend"/>
                         </a:rPr>
                         <a:t>1</a:t>
                       </a:r>
@@ -16257,7 +16428,7 @@
       </p:graphicFrame>
       <p:pic>
         <p:nvPicPr>
-          <p:cNvPr id="11" name="Picture 10" descr="3c353a5052ea24b7.png"/>
+          <p:cNvPr id="11" name="Picture 10" descr="36cadf9b5edf7664.png"/>
           <p:cNvPicPr>
             <a:picLocks noChangeAspect="1"/>
           </p:cNvPicPr>
@@ -16271,8 +16442,8 @@
         </p:blipFill>
         <p:spPr>
           <a:xfrm>
-            <a:off x="1917885" y="2990088"/>
-            <a:ext cx="1630680" cy="798576"/>
+            <a:off x="2018266" y="2990088"/>
+            <a:ext cx="1581912" cy="786384"/>
           </a:xfrm>
           <a:prstGeom prst="rect">
             <a:avLst/>
@@ -16287,8 +16458,8 @@
         </p:nvSpPr>
         <p:spPr>
           <a:xfrm>
-            <a:off x="3548565" y="3160776"/>
-            <a:ext cx="1987138" cy="457200"/>
+            <a:off x="3600178" y="3154680"/>
+            <a:ext cx="1946854" cy="457200"/>
           </a:xfrm>
           <a:prstGeom prst="rect">
             <a:avLst/>
@@ -16303,11 +16474,11 @@
           <a:p>
             <a:pPr algn="l"/>
             <a:r>
-              <a:rPr sz="2600" b="0" i="0">
+              <a:rPr sz="2470" b="0" i="0">
                 <a:solidFill>
                   <a:srgbClr val="1A1A1A"/>
                 </a:solidFill>
-                <a:latin typeface="Century Schoolbook"/>
+                <a:latin typeface="Lexend"/>
               </a:rPr>
               <a:t>      and      </a:t>
             </a:r>
@@ -16316,7 +16487,7 @@
       </p:sp>
       <p:pic>
         <p:nvPicPr>
-          <p:cNvPr id="13" name="Picture 12" descr="3484dae0b8b01f22.png"/>
+          <p:cNvPr id="13" name="Picture 12" descr="3f4324b961ec0a20.png"/>
           <p:cNvPicPr>
             <a:picLocks noChangeAspect="1"/>
           </p:cNvPicPr>
@@ -16330,8 +16501,8 @@
         </p:blipFill>
         <p:spPr>
           <a:xfrm>
-            <a:off x="5398543" y="2990088"/>
-            <a:ext cx="2350008" cy="798576"/>
+            <a:off x="5409873" y="2990088"/>
+            <a:ext cx="2273808" cy="786384"/>
           </a:xfrm>
           <a:prstGeom prst="rect">
             <a:avLst/>
@@ -16346,8 +16517,8 @@
         </p:nvSpPr>
         <p:spPr>
           <a:xfrm>
-            <a:off x="7748551" y="3160776"/>
-            <a:ext cx="1714795" cy="457200"/>
+            <a:off x="7683681" y="3154680"/>
+            <a:ext cx="1691476" cy="457200"/>
           </a:xfrm>
           <a:prstGeom prst="rect">
             <a:avLst/>
@@ -16362,11 +16533,11 @@
           <a:p>
             <a:pPr algn="l"/>
             <a:r>
-              <a:rPr sz="2600" b="0" i="0">
+              <a:rPr sz="2470" b="0" i="0">
                 <a:solidFill>
                   <a:srgbClr val="1A1A1A"/>
                 </a:solidFill>
-                <a:latin typeface="Century Schoolbook"/>
+                <a:latin typeface="Lexend"/>
               </a:rPr>
               <a:t>      so      </a:t>
             </a:r>
@@ -16375,7 +16546,7 @@
       </p:sp>
       <p:pic>
         <p:nvPicPr>
-          <p:cNvPr id="15" name="Picture 14" descr="7798067ac7529857.png"/>
+          <p:cNvPr id="15" name="Picture 14" descr="30376742585bb896.png"/>
           <p:cNvPicPr>
             <a:picLocks noChangeAspect="1"/>
           </p:cNvPicPr>
@@ -16389,8 +16560,8 @@
         </p:blipFill>
         <p:spPr>
           <a:xfrm>
-            <a:off x="9326186" y="3220212"/>
-            <a:ext cx="917448" cy="338328"/>
+            <a:off x="9237997" y="3214116"/>
+            <a:ext cx="905256" cy="338328"/>
           </a:xfrm>
           <a:prstGeom prst="rect">
             <a:avLst/>
@@ -16405,8 +16576,8 @@
         </p:nvSpPr>
         <p:spPr>
           <a:xfrm>
-            <a:off x="987552" y="4085843"/>
-            <a:ext cx="2787443" cy="457200"/>
+            <a:off x="987552" y="4073651"/>
+            <a:ext cx="2650993" cy="457200"/>
           </a:xfrm>
           <a:prstGeom prst="rect">
             <a:avLst/>
@@ -16421,11 +16592,11 @@
           <a:p>
             <a:pPr algn="l"/>
             <a:r>
-              <a:rPr sz="2300" b="1" i="0">
+              <a:rPr sz="2180" b="1" i="0">
                 <a:solidFill>
                   <a:srgbClr val="1A1A1A"/>
                 </a:solidFill>
-                <a:latin typeface="Century Schoolbook"/>
+                <a:latin typeface="Lexend"/>
               </a:rPr>
               <a:t>Zero exponent:  </a:t>
             </a:r>
@@ -16434,7 +16605,7 @@
       </p:sp>
       <p:pic>
         <p:nvPicPr>
-          <p:cNvPr id="17" name="Picture 16" descr="d591c8ddcc96ae96.png"/>
+          <p:cNvPr id="17" name="Picture 16" descr="6d55b3ee728095c0.png"/>
           <p:cNvPicPr>
             <a:picLocks noChangeAspect="1"/>
           </p:cNvPicPr>
@@ -16448,8 +16619,8 @@
         </p:blipFill>
         <p:spPr>
           <a:xfrm>
-            <a:off x="3637835" y="4143755"/>
-            <a:ext cx="941832" cy="341376"/>
+            <a:off x="3501385" y="4131563"/>
+            <a:ext cx="954023" cy="341376"/>
           </a:xfrm>
           <a:prstGeom prst="rect">
             <a:avLst/>
@@ -16464,8 +16635,8 @@
         </p:nvSpPr>
         <p:spPr>
           <a:xfrm>
-            <a:off x="4579667" y="4085843"/>
-            <a:ext cx="3406485" cy="457200"/>
+            <a:off x="4455409" y="4073651"/>
+            <a:ext cx="3247775" cy="457200"/>
           </a:xfrm>
           <a:prstGeom prst="rect">
             <a:avLst/>
@@ -16480,11 +16651,11 @@
           <a:p>
             <a:pPr algn="l"/>
             <a:r>
-              <a:rPr sz="2300" b="1" i="0">
+              <a:rPr sz="2180" b="1" i="0">
                 <a:solidFill>
                   <a:srgbClr val="1A1A1A"/>
                 </a:solidFill>
-                <a:latin typeface="Century Schoolbook"/>
+                <a:latin typeface="Lexend"/>
               </a:rPr>
               <a:t>   for every nonzero </a:t>
             </a:r>
@@ -16493,7 +16664,7 @@
       </p:sp>
       <p:pic>
         <p:nvPicPr>
-          <p:cNvPr id="19" name="Picture 18" descr="c030b8e94fe02ffe.png"/>
+          <p:cNvPr id="19" name="Picture 18" descr="7feb388dbf36f769.png"/>
           <p:cNvPicPr>
             <a:picLocks noChangeAspect="1"/>
           </p:cNvPicPr>
@@ -16507,8 +16678,8 @@
         </p:blipFill>
         <p:spPr>
           <a:xfrm>
-            <a:off x="7848992" y="4223004"/>
-            <a:ext cx="188976" cy="182880"/>
+            <a:off x="7566025" y="4197096"/>
+            <a:ext cx="204216" cy="210312"/>
           </a:xfrm>
           <a:prstGeom prst="rect">
             <a:avLst/>
@@ -16557,11 +16728,11 @@
           <a:p>
             <a:pPr algn="l"/>
             <a:r>
-              <a:rPr sz="3600" b="1" i="0">
+              <a:rPr sz="3420" b="1" i="0">
                 <a:solidFill>
                   <a:srgbClr val="1A1A1A"/>
                 </a:solidFill>
-                <a:latin typeface="Century Schoolbook"/>
+                <a:latin typeface="Lexend"/>
               </a:rPr>
               <a:t>Example 1</a:t>
             </a:r>
@@ -16697,11 +16868,11 @@
           <a:p>
             <a:pPr algn="l"/>
             <a:r>
-              <a:rPr sz="1100" b="0" i="1">
+              <a:rPr sz="1040" b="0" i="0">
                 <a:solidFill>
                   <a:srgbClr val="6B6B6B"/>
                 </a:solidFill>
-                <a:latin typeface="Century Schoolbook"/>
+                <a:latin typeface="Lexend"/>
               </a:rPr>
               <a:t>Grade 7 Accelerated · Unit 3 · Lesson 2 — Quotient Laws of Exponents</a:t>
             </a:r>
@@ -16732,11 +16903,11 @@
           <a:p>
             <a:pPr algn="r"/>
             <a:r>
-              <a:rPr sz="1100" b="0" i="0">
+              <a:rPr sz="1040" b="0" i="0">
                 <a:solidFill>
                   <a:srgbClr val="6B6B6B"/>
                 </a:solidFill>
-                <a:latin typeface="Century Schoolbook"/>
+                <a:latin typeface="Lexend"/>
               </a:rPr>
               <a:t>7</a:t>
             </a:r>
@@ -16745,7 +16916,7 @@
       </p:sp>
       <p:pic>
         <p:nvPicPr>
-          <p:cNvPr id="8" name="Picture 7" descr="66659ac1f0ea0461.png"/>
+          <p:cNvPr id="8" name="Picture 7" descr="6370c244a2f01b0b.png"/>
           <p:cNvPicPr>
             <a:picLocks noChangeAspect="1"/>
           </p:cNvPicPr>
@@ -16759,8 +16930,8 @@
         </p:blipFill>
         <p:spPr>
           <a:xfrm>
-            <a:off x="5618988" y="2103120"/>
-            <a:ext cx="923544" cy="947928"/>
+            <a:off x="5637275" y="2103120"/>
+            <a:ext cx="886968" cy="935736"/>
           </a:xfrm>
           <a:prstGeom prst="rect">
             <a:avLst/>
@@ -16775,7 +16946,7 @@
         </p:nvSpPr>
         <p:spPr>
           <a:xfrm>
-            <a:off x="777240" y="3553968"/>
+            <a:off x="777240" y="3541776"/>
             <a:ext cx="10607040" cy="429370"/>
           </a:xfrm>
           <a:prstGeom prst="rect">
@@ -16791,11 +16962,11 @@
           <a:p>
             <a:pPr algn="ctr"/>
             <a:r>
-              <a:rPr sz="2400" b="1" i="0">
+              <a:rPr sz="2280" b="1" i="0">
                 <a:solidFill>
                   <a:srgbClr val="1A1A1A"/>
                 </a:solidFill>
-                <a:latin typeface="Century Schoolbook"/>
+                <a:latin typeface="Lexend"/>
               </a:rPr>
               <a:t>Which law? Then find the value.</a:t>
             </a:r>
@@ -16844,11 +17015,11 @@
           <a:p>
             <a:pPr algn="l"/>
             <a:r>
-              <a:rPr sz="3600" b="1" i="0">
+              <a:rPr sz="3420" b="1" i="0">
                 <a:solidFill>
                   <a:srgbClr val="1A1A1A"/>
                 </a:solidFill>
-                <a:latin typeface="Century Schoolbook"/>
+                <a:latin typeface="Lexend"/>
               </a:rPr>
               <a:t>Example 1</a:t>
             </a:r>
@@ -16984,11 +17155,11 @@
           <a:p>
             <a:pPr algn="l"/>
             <a:r>
-              <a:rPr sz="1100" b="0" i="1">
+              <a:rPr sz="1040" b="0" i="0">
                 <a:solidFill>
                   <a:srgbClr val="6B6B6B"/>
                 </a:solidFill>
-                <a:latin typeface="Century Schoolbook"/>
+                <a:latin typeface="Lexend"/>
               </a:rPr>
               <a:t>Grade 7 Accelerated · Unit 3 · Lesson 2 — Quotient Laws of Exponents</a:t>
             </a:r>
@@ -17019,11 +17190,11 @@
           <a:p>
             <a:pPr algn="r"/>
             <a:r>
-              <a:rPr sz="1100" b="0" i="0">
+              <a:rPr sz="1040" b="0" i="0">
                 <a:solidFill>
                   <a:srgbClr val="6B6B6B"/>
                 </a:solidFill>
-                <a:latin typeface="Century Schoolbook"/>
+                <a:latin typeface="Lexend"/>
               </a:rPr>
               <a:t>8</a:t>
             </a:r>
@@ -17032,7 +17203,7 @@
       </p:sp>
       <p:pic>
         <p:nvPicPr>
-          <p:cNvPr id="8" name="Picture 7" descr="8665e93b2158cddb.png"/>
+          <p:cNvPr id="8" name="Picture 7" descr="b0c94eb2ca76e9c2.png"/>
           <p:cNvPicPr>
             <a:picLocks noChangeAspect="1"/>
           </p:cNvPicPr>
@@ -17047,7 +17218,7 @@
         <p:spPr>
           <a:xfrm>
             <a:off x="1828800" y="1920240"/>
-            <a:ext cx="3986784" cy="944880"/>
+            <a:ext cx="3791712" cy="938784"/>
           </a:xfrm>
           <a:prstGeom prst="rect">
             <a:avLst/>
@@ -17056,7 +17227,7 @@
       </p:pic>
       <p:pic>
         <p:nvPicPr>
-          <p:cNvPr id="9" name="Picture 8" descr="a6bb031371915f0d.png"/>
+          <p:cNvPr id="9" name="Picture 8" descr="a554635d943785b4.png"/>
           <p:cNvPicPr>
             <a:picLocks noChangeAspect="1"/>
           </p:cNvPicPr>
@@ -17070,8 +17241,8 @@
         </p:blipFill>
         <p:spPr>
           <a:xfrm>
-            <a:off x="1828800" y="3139440"/>
-            <a:ext cx="1758696" cy="408432"/>
+            <a:off x="1828800" y="3133344"/>
+            <a:ext cx="1648968" cy="408432"/>
           </a:xfrm>
           <a:prstGeom prst="rect">
             <a:avLst/>
@@ -17080,7 +17251,7 @@
       </p:pic>
       <p:pic>
         <p:nvPicPr>
-          <p:cNvPr id="10" name="Picture 9" descr="1a7fe49e913d88f6.png"/>
+          <p:cNvPr id="10" name="Picture 9" descr="5c1f83d7f33d27e0.png"/>
           <p:cNvPicPr>
             <a:picLocks noChangeAspect="1"/>
           </p:cNvPicPr>
@@ -17094,8 +17265,8 @@
         </p:blipFill>
         <p:spPr>
           <a:xfrm>
-            <a:off x="1828800" y="3822192"/>
-            <a:ext cx="2353056" cy="350520"/>
+            <a:off x="1828800" y="3816096"/>
+            <a:ext cx="2331720" cy="353568"/>
           </a:xfrm>
           <a:prstGeom prst="rect">
             <a:avLst/>
@@ -17110,7 +17281,7 @@
         </p:nvSpPr>
         <p:spPr>
           <a:xfrm>
-            <a:off x="777240" y="4629912"/>
+            <a:off x="777240" y="4626864"/>
             <a:ext cx="10607040" cy="548640"/>
           </a:xfrm>
           <a:prstGeom prst="rect">
@@ -17126,11 +17297,11 @@
           <a:p>
             <a:pPr algn="ctr"/>
             <a:r>
-              <a:rPr sz="3200" b="1" i="0">
+              <a:rPr sz="3040" b="1" i="0">
                 <a:solidFill>
                   <a:srgbClr val="9E1B32"/>
                 </a:solidFill>
-                <a:latin typeface="Century Schoolbook"/>
+                <a:latin typeface="Lexend"/>
               </a:rPr>
               <a:t>Answer:   −8</a:t>
             </a:r>
@@ -17179,11 +17350,11 @@
           <a:p>
             <a:pPr algn="l"/>
             <a:r>
-              <a:rPr sz="3600" b="1" i="0">
+              <a:rPr sz="3420" b="1" i="0">
                 <a:solidFill>
                   <a:srgbClr val="1A1A1A"/>
                 </a:solidFill>
-                <a:latin typeface="Century Schoolbook"/>
+                <a:latin typeface="Lexend"/>
               </a:rPr>
               <a:t>Your Turn</a:t>
             </a:r>
@@ -17319,11 +17490,11 @@
           <a:p>
             <a:pPr algn="l"/>
             <a:r>
-              <a:rPr sz="1100" b="0" i="1">
+              <a:rPr sz="1040" b="0" i="0">
                 <a:solidFill>
                   <a:srgbClr val="6B6B6B"/>
                 </a:solidFill>
-                <a:latin typeface="Century Schoolbook"/>
+                <a:latin typeface="Lexend"/>
               </a:rPr>
               <a:t>Grade 7 Accelerated · Unit 3 · Lesson 2 — Quotient Laws of Exponents</a:t>
             </a:r>
@@ -17354,11 +17525,11 @@
           <a:p>
             <a:pPr algn="r"/>
             <a:r>
-              <a:rPr sz="1100" b="0" i="0">
+              <a:rPr sz="1040" b="0" i="0">
                 <a:solidFill>
                   <a:srgbClr val="6B6B6B"/>
                 </a:solidFill>
-                <a:latin typeface="Century Schoolbook"/>
+                <a:latin typeface="Lexend"/>
               </a:rPr>
               <a:t>9</a:t>
             </a:r>
@@ -17367,7 +17538,7 @@
       </p:sp>
       <p:pic>
         <p:nvPicPr>
-          <p:cNvPr id="8" name="Picture 7" descr="309fc1c6c87d6fce.png"/>
+          <p:cNvPr id="8" name="Picture 7" descr="bc1d7f761d4b7d5c.png"/>
           <p:cNvPicPr>
             <a:picLocks noChangeAspect="1"/>
           </p:cNvPicPr>
@@ -17381,8 +17552,8 @@
         </p:blipFill>
         <p:spPr>
           <a:xfrm>
-            <a:off x="5847588" y="2194560"/>
-            <a:ext cx="466344" cy="1021080"/>
+            <a:off x="5847588" y="1600200"/>
+            <a:ext cx="466344" cy="1002792"/>
           </a:xfrm>
           <a:prstGeom prst="rect">
             <a:avLst/>
@@ -17397,7 +17568,7 @@
         </p:nvSpPr>
         <p:spPr>
           <a:xfrm>
-            <a:off x="777240" y="3718560"/>
+            <a:off x="777240" y="3105912"/>
             <a:ext cx="10607040" cy="429370"/>
           </a:xfrm>
           <a:prstGeom prst="rect">
@@ -17413,11 +17584,11 @@
           <a:p>
             <a:pPr algn="ctr"/>
             <a:r>
-              <a:rPr sz="2400" b="1" i="0">
+              <a:rPr sz="2280" b="1" i="0">
                 <a:solidFill>
                   <a:srgbClr val="1A1A1A"/>
                 </a:solidFill>
-                <a:latin typeface="Century Schoolbook"/>
+                <a:latin typeface="Lexend"/>
               </a:rPr>
               <a:t>Which law? Then find the value.</a:t>
             </a:r>

--- a/a7/packages/A7 Unit 3 - Exponents and Scientific Notation/Lessons/3.02/A7 3.02 Quotient Laws of Exponents - Slides.pptx
+++ b/a7/packages/A7 Unit 3 - Exponents and Scientific Notation/Lessons/3.02/A7 3.02 Quotient Laws of Exponents - Slides.pptx
@@ -5990,7 +5990,7 @@
       </p:sp>
       <p:pic>
         <p:nvPicPr>
-          <p:cNvPr id="9" name="Picture 8" descr="d7dee7bac0eb5ce9.png"/>
+          <p:cNvPr id="9" name="Picture 8" descr="15b8f32e295eee24.png"/>
           <p:cNvPicPr>
             <a:picLocks noChangeAspect="1"/>
           </p:cNvPicPr>
@@ -6005,7 +6005,7 @@
         <p:spPr>
           <a:xfrm>
             <a:off x="3659200" y="1946147"/>
-            <a:ext cx="295656" cy="268224"/>
+            <a:ext cx="280416" cy="268224"/>
           </a:xfrm>
           <a:prstGeom prst="rect">
             <a:avLst/>
@@ -6020,8 +6020,8 @@
         </p:nvSpPr>
         <p:spPr>
           <a:xfrm>
-            <a:off x="3954856" y="1851660"/>
-            <a:ext cx="4474161" cy="457200"/>
+            <a:off x="3939616" y="1851660"/>
+            <a:ext cx="4462821" cy="457200"/>
           </a:xfrm>
           <a:prstGeom prst="rect">
             <a:avLst/>
@@ -6042,7 +6042,7 @@
                 </a:solidFill>
                 <a:latin typeface="Lexend"/>
               </a:rPr>
-              <a:t>  photos into 8 equal albums.</a:t>
+              <a:t>  photos into 7 equal albums.</a:t>
             </a:r>
           </a:p>
         </p:txBody>
@@ -6417,7 +6417,7 @@
       </p:sp>
       <p:pic>
         <p:nvPicPr>
-          <p:cNvPr id="9" name="Picture 8" descr="249c39e603376802.png"/>
+          <p:cNvPr id="9" name="Picture 8" descr="dc729c1ffc747c04.png"/>
           <p:cNvPicPr>
             <a:picLocks noChangeAspect="1"/>
           </p:cNvPicPr>
@@ -6432,7 +6432,7 @@
         <p:spPr>
           <a:xfrm>
             <a:off x="3659200" y="1944623"/>
-            <a:ext cx="295656" cy="271272"/>
+            <a:ext cx="283464" cy="271272"/>
           </a:xfrm>
           <a:prstGeom prst="rect">
             <a:avLst/>
@@ -6447,8 +6447,8 @@
         </p:nvSpPr>
         <p:spPr>
           <a:xfrm>
-            <a:off x="3954856" y="1851660"/>
-            <a:ext cx="4474161" cy="457200"/>
+            <a:off x="3942664" y="1851660"/>
+            <a:ext cx="4462821" cy="457200"/>
           </a:xfrm>
           <a:prstGeom prst="rect">
             <a:avLst/>
@@ -6469,7 +6469,7 @@
                 </a:solidFill>
                 <a:latin typeface="Lexend"/>
               </a:rPr>
-              <a:t>  photos into 8 equal albums.</a:t>
+              <a:t>  photos into 7 equal albums.</a:t>
             </a:r>
           </a:p>
         </p:txBody>
@@ -6546,7 +6546,7 @@
       </p:sp>
       <p:pic>
         <p:nvPicPr>
-          <p:cNvPr id="13" name="Picture 12" descr="6c1f346a6254f114.png"/>
+          <p:cNvPr id="13" name="Picture 12" descr="95b43b6c8399109e.png"/>
           <p:cNvPicPr>
             <a:picLocks noChangeAspect="1"/>
           </p:cNvPicPr>
@@ -6560,8 +6560,8 @@
         </p:blipFill>
         <p:spPr>
           <a:xfrm>
-            <a:off x="4773167" y="3739100"/>
-            <a:ext cx="2727960" cy="301752"/>
+            <a:off x="4799075" y="3736052"/>
+            <a:ext cx="2673096" cy="307848"/>
           </a:xfrm>
           <a:prstGeom prst="rect">
             <a:avLst/>
@@ -6570,7 +6570,7 @@
       </p:pic>
       <p:pic>
         <p:nvPicPr>
-          <p:cNvPr id="14" name="Picture 13" descr="7e3b81dbc2bff30b.png"/>
+          <p:cNvPr id="14" name="Picture 13" descr="64ee76928545b36f.png"/>
           <p:cNvPicPr>
             <a:picLocks noChangeAspect="1"/>
           </p:cNvPicPr>
@@ -6584,7 +6584,7 @@
         </p:blipFill>
         <p:spPr>
           <a:xfrm>
-            <a:off x="4773167" y="4277072"/>
+            <a:off x="4799075" y="4277072"/>
             <a:ext cx="1213104" cy="304800"/>
           </a:xfrm>
           <a:prstGeom prst="rect">
@@ -6622,7 +6622,7 @@
                 </a:solidFill>
                 <a:latin typeface="Lexend"/>
               </a:rPr>
-              <a:t>Answer:   512</a:t>
+              <a:t>Answer:   343</a:t>
             </a:r>
           </a:p>
         </p:txBody>
@@ -12163,7 +12163,7 @@
         </p:nvSpPr>
         <p:spPr>
           <a:xfrm>
-            <a:off x="1246769" y="1812036"/>
+            <a:off x="1138565" y="1813560"/>
             <a:ext cx="3034610" cy="457200"/>
           </a:xfrm>
           <a:prstGeom prst="rect">
@@ -12192,7 +12192,7 @@
       </p:sp>
       <p:pic>
         <p:nvPicPr>
-          <p:cNvPr id="9" name="Picture 8" descr="f187a11a89af76bf.png"/>
+          <p:cNvPr id="9" name="Picture 8" descr="6487e9973aa3b8e7.png"/>
           <p:cNvPicPr>
             <a:picLocks noChangeAspect="1"/>
           </p:cNvPicPr>
@@ -12206,8 +12206,8 @@
         </p:blipFill>
         <p:spPr>
           <a:xfrm>
-            <a:off x="4144219" y="1645920"/>
-            <a:ext cx="1578864" cy="789432"/>
+            <a:off x="4036015" y="1645920"/>
+            <a:ext cx="1783080" cy="792480"/>
           </a:xfrm>
           <a:prstGeom prst="rect">
             <a:avLst/>
@@ -12222,7 +12222,7 @@
         </p:nvSpPr>
         <p:spPr>
           <a:xfrm>
-            <a:off x="5723083" y="1812036"/>
+            <a:off x="5819095" y="1813560"/>
             <a:ext cx="4036840" cy="457200"/>
           </a:xfrm>
           <a:prstGeom prst="rect">
@@ -12251,7 +12251,7 @@
       </p:sp>
       <p:pic>
         <p:nvPicPr>
-          <p:cNvPr id="11" name="Picture 10" descr="f7fea7d63fe294ce.png"/>
+          <p:cNvPr id="11" name="Picture 10" descr="b9bb78b1e21beab8.png"/>
           <p:cNvPicPr>
             <a:picLocks noChangeAspect="1"/>
           </p:cNvPicPr>
@@ -12265,8 +12265,8 @@
         </p:blipFill>
         <p:spPr>
           <a:xfrm>
-            <a:off x="9622764" y="1645920"/>
-            <a:ext cx="1143000" cy="789432"/>
+            <a:off x="9718776" y="1645920"/>
+            <a:ext cx="1155192" cy="792480"/>
           </a:xfrm>
           <a:prstGeom prst="rect">
             <a:avLst/>
@@ -12281,7 +12281,7 @@
         </p:nvSpPr>
         <p:spPr>
           <a:xfrm>
-            <a:off x="10765764" y="1812036"/>
+            <a:off x="10873968" y="1813560"/>
             <a:ext cx="286146" cy="457200"/>
           </a:xfrm>
           <a:prstGeom prst="rect">
@@ -12316,7 +12316,7 @@
         </p:nvSpPr>
         <p:spPr>
           <a:xfrm>
-            <a:off x="777240" y="2709671"/>
+            <a:off x="777240" y="2712720"/>
             <a:ext cx="10607040" cy="465151"/>
           </a:xfrm>
           <a:prstGeom prst="rect">
@@ -12614,7 +12614,7 @@
         </p:nvSpPr>
         <p:spPr>
           <a:xfrm>
-            <a:off x="1243721" y="1810512"/>
+            <a:off x="1135517" y="1813560"/>
             <a:ext cx="3034610" cy="457200"/>
           </a:xfrm>
           <a:prstGeom prst="rect">
@@ -12643,7 +12643,7 @@
       </p:sp>
       <p:pic>
         <p:nvPicPr>
-          <p:cNvPr id="9" name="Picture 8" descr="36cadf9b5edf7664.png"/>
+          <p:cNvPr id="9" name="Picture 8" descr="11d10f7878f2ffb7.png"/>
           <p:cNvPicPr>
             <a:picLocks noChangeAspect="1"/>
           </p:cNvPicPr>
@@ -12657,8 +12657,8 @@
         </p:blipFill>
         <p:spPr>
           <a:xfrm>
-            <a:off x="4141171" y="1645920"/>
-            <a:ext cx="1581912" cy="786384"/>
+            <a:off x="4032967" y="1645920"/>
+            <a:ext cx="1786128" cy="792480"/>
           </a:xfrm>
           <a:prstGeom prst="rect">
             <a:avLst/>
@@ -12673,7 +12673,7 @@
         </p:nvSpPr>
         <p:spPr>
           <a:xfrm>
-            <a:off x="5723083" y="1810512"/>
+            <a:off x="5819095" y="1813560"/>
             <a:ext cx="4036840" cy="457200"/>
           </a:xfrm>
           <a:prstGeom prst="rect">
@@ -12702,7 +12702,7 @@
       </p:sp>
       <p:pic>
         <p:nvPicPr>
-          <p:cNvPr id="11" name="Picture 10" descr="481073d0dfc43449.png"/>
+          <p:cNvPr id="11" name="Picture 10" descr="dbd80c8d396a3c82.png"/>
           <p:cNvPicPr>
             <a:picLocks noChangeAspect="1"/>
           </p:cNvPicPr>
@@ -12716,8 +12716,8 @@
         </p:blipFill>
         <p:spPr>
           <a:xfrm>
-            <a:off x="9622764" y="1645920"/>
-            <a:ext cx="1146048" cy="786384"/>
+            <a:off x="9718776" y="1645920"/>
+            <a:ext cx="1158240" cy="792480"/>
           </a:xfrm>
           <a:prstGeom prst="rect">
             <a:avLst/>
@@ -12732,7 +12732,7 @@
         </p:nvSpPr>
         <p:spPr>
           <a:xfrm>
-            <a:off x="10768812" y="1810512"/>
+            <a:off x="10877016" y="1813560"/>
             <a:ext cx="286146" cy="457200"/>
           </a:xfrm>
           <a:prstGeom prst="rect">
@@ -12767,7 +12767,7 @@
         </p:nvSpPr>
         <p:spPr>
           <a:xfrm>
-            <a:off x="777240" y="2706624"/>
+            <a:off x="777240" y="2712720"/>
             <a:ext cx="10607040" cy="465151"/>
           </a:xfrm>
           <a:prstGeom prst="rect">
@@ -12802,7 +12802,7 @@
         </p:nvSpPr>
         <p:spPr>
           <a:xfrm>
-            <a:off x="4279017" y="3426283"/>
+            <a:off x="4275969" y="3435427"/>
             <a:ext cx="1651611" cy="457200"/>
           </a:xfrm>
           <a:prstGeom prst="rect">
@@ -12831,7 +12831,7 @@
       </p:sp>
       <p:pic>
         <p:nvPicPr>
-          <p:cNvPr id="15" name="Picture 14" descr="cccc3c74ba494fe3.png"/>
+          <p:cNvPr id="15" name="Picture 14" descr="466255709ad01743.png"/>
           <p:cNvPicPr>
             <a:picLocks noChangeAspect="1"/>
           </p:cNvPicPr>
@@ -12845,8 +12845,8 @@
         </p:blipFill>
         <p:spPr>
           <a:xfrm>
-            <a:off x="5793468" y="3354655"/>
-            <a:ext cx="1213104" cy="600456"/>
+            <a:off x="5790420" y="3360751"/>
+            <a:ext cx="1368552" cy="606552"/>
           </a:xfrm>
           <a:prstGeom prst="rect">
             <a:avLst/>
@@ -12861,7 +12861,7 @@
         </p:nvSpPr>
         <p:spPr>
           <a:xfrm>
-            <a:off x="4279017" y="4118179"/>
+            <a:off x="4275969" y="4133419"/>
             <a:ext cx="1974280" cy="457200"/>
           </a:xfrm>
           <a:prstGeom prst="rect">
@@ -12890,7 +12890,7 @@
       </p:sp>
       <p:pic>
         <p:nvPicPr>
-          <p:cNvPr id="17" name="Picture 16" descr="c39e2f4fb056822e.png"/>
+          <p:cNvPr id="17" name="Picture 16" descr="44267a0bd970c1cd.png"/>
           <p:cNvPicPr>
             <a:picLocks noChangeAspect="1"/>
           </p:cNvPicPr>
@@ -12904,8 +12904,8 @@
         </p:blipFill>
         <p:spPr>
           <a:xfrm>
-            <a:off x="6116138" y="4046551"/>
-            <a:ext cx="1743456" cy="600456"/>
+            <a:off x="6113090" y="4058743"/>
+            <a:ext cx="1761744" cy="606552"/>
           </a:xfrm>
           <a:prstGeom prst="rect">
             <a:avLst/>
@@ -12920,7 +12920,7 @@
         </p:nvSpPr>
         <p:spPr>
           <a:xfrm>
-            <a:off x="4279017" y="4715587"/>
+            <a:off x="4275969" y="4733875"/>
             <a:ext cx="3048748" cy="457200"/>
           </a:xfrm>
           <a:prstGeom prst="rect">
@@ -12949,7 +12949,7 @@
       </p:sp>
       <p:pic>
         <p:nvPicPr>
-          <p:cNvPr id="19" name="Picture 18" descr="c474a6f40cf41139.png"/>
+          <p:cNvPr id="19" name="Picture 18" descr="7c74b884d49f452e.png"/>
           <p:cNvPicPr>
             <a:picLocks noChangeAspect="1"/>
           </p:cNvPicPr>
@@ -12963,8 +12963,8 @@
         </p:blipFill>
         <p:spPr>
           <a:xfrm>
-            <a:off x="7190606" y="4814647"/>
-            <a:ext cx="691896" cy="259080"/>
+            <a:off x="7187558" y="4832935"/>
+            <a:ext cx="697992" cy="259080"/>
           </a:xfrm>
           <a:prstGeom prst="rect">
             <a:avLst/>
@@ -12979,7 +12979,7 @@
         </p:nvSpPr>
         <p:spPr>
           <a:xfrm>
-            <a:off x="777240" y="5287087"/>
+            <a:off x="777240" y="5305375"/>
             <a:ext cx="10607040" cy="548640"/>
           </a:xfrm>
           <a:prstGeom prst="rect">
@@ -13001,7 +13001,7 @@
                 </a:solidFill>
                 <a:latin typeface="Lexend"/>
               </a:rPr>
-              <a:t>Answer:   Both — 2</a:t>
+              <a:t>Answer:   Both — 6</a:t>
             </a:r>
             <a:r>
               <a:rPr sz="3040" b="1" i="0" baseline="30000">
